--- a/TPO-Ajedrez-2026/docs/presentacion-tpo.pptx
+++ b/TPO-Ajedrez-2026/docs/presentacion-tpo.pptx
@@ -2,19 +2,20 @@
 <file path=ppt/presentation.xml><?xml version="1.0" encoding="utf-8"?>
 <p:presentation xmlns:p="http://schemas.openxmlformats.org/presentationml/2006/main">
   <p:sldMasterIdLst>
-    <p:sldMasterId xmlns:r="http://schemas.openxmlformats.org/officeDocument/2006/relationships" id="2147483648" r:id="Ra5b02a96530e427e"/>
+    <p:sldMasterId xmlns:r="http://schemas.openxmlformats.org/officeDocument/2006/relationships" id="2147483648" r:id="Re1a6ecf4b9a14638"/>
   </p:sldMasterIdLst>
   <p:notesMasterIdLst>
-    <p:notesMasterId xmlns:r="http://schemas.openxmlformats.org/officeDocument/2006/relationships" r:id="R092efcb379c04d6f"/>
+    <p:notesMasterId xmlns:r="http://schemas.openxmlformats.org/officeDocument/2006/relationships" r:id="Re1ff0a48fef9451d"/>
   </p:notesMasterIdLst>
   <p:sldIdLst>
-    <p:sldId xmlns:r="http://schemas.openxmlformats.org/officeDocument/2006/relationships" id="256" r:id="R81c5c5779ba44ece"/>
-    <p:sldId xmlns:r="http://schemas.openxmlformats.org/officeDocument/2006/relationships" id="257" r:id="R07245c2b4c814986"/>
-    <p:sldId xmlns:r="http://schemas.openxmlformats.org/officeDocument/2006/relationships" id="258" r:id="Re1ed2780fa3c4a35"/>
-    <p:sldId xmlns:r="http://schemas.openxmlformats.org/officeDocument/2006/relationships" id="259" r:id="R31e2d57a252b486b"/>
-    <p:sldId xmlns:r="http://schemas.openxmlformats.org/officeDocument/2006/relationships" id="260" r:id="R581cc45c5d4440ae"/>
-    <p:sldId xmlns:r="http://schemas.openxmlformats.org/officeDocument/2006/relationships" id="261" r:id="R0b1e934971064b22"/>
-    <p:sldId xmlns:r="http://schemas.openxmlformats.org/officeDocument/2006/relationships" id="262" r:id="R06e3c2bf10544685"/>
+    <p:sldId xmlns:r="http://schemas.openxmlformats.org/officeDocument/2006/relationships" id="256" r:id="R81b19bea959a4f30"/>
+    <p:sldId xmlns:r="http://schemas.openxmlformats.org/officeDocument/2006/relationships" id="257" r:id="R0edfac2b4d524a3d"/>
+    <p:sldId xmlns:r="http://schemas.openxmlformats.org/officeDocument/2006/relationships" id="258" r:id="R5039f1eed3a74947"/>
+    <p:sldId xmlns:r="http://schemas.openxmlformats.org/officeDocument/2006/relationships" id="259" r:id="R9a9b6918ebb94295"/>
+    <p:sldId xmlns:r="http://schemas.openxmlformats.org/officeDocument/2006/relationships" id="260" r:id="R530f711ffb4a474d"/>
+    <p:sldId xmlns:r="http://schemas.openxmlformats.org/officeDocument/2006/relationships" id="261" r:id="R3f731650e9fa4512"/>
+    <p:sldId xmlns:r="http://schemas.openxmlformats.org/officeDocument/2006/relationships" id="262" r:id="R3c18b12e5e054791"/>
+    <p:sldId xmlns:r="http://schemas.openxmlformats.org/officeDocument/2006/relationships" id="263" r:id="R691f392216224be6"/>
   </p:sldIdLst>
   <p:sldSz cx="12192000" cy="6858000"/>
   <p:notesSz cx="6858000" cy="9144000"/>
@@ -898,6 +899,76 @@
 </p:notes>
 </file>
 
+<file path=ppt/notesSlides/notesSlide8.xml><?xml version="1.0" encoding="utf-8"?>
+<p:notes xmlns:p="http://schemas.openxmlformats.org/presentationml/2006/main">
+  <p:cSld>
+    <p:spTree>
+      <p:nvGrpSpPr>
+        <p:cNvPr id="1" name=""/>
+        <p:cNvGrpSpPr/>
+        <p:nvPr/>
+      </p:nvGrpSpPr>
+      <p:grpSpPr>
+        <a:xfrm xmlns:a="http://schemas.openxmlformats.org/drawingml/2006/main"/>
+      </p:grpSpPr>
+      <p:sp>
+        <p:nvSpPr>
+          <p:cNvPr id="2" name="Slide Image Placeholder 1"/>
+          <p:cNvSpPr>
+            <a:spLocks xmlns:a="http://schemas.openxmlformats.org/drawingml/2006/main" noGrp="1"/>
+          </p:cNvSpPr>
+          <p:nvPr>
+            <p:ph type="sldImg" idx="0"/>
+          </p:nvPr>
+        </p:nvSpPr>
+        <p:spPr/>
+      </p:sp>
+      <p:sp>
+        <p:nvSpPr>
+          <p:cNvPr id="3" name="Notes Placeholder 2"/>
+          <p:cNvSpPr>
+            <a:spLocks xmlns:a="http://schemas.openxmlformats.org/drawingml/2006/main" noGrp="1"/>
+          </p:cNvSpPr>
+          <p:nvPr>
+            <p:ph type="body" idx="1"/>
+          </p:nvPr>
+        </p:nvSpPr>
+        <p:spPr/>
+        <p:txBody>
+          <a:bodyPr xmlns:a="http://schemas.openxmlformats.org/drawingml/2006/main"/>
+          <a:lstStyle xmlns:a="http://schemas.openxmlformats.org/drawingml/2006/main"/>
+          <a:p xmlns:a="http://schemas.openxmlformats.org/drawingml/2006/main">
+            <a:r>
+              <a:t>Fuentes: Unidad 5, Gobernanza de IT: políticas, normativas y gestión de riesgos, diapositivas 19 y 21–22; Unidad 6, Auditoría, métricas, KPIs, ética e integridad, diapositivas 13 y 24–25. Evidencia del proyecto: README.md, ajedrez/nucleo/partida.py y tests/test_nucleo.py. El registro y los indicadores son propuestas para la defensa académica, no métricas de producción.</a:t>
+            </a:r>
+          </a:p>
+        </p:txBody>
+      </p:sp>
+      <p:sp>
+        <p:nvSpPr>
+          <p:cNvPr id="4" name="Slide Number Placeholder 3"/>
+          <p:cNvSpPr>
+            <a:spLocks xmlns:a="http://schemas.openxmlformats.org/drawingml/2006/main" noGrp="1"/>
+          </p:cNvSpPr>
+          <p:nvPr>
+            <p:ph type="sldNum" idx="5"/>
+          </p:nvPr>
+        </p:nvSpPr>
+        <p:spPr/>
+        <p:txBody>
+          <a:bodyPr xmlns:a="http://schemas.openxmlformats.org/drawingml/2006/main"/>
+          <a:lstStyle xmlns:a="http://schemas.openxmlformats.org/drawingml/2006/main"/>
+          <a:p xmlns:a="http://schemas.openxmlformats.org/drawingml/2006/main"/>
+        </p:txBody>
+      </p:sp>
+    </p:spTree>
+  </p:cSld>
+  <p:clrMapOvr>
+    <a:masterClrMapping xmlns:a="http://schemas.openxmlformats.org/drawingml/2006/main"/>
+  </p:clrMapOvr>
+</p:notes>
+</file>
+
 <file path=ppt/slideLayouts/slideLayout1.xml><?xml version="1.0" encoding="utf-8"?>
 <p:sldLayout xmlns:p="http://schemas.openxmlformats.org/presentationml/2006/main" type="title">
   <p:cSld name="Title Slide">
@@ -3311,12 +3382,12 @@
   </p:cSld>
   <p:clrMap bg1="lt1" tx1="dk1" bg2="lt2" tx2="dk2" accent1="accent1" accent2="accent2" accent3="accent3" accent4="accent4" accent5="accent5" accent6="accent6" hlink="hlink" folHlink="folHlink"/>
   <p:sldLayoutIdLst>
-    <p:sldLayoutId xmlns:r="http://schemas.openxmlformats.org/officeDocument/2006/relationships" id="2147483649" r:id="R6d96c7831a754e66"/>
-    <p:sldLayoutId xmlns:r="http://schemas.openxmlformats.org/officeDocument/2006/relationships" id="2147483650" r:id="R7b048743267f4ad4"/>
-    <p:sldLayoutId xmlns:r="http://schemas.openxmlformats.org/officeDocument/2006/relationships" id="2147483651" r:id="Rfcbb580ca15c401e"/>
-    <p:sldLayoutId xmlns:r="http://schemas.openxmlformats.org/officeDocument/2006/relationships" id="2147483652" r:id="R4cdaf7707ad740df"/>
-    <p:sldLayoutId xmlns:r="http://schemas.openxmlformats.org/officeDocument/2006/relationships" id="2147483653" r:id="R322849798ebd4fc0"/>
-    <p:sldLayoutId xmlns:r="http://schemas.openxmlformats.org/officeDocument/2006/relationships" id="2147483654" r:id="Rc4010d1f2cea440c"/>
+    <p:sldLayoutId xmlns:r="http://schemas.openxmlformats.org/officeDocument/2006/relationships" id="2147483649" r:id="R9f8c71cafdd44b55"/>
+    <p:sldLayoutId xmlns:r="http://schemas.openxmlformats.org/officeDocument/2006/relationships" id="2147483650" r:id="Rdbcfdd277de54b1f"/>
+    <p:sldLayoutId xmlns:r="http://schemas.openxmlformats.org/officeDocument/2006/relationships" id="2147483651" r:id="R618b06a218094fdd"/>
+    <p:sldLayoutId xmlns:r="http://schemas.openxmlformats.org/officeDocument/2006/relationships" id="2147483652" r:id="Rfe6ce6bcbc964544"/>
+    <p:sldLayoutId xmlns:r="http://schemas.openxmlformats.org/officeDocument/2006/relationships" id="2147483653" r:id="Raa731c8f36064b58"/>
+    <p:sldLayoutId xmlns:r="http://schemas.openxmlformats.org/officeDocument/2006/relationships" id="2147483654" r:id="Rac813d21e73544fc"/>
   </p:sldLayoutIdLst>
   <p:txStyles>
     <p:titleStyle>
@@ -3937,6 +4008,7 @@
               </a:defRPr>
             </a:defPPr>
             <a:lvl1pPr>
+              <a:buNone/>
               <a:defRPr sz="4350" b="1">
                 <a:solidFill>
                   <a:srgbClr val="FFFFFF"/>
@@ -3947,6 +4019,7 @@
               </a:defRPr>
             </a:lvl1pPr>
             <a:lvl2pPr>
+              <a:buNone/>
               <a:defRPr sz="4350" b="1">
                 <a:solidFill>
                   <a:srgbClr val="FFFFFF"/>
@@ -3957,6 +4030,7 @@
               </a:defRPr>
             </a:lvl2pPr>
             <a:lvl3pPr>
+              <a:buNone/>
               <a:defRPr sz="4350" b="1">
                 <a:solidFill>
                   <a:srgbClr val="FFFFFF"/>
@@ -3967,6 +4041,7 @@
               </a:defRPr>
             </a:lvl3pPr>
             <a:lvl4pPr>
+              <a:buNone/>
               <a:defRPr sz="4350" b="1">
                 <a:solidFill>
                   <a:srgbClr val="FFFFFF"/>
@@ -3977,6 +4052,7 @@
               </a:defRPr>
             </a:lvl4pPr>
             <a:lvl5pPr>
+              <a:buNone/>
               <a:defRPr sz="4350" b="1">
                 <a:solidFill>
                   <a:srgbClr val="FFFFFF"/>
@@ -3987,6 +4063,7 @@
               </a:defRPr>
             </a:lvl5pPr>
             <a:lvl6pPr>
+              <a:buNone/>
               <a:defRPr sz="4350" b="1">
                 <a:solidFill>
                   <a:srgbClr val="FFFFFF"/>
@@ -3997,6 +4074,7 @@
               </a:defRPr>
             </a:lvl6pPr>
             <a:lvl7pPr>
+              <a:buNone/>
               <a:defRPr sz="4350" b="1">
                 <a:solidFill>
                   <a:srgbClr val="FFFFFF"/>
@@ -4007,6 +4085,7 @@
               </a:defRPr>
             </a:lvl7pPr>
             <a:lvl8pPr>
+              <a:buNone/>
               <a:defRPr sz="4350" b="1">
                 <a:solidFill>
                   <a:srgbClr val="FFFFFF"/>
@@ -4017,6 +4096,7 @@
               </a:defRPr>
             </a:lvl8pPr>
             <a:lvl9pPr>
+              <a:buNone/>
               <a:defRPr sz="4350" b="1">
                 <a:solidFill>
                   <a:srgbClr val="FFFFFF"/>
@@ -4029,6 +4109,7 @@
           </a:lstStyle>
           <a:p xmlns:a="http://schemas.openxmlformats.org/drawingml/2006/main">
             <a:pPr>
+              <a:buNone/>
               <a:defRPr sz="4350" b="1">
                 <a:solidFill>
                   <a:srgbClr val="FFFFFF"/>
@@ -4096,6 +4177,7 @@
               </a:defRPr>
             </a:defPPr>
             <a:lvl1pPr>
+              <a:buNone/>
               <a:defRPr sz="2250" b="0">
                 <a:solidFill>
                   <a:srgbClr val="B8DDE0"/>
@@ -4106,6 +4188,7 @@
               </a:defRPr>
             </a:lvl1pPr>
             <a:lvl2pPr>
+              <a:buNone/>
               <a:defRPr sz="2250" b="0">
                 <a:solidFill>
                   <a:srgbClr val="B8DDE0"/>
@@ -4116,6 +4199,7 @@
               </a:defRPr>
             </a:lvl2pPr>
             <a:lvl3pPr>
+              <a:buNone/>
               <a:defRPr sz="2250" b="0">
                 <a:solidFill>
                   <a:srgbClr val="B8DDE0"/>
@@ -4126,6 +4210,7 @@
               </a:defRPr>
             </a:lvl3pPr>
             <a:lvl4pPr>
+              <a:buNone/>
               <a:defRPr sz="2250" b="0">
                 <a:solidFill>
                   <a:srgbClr val="B8DDE0"/>
@@ -4136,6 +4221,7 @@
               </a:defRPr>
             </a:lvl4pPr>
             <a:lvl5pPr>
+              <a:buNone/>
               <a:defRPr sz="2250" b="0">
                 <a:solidFill>
                   <a:srgbClr val="B8DDE0"/>
@@ -4146,6 +4232,7 @@
               </a:defRPr>
             </a:lvl5pPr>
             <a:lvl6pPr>
+              <a:buNone/>
               <a:defRPr sz="2250" b="0">
                 <a:solidFill>
                   <a:srgbClr val="B8DDE0"/>
@@ -4156,6 +4243,7 @@
               </a:defRPr>
             </a:lvl6pPr>
             <a:lvl7pPr>
+              <a:buNone/>
               <a:defRPr sz="2250" b="0">
                 <a:solidFill>
                   <a:srgbClr val="B8DDE0"/>
@@ -4166,6 +4254,7 @@
               </a:defRPr>
             </a:lvl7pPr>
             <a:lvl8pPr>
+              <a:buNone/>
               <a:defRPr sz="2250" b="0">
                 <a:solidFill>
                   <a:srgbClr val="B8DDE0"/>
@@ -4176,6 +4265,7 @@
               </a:defRPr>
             </a:lvl8pPr>
             <a:lvl9pPr>
+              <a:buNone/>
               <a:defRPr sz="2250" b="0">
                 <a:solidFill>
                   <a:srgbClr val="B8DDE0"/>
@@ -4188,6 +4278,7 @@
           </a:lstStyle>
           <a:p xmlns:a="http://schemas.openxmlformats.org/drawingml/2006/main">
             <a:pPr>
+              <a:buNone/>
               <a:defRPr sz="2250" b="0">
                 <a:solidFill>
                   <a:srgbClr val="B8DDE0"/>
@@ -4286,6 +4377,7 @@
               </a:defRPr>
             </a:defPPr>
             <a:lvl1pPr>
+              <a:buNone/>
               <a:defRPr sz="2325" b="0">
                 <a:solidFill>
                   <a:srgbClr val="FFFFFF"/>
@@ -4296,6 +4388,7 @@
               </a:defRPr>
             </a:lvl1pPr>
             <a:lvl2pPr>
+              <a:buNone/>
               <a:defRPr sz="2325" b="0">
                 <a:solidFill>
                   <a:srgbClr val="FFFFFF"/>
@@ -4306,6 +4399,7 @@
               </a:defRPr>
             </a:lvl2pPr>
             <a:lvl3pPr>
+              <a:buNone/>
               <a:defRPr sz="2325" b="0">
                 <a:solidFill>
                   <a:srgbClr val="FFFFFF"/>
@@ -4316,6 +4410,7 @@
               </a:defRPr>
             </a:lvl3pPr>
             <a:lvl4pPr>
+              <a:buNone/>
               <a:defRPr sz="2325" b="0">
                 <a:solidFill>
                   <a:srgbClr val="FFFFFF"/>
@@ -4326,6 +4421,7 @@
               </a:defRPr>
             </a:lvl4pPr>
             <a:lvl5pPr>
+              <a:buNone/>
               <a:defRPr sz="2325" b="0">
                 <a:solidFill>
                   <a:srgbClr val="FFFFFF"/>
@@ -4336,6 +4432,7 @@
               </a:defRPr>
             </a:lvl5pPr>
             <a:lvl6pPr>
+              <a:buNone/>
               <a:defRPr sz="2325" b="0">
                 <a:solidFill>
                   <a:srgbClr val="FFFFFF"/>
@@ -4346,6 +4443,7 @@
               </a:defRPr>
             </a:lvl6pPr>
             <a:lvl7pPr>
+              <a:buNone/>
               <a:defRPr sz="2325" b="0">
                 <a:solidFill>
                   <a:srgbClr val="FFFFFF"/>
@@ -4356,6 +4454,7 @@
               </a:defRPr>
             </a:lvl7pPr>
             <a:lvl8pPr>
+              <a:buNone/>
               <a:defRPr sz="2325" b="0">
                 <a:solidFill>
                   <a:srgbClr val="FFFFFF"/>
@@ -4366,6 +4465,7 @@
               </a:defRPr>
             </a:lvl8pPr>
             <a:lvl9pPr>
+              <a:buNone/>
               <a:defRPr sz="2325" b="0">
                 <a:solidFill>
                   <a:srgbClr val="FFFFFF"/>
@@ -4378,6 +4478,7 @@
           </a:lstStyle>
           <a:p xmlns:a="http://schemas.openxmlformats.org/drawingml/2006/main">
             <a:pPr>
+              <a:buNone/>
               <a:defRPr sz="2325" b="0">
                 <a:solidFill>
                   <a:srgbClr val="FFFFFF"/>
@@ -4445,6 +4546,7 @@
               </a:defRPr>
             </a:defPPr>
             <a:lvl1pPr>
+              <a:buNone/>
               <a:defRPr sz="1275" b="0">
                 <a:solidFill>
                   <a:srgbClr val="C5D0D5"/>
@@ -4455,6 +4557,7 @@
               </a:defRPr>
             </a:lvl1pPr>
             <a:lvl2pPr>
+              <a:buNone/>
               <a:defRPr sz="1275" b="0">
                 <a:solidFill>
                   <a:srgbClr val="C5D0D5"/>
@@ -4465,6 +4568,7 @@
               </a:defRPr>
             </a:lvl2pPr>
             <a:lvl3pPr>
+              <a:buNone/>
               <a:defRPr sz="1275" b="0">
                 <a:solidFill>
                   <a:srgbClr val="C5D0D5"/>
@@ -4475,6 +4579,7 @@
               </a:defRPr>
             </a:lvl3pPr>
             <a:lvl4pPr>
+              <a:buNone/>
               <a:defRPr sz="1275" b="0">
                 <a:solidFill>
                   <a:srgbClr val="C5D0D5"/>
@@ -4485,6 +4590,7 @@
               </a:defRPr>
             </a:lvl4pPr>
             <a:lvl5pPr>
+              <a:buNone/>
               <a:defRPr sz="1275" b="0">
                 <a:solidFill>
                   <a:srgbClr val="C5D0D5"/>
@@ -4495,6 +4601,7 @@
               </a:defRPr>
             </a:lvl5pPr>
             <a:lvl6pPr>
+              <a:buNone/>
               <a:defRPr sz="1275" b="0">
                 <a:solidFill>
                   <a:srgbClr val="C5D0D5"/>
@@ -4505,6 +4612,7 @@
               </a:defRPr>
             </a:lvl6pPr>
             <a:lvl7pPr>
+              <a:buNone/>
               <a:defRPr sz="1275" b="0">
                 <a:solidFill>
                   <a:srgbClr val="C5D0D5"/>
@@ -4515,6 +4623,7 @@
               </a:defRPr>
             </a:lvl7pPr>
             <a:lvl8pPr>
+              <a:buNone/>
               <a:defRPr sz="1275" b="0">
                 <a:solidFill>
                   <a:srgbClr val="C5D0D5"/>
@@ -4525,6 +4634,7 @@
               </a:defRPr>
             </a:lvl8pPr>
             <a:lvl9pPr>
+              <a:buNone/>
               <a:defRPr sz="1275" b="0">
                 <a:solidFill>
                   <a:srgbClr val="C5D0D5"/>
@@ -4537,6 +4647,7 @@
           </a:lstStyle>
           <a:p xmlns:a="http://schemas.openxmlformats.org/drawingml/2006/main">
             <a:pPr>
+              <a:buNone/>
               <a:defRPr sz="1275" b="0">
                 <a:solidFill>
                   <a:srgbClr val="C5D0D5"/>
@@ -4664,6 +4775,7 @@
               </a:defRPr>
             </a:defPPr>
             <a:lvl1pPr>
+              <a:buNone/>
               <a:defRPr sz="2850" b="1">
                 <a:solidFill>
                   <a:srgbClr val="111111"/>
@@ -4674,6 +4786,7 @@
               </a:defRPr>
             </a:lvl1pPr>
             <a:lvl2pPr>
+              <a:buNone/>
               <a:defRPr sz="2850" b="1">
                 <a:solidFill>
                   <a:srgbClr val="111111"/>
@@ -4684,6 +4797,7 @@
               </a:defRPr>
             </a:lvl2pPr>
             <a:lvl3pPr>
+              <a:buNone/>
               <a:defRPr sz="2850" b="1">
                 <a:solidFill>
                   <a:srgbClr val="111111"/>
@@ -4694,6 +4808,7 @@
               </a:defRPr>
             </a:lvl3pPr>
             <a:lvl4pPr>
+              <a:buNone/>
               <a:defRPr sz="2850" b="1">
                 <a:solidFill>
                   <a:srgbClr val="111111"/>
@@ -4704,6 +4819,7 @@
               </a:defRPr>
             </a:lvl4pPr>
             <a:lvl5pPr>
+              <a:buNone/>
               <a:defRPr sz="2850" b="1">
                 <a:solidFill>
                   <a:srgbClr val="111111"/>
@@ -4714,6 +4830,7 @@
               </a:defRPr>
             </a:lvl5pPr>
             <a:lvl6pPr>
+              <a:buNone/>
               <a:defRPr sz="2850" b="1">
                 <a:solidFill>
                   <a:srgbClr val="111111"/>
@@ -4724,6 +4841,7 @@
               </a:defRPr>
             </a:lvl6pPr>
             <a:lvl7pPr>
+              <a:buNone/>
               <a:defRPr sz="2850" b="1">
                 <a:solidFill>
                   <a:srgbClr val="111111"/>
@@ -4734,6 +4852,7 @@
               </a:defRPr>
             </a:lvl7pPr>
             <a:lvl8pPr>
+              <a:buNone/>
               <a:defRPr sz="2850" b="1">
                 <a:solidFill>
                   <a:srgbClr val="111111"/>
@@ -4744,6 +4863,7 @@
               </a:defRPr>
             </a:lvl8pPr>
             <a:lvl9pPr>
+              <a:buNone/>
               <a:defRPr sz="2850" b="1">
                 <a:solidFill>
                   <a:srgbClr val="111111"/>
@@ -4756,6 +4876,7 @@
           </a:lstStyle>
           <a:p xmlns:a="http://schemas.openxmlformats.org/drawingml/2006/main">
             <a:pPr>
+              <a:buNone/>
               <a:defRPr sz="2850" b="1">
                 <a:solidFill>
                   <a:srgbClr val="111111"/>
@@ -4854,6 +4975,7 @@
               </a:defRPr>
             </a:defPPr>
             <a:lvl1pPr>
+              <a:buNone/>
               <a:defRPr sz="1050" b="1">
                 <a:solidFill>
                   <a:srgbClr val="3A3A3A"/>
@@ -4864,6 +4986,7 @@
               </a:defRPr>
             </a:lvl1pPr>
             <a:lvl2pPr>
+              <a:buNone/>
               <a:defRPr sz="1050" b="1">
                 <a:solidFill>
                   <a:srgbClr val="3A3A3A"/>
@@ -4874,6 +4997,7 @@
               </a:defRPr>
             </a:lvl2pPr>
             <a:lvl3pPr>
+              <a:buNone/>
               <a:defRPr sz="1050" b="1">
                 <a:solidFill>
                   <a:srgbClr val="3A3A3A"/>
@@ -4884,6 +5008,7 @@
               </a:defRPr>
             </a:lvl3pPr>
             <a:lvl4pPr>
+              <a:buNone/>
               <a:defRPr sz="1050" b="1">
                 <a:solidFill>
                   <a:srgbClr val="3A3A3A"/>
@@ -4894,6 +5019,7 @@
               </a:defRPr>
             </a:lvl4pPr>
             <a:lvl5pPr>
+              <a:buNone/>
               <a:defRPr sz="1050" b="1">
                 <a:solidFill>
                   <a:srgbClr val="3A3A3A"/>
@@ -4904,6 +5030,7 @@
               </a:defRPr>
             </a:lvl5pPr>
             <a:lvl6pPr>
+              <a:buNone/>
               <a:defRPr sz="1050" b="1">
                 <a:solidFill>
                   <a:srgbClr val="3A3A3A"/>
@@ -4914,6 +5041,7 @@
               </a:defRPr>
             </a:lvl6pPr>
             <a:lvl7pPr>
+              <a:buNone/>
               <a:defRPr sz="1050" b="1">
                 <a:solidFill>
                   <a:srgbClr val="3A3A3A"/>
@@ -4924,6 +5052,7 @@
               </a:defRPr>
             </a:lvl7pPr>
             <a:lvl8pPr>
+              <a:buNone/>
               <a:defRPr sz="1050" b="1">
                 <a:solidFill>
                   <a:srgbClr val="3A3A3A"/>
@@ -4934,6 +5063,7 @@
               </a:defRPr>
             </a:lvl8pPr>
             <a:lvl9pPr>
+              <a:buNone/>
               <a:defRPr sz="1050" b="1">
                 <a:solidFill>
                   <a:srgbClr val="3A3A3A"/>
@@ -4946,6 +5076,7 @@
           </a:lstStyle>
           <a:p xmlns:a="http://schemas.openxmlformats.org/drawingml/2006/main">
             <a:pPr>
+              <a:buNone/>
               <a:defRPr sz="1050" b="1">
                 <a:solidFill>
                   <a:srgbClr val="3A3A3A"/>
@@ -5013,6 +5144,7 @@
               </a:defRPr>
             </a:defPPr>
             <a:lvl1pPr>
+              <a:buNone/>
               <a:defRPr sz="2025" b="1">
                 <a:solidFill>
                   <a:srgbClr val="111111"/>
@@ -5023,6 +5155,7 @@
               </a:defRPr>
             </a:lvl1pPr>
             <a:lvl2pPr>
+              <a:buNone/>
               <a:defRPr sz="2025" b="1">
                 <a:solidFill>
                   <a:srgbClr val="111111"/>
@@ -5033,6 +5166,7 @@
               </a:defRPr>
             </a:lvl2pPr>
             <a:lvl3pPr>
+              <a:buNone/>
               <a:defRPr sz="2025" b="1">
                 <a:solidFill>
                   <a:srgbClr val="111111"/>
@@ -5043,6 +5177,7 @@
               </a:defRPr>
             </a:lvl3pPr>
             <a:lvl4pPr>
+              <a:buNone/>
               <a:defRPr sz="2025" b="1">
                 <a:solidFill>
                   <a:srgbClr val="111111"/>
@@ -5053,6 +5188,7 @@
               </a:defRPr>
             </a:lvl4pPr>
             <a:lvl5pPr>
+              <a:buNone/>
               <a:defRPr sz="2025" b="1">
                 <a:solidFill>
                   <a:srgbClr val="111111"/>
@@ -5063,6 +5199,7 @@
               </a:defRPr>
             </a:lvl5pPr>
             <a:lvl6pPr>
+              <a:buNone/>
               <a:defRPr sz="2025" b="1">
                 <a:solidFill>
                   <a:srgbClr val="111111"/>
@@ -5073,6 +5210,7 @@
               </a:defRPr>
             </a:lvl6pPr>
             <a:lvl7pPr>
+              <a:buNone/>
               <a:defRPr sz="2025" b="1">
                 <a:solidFill>
                   <a:srgbClr val="111111"/>
@@ -5083,6 +5221,7 @@
               </a:defRPr>
             </a:lvl7pPr>
             <a:lvl8pPr>
+              <a:buNone/>
               <a:defRPr sz="2025" b="1">
                 <a:solidFill>
                   <a:srgbClr val="111111"/>
@@ -5093,6 +5232,7 @@
               </a:defRPr>
             </a:lvl8pPr>
             <a:lvl9pPr>
+              <a:buNone/>
               <a:defRPr sz="2025" b="1">
                 <a:solidFill>
                   <a:srgbClr val="111111"/>
@@ -5105,6 +5245,7 @@
           </a:lstStyle>
           <a:p xmlns:a="http://schemas.openxmlformats.org/drawingml/2006/main">
             <a:pPr>
+              <a:buNone/>
               <a:defRPr sz="2025" b="1">
                 <a:solidFill>
                   <a:srgbClr val="111111"/>
@@ -5172,6 +5313,7 @@
               </a:defRPr>
             </a:defPPr>
             <a:lvl1pPr>
+              <a:buNone/>
               <a:defRPr sz="1800" b="0">
                 <a:solidFill>
                   <a:srgbClr val="111111"/>
@@ -5182,6 +5324,7 @@
               </a:defRPr>
             </a:lvl1pPr>
             <a:lvl2pPr>
+              <a:buNone/>
               <a:defRPr sz="1800" b="0">
                 <a:solidFill>
                   <a:srgbClr val="111111"/>
@@ -5192,6 +5335,7 @@
               </a:defRPr>
             </a:lvl2pPr>
             <a:lvl3pPr>
+              <a:buNone/>
               <a:defRPr sz="1800" b="0">
                 <a:solidFill>
                   <a:srgbClr val="111111"/>
@@ -5202,6 +5346,7 @@
               </a:defRPr>
             </a:lvl3pPr>
             <a:lvl4pPr>
+              <a:buNone/>
               <a:defRPr sz="1800" b="0">
                 <a:solidFill>
                   <a:srgbClr val="111111"/>
@@ -5212,6 +5357,7 @@
               </a:defRPr>
             </a:lvl4pPr>
             <a:lvl5pPr>
+              <a:buNone/>
               <a:defRPr sz="1800" b="0">
                 <a:solidFill>
                   <a:srgbClr val="111111"/>
@@ -5222,6 +5368,7 @@
               </a:defRPr>
             </a:lvl5pPr>
             <a:lvl6pPr>
+              <a:buNone/>
               <a:defRPr sz="1800" b="0">
                 <a:solidFill>
                   <a:srgbClr val="111111"/>
@@ -5232,6 +5379,7 @@
               </a:defRPr>
             </a:lvl6pPr>
             <a:lvl7pPr>
+              <a:buNone/>
               <a:defRPr sz="1800" b="0">
                 <a:solidFill>
                   <a:srgbClr val="111111"/>
@@ -5242,6 +5390,7 @@
               </a:defRPr>
             </a:lvl7pPr>
             <a:lvl8pPr>
+              <a:buNone/>
               <a:defRPr sz="1800" b="0">
                 <a:solidFill>
                   <a:srgbClr val="111111"/>
@@ -5252,6 +5401,7 @@
               </a:defRPr>
             </a:lvl8pPr>
             <a:lvl9pPr>
+              <a:buNone/>
               <a:defRPr sz="1800" b="0">
                 <a:solidFill>
                   <a:srgbClr val="111111"/>
@@ -5264,6 +5414,7 @@
           </a:lstStyle>
           <a:p xmlns:a="http://schemas.openxmlformats.org/drawingml/2006/main">
             <a:pPr>
+              <a:buNone/>
               <a:defRPr sz="1800" b="0">
                 <a:solidFill>
                   <a:srgbClr val="111111"/>
@@ -5287,6 +5438,7 @@
           </a:p>
           <a:p xmlns:a="http://schemas.openxmlformats.org/drawingml/2006/main">
             <a:pPr>
+              <a:buNone/>
               <a:defRPr sz="1800" b="0">
                 <a:solidFill>
                   <a:srgbClr val="111111"/>
@@ -5310,6 +5462,7 @@
           </a:p>
           <a:p xmlns:a="http://schemas.openxmlformats.org/drawingml/2006/main">
             <a:pPr>
+              <a:buNone/>
               <a:defRPr sz="1800" b="0">
                 <a:solidFill>
                   <a:srgbClr val="111111"/>
@@ -5333,6 +5486,7 @@
           </a:p>
           <a:p xmlns:a="http://schemas.openxmlformats.org/drawingml/2006/main">
             <a:pPr>
+              <a:buNone/>
               <a:defRPr sz="1800" b="0">
                 <a:solidFill>
                   <a:srgbClr val="111111"/>
@@ -5356,6 +5510,7 @@
           </a:p>
           <a:p xmlns:a="http://schemas.openxmlformats.org/drawingml/2006/main">
             <a:pPr>
+              <a:buNone/>
               <a:defRPr sz="1800" b="0">
                 <a:solidFill>
                   <a:srgbClr val="111111"/>
@@ -5454,6 +5609,7 @@
               </a:defRPr>
             </a:defPPr>
             <a:lvl1pPr>
+              <a:buNone/>
               <a:defRPr sz="2025" b="1">
                 <a:solidFill>
                   <a:srgbClr val="555555"/>
@@ -5464,6 +5620,7 @@
               </a:defRPr>
             </a:lvl1pPr>
             <a:lvl2pPr>
+              <a:buNone/>
               <a:defRPr sz="2025" b="1">
                 <a:solidFill>
                   <a:srgbClr val="555555"/>
@@ -5474,6 +5631,7 @@
               </a:defRPr>
             </a:lvl2pPr>
             <a:lvl3pPr>
+              <a:buNone/>
               <a:defRPr sz="2025" b="1">
                 <a:solidFill>
                   <a:srgbClr val="555555"/>
@@ -5484,6 +5642,7 @@
               </a:defRPr>
             </a:lvl3pPr>
             <a:lvl4pPr>
+              <a:buNone/>
               <a:defRPr sz="2025" b="1">
                 <a:solidFill>
                   <a:srgbClr val="555555"/>
@@ -5494,6 +5653,7 @@
               </a:defRPr>
             </a:lvl4pPr>
             <a:lvl5pPr>
+              <a:buNone/>
               <a:defRPr sz="2025" b="1">
                 <a:solidFill>
                   <a:srgbClr val="555555"/>
@@ -5504,6 +5664,7 @@
               </a:defRPr>
             </a:lvl5pPr>
             <a:lvl6pPr>
+              <a:buNone/>
               <a:defRPr sz="2025" b="1">
                 <a:solidFill>
                   <a:srgbClr val="555555"/>
@@ -5514,6 +5675,7 @@
               </a:defRPr>
             </a:lvl6pPr>
             <a:lvl7pPr>
+              <a:buNone/>
               <a:defRPr sz="2025" b="1">
                 <a:solidFill>
                   <a:srgbClr val="555555"/>
@@ -5524,6 +5686,7 @@
               </a:defRPr>
             </a:lvl7pPr>
             <a:lvl8pPr>
+              <a:buNone/>
               <a:defRPr sz="2025" b="1">
                 <a:solidFill>
                   <a:srgbClr val="555555"/>
@@ -5534,6 +5697,7 @@
               </a:defRPr>
             </a:lvl8pPr>
             <a:lvl9pPr>
+              <a:buNone/>
               <a:defRPr sz="2025" b="1">
                 <a:solidFill>
                   <a:srgbClr val="555555"/>
@@ -5546,6 +5710,7 @@
           </a:lstStyle>
           <a:p xmlns:a="http://schemas.openxmlformats.org/drawingml/2006/main">
             <a:pPr>
+              <a:buNone/>
               <a:defRPr sz="2025" b="1">
                 <a:solidFill>
                   <a:srgbClr val="555555"/>
@@ -5613,6 +5778,7 @@
               </a:defRPr>
             </a:defPPr>
             <a:lvl1pPr>
+              <a:buNone/>
               <a:defRPr sz="1725" b="0">
                 <a:solidFill>
                   <a:srgbClr val="111111"/>
@@ -5623,6 +5789,7 @@
               </a:defRPr>
             </a:lvl1pPr>
             <a:lvl2pPr>
+              <a:buNone/>
               <a:defRPr sz="1725" b="0">
                 <a:solidFill>
                   <a:srgbClr val="111111"/>
@@ -5633,6 +5800,7 @@
               </a:defRPr>
             </a:lvl2pPr>
             <a:lvl3pPr>
+              <a:buNone/>
               <a:defRPr sz="1725" b="0">
                 <a:solidFill>
                   <a:srgbClr val="111111"/>
@@ -5643,6 +5811,7 @@
               </a:defRPr>
             </a:lvl3pPr>
             <a:lvl4pPr>
+              <a:buNone/>
               <a:defRPr sz="1725" b="0">
                 <a:solidFill>
                   <a:srgbClr val="111111"/>
@@ -5653,6 +5822,7 @@
               </a:defRPr>
             </a:lvl4pPr>
             <a:lvl5pPr>
+              <a:buNone/>
               <a:defRPr sz="1725" b="0">
                 <a:solidFill>
                   <a:srgbClr val="111111"/>
@@ -5663,6 +5833,7 @@
               </a:defRPr>
             </a:lvl5pPr>
             <a:lvl6pPr>
+              <a:buNone/>
               <a:defRPr sz="1725" b="0">
                 <a:solidFill>
                   <a:srgbClr val="111111"/>
@@ -5673,6 +5844,7 @@
               </a:defRPr>
             </a:lvl6pPr>
             <a:lvl7pPr>
+              <a:buNone/>
               <a:defRPr sz="1725" b="0">
                 <a:solidFill>
                   <a:srgbClr val="111111"/>
@@ -5683,6 +5855,7 @@
               </a:defRPr>
             </a:lvl7pPr>
             <a:lvl8pPr>
+              <a:buNone/>
               <a:defRPr sz="1725" b="0">
                 <a:solidFill>
                   <a:srgbClr val="111111"/>
@@ -5693,6 +5866,7 @@
               </a:defRPr>
             </a:lvl8pPr>
             <a:lvl9pPr>
+              <a:buNone/>
               <a:defRPr sz="1725" b="0">
                 <a:solidFill>
                   <a:srgbClr val="111111"/>
@@ -5705,6 +5879,7 @@
           </a:lstStyle>
           <a:p xmlns:a="http://schemas.openxmlformats.org/drawingml/2006/main">
             <a:pPr>
+              <a:buNone/>
               <a:defRPr sz="1725" b="0">
                 <a:solidFill>
                   <a:srgbClr val="111111"/>
@@ -5733,6 +5908,7 @@
           </a:p>
           <a:p xmlns:a="http://schemas.openxmlformats.org/drawingml/2006/main">
             <a:pPr>
+              <a:buNone/>
               <a:defRPr sz="1725" b="0">
                 <a:solidFill>
                   <a:srgbClr val="111111"/>
@@ -5761,6 +5937,7 @@
           </a:p>
           <a:p xmlns:a="http://schemas.openxmlformats.org/drawingml/2006/main">
             <a:pPr>
+              <a:buNone/>
               <a:defRPr sz="1725" b="0">
                 <a:solidFill>
                   <a:srgbClr val="111111"/>
@@ -5828,6 +6005,7 @@
               </a:defRPr>
             </a:defPPr>
             <a:lvl1pPr>
+              <a:buNone/>
               <a:defRPr sz="1425" b="0">
                 <a:solidFill>
                   <a:srgbClr val="3A3A3A"/>
@@ -5838,6 +6016,7 @@
               </a:defRPr>
             </a:lvl1pPr>
             <a:lvl2pPr>
+              <a:buNone/>
               <a:defRPr sz="1425" b="0">
                 <a:solidFill>
                   <a:srgbClr val="3A3A3A"/>
@@ -5848,6 +6027,7 @@
               </a:defRPr>
             </a:lvl2pPr>
             <a:lvl3pPr>
+              <a:buNone/>
               <a:defRPr sz="1425" b="0">
                 <a:solidFill>
                   <a:srgbClr val="3A3A3A"/>
@@ -5858,6 +6038,7 @@
               </a:defRPr>
             </a:lvl3pPr>
             <a:lvl4pPr>
+              <a:buNone/>
               <a:defRPr sz="1425" b="0">
                 <a:solidFill>
                   <a:srgbClr val="3A3A3A"/>
@@ -5868,6 +6049,7 @@
               </a:defRPr>
             </a:lvl4pPr>
             <a:lvl5pPr>
+              <a:buNone/>
               <a:defRPr sz="1425" b="0">
                 <a:solidFill>
                   <a:srgbClr val="3A3A3A"/>
@@ -5878,6 +6060,7 @@
               </a:defRPr>
             </a:lvl5pPr>
             <a:lvl6pPr>
+              <a:buNone/>
               <a:defRPr sz="1425" b="0">
                 <a:solidFill>
                   <a:srgbClr val="3A3A3A"/>
@@ -5888,6 +6071,7 @@
               </a:defRPr>
             </a:lvl6pPr>
             <a:lvl7pPr>
+              <a:buNone/>
               <a:defRPr sz="1425" b="0">
                 <a:solidFill>
                   <a:srgbClr val="3A3A3A"/>
@@ -5898,6 +6082,7 @@
               </a:defRPr>
             </a:lvl7pPr>
             <a:lvl8pPr>
+              <a:buNone/>
               <a:defRPr sz="1425" b="0">
                 <a:solidFill>
                   <a:srgbClr val="3A3A3A"/>
@@ -5908,6 +6093,7 @@
               </a:defRPr>
             </a:lvl8pPr>
             <a:lvl9pPr>
+              <a:buNone/>
               <a:defRPr sz="1425" b="0">
                 <a:solidFill>
                   <a:srgbClr val="3A3A3A"/>
@@ -5920,6 +6106,7 @@
           </a:lstStyle>
           <a:p xmlns:a="http://schemas.openxmlformats.org/drawingml/2006/main">
             <a:pPr>
+              <a:buNone/>
               <a:defRPr sz="1425" b="0">
                 <a:solidFill>
                   <a:srgbClr val="3A3A3A"/>
@@ -6047,6 +6234,7 @@
               </a:defRPr>
             </a:defPPr>
             <a:lvl1pPr>
+              <a:buNone/>
               <a:defRPr sz="2850" b="1">
                 <a:solidFill>
                   <a:srgbClr val="111111"/>
@@ -6057,6 +6245,7 @@
               </a:defRPr>
             </a:lvl1pPr>
             <a:lvl2pPr>
+              <a:buNone/>
               <a:defRPr sz="2850" b="1">
                 <a:solidFill>
                   <a:srgbClr val="111111"/>
@@ -6067,6 +6256,7 @@
               </a:defRPr>
             </a:lvl2pPr>
             <a:lvl3pPr>
+              <a:buNone/>
               <a:defRPr sz="2850" b="1">
                 <a:solidFill>
                   <a:srgbClr val="111111"/>
@@ -6077,6 +6267,7 @@
               </a:defRPr>
             </a:lvl3pPr>
             <a:lvl4pPr>
+              <a:buNone/>
               <a:defRPr sz="2850" b="1">
                 <a:solidFill>
                   <a:srgbClr val="111111"/>
@@ -6087,6 +6278,7 @@
               </a:defRPr>
             </a:lvl4pPr>
             <a:lvl5pPr>
+              <a:buNone/>
               <a:defRPr sz="2850" b="1">
                 <a:solidFill>
                   <a:srgbClr val="111111"/>
@@ -6097,6 +6289,7 @@
               </a:defRPr>
             </a:lvl5pPr>
             <a:lvl6pPr>
+              <a:buNone/>
               <a:defRPr sz="2850" b="1">
                 <a:solidFill>
                   <a:srgbClr val="111111"/>
@@ -6107,6 +6300,7 @@
               </a:defRPr>
             </a:lvl6pPr>
             <a:lvl7pPr>
+              <a:buNone/>
               <a:defRPr sz="2850" b="1">
                 <a:solidFill>
                   <a:srgbClr val="111111"/>
@@ -6117,6 +6311,7 @@
               </a:defRPr>
             </a:lvl7pPr>
             <a:lvl8pPr>
+              <a:buNone/>
               <a:defRPr sz="2850" b="1">
                 <a:solidFill>
                   <a:srgbClr val="111111"/>
@@ -6127,6 +6322,7 @@
               </a:defRPr>
             </a:lvl8pPr>
             <a:lvl9pPr>
+              <a:buNone/>
               <a:defRPr sz="2850" b="1">
                 <a:solidFill>
                   <a:srgbClr val="111111"/>
@@ -6139,6 +6335,7 @@
           </a:lstStyle>
           <a:p xmlns:a="http://schemas.openxmlformats.org/drawingml/2006/main">
             <a:pPr>
+              <a:buNone/>
               <a:defRPr sz="2850" b="1">
                 <a:solidFill>
                   <a:srgbClr val="111111"/>
@@ -6237,6 +6434,7 @@
               </a:defRPr>
             </a:defPPr>
             <a:lvl1pPr>
+              <a:buNone/>
               <a:defRPr sz="1050" b="1">
                 <a:solidFill>
                   <a:srgbClr val="3A3A3A"/>
@@ -6247,6 +6445,7 @@
               </a:defRPr>
             </a:lvl1pPr>
             <a:lvl2pPr>
+              <a:buNone/>
               <a:defRPr sz="1050" b="1">
                 <a:solidFill>
                   <a:srgbClr val="3A3A3A"/>
@@ -6257,6 +6456,7 @@
               </a:defRPr>
             </a:lvl2pPr>
             <a:lvl3pPr>
+              <a:buNone/>
               <a:defRPr sz="1050" b="1">
                 <a:solidFill>
                   <a:srgbClr val="3A3A3A"/>
@@ -6267,6 +6467,7 @@
               </a:defRPr>
             </a:lvl3pPr>
             <a:lvl4pPr>
+              <a:buNone/>
               <a:defRPr sz="1050" b="1">
                 <a:solidFill>
                   <a:srgbClr val="3A3A3A"/>
@@ -6277,6 +6478,7 @@
               </a:defRPr>
             </a:lvl4pPr>
             <a:lvl5pPr>
+              <a:buNone/>
               <a:defRPr sz="1050" b="1">
                 <a:solidFill>
                   <a:srgbClr val="3A3A3A"/>
@@ -6287,6 +6489,7 @@
               </a:defRPr>
             </a:lvl5pPr>
             <a:lvl6pPr>
+              <a:buNone/>
               <a:defRPr sz="1050" b="1">
                 <a:solidFill>
                   <a:srgbClr val="3A3A3A"/>
@@ -6297,6 +6500,7 @@
               </a:defRPr>
             </a:lvl6pPr>
             <a:lvl7pPr>
+              <a:buNone/>
               <a:defRPr sz="1050" b="1">
                 <a:solidFill>
                   <a:srgbClr val="3A3A3A"/>
@@ -6307,6 +6511,7 @@
               </a:defRPr>
             </a:lvl7pPr>
             <a:lvl8pPr>
+              <a:buNone/>
               <a:defRPr sz="1050" b="1">
                 <a:solidFill>
                   <a:srgbClr val="3A3A3A"/>
@@ -6317,6 +6522,7 @@
               </a:defRPr>
             </a:lvl8pPr>
             <a:lvl9pPr>
+              <a:buNone/>
               <a:defRPr sz="1050" b="1">
                 <a:solidFill>
                   <a:srgbClr val="3A3A3A"/>
@@ -6329,6 +6535,7 @@
           </a:lstStyle>
           <a:p xmlns:a="http://schemas.openxmlformats.org/drawingml/2006/main">
             <a:pPr>
+              <a:buNone/>
               <a:defRPr sz="1050" b="1">
                 <a:solidFill>
                   <a:srgbClr val="3A3A3A"/>
@@ -6396,6 +6603,7 @@
               </a:defRPr>
             </a:defPPr>
             <a:lvl1pPr>
+              <a:buNone/>
               <a:defRPr sz="1725" b="0">
                 <a:solidFill>
                   <a:srgbClr val="3A3A3A"/>
@@ -6406,6 +6614,7 @@
               </a:defRPr>
             </a:lvl1pPr>
             <a:lvl2pPr>
+              <a:buNone/>
               <a:defRPr sz="1725" b="0">
                 <a:solidFill>
                   <a:srgbClr val="3A3A3A"/>
@@ -6416,6 +6625,7 @@
               </a:defRPr>
             </a:lvl2pPr>
             <a:lvl3pPr>
+              <a:buNone/>
               <a:defRPr sz="1725" b="0">
                 <a:solidFill>
                   <a:srgbClr val="3A3A3A"/>
@@ -6426,6 +6636,7 @@
               </a:defRPr>
             </a:lvl3pPr>
             <a:lvl4pPr>
+              <a:buNone/>
               <a:defRPr sz="1725" b="0">
                 <a:solidFill>
                   <a:srgbClr val="3A3A3A"/>
@@ -6436,6 +6647,7 @@
               </a:defRPr>
             </a:lvl4pPr>
             <a:lvl5pPr>
+              <a:buNone/>
               <a:defRPr sz="1725" b="0">
                 <a:solidFill>
                   <a:srgbClr val="3A3A3A"/>
@@ -6446,6 +6658,7 @@
               </a:defRPr>
             </a:lvl5pPr>
             <a:lvl6pPr>
+              <a:buNone/>
               <a:defRPr sz="1725" b="0">
                 <a:solidFill>
                   <a:srgbClr val="3A3A3A"/>
@@ -6456,6 +6669,7 @@
               </a:defRPr>
             </a:lvl6pPr>
             <a:lvl7pPr>
+              <a:buNone/>
               <a:defRPr sz="1725" b="0">
                 <a:solidFill>
                   <a:srgbClr val="3A3A3A"/>
@@ -6466,6 +6680,7 @@
               </a:defRPr>
             </a:lvl7pPr>
             <a:lvl8pPr>
+              <a:buNone/>
               <a:defRPr sz="1725" b="0">
                 <a:solidFill>
                   <a:srgbClr val="3A3A3A"/>
@@ -6476,6 +6691,7 @@
               </a:defRPr>
             </a:lvl8pPr>
             <a:lvl9pPr>
+              <a:buNone/>
               <a:defRPr sz="1725" b="0">
                 <a:solidFill>
                   <a:srgbClr val="3A3A3A"/>
@@ -6488,6 +6704,7 @@
           </a:lstStyle>
           <a:p xmlns:a="http://schemas.openxmlformats.org/drawingml/2006/main">
             <a:pPr>
+              <a:buNone/>
               <a:defRPr sz="1725" b="0">
                 <a:solidFill>
                   <a:srgbClr val="3A3A3A"/>
@@ -6590,6 +6807,7 @@
               </a:defRPr>
             </a:defPPr>
             <a:lvl1pPr>
+              <a:buNone/>
               <a:defRPr sz="2025" b="1">
                 <a:solidFill>
                   <a:srgbClr val="111111"/>
@@ -6600,6 +6818,7 @@
               </a:defRPr>
             </a:lvl1pPr>
             <a:lvl2pPr>
+              <a:buNone/>
               <a:defRPr sz="2025" b="1">
                 <a:solidFill>
                   <a:srgbClr val="111111"/>
@@ -6610,6 +6829,7 @@
               </a:defRPr>
             </a:lvl2pPr>
             <a:lvl3pPr>
+              <a:buNone/>
               <a:defRPr sz="2025" b="1">
                 <a:solidFill>
                   <a:srgbClr val="111111"/>
@@ -6620,6 +6840,7 @@
               </a:defRPr>
             </a:lvl3pPr>
             <a:lvl4pPr>
+              <a:buNone/>
               <a:defRPr sz="2025" b="1">
                 <a:solidFill>
                   <a:srgbClr val="111111"/>
@@ -6630,6 +6851,7 @@
               </a:defRPr>
             </a:lvl4pPr>
             <a:lvl5pPr>
+              <a:buNone/>
               <a:defRPr sz="2025" b="1">
                 <a:solidFill>
                   <a:srgbClr val="111111"/>
@@ -6640,6 +6862,7 @@
               </a:defRPr>
             </a:lvl5pPr>
             <a:lvl6pPr>
+              <a:buNone/>
               <a:defRPr sz="2025" b="1">
                 <a:solidFill>
                   <a:srgbClr val="111111"/>
@@ -6650,6 +6873,7 @@
               </a:defRPr>
             </a:lvl6pPr>
             <a:lvl7pPr>
+              <a:buNone/>
               <a:defRPr sz="2025" b="1">
                 <a:solidFill>
                   <a:srgbClr val="111111"/>
@@ -6660,6 +6884,7 @@
               </a:defRPr>
             </a:lvl7pPr>
             <a:lvl8pPr>
+              <a:buNone/>
               <a:defRPr sz="2025" b="1">
                 <a:solidFill>
                   <a:srgbClr val="111111"/>
@@ -6670,6 +6895,7 @@
               </a:defRPr>
             </a:lvl8pPr>
             <a:lvl9pPr>
+              <a:buNone/>
               <a:defRPr sz="2025" b="1">
                 <a:solidFill>
                   <a:srgbClr val="111111"/>
@@ -6682,6 +6908,7 @@
           </a:lstStyle>
           <a:p xmlns:a="http://schemas.openxmlformats.org/drawingml/2006/main">
             <a:pPr>
+              <a:buNone/>
               <a:defRPr sz="2025" b="1">
                 <a:solidFill>
                   <a:srgbClr val="111111"/>
@@ -6749,6 +6976,7 @@
               </a:defRPr>
             </a:defPPr>
             <a:lvl1pPr>
+              <a:buNone/>
               <a:defRPr sz="1650" b="0">
                 <a:solidFill>
                   <a:srgbClr val="111111"/>
@@ -6759,6 +6987,7 @@
               </a:defRPr>
             </a:lvl1pPr>
             <a:lvl2pPr>
+              <a:buNone/>
               <a:defRPr sz="1650" b="0">
                 <a:solidFill>
                   <a:srgbClr val="111111"/>
@@ -6769,6 +6998,7 @@
               </a:defRPr>
             </a:lvl2pPr>
             <a:lvl3pPr>
+              <a:buNone/>
               <a:defRPr sz="1650" b="0">
                 <a:solidFill>
                   <a:srgbClr val="111111"/>
@@ -6779,6 +7009,7 @@
               </a:defRPr>
             </a:lvl3pPr>
             <a:lvl4pPr>
+              <a:buNone/>
               <a:defRPr sz="1650" b="0">
                 <a:solidFill>
                   <a:srgbClr val="111111"/>
@@ -6789,6 +7020,7 @@
               </a:defRPr>
             </a:lvl4pPr>
             <a:lvl5pPr>
+              <a:buNone/>
               <a:defRPr sz="1650" b="0">
                 <a:solidFill>
                   <a:srgbClr val="111111"/>
@@ -6799,6 +7031,7 @@
               </a:defRPr>
             </a:lvl5pPr>
             <a:lvl6pPr>
+              <a:buNone/>
               <a:defRPr sz="1650" b="0">
                 <a:solidFill>
                   <a:srgbClr val="111111"/>
@@ -6809,6 +7042,7 @@
               </a:defRPr>
             </a:lvl6pPr>
             <a:lvl7pPr>
+              <a:buNone/>
               <a:defRPr sz="1650" b="0">
                 <a:solidFill>
                   <a:srgbClr val="111111"/>
@@ -6819,6 +7053,7 @@
               </a:defRPr>
             </a:lvl7pPr>
             <a:lvl8pPr>
+              <a:buNone/>
               <a:defRPr sz="1650" b="0">
                 <a:solidFill>
                   <a:srgbClr val="111111"/>
@@ -6829,6 +7064,7 @@
               </a:defRPr>
             </a:lvl8pPr>
             <a:lvl9pPr>
+              <a:buNone/>
               <a:defRPr sz="1650" b="0">
                 <a:solidFill>
                   <a:srgbClr val="111111"/>
@@ -6841,6 +7077,7 @@
           </a:lstStyle>
           <a:p xmlns:a="http://schemas.openxmlformats.org/drawingml/2006/main">
             <a:pPr>
+              <a:buNone/>
               <a:defRPr sz="1650" b="0">
                 <a:solidFill>
                   <a:srgbClr val="111111"/>
@@ -6864,6 +7101,7 @@
           </a:p>
           <a:p xmlns:a="http://schemas.openxmlformats.org/drawingml/2006/main">
             <a:pPr>
+              <a:buNone/>
               <a:defRPr sz="1650" b="0">
                 <a:solidFill>
                   <a:srgbClr val="111111"/>
@@ -6966,6 +7204,7 @@
               </a:defRPr>
             </a:defPPr>
             <a:lvl1pPr>
+              <a:buNone/>
               <a:defRPr sz="2025" b="1">
                 <a:solidFill>
                   <a:srgbClr val="111111"/>
@@ -6976,6 +7215,7 @@
               </a:defRPr>
             </a:lvl1pPr>
             <a:lvl2pPr>
+              <a:buNone/>
               <a:defRPr sz="2025" b="1">
                 <a:solidFill>
                   <a:srgbClr val="111111"/>
@@ -6986,6 +7226,7 @@
               </a:defRPr>
             </a:lvl2pPr>
             <a:lvl3pPr>
+              <a:buNone/>
               <a:defRPr sz="2025" b="1">
                 <a:solidFill>
                   <a:srgbClr val="111111"/>
@@ -6996,6 +7237,7 @@
               </a:defRPr>
             </a:lvl3pPr>
             <a:lvl4pPr>
+              <a:buNone/>
               <a:defRPr sz="2025" b="1">
                 <a:solidFill>
                   <a:srgbClr val="111111"/>
@@ -7006,6 +7248,7 @@
               </a:defRPr>
             </a:lvl4pPr>
             <a:lvl5pPr>
+              <a:buNone/>
               <a:defRPr sz="2025" b="1">
                 <a:solidFill>
                   <a:srgbClr val="111111"/>
@@ -7016,6 +7259,7 @@
               </a:defRPr>
             </a:lvl5pPr>
             <a:lvl6pPr>
+              <a:buNone/>
               <a:defRPr sz="2025" b="1">
                 <a:solidFill>
                   <a:srgbClr val="111111"/>
@@ -7026,6 +7270,7 @@
               </a:defRPr>
             </a:lvl6pPr>
             <a:lvl7pPr>
+              <a:buNone/>
               <a:defRPr sz="2025" b="1">
                 <a:solidFill>
                   <a:srgbClr val="111111"/>
@@ -7036,6 +7281,7 @@
               </a:defRPr>
             </a:lvl7pPr>
             <a:lvl8pPr>
+              <a:buNone/>
               <a:defRPr sz="2025" b="1">
                 <a:solidFill>
                   <a:srgbClr val="111111"/>
@@ -7046,6 +7292,7 @@
               </a:defRPr>
             </a:lvl8pPr>
             <a:lvl9pPr>
+              <a:buNone/>
               <a:defRPr sz="2025" b="1">
                 <a:solidFill>
                   <a:srgbClr val="111111"/>
@@ -7058,6 +7305,7 @@
           </a:lstStyle>
           <a:p xmlns:a="http://schemas.openxmlformats.org/drawingml/2006/main">
             <a:pPr>
+              <a:buNone/>
               <a:defRPr sz="2025" b="1">
                 <a:solidFill>
                   <a:srgbClr val="111111"/>
@@ -7125,6 +7373,7 @@
               </a:defRPr>
             </a:defPPr>
             <a:lvl1pPr>
+              <a:buNone/>
               <a:defRPr sz="1650" b="0">
                 <a:solidFill>
                   <a:srgbClr val="111111"/>
@@ -7135,6 +7384,7 @@
               </a:defRPr>
             </a:lvl1pPr>
             <a:lvl2pPr>
+              <a:buNone/>
               <a:defRPr sz="1650" b="0">
                 <a:solidFill>
                   <a:srgbClr val="111111"/>
@@ -7145,6 +7395,7 @@
               </a:defRPr>
             </a:lvl2pPr>
             <a:lvl3pPr>
+              <a:buNone/>
               <a:defRPr sz="1650" b="0">
                 <a:solidFill>
                   <a:srgbClr val="111111"/>
@@ -7155,6 +7406,7 @@
               </a:defRPr>
             </a:lvl3pPr>
             <a:lvl4pPr>
+              <a:buNone/>
               <a:defRPr sz="1650" b="0">
                 <a:solidFill>
                   <a:srgbClr val="111111"/>
@@ -7165,6 +7417,7 @@
               </a:defRPr>
             </a:lvl4pPr>
             <a:lvl5pPr>
+              <a:buNone/>
               <a:defRPr sz="1650" b="0">
                 <a:solidFill>
                   <a:srgbClr val="111111"/>
@@ -7175,6 +7428,7 @@
               </a:defRPr>
             </a:lvl5pPr>
             <a:lvl6pPr>
+              <a:buNone/>
               <a:defRPr sz="1650" b="0">
                 <a:solidFill>
                   <a:srgbClr val="111111"/>
@@ -7185,6 +7439,7 @@
               </a:defRPr>
             </a:lvl6pPr>
             <a:lvl7pPr>
+              <a:buNone/>
               <a:defRPr sz="1650" b="0">
                 <a:solidFill>
                   <a:srgbClr val="111111"/>
@@ -7195,6 +7450,7 @@
               </a:defRPr>
             </a:lvl7pPr>
             <a:lvl8pPr>
+              <a:buNone/>
               <a:defRPr sz="1650" b="0">
                 <a:solidFill>
                   <a:srgbClr val="111111"/>
@@ -7205,6 +7461,7 @@
               </a:defRPr>
             </a:lvl8pPr>
             <a:lvl9pPr>
+              <a:buNone/>
               <a:defRPr sz="1650" b="0">
                 <a:solidFill>
                   <a:srgbClr val="111111"/>
@@ -7217,6 +7474,7 @@
           </a:lstStyle>
           <a:p xmlns:a="http://schemas.openxmlformats.org/drawingml/2006/main">
             <a:pPr>
+              <a:buNone/>
               <a:defRPr sz="1650" b="0">
                 <a:solidFill>
                   <a:srgbClr val="111111"/>
@@ -7240,6 +7498,7 @@
           </a:p>
           <a:p xmlns:a="http://schemas.openxmlformats.org/drawingml/2006/main">
             <a:pPr>
+              <a:buNone/>
               <a:defRPr sz="1650" b="0">
                 <a:solidFill>
                   <a:srgbClr val="111111"/>
@@ -7338,6 +7597,7 @@
               </a:defRPr>
             </a:defPPr>
             <a:lvl1pPr>
+              <a:buNone/>
               <a:defRPr sz="1275" b="1">
                 <a:solidFill>
                   <a:srgbClr val="3A3A3A"/>
@@ -7348,6 +7608,7 @@
               </a:defRPr>
             </a:lvl1pPr>
             <a:lvl2pPr>
+              <a:buNone/>
               <a:defRPr sz="1275" b="1">
                 <a:solidFill>
                   <a:srgbClr val="3A3A3A"/>
@@ -7358,6 +7619,7 @@
               </a:defRPr>
             </a:lvl2pPr>
             <a:lvl3pPr>
+              <a:buNone/>
               <a:defRPr sz="1275" b="1">
                 <a:solidFill>
                   <a:srgbClr val="3A3A3A"/>
@@ -7368,6 +7630,7 @@
               </a:defRPr>
             </a:lvl3pPr>
             <a:lvl4pPr>
+              <a:buNone/>
               <a:defRPr sz="1275" b="1">
                 <a:solidFill>
                   <a:srgbClr val="3A3A3A"/>
@@ -7378,6 +7641,7 @@
               </a:defRPr>
             </a:lvl4pPr>
             <a:lvl5pPr>
+              <a:buNone/>
               <a:defRPr sz="1275" b="1">
                 <a:solidFill>
                   <a:srgbClr val="3A3A3A"/>
@@ -7388,6 +7652,7 @@
               </a:defRPr>
             </a:lvl5pPr>
             <a:lvl6pPr>
+              <a:buNone/>
               <a:defRPr sz="1275" b="1">
                 <a:solidFill>
                   <a:srgbClr val="3A3A3A"/>
@@ -7398,6 +7663,7 @@
               </a:defRPr>
             </a:lvl6pPr>
             <a:lvl7pPr>
+              <a:buNone/>
               <a:defRPr sz="1275" b="1">
                 <a:solidFill>
                   <a:srgbClr val="3A3A3A"/>
@@ -7408,6 +7674,7 @@
               </a:defRPr>
             </a:lvl7pPr>
             <a:lvl8pPr>
+              <a:buNone/>
               <a:defRPr sz="1275" b="1">
                 <a:solidFill>
                   <a:srgbClr val="3A3A3A"/>
@@ -7418,6 +7685,7 @@
               </a:defRPr>
             </a:lvl8pPr>
             <a:lvl9pPr>
+              <a:buNone/>
               <a:defRPr sz="1275" b="1">
                 <a:solidFill>
                   <a:srgbClr val="3A3A3A"/>
@@ -7430,6 +7698,7 @@
           </a:lstStyle>
           <a:p xmlns:a="http://schemas.openxmlformats.org/drawingml/2006/main">
             <a:pPr>
+              <a:buNone/>
               <a:defRPr sz="1275" b="1">
                 <a:solidFill>
                   <a:srgbClr val="3A3A3A"/>
@@ -7497,6 +7766,7 @@
               </a:defRPr>
             </a:defPPr>
             <a:lvl1pPr>
+              <a:buNone/>
               <a:defRPr sz="1650" b="0">
                 <a:solidFill>
                   <a:srgbClr val="111111"/>
@@ -7507,6 +7777,7 @@
               </a:defRPr>
             </a:lvl1pPr>
             <a:lvl2pPr>
+              <a:buNone/>
               <a:defRPr sz="1650" b="0">
                 <a:solidFill>
                   <a:srgbClr val="111111"/>
@@ -7517,6 +7788,7 @@
               </a:defRPr>
             </a:lvl2pPr>
             <a:lvl3pPr>
+              <a:buNone/>
               <a:defRPr sz="1650" b="0">
                 <a:solidFill>
                   <a:srgbClr val="111111"/>
@@ -7527,6 +7799,7 @@
               </a:defRPr>
             </a:lvl3pPr>
             <a:lvl4pPr>
+              <a:buNone/>
               <a:defRPr sz="1650" b="0">
                 <a:solidFill>
                   <a:srgbClr val="111111"/>
@@ -7537,6 +7810,7 @@
               </a:defRPr>
             </a:lvl4pPr>
             <a:lvl5pPr>
+              <a:buNone/>
               <a:defRPr sz="1650" b="0">
                 <a:solidFill>
                   <a:srgbClr val="111111"/>
@@ -7547,6 +7821,7 @@
               </a:defRPr>
             </a:lvl5pPr>
             <a:lvl6pPr>
+              <a:buNone/>
               <a:defRPr sz="1650" b="0">
                 <a:solidFill>
                   <a:srgbClr val="111111"/>
@@ -7557,6 +7832,7 @@
               </a:defRPr>
             </a:lvl6pPr>
             <a:lvl7pPr>
+              <a:buNone/>
               <a:defRPr sz="1650" b="0">
                 <a:solidFill>
                   <a:srgbClr val="111111"/>
@@ -7567,6 +7843,7 @@
               </a:defRPr>
             </a:lvl7pPr>
             <a:lvl8pPr>
+              <a:buNone/>
               <a:defRPr sz="1650" b="0">
                 <a:solidFill>
                   <a:srgbClr val="111111"/>
@@ -7577,6 +7854,7 @@
               </a:defRPr>
             </a:lvl8pPr>
             <a:lvl9pPr>
+              <a:buNone/>
               <a:defRPr sz="1650" b="0">
                 <a:solidFill>
                   <a:srgbClr val="111111"/>
@@ -7589,6 +7867,7 @@
           </a:lstStyle>
           <a:p xmlns:a="http://schemas.openxmlformats.org/drawingml/2006/main">
             <a:pPr>
+              <a:buNone/>
               <a:defRPr sz="1650" b="0">
                 <a:solidFill>
                   <a:srgbClr val="111111"/>
@@ -7716,6 +7995,7 @@
               </a:defRPr>
             </a:defPPr>
             <a:lvl1pPr>
+              <a:buNone/>
               <a:defRPr sz="2850" b="1">
                 <a:solidFill>
                   <a:srgbClr val="111111"/>
@@ -7726,6 +8006,7 @@
               </a:defRPr>
             </a:lvl1pPr>
             <a:lvl2pPr>
+              <a:buNone/>
               <a:defRPr sz="2850" b="1">
                 <a:solidFill>
                   <a:srgbClr val="111111"/>
@@ -7736,6 +8017,7 @@
               </a:defRPr>
             </a:lvl2pPr>
             <a:lvl3pPr>
+              <a:buNone/>
               <a:defRPr sz="2850" b="1">
                 <a:solidFill>
                   <a:srgbClr val="111111"/>
@@ -7746,6 +8028,7 @@
               </a:defRPr>
             </a:lvl3pPr>
             <a:lvl4pPr>
+              <a:buNone/>
               <a:defRPr sz="2850" b="1">
                 <a:solidFill>
                   <a:srgbClr val="111111"/>
@@ -7756,6 +8039,7 @@
               </a:defRPr>
             </a:lvl4pPr>
             <a:lvl5pPr>
+              <a:buNone/>
               <a:defRPr sz="2850" b="1">
                 <a:solidFill>
                   <a:srgbClr val="111111"/>
@@ -7766,6 +8050,7 @@
               </a:defRPr>
             </a:lvl5pPr>
             <a:lvl6pPr>
+              <a:buNone/>
               <a:defRPr sz="2850" b="1">
                 <a:solidFill>
                   <a:srgbClr val="111111"/>
@@ -7776,6 +8061,7 @@
               </a:defRPr>
             </a:lvl6pPr>
             <a:lvl7pPr>
+              <a:buNone/>
               <a:defRPr sz="2850" b="1">
                 <a:solidFill>
                   <a:srgbClr val="111111"/>
@@ -7786,6 +8072,7 @@
               </a:defRPr>
             </a:lvl7pPr>
             <a:lvl8pPr>
+              <a:buNone/>
               <a:defRPr sz="2850" b="1">
                 <a:solidFill>
                   <a:srgbClr val="111111"/>
@@ -7796,6 +8083,7 @@
               </a:defRPr>
             </a:lvl8pPr>
             <a:lvl9pPr>
+              <a:buNone/>
               <a:defRPr sz="2850" b="1">
                 <a:solidFill>
                   <a:srgbClr val="111111"/>
@@ -7808,6 +8096,7 @@
           </a:lstStyle>
           <a:p xmlns:a="http://schemas.openxmlformats.org/drawingml/2006/main">
             <a:pPr>
+              <a:buNone/>
               <a:defRPr sz="2850" b="1">
                 <a:solidFill>
                   <a:srgbClr val="111111"/>
@@ -7906,6 +8195,7 @@
               </a:defRPr>
             </a:defPPr>
             <a:lvl1pPr>
+              <a:buNone/>
               <a:defRPr sz="1050" b="1">
                 <a:solidFill>
                   <a:srgbClr val="3A3A3A"/>
@@ -7916,6 +8206,7 @@
               </a:defRPr>
             </a:lvl1pPr>
             <a:lvl2pPr>
+              <a:buNone/>
               <a:defRPr sz="1050" b="1">
                 <a:solidFill>
                   <a:srgbClr val="3A3A3A"/>
@@ -7926,6 +8217,7 @@
               </a:defRPr>
             </a:lvl2pPr>
             <a:lvl3pPr>
+              <a:buNone/>
               <a:defRPr sz="1050" b="1">
                 <a:solidFill>
                   <a:srgbClr val="3A3A3A"/>
@@ -7936,6 +8228,7 @@
               </a:defRPr>
             </a:lvl3pPr>
             <a:lvl4pPr>
+              <a:buNone/>
               <a:defRPr sz="1050" b="1">
                 <a:solidFill>
                   <a:srgbClr val="3A3A3A"/>
@@ -7946,6 +8239,7 @@
               </a:defRPr>
             </a:lvl4pPr>
             <a:lvl5pPr>
+              <a:buNone/>
               <a:defRPr sz="1050" b="1">
                 <a:solidFill>
                   <a:srgbClr val="3A3A3A"/>
@@ -7956,6 +8250,7 @@
               </a:defRPr>
             </a:lvl5pPr>
             <a:lvl6pPr>
+              <a:buNone/>
               <a:defRPr sz="1050" b="1">
                 <a:solidFill>
                   <a:srgbClr val="3A3A3A"/>
@@ -7966,6 +8261,7 @@
               </a:defRPr>
             </a:lvl6pPr>
             <a:lvl7pPr>
+              <a:buNone/>
               <a:defRPr sz="1050" b="1">
                 <a:solidFill>
                   <a:srgbClr val="3A3A3A"/>
@@ -7976,6 +8272,7 @@
               </a:defRPr>
             </a:lvl7pPr>
             <a:lvl8pPr>
+              <a:buNone/>
               <a:defRPr sz="1050" b="1">
                 <a:solidFill>
                   <a:srgbClr val="3A3A3A"/>
@@ -7986,6 +8283,7 @@
               </a:defRPr>
             </a:lvl8pPr>
             <a:lvl9pPr>
+              <a:buNone/>
               <a:defRPr sz="1050" b="1">
                 <a:solidFill>
                   <a:srgbClr val="3A3A3A"/>
@@ -7998,6 +8296,7 @@
           </a:lstStyle>
           <a:p xmlns:a="http://schemas.openxmlformats.org/drawingml/2006/main">
             <a:pPr>
+              <a:buNone/>
               <a:defRPr sz="1050" b="1">
                 <a:solidFill>
                   <a:srgbClr val="3A3A3A"/>
@@ -8065,6 +8364,7 @@
               </a:defRPr>
             </a:defPPr>
             <a:lvl1pPr>
+              <a:buNone/>
               <a:defRPr sz="1650" b="0">
                 <a:solidFill>
                   <a:srgbClr val="3A3A3A"/>
@@ -8075,6 +8375,7 @@
               </a:defRPr>
             </a:lvl1pPr>
             <a:lvl2pPr>
+              <a:buNone/>
               <a:defRPr sz="1650" b="0">
                 <a:solidFill>
                   <a:srgbClr val="3A3A3A"/>
@@ -8085,6 +8386,7 @@
               </a:defRPr>
             </a:lvl2pPr>
             <a:lvl3pPr>
+              <a:buNone/>
               <a:defRPr sz="1650" b="0">
                 <a:solidFill>
                   <a:srgbClr val="3A3A3A"/>
@@ -8095,6 +8397,7 @@
               </a:defRPr>
             </a:lvl3pPr>
             <a:lvl4pPr>
+              <a:buNone/>
               <a:defRPr sz="1650" b="0">
                 <a:solidFill>
                   <a:srgbClr val="3A3A3A"/>
@@ -8105,6 +8408,7 @@
               </a:defRPr>
             </a:lvl4pPr>
             <a:lvl5pPr>
+              <a:buNone/>
               <a:defRPr sz="1650" b="0">
                 <a:solidFill>
                   <a:srgbClr val="3A3A3A"/>
@@ -8115,6 +8419,7 @@
               </a:defRPr>
             </a:lvl5pPr>
             <a:lvl6pPr>
+              <a:buNone/>
               <a:defRPr sz="1650" b="0">
                 <a:solidFill>
                   <a:srgbClr val="3A3A3A"/>
@@ -8125,6 +8430,7 @@
               </a:defRPr>
             </a:lvl6pPr>
             <a:lvl7pPr>
+              <a:buNone/>
               <a:defRPr sz="1650" b="0">
                 <a:solidFill>
                   <a:srgbClr val="3A3A3A"/>
@@ -8135,6 +8441,7 @@
               </a:defRPr>
             </a:lvl7pPr>
             <a:lvl8pPr>
+              <a:buNone/>
               <a:defRPr sz="1650" b="0">
                 <a:solidFill>
                   <a:srgbClr val="3A3A3A"/>
@@ -8145,6 +8452,7 @@
               </a:defRPr>
             </a:lvl8pPr>
             <a:lvl9pPr>
+              <a:buNone/>
               <a:defRPr sz="1650" b="0">
                 <a:solidFill>
                   <a:srgbClr val="3A3A3A"/>
@@ -8157,6 +8465,7 @@
           </a:lstStyle>
           <a:p xmlns:a="http://schemas.openxmlformats.org/drawingml/2006/main">
             <a:pPr>
+              <a:buNone/>
               <a:defRPr sz="1650" b="0">
                 <a:solidFill>
                   <a:srgbClr val="3A3A3A"/>
@@ -8257,6 +8566,7 @@
               </a:defRPr>
             </a:defPPr>
             <a:lvl1pPr>
+              <a:buNone/>
               <a:defRPr sz="1800" b="1">
                 <a:solidFill>
                   <a:srgbClr val="111111"/>
@@ -8267,6 +8577,7 @@
               </a:defRPr>
             </a:lvl1pPr>
             <a:lvl2pPr>
+              <a:buNone/>
               <a:defRPr sz="1800" b="1">
                 <a:solidFill>
                   <a:srgbClr val="111111"/>
@@ -8277,6 +8588,7 @@
               </a:defRPr>
             </a:lvl2pPr>
             <a:lvl3pPr>
+              <a:buNone/>
               <a:defRPr sz="1800" b="1">
                 <a:solidFill>
                   <a:srgbClr val="111111"/>
@@ -8287,6 +8599,7 @@
               </a:defRPr>
             </a:lvl3pPr>
             <a:lvl4pPr>
+              <a:buNone/>
               <a:defRPr sz="1800" b="1">
                 <a:solidFill>
                   <a:srgbClr val="111111"/>
@@ -8297,6 +8610,7 @@
               </a:defRPr>
             </a:lvl4pPr>
             <a:lvl5pPr>
+              <a:buNone/>
               <a:defRPr sz="1800" b="1">
                 <a:solidFill>
                   <a:srgbClr val="111111"/>
@@ -8307,6 +8621,7 @@
               </a:defRPr>
             </a:lvl5pPr>
             <a:lvl6pPr>
+              <a:buNone/>
               <a:defRPr sz="1800" b="1">
                 <a:solidFill>
                   <a:srgbClr val="111111"/>
@@ -8317,6 +8632,7 @@
               </a:defRPr>
             </a:lvl6pPr>
             <a:lvl7pPr>
+              <a:buNone/>
               <a:defRPr sz="1800" b="1">
                 <a:solidFill>
                   <a:srgbClr val="111111"/>
@@ -8327,6 +8643,7 @@
               </a:defRPr>
             </a:lvl7pPr>
             <a:lvl8pPr>
+              <a:buNone/>
               <a:defRPr sz="1800" b="1">
                 <a:solidFill>
                   <a:srgbClr val="111111"/>
@@ -8337,6 +8654,7 @@
               </a:defRPr>
             </a:lvl8pPr>
             <a:lvl9pPr>
+              <a:buNone/>
               <a:defRPr sz="1800" b="1">
                 <a:solidFill>
                   <a:srgbClr val="111111"/>
@@ -8349,6 +8667,7 @@
           </a:lstStyle>
           <a:p xmlns:a="http://schemas.openxmlformats.org/drawingml/2006/main">
             <a:pPr>
+              <a:buNone/>
               <a:defRPr sz="1800" b="1">
                 <a:solidFill>
                   <a:srgbClr val="111111"/>
@@ -8416,6 +8735,7 @@
               </a:defRPr>
             </a:defPPr>
             <a:lvl1pPr>
+              <a:buNone/>
               <a:defRPr sz="1425" b="0">
                 <a:solidFill>
                   <a:srgbClr val="111111"/>
@@ -8426,6 +8746,7 @@
               </a:defRPr>
             </a:lvl1pPr>
             <a:lvl2pPr>
+              <a:buNone/>
               <a:defRPr sz="1425" b="0">
                 <a:solidFill>
                   <a:srgbClr val="111111"/>
@@ -8436,6 +8757,7 @@
               </a:defRPr>
             </a:lvl2pPr>
             <a:lvl3pPr>
+              <a:buNone/>
               <a:defRPr sz="1425" b="0">
                 <a:solidFill>
                   <a:srgbClr val="111111"/>
@@ -8446,6 +8768,7 @@
               </a:defRPr>
             </a:lvl3pPr>
             <a:lvl4pPr>
+              <a:buNone/>
               <a:defRPr sz="1425" b="0">
                 <a:solidFill>
                   <a:srgbClr val="111111"/>
@@ -8456,6 +8779,7 @@
               </a:defRPr>
             </a:lvl4pPr>
             <a:lvl5pPr>
+              <a:buNone/>
               <a:defRPr sz="1425" b="0">
                 <a:solidFill>
                   <a:srgbClr val="111111"/>
@@ -8466,6 +8790,7 @@
               </a:defRPr>
             </a:lvl5pPr>
             <a:lvl6pPr>
+              <a:buNone/>
               <a:defRPr sz="1425" b="0">
                 <a:solidFill>
                   <a:srgbClr val="111111"/>
@@ -8476,6 +8801,7 @@
               </a:defRPr>
             </a:lvl6pPr>
             <a:lvl7pPr>
+              <a:buNone/>
               <a:defRPr sz="1425" b="0">
                 <a:solidFill>
                   <a:srgbClr val="111111"/>
@@ -8486,6 +8812,7 @@
               </a:defRPr>
             </a:lvl7pPr>
             <a:lvl8pPr>
+              <a:buNone/>
               <a:defRPr sz="1425" b="0">
                 <a:solidFill>
                   <a:srgbClr val="111111"/>
@@ -8496,6 +8823,7 @@
               </a:defRPr>
             </a:lvl8pPr>
             <a:lvl9pPr>
+              <a:buNone/>
               <a:defRPr sz="1425" b="0">
                 <a:solidFill>
                   <a:srgbClr val="111111"/>
@@ -8508,6 +8836,7 @@
           </a:lstStyle>
           <a:p xmlns:a="http://schemas.openxmlformats.org/drawingml/2006/main">
             <a:pPr>
+              <a:buNone/>
               <a:defRPr sz="1425" b="0">
                 <a:solidFill>
                   <a:srgbClr val="111111"/>
@@ -8531,6 +8860,7 @@
           </a:p>
           <a:p xmlns:a="http://schemas.openxmlformats.org/drawingml/2006/main">
             <a:pPr>
+              <a:buNone/>
               <a:defRPr sz="1425" b="0">
                 <a:solidFill>
                   <a:srgbClr val="111111"/>
@@ -8631,6 +8961,7 @@
               </a:defRPr>
             </a:defPPr>
             <a:lvl1pPr>
+              <a:buNone/>
               <a:defRPr sz="1800" b="1">
                 <a:solidFill>
                   <a:srgbClr val="111111"/>
@@ -8641,6 +8972,7 @@
               </a:defRPr>
             </a:lvl1pPr>
             <a:lvl2pPr>
+              <a:buNone/>
               <a:defRPr sz="1800" b="1">
                 <a:solidFill>
                   <a:srgbClr val="111111"/>
@@ -8651,6 +8983,7 @@
               </a:defRPr>
             </a:lvl2pPr>
             <a:lvl3pPr>
+              <a:buNone/>
               <a:defRPr sz="1800" b="1">
                 <a:solidFill>
                   <a:srgbClr val="111111"/>
@@ -8661,6 +8994,7 @@
               </a:defRPr>
             </a:lvl3pPr>
             <a:lvl4pPr>
+              <a:buNone/>
               <a:defRPr sz="1800" b="1">
                 <a:solidFill>
                   <a:srgbClr val="111111"/>
@@ -8671,6 +9005,7 @@
               </a:defRPr>
             </a:lvl4pPr>
             <a:lvl5pPr>
+              <a:buNone/>
               <a:defRPr sz="1800" b="1">
                 <a:solidFill>
                   <a:srgbClr val="111111"/>
@@ -8681,6 +9016,7 @@
               </a:defRPr>
             </a:lvl5pPr>
             <a:lvl6pPr>
+              <a:buNone/>
               <a:defRPr sz="1800" b="1">
                 <a:solidFill>
                   <a:srgbClr val="111111"/>
@@ -8691,6 +9027,7 @@
               </a:defRPr>
             </a:lvl6pPr>
             <a:lvl7pPr>
+              <a:buNone/>
               <a:defRPr sz="1800" b="1">
                 <a:solidFill>
                   <a:srgbClr val="111111"/>
@@ -8701,6 +9038,7 @@
               </a:defRPr>
             </a:lvl7pPr>
             <a:lvl8pPr>
+              <a:buNone/>
               <a:defRPr sz="1800" b="1">
                 <a:solidFill>
                   <a:srgbClr val="111111"/>
@@ -8711,6 +9049,7 @@
               </a:defRPr>
             </a:lvl8pPr>
             <a:lvl9pPr>
+              <a:buNone/>
               <a:defRPr sz="1800" b="1">
                 <a:solidFill>
                   <a:srgbClr val="111111"/>
@@ -8723,6 +9062,7 @@
           </a:lstStyle>
           <a:p xmlns:a="http://schemas.openxmlformats.org/drawingml/2006/main">
             <a:pPr>
+              <a:buNone/>
               <a:defRPr sz="1800" b="1">
                 <a:solidFill>
                   <a:srgbClr val="111111"/>
@@ -8790,6 +9130,7 @@
               </a:defRPr>
             </a:defPPr>
             <a:lvl1pPr>
+              <a:buNone/>
               <a:defRPr sz="1425" b="0">
                 <a:solidFill>
                   <a:srgbClr val="111111"/>
@@ -8800,6 +9141,7 @@
               </a:defRPr>
             </a:lvl1pPr>
             <a:lvl2pPr>
+              <a:buNone/>
               <a:defRPr sz="1425" b="0">
                 <a:solidFill>
                   <a:srgbClr val="111111"/>
@@ -8810,6 +9152,7 @@
               </a:defRPr>
             </a:lvl2pPr>
             <a:lvl3pPr>
+              <a:buNone/>
               <a:defRPr sz="1425" b="0">
                 <a:solidFill>
                   <a:srgbClr val="111111"/>
@@ -8820,6 +9163,7 @@
               </a:defRPr>
             </a:lvl3pPr>
             <a:lvl4pPr>
+              <a:buNone/>
               <a:defRPr sz="1425" b="0">
                 <a:solidFill>
                   <a:srgbClr val="111111"/>
@@ -8830,6 +9174,7 @@
               </a:defRPr>
             </a:lvl4pPr>
             <a:lvl5pPr>
+              <a:buNone/>
               <a:defRPr sz="1425" b="0">
                 <a:solidFill>
                   <a:srgbClr val="111111"/>
@@ -8840,6 +9185,7 @@
               </a:defRPr>
             </a:lvl5pPr>
             <a:lvl6pPr>
+              <a:buNone/>
               <a:defRPr sz="1425" b="0">
                 <a:solidFill>
                   <a:srgbClr val="111111"/>
@@ -8850,6 +9196,7 @@
               </a:defRPr>
             </a:lvl6pPr>
             <a:lvl7pPr>
+              <a:buNone/>
               <a:defRPr sz="1425" b="0">
                 <a:solidFill>
                   <a:srgbClr val="111111"/>
@@ -8860,6 +9207,7 @@
               </a:defRPr>
             </a:lvl7pPr>
             <a:lvl8pPr>
+              <a:buNone/>
               <a:defRPr sz="1425" b="0">
                 <a:solidFill>
                   <a:srgbClr val="111111"/>
@@ -8870,6 +9218,7 @@
               </a:defRPr>
             </a:lvl8pPr>
             <a:lvl9pPr>
+              <a:buNone/>
               <a:defRPr sz="1425" b="0">
                 <a:solidFill>
                   <a:srgbClr val="111111"/>
@@ -8882,6 +9231,7 @@
           </a:lstStyle>
           <a:p xmlns:a="http://schemas.openxmlformats.org/drawingml/2006/main">
             <a:pPr>
+              <a:buNone/>
               <a:defRPr sz="1425" b="0">
                 <a:solidFill>
                   <a:srgbClr val="111111"/>
@@ -8905,6 +9255,7 @@
           </a:p>
           <a:p xmlns:a="http://schemas.openxmlformats.org/drawingml/2006/main">
             <a:pPr>
+              <a:buNone/>
               <a:defRPr sz="1425" b="0">
                 <a:solidFill>
                   <a:srgbClr val="111111"/>
@@ -9005,6 +9356,7 @@
               </a:defRPr>
             </a:defPPr>
             <a:lvl1pPr>
+              <a:buNone/>
               <a:defRPr sz="1800" b="1">
                 <a:solidFill>
                   <a:srgbClr val="111111"/>
@@ -9015,6 +9367,7 @@
               </a:defRPr>
             </a:lvl1pPr>
             <a:lvl2pPr>
+              <a:buNone/>
               <a:defRPr sz="1800" b="1">
                 <a:solidFill>
                   <a:srgbClr val="111111"/>
@@ -9025,6 +9378,7 @@
               </a:defRPr>
             </a:lvl2pPr>
             <a:lvl3pPr>
+              <a:buNone/>
               <a:defRPr sz="1800" b="1">
                 <a:solidFill>
                   <a:srgbClr val="111111"/>
@@ -9035,6 +9389,7 @@
               </a:defRPr>
             </a:lvl3pPr>
             <a:lvl4pPr>
+              <a:buNone/>
               <a:defRPr sz="1800" b="1">
                 <a:solidFill>
                   <a:srgbClr val="111111"/>
@@ -9045,6 +9400,7 @@
               </a:defRPr>
             </a:lvl4pPr>
             <a:lvl5pPr>
+              <a:buNone/>
               <a:defRPr sz="1800" b="1">
                 <a:solidFill>
                   <a:srgbClr val="111111"/>
@@ -9055,6 +9411,7 @@
               </a:defRPr>
             </a:lvl5pPr>
             <a:lvl6pPr>
+              <a:buNone/>
               <a:defRPr sz="1800" b="1">
                 <a:solidFill>
                   <a:srgbClr val="111111"/>
@@ -9065,6 +9422,7 @@
               </a:defRPr>
             </a:lvl6pPr>
             <a:lvl7pPr>
+              <a:buNone/>
               <a:defRPr sz="1800" b="1">
                 <a:solidFill>
                   <a:srgbClr val="111111"/>
@@ -9075,6 +9433,7 @@
               </a:defRPr>
             </a:lvl7pPr>
             <a:lvl8pPr>
+              <a:buNone/>
               <a:defRPr sz="1800" b="1">
                 <a:solidFill>
                   <a:srgbClr val="111111"/>
@@ -9085,6 +9444,7 @@
               </a:defRPr>
             </a:lvl8pPr>
             <a:lvl9pPr>
+              <a:buNone/>
               <a:defRPr sz="1800" b="1">
                 <a:solidFill>
                   <a:srgbClr val="111111"/>
@@ -9097,6 +9457,7 @@
           </a:lstStyle>
           <a:p xmlns:a="http://schemas.openxmlformats.org/drawingml/2006/main">
             <a:pPr>
+              <a:buNone/>
               <a:defRPr sz="1800" b="1">
                 <a:solidFill>
                   <a:srgbClr val="111111"/>
@@ -9164,6 +9525,7 @@
               </a:defRPr>
             </a:defPPr>
             <a:lvl1pPr>
+              <a:buNone/>
               <a:defRPr sz="1425" b="0">
                 <a:solidFill>
                   <a:srgbClr val="111111"/>
@@ -9174,6 +9536,7 @@
               </a:defRPr>
             </a:lvl1pPr>
             <a:lvl2pPr>
+              <a:buNone/>
               <a:defRPr sz="1425" b="0">
                 <a:solidFill>
                   <a:srgbClr val="111111"/>
@@ -9184,6 +9547,7 @@
               </a:defRPr>
             </a:lvl2pPr>
             <a:lvl3pPr>
+              <a:buNone/>
               <a:defRPr sz="1425" b="0">
                 <a:solidFill>
                   <a:srgbClr val="111111"/>
@@ -9194,6 +9558,7 @@
               </a:defRPr>
             </a:lvl3pPr>
             <a:lvl4pPr>
+              <a:buNone/>
               <a:defRPr sz="1425" b="0">
                 <a:solidFill>
                   <a:srgbClr val="111111"/>
@@ -9204,6 +9569,7 @@
               </a:defRPr>
             </a:lvl4pPr>
             <a:lvl5pPr>
+              <a:buNone/>
               <a:defRPr sz="1425" b="0">
                 <a:solidFill>
                   <a:srgbClr val="111111"/>
@@ -9214,6 +9580,7 @@
               </a:defRPr>
             </a:lvl5pPr>
             <a:lvl6pPr>
+              <a:buNone/>
               <a:defRPr sz="1425" b="0">
                 <a:solidFill>
                   <a:srgbClr val="111111"/>
@@ -9224,6 +9591,7 @@
               </a:defRPr>
             </a:lvl6pPr>
             <a:lvl7pPr>
+              <a:buNone/>
               <a:defRPr sz="1425" b="0">
                 <a:solidFill>
                   <a:srgbClr val="111111"/>
@@ -9234,6 +9602,7 @@
               </a:defRPr>
             </a:lvl7pPr>
             <a:lvl8pPr>
+              <a:buNone/>
               <a:defRPr sz="1425" b="0">
                 <a:solidFill>
                   <a:srgbClr val="111111"/>
@@ -9244,6 +9613,7 @@
               </a:defRPr>
             </a:lvl8pPr>
             <a:lvl9pPr>
+              <a:buNone/>
               <a:defRPr sz="1425" b="0">
                 <a:solidFill>
                   <a:srgbClr val="111111"/>
@@ -9256,6 +9626,7 @@
           </a:lstStyle>
           <a:p xmlns:a="http://schemas.openxmlformats.org/drawingml/2006/main">
             <a:pPr>
+              <a:buNone/>
               <a:defRPr sz="1425" b="0">
                 <a:solidFill>
                   <a:srgbClr val="111111"/>
@@ -9279,6 +9650,7 @@
           </a:p>
           <a:p xmlns:a="http://schemas.openxmlformats.org/drawingml/2006/main">
             <a:pPr>
+              <a:buNone/>
               <a:defRPr sz="1425" b="0">
                 <a:solidFill>
                   <a:srgbClr val="111111"/>
@@ -9379,6 +9751,7 @@
               </a:defRPr>
             </a:defPPr>
             <a:lvl1pPr>
+              <a:buNone/>
               <a:defRPr sz="1800" b="1">
                 <a:solidFill>
                   <a:srgbClr val="111111"/>
@@ -9389,6 +9762,7 @@
               </a:defRPr>
             </a:lvl1pPr>
             <a:lvl2pPr>
+              <a:buNone/>
               <a:defRPr sz="1800" b="1">
                 <a:solidFill>
                   <a:srgbClr val="111111"/>
@@ -9399,6 +9773,7 @@
               </a:defRPr>
             </a:lvl2pPr>
             <a:lvl3pPr>
+              <a:buNone/>
               <a:defRPr sz="1800" b="1">
                 <a:solidFill>
                   <a:srgbClr val="111111"/>
@@ -9409,6 +9784,7 @@
               </a:defRPr>
             </a:lvl3pPr>
             <a:lvl4pPr>
+              <a:buNone/>
               <a:defRPr sz="1800" b="1">
                 <a:solidFill>
                   <a:srgbClr val="111111"/>
@@ -9419,6 +9795,7 @@
               </a:defRPr>
             </a:lvl4pPr>
             <a:lvl5pPr>
+              <a:buNone/>
               <a:defRPr sz="1800" b="1">
                 <a:solidFill>
                   <a:srgbClr val="111111"/>
@@ -9429,6 +9806,7 @@
               </a:defRPr>
             </a:lvl5pPr>
             <a:lvl6pPr>
+              <a:buNone/>
               <a:defRPr sz="1800" b="1">
                 <a:solidFill>
                   <a:srgbClr val="111111"/>
@@ -9439,6 +9817,7 @@
               </a:defRPr>
             </a:lvl6pPr>
             <a:lvl7pPr>
+              <a:buNone/>
               <a:defRPr sz="1800" b="1">
                 <a:solidFill>
                   <a:srgbClr val="111111"/>
@@ -9449,6 +9828,7 @@
               </a:defRPr>
             </a:lvl7pPr>
             <a:lvl8pPr>
+              <a:buNone/>
               <a:defRPr sz="1800" b="1">
                 <a:solidFill>
                   <a:srgbClr val="111111"/>
@@ -9459,6 +9839,7 @@
               </a:defRPr>
             </a:lvl8pPr>
             <a:lvl9pPr>
+              <a:buNone/>
               <a:defRPr sz="1800" b="1">
                 <a:solidFill>
                   <a:srgbClr val="111111"/>
@@ -9471,6 +9852,7 @@
           </a:lstStyle>
           <a:p xmlns:a="http://schemas.openxmlformats.org/drawingml/2006/main">
             <a:pPr>
+              <a:buNone/>
               <a:defRPr sz="1800" b="1">
                 <a:solidFill>
                   <a:srgbClr val="111111"/>
@@ -9538,6 +9920,7 @@
               </a:defRPr>
             </a:defPPr>
             <a:lvl1pPr>
+              <a:buNone/>
               <a:defRPr sz="1425" b="0">
                 <a:solidFill>
                   <a:srgbClr val="111111"/>
@@ -9548,6 +9931,7 @@
               </a:defRPr>
             </a:lvl1pPr>
             <a:lvl2pPr>
+              <a:buNone/>
               <a:defRPr sz="1425" b="0">
                 <a:solidFill>
                   <a:srgbClr val="111111"/>
@@ -9558,6 +9942,7 @@
               </a:defRPr>
             </a:lvl2pPr>
             <a:lvl3pPr>
+              <a:buNone/>
               <a:defRPr sz="1425" b="0">
                 <a:solidFill>
                   <a:srgbClr val="111111"/>
@@ -9568,6 +9953,7 @@
               </a:defRPr>
             </a:lvl3pPr>
             <a:lvl4pPr>
+              <a:buNone/>
               <a:defRPr sz="1425" b="0">
                 <a:solidFill>
                   <a:srgbClr val="111111"/>
@@ -9578,6 +9964,7 @@
               </a:defRPr>
             </a:lvl4pPr>
             <a:lvl5pPr>
+              <a:buNone/>
               <a:defRPr sz="1425" b="0">
                 <a:solidFill>
                   <a:srgbClr val="111111"/>
@@ -9588,6 +9975,7 @@
               </a:defRPr>
             </a:lvl5pPr>
             <a:lvl6pPr>
+              <a:buNone/>
               <a:defRPr sz="1425" b="0">
                 <a:solidFill>
                   <a:srgbClr val="111111"/>
@@ -9598,6 +9986,7 @@
               </a:defRPr>
             </a:lvl6pPr>
             <a:lvl7pPr>
+              <a:buNone/>
               <a:defRPr sz="1425" b="0">
                 <a:solidFill>
                   <a:srgbClr val="111111"/>
@@ -9608,6 +9997,7 @@
               </a:defRPr>
             </a:lvl7pPr>
             <a:lvl8pPr>
+              <a:buNone/>
               <a:defRPr sz="1425" b="0">
                 <a:solidFill>
                   <a:srgbClr val="111111"/>
@@ -9618,6 +10008,7 @@
               </a:defRPr>
             </a:lvl8pPr>
             <a:lvl9pPr>
+              <a:buNone/>
               <a:defRPr sz="1425" b="0">
                 <a:solidFill>
                   <a:srgbClr val="111111"/>
@@ -9630,6 +10021,7 @@
           </a:lstStyle>
           <a:p xmlns:a="http://schemas.openxmlformats.org/drawingml/2006/main">
             <a:pPr>
+              <a:buNone/>
               <a:defRPr sz="1425" b="0">
                 <a:solidFill>
                   <a:srgbClr val="111111"/>
@@ -9653,6 +10045,7 @@
           </a:p>
           <a:p xmlns:a="http://schemas.openxmlformats.org/drawingml/2006/main">
             <a:pPr>
+              <a:buNone/>
               <a:defRPr sz="1425" b="0">
                 <a:solidFill>
                   <a:srgbClr val="111111"/>
@@ -9753,6 +10146,7 @@
               </a:defRPr>
             </a:defPPr>
             <a:lvl1pPr>
+              <a:buNone/>
               <a:defRPr sz="1650" b="1">
                 <a:solidFill>
                   <a:srgbClr val="111111"/>
@@ -9763,6 +10157,7 @@
               </a:defRPr>
             </a:lvl1pPr>
             <a:lvl2pPr>
+              <a:buNone/>
               <a:defRPr sz="1650" b="1">
                 <a:solidFill>
                   <a:srgbClr val="111111"/>
@@ -9773,6 +10168,7 @@
               </a:defRPr>
             </a:lvl2pPr>
             <a:lvl3pPr>
+              <a:buNone/>
               <a:defRPr sz="1650" b="1">
                 <a:solidFill>
                   <a:srgbClr val="111111"/>
@@ -9783,6 +10179,7 @@
               </a:defRPr>
             </a:lvl3pPr>
             <a:lvl4pPr>
+              <a:buNone/>
               <a:defRPr sz="1650" b="1">
                 <a:solidFill>
                   <a:srgbClr val="111111"/>
@@ -9793,6 +10190,7 @@
               </a:defRPr>
             </a:lvl4pPr>
             <a:lvl5pPr>
+              <a:buNone/>
               <a:defRPr sz="1650" b="1">
                 <a:solidFill>
                   <a:srgbClr val="111111"/>
@@ -9803,6 +10201,7 @@
               </a:defRPr>
             </a:lvl5pPr>
             <a:lvl6pPr>
+              <a:buNone/>
               <a:defRPr sz="1650" b="1">
                 <a:solidFill>
                   <a:srgbClr val="111111"/>
@@ -9813,6 +10212,7 @@
               </a:defRPr>
             </a:lvl6pPr>
             <a:lvl7pPr>
+              <a:buNone/>
               <a:defRPr sz="1650" b="1">
                 <a:solidFill>
                   <a:srgbClr val="111111"/>
@@ -9823,6 +10223,7 @@
               </a:defRPr>
             </a:lvl7pPr>
             <a:lvl8pPr>
+              <a:buNone/>
               <a:defRPr sz="1650" b="1">
                 <a:solidFill>
                   <a:srgbClr val="111111"/>
@@ -9833,6 +10234,7 @@
               </a:defRPr>
             </a:lvl8pPr>
             <a:lvl9pPr>
+              <a:buNone/>
               <a:defRPr sz="1650" b="1">
                 <a:solidFill>
                   <a:srgbClr val="111111"/>
@@ -9845,6 +10247,7 @@
           </a:lstStyle>
           <a:p xmlns:a="http://schemas.openxmlformats.org/drawingml/2006/main">
             <a:pPr>
+              <a:buNone/>
               <a:defRPr sz="1650" b="1">
                 <a:solidFill>
                   <a:srgbClr val="111111"/>
@@ -9912,6 +10315,7 @@
               </a:defRPr>
             </a:defPPr>
             <a:lvl1pPr>
+              <a:buNone/>
               <a:defRPr sz="1425" b="0">
                 <a:solidFill>
                   <a:srgbClr val="111111"/>
@@ -9922,6 +10326,7 @@
               </a:defRPr>
             </a:lvl1pPr>
             <a:lvl2pPr>
+              <a:buNone/>
               <a:defRPr sz="1425" b="0">
                 <a:solidFill>
                   <a:srgbClr val="111111"/>
@@ -9932,6 +10337,7 @@
               </a:defRPr>
             </a:lvl2pPr>
             <a:lvl3pPr>
+              <a:buNone/>
               <a:defRPr sz="1425" b="0">
                 <a:solidFill>
                   <a:srgbClr val="111111"/>
@@ -9942,6 +10348,7 @@
               </a:defRPr>
             </a:lvl3pPr>
             <a:lvl4pPr>
+              <a:buNone/>
               <a:defRPr sz="1425" b="0">
                 <a:solidFill>
                   <a:srgbClr val="111111"/>
@@ -9952,6 +10359,7 @@
               </a:defRPr>
             </a:lvl4pPr>
             <a:lvl5pPr>
+              <a:buNone/>
               <a:defRPr sz="1425" b="0">
                 <a:solidFill>
                   <a:srgbClr val="111111"/>
@@ -9962,6 +10370,7 @@
               </a:defRPr>
             </a:lvl5pPr>
             <a:lvl6pPr>
+              <a:buNone/>
               <a:defRPr sz="1425" b="0">
                 <a:solidFill>
                   <a:srgbClr val="111111"/>
@@ -9972,6 +10381,7 @@
               </a:defRPr>
             </a:lvl6pPr>
             <a:lvl7pPr>
+              <a:buNone/>
               <a:defRPr sz="1425" b="0">
                 <a:solidFill>
                   <a:srgbClr val="111111"/>
@@ -9982,6 +10392,7 @@
               </a:defRPr>
             </a:lvl7pPr>
             <a:lvl8pPr>
+              <a:buNone/>
               <a:defRPr sz="1425" b="0">
                 <a:solidFill>
                   <a:srgbClr val="111111"/>
@@ -9992,6 +10403,7 @@
               </a:defRPr>
             </a:lvl8pPr>
             <a:lvl9pPr>
+              <a:buNone/>
               <a:defRPr sz="1425" b="0">
                 <a:solidFill>
                   <a:srgbClr val="111111"/>
@@ -10004,6 +10416,7 @@
           </a:lstStyle>
           <a:p xmlns:a="http://schemas.openxmlformats.org/drawingml/2006/main">
             <a:pPr>
+              <a:buNone/>
               <a:defRPr sz="1425" b="0">
                 <a:solidFill>
                   <a:srgbClr val="111111"/>
@@ -10027,6 +10440,7 @@
           </a:p>
           <a:p xmlns:a="http://schemas.openxmlformats.org/drawingml/2006/main">
             <a:pPr>
+              <a:buNone/>
               <a:defRPr sz="1425" b="0">
                 <a:solidFill>
                   <a:srgbClr val="111111"/>
@@ -10280,6 +10694,7 @@
               </a:defRPr>
             </a:defPPr>
             <a:lvl1pPr>
+              <a:buNone/>
               <a:defRPr sz="1125" b="1">
                 <a:solidFill>
                   <a:srgbClr val="3A3A3A"/>
@@ -10290,6 +10705,7 @@
               </a:defRPr>
             </a:lvl1pPr>
             <a:lvl2pPr>
+              <a:buNone/>
               <a:defRPr sz="1125" b="1">
                 <a:solidFill>
                   <a:srgbClr val="3A3A3A"/>
@@ -10300,6 +10716,7 @@
               </a:defRPr>
             </a:lvl2pPr>
             <a:lvl3pPr>
+              <a:buNone/>
               <a:defRPr sz="1125" b="1">
                 <a:solidFill>
                   <a:srgbClr val="3A3A3A"/>
@@ -10310,6 +10727,7 @@
               </a:defRPr>
             </a:lvl3pPr>
             <a:lvl4pPr>
+              <a:buNone/>
               <a:defRPr sz="1125" b="1">
                 <a:solidFill>
                   <a:srgbClr val="3A3A3A"/>
@@ -10320,6 +10738,7 @@
               </a:defRPr>
             </a:lvl4pPr>
             <a:lvl5pPr>
+              <a:buNone/>
               <a:defRPr sz="1125" b="1">
                 <a:solidFill>
                   <a:srgbClr val="3A3A3A"/>
@@ -10330,6 +10749,7 @@
               </a:defRPr>
             </a:lvl5pPr>
             <a:lvl6pPr>
+              <a:buNone/>
               <a:defRPr sz="1125" b="1">
                 <a:solidFill>
                   <a:srgbClr val="3A3A3A"/>
@@ -10340,6 +10760,7 @@
               </a:defRPr>
             </a:lvl6pPr>
             <a:lvl7pPr>
+              <a:buNone/>
               <a:defRPr sz="1125" b="1">
                 <a:solidFill>
                   <a:srgbClr val="3A3A3A"/>
@@ -10350,6 +10771,7 @@
               </a:defRPr>
             </a:lvl7pPr>
             <a:lvl8pPr>
+              <a:buNone/>
               <a:defRPr sz="1125" b="1">
                 <a:solidFill>
                   <a:srgbClr val="3A3A3A"/>
@@ -10360,6 +10782,7 @@
               </a:defRPr>
             </a:lvl8pPr>
             <a:lvl9pPr>
+              <a:buNone/>
               <a:defRPr sz="1125" b="1">
                 <a:solidFill>
                   <a:srgbClr val="3A3A3A"/>
@@ -10372,6 +10795,7 @@
           </a:lstStyle>
           <a:p xmlns:a="http://schemas.openxmlformats.org/drawingml/2006/main">
             <a:pPr>
+              <a:buNone/>
               <a:defRPr sz="1125" b="1">
                 <a:solidFill>
                   <a:srgbClr val="3A3A3A"/>
@@ -10439,6 +10863,7 @@
               </a:defRPr>
             </a:defPPr>
             <a:lvl1pPr>
+              <a:buNone/>
               <a:defRPr sz="1125" b="1">
                 <a:solidFill>
                   <a:srgbClr val="3A3A3A"/>
@@ -10449,6 +10874,7 @@
               </a:defRPr>
             </a:lvl1pPr>
             <a:lvl2pPr>
+              <a:buNone/>
               <a:defRPr sz="1125" b="1">
                 <a:solidFill>
                   <a:srgbClr val="3A3A3A"/>
@@ -10459,6 +10885,7 @@
               </a:defRPr>
             </a:lvl2pPr>
             <a:lvl3pPr>
+              <a:buNone/>
               <a:defRPr sz="1125" b="1">
                 <a:solidFill>
                   <a:srgbClr val="3A3A3A"/>
@@ -10469,6 +10896,7 @@
               </a:defRPr>
             </a:lvl3pPr>
             <a:lvl4pPr>
+              <a:buNone/>
               <a:defRPr sz="1125" b="1">
                 <a:solidFill>
                   <a:srgbClr val="3A3A3A"/>
@@ -10479,6 +10907,7 @@
               </a:defRPr>
             </a:lvl4pPr>
             <a:lvl5pPr>
+              <a:buNone/>
               <a:defRPr sz="1125" b="1">
                 <a:solidFill>
                   <a:srgbClr val="3A3A3A"/>
@@ -10489,6 +10918,7 @@
               </a:defRPr>
             </a:lvl5pPr>
             <a:lvl6pPr>
+              <a:buNone/>
               <a:defRPr sz="1125" b="1">
                 <a:solidFill>
                   <a:srgbClr val="3A3A3A"/>
@@ -10499,6 +10929,7 @@
               </a:defRPr>
             </a:lvl6pPr>
             <a:lvl7pPr>
+              <a:buNone/>
               <a:defRPr sz="1125" b="1">
                 <a:solidFill>
                   <a:srgbClr val="3A3A3A"/>
@@ -10509,6 +10940,7 @@
               </a:defRPr>
             </a:lvl7pPr>
             <a:lvl8pPr>
+              <a:buNone/>
               <a:defRPr sz="1125" b="1">
                 <a:solidFill>
                   <a:srgbClr val="3A3A3A"/>
@@ -10519,6 +10951,7 @@
               </a:defRPr>
             </a:lvl8pPr>
             <a:lvl9pPr>
+              <a:buNone/>
               <a:defRPr sz="1125" b="1">
                 <a:solidFill>
                   <a:srgbClr val="3A3A3A"/>
@@ -10531,6 +10964,7 @@
           </a:lstStyle>
           <a:p xmlns:a="http://schemas.openxmlformats.org/drawingml/2006/main">
             <a:pPr>
+              <a:buNone/>
               <a:defRPr sz="1125" b="1">
                 <a:solidFill>
                   <a:srgbClr val="3A3A3A"/>
@@ -10598,6 +11032,7 @@
               </a:defRPr>
             </a:defPPr>
             <a:lvl1pPr>
+              <a:buNone/>
               <a:defRPr sz="1125" b="1">
                 <a:solidFill>
                   <a:srgbClr val="3A3A3A"/>
@@ -10608,6 +11043,7 @@
               </a:defRPr>
             </a:lvl1pPr>
             <a:lvl2pPr>
+              <a:buNone/>
               <a:defRPr sz="1125" b="1">
                 <a:solidFill>
                   <a:srgbClr val="3A3A3A"/>
@@ -10618,6 +11054,7 @@
               </a:defRPr>
             </a:lvl2pPr>
             <a:lvl3pPr>
+              <a:buNone/>
               <a:defRPr sz="1125" b="1">
                 <a:solidFill>
                   <a:srgbClr val="3A3A3A"/>
@@ -10628,6 +11065,7 @@
               </a:defRPr>
             </a:lvl3pPr>
             <a:lvl4pPr>
+              <a:buNone/>
               <a:defRPr sz="1125" b="1">
                 <a:solidFill>
                   <a:srgbClr val="3A3A3A"/>
@@ -10638,6 +11076,7 @@
               </a:defRPr>
             </a:lvl4pPr>
             <a:lvl5pPr>
+              <a:buNone/>
               <a:defRPr sz="1125" b="1">
                 <a:solidFill>
                   <a:srgbClr val="3A3A3A"/>
@@ -10648,6 +11087,7 @@
               </a:defRPr>
             </a:lvl5pPr>
             <a:lvl6pPr>
+              <a:buNone/>
               <a:defRPr sz="1125" b="1">
                 <a:solidFill>
                   <a:srgbClr val="3A3A3A"/>
@@ -10658,6 +11098,7 @@
               </a:defRPr>
             </a:lvl6pPr>
             <a:lvl7pPr>
+              <a:buNone/>
               <a:defRPr sz="1125" b="1">
                 <a:solidFill>
                   <a:srgbClr val="3A3A3A"/>
@@ -10668,6 +11109,7 @@
               </a:defRPr>
             </a:lvl7pPr>
             <a:lvl8pPr>
+              <a:buNone/>
               <a:defRPr sz="1125" b="1">
                 <a:solidFill>
                   <a:srgbClr val="3A3A3A"/>
@@ -10678,6 +11120,7 @@
               </a:defRPr>
             </a:lvl8pPr>
             <a:lvl9pPr>
+              <a:buNone/>
               <a:defRPr sz="1125" b="1">
                 <a:solidFill>
                   <a:srgbClr val="3A3A3A"/>
@@ -10690,6 +11133,7 @@
           </a:lstStyle>
           <a:p xmlns:a="http://schemas.openxmlformats.org/drawingml/2006/main">
             <a:pPr>
+              <a:buNone/>
               <a:defRPr sz="1125" b="1">
                 <a:solidFill>
                   <a:srgbClr val="3A3A3A"/>
@@ -10757,6 +11201,7 @@
               </a:defRPr>
             </a:defPPr>
             <a:lvl1pPr>
+              <a:buNone/>
               <a:defRPr sz="1125" b="1">
                 <a:solidFill>
                   <a:srgbClr val="3A3A3A"/>
@@ -10767,6 +11212,7 @@
               </a:defRPr>
             </a:lvl1pPr>
             <a:lvl2pPr>
+              <a:buNone/>
               <a:defRPr sz="1125" b="1">
                 <a:solidFill>
                   <a:srgbClr val="3A3A3A"/>
@@ -10777,6 +11223,7 @@
               </a:defRPr>
             </a:lvl2pPr>
             <a:lvl3pPr>
+              <a:buNone/>
               <a:defRPr sz="1125" b="1">
                 <a:solidFill>
                   <a:srgbClr val="3A3A3A"/>
@@ -10787,6 +11234,7 @@
               </a:defRPr>
             </a:lvl3pPr>
             <a:lvl4pPr>
+              <a:buNone/>
               <a:defRPr sz="1125" b="1">
                 <a:solidFill>
                   <a:srgbClr val="3A3A3A"/>
@@ -10797,6 +11245,7 @@
               </a:defRPr>
             </a:lvl4pPr>
             <a:lvl5pPr>
+              <a:buNone/>
               <a:defRPr sz="1125" b="1">
                 <a:solidFill>
                   <a:srgbClr val="3A3A3A"/>
@@ -10807,6 +11256,7 @@
               </a:defRPr>
             </a:lvl5pPr>
             <a:lvl6pPr>
+              <a:buNone/>
               <a:defRPr sz="1125" b="1">
                 <a:solidFill>
                   <a:srgbClr val="3A3A3A"/>
@@ -10817,6 +11267,7 @@
               </a:defRPr>
             </a:lvl6pPr>
             <a:lvl7pPr>
+              <a:buNone/>
               <a:defRPr sz="1125" b="1">
                 <a:solidFill>
                   <a:srgbClr val="3A3A3A"/>
@@ -10827,6 +11278,7 @@
               </a:defRPr>
             </a:lvl7pPr>
             <a:lvl8pPr>
+              <a:buNone/>
               <a:defRPr sz="1125" b="1">
                 <a:solidFill>
                   <a:srgbClr val="3A3A3A"/>
@@ -10837,6 +11289,7 @@
               </a:defRPr>
             </a:lvl8pPr>
             <a:lvl9pPr>
+              <a:buNone/>
               <a:defRPr sz="1125" b="1">
                 <a:solidFill>
                   <a:srgbClr val="3A3A3A"/>
@@ -10849,6 +11302,7 @@
           </a:lstStyle>
           <a:p xmlns:a="http://schemas.openxmlformats.org/drawingml/2006/main">
             <a:pPr>
+              <a:buNone/>
               <a:defRPr sz="1125" b="1">
                 <a:solidFill>
                   <a:srgbClr val="3A3A3A"/>
@@ -10916,6 +11370,7 @@
               </a:defRPr>
             </a:defPPr>
             <a:lvl1pPr>
+              <a:buNone/>
               <a:defRPr sz="1275" b="0">
                 <a:solidFill>
                   <a:srgbClr val="3A3A3A"/>
@@ -10926,6 +11381,7 @@
               </a:defRPr>
             </a:lvl1pPr>
             <a:lvl2pPr>
+              <a:buNone/>
               <a:defRPr sz="1275" b="0">
                 <a:solidFill>
                   <a:srgbClr val="3A3A3A"/>
@@ -10936,6 +11392,7 @@
               </a:defRPr>
             </a:lvl2pPr>
             <a:lvl3pPr>
+              <a:buNone/>
               <a:defRPr sz="1275" b="0">
                 <a:solidFill>
                   <a:srgbClr val="3A3A3A"/>
@@ -10946,6 +11403,7 @@
               </a:defRPr>
             </a:lvl3pPr>
             <a:lvl4pPr>
+              <a:buNone/>
               <a:defRPr sz="1275" b="0">
                 <a:solidFill>
                   <a:srgbClr val="3A3A3A"/>
@@ -10956,6 +11414,7 @@
               </a:defRPr>
             </a:lvl4pPr>
             <a:lvl5pPr>
+              <a:buNone/>
               <a:defRPr sz="1275" b="0">
                 <a:solidFill>
                   <a:srgbClr val="3A3A3A"/>
@@ -10966,6 +11425,7 @@
               </a:defRPr>
             </a:lvl5pPr>
             <a:lvl6pPr>
+              <a:buNone/>
               <a:defRPr sz="1275" b="0">
                 <a:solidFill>
                   <a:srgbClr val="3A3A3A"/>
@@ -10976,6 +11436,7 @@
               </a:defRPr>
             </a:lvl6pPr>
             <a:lvl7pPr>
+              <a:buNone/>
               <a:defRPr sz="1275" b="0">
                 <a:solidFill>
                   <a:srgbClr val="3A3A3A"/>
@@ -10986,6 +11447,7 @@
               </a:defRPr>
             </a:lvl7pPr>
             <a:lvl8pPr>
+              <a:buNone/>
               <a:defRPr sz="1275" b="0">
                 <a:solidFill>
                   <a:srgbClr val="3A3A3A"/>
@@ -10996,6 +11458,7 @@
               </a:defRPr>
             </a:lvl8pPr>
             <a:lvl9pPr>
+              <a:buNone/>
               <a:defRPr sz="1275" b="0">
                 <a:solidFill>
                   <a:srgbClr val="3A3A3A"/>
@@ -11008,6 +11471,7 @@
           </a:lstStyle>
           <a:p xmlns:a="http://schemas.openxmlformats.org/drawingml/2006/main">
             <a:pPr>
+              <a:buNone/>
               <a:defRPr sz="1275" b="0">
                 <a:solidFill>
                   <a:srgbClr val="3A3A3A"/>
@@ -11135,6 +11599,7 @@
               </a:defRPr>
             </a:defPPr>
             <a:lvl1pPr>
+              <a:buNone/>
               <a:defRPr sz="2850" b="1">
                 <a:solidFill>
                   <a:srgbClr val="111111"/>
@@ -11145,6 +11610,7 @@
               </a:defRPr>
             </a:lvl1pPr>
             <a:lvl2pPr>
+              <a:buNone/>
               <a:defRPr sz="2850" b="1">
                 <a:solidFill>
                   <a:srgbClr val="111111"/>
@@ -11155,6 +11621,7 @@
               </a:defRPr>
             </a:lvl2pPr>
             <a:lvl3pPr>
+              <a:buNone/>
               <a:defRPr sz="2850" b="1">
                 <a:solidFill>
                   <a:srgbClr val="111111"/>
@@ -11165,6 +11632,7 @@
               </a:defRPr>
             </a:lvl3pPr>
             <a:lvl4pPr>
+              <a:buNone/>
               <a:defRPr sz="2850" b="1">
                 <a:solidFill>
                   <a:srgbClr val="111111"/>
@@ -11175,6 +11643,7 @@
               </a:defRPr>
             </a:lvl4pPr>
             <a:lvl5pPr>
+              <a:buNone/>
               <a:defRPr sz="2850" b="1">
                 <a:solidFill>
                   <a:srgbClr val="111111"/>
@@ -11185,6 +11654,7 @@
               </a:defRPr>
             </a:lvl5pPr>
             <a:lvl6pPr>
+              <a:buNone/>
               <a:defRPr sz="2850" b="1">
                 <a:solidFill>
                   <a:srgbClr val="111111"/>
@@ -11195,6 +11665,7 @@
               </a:defRPr>
             </a:lvl6pPr>
             <a:lvl7pPr>
+              <a:buNone/>
               <a:defRPr sz="2850" b="1">
                 <a:solidFill>
                   <a:srgbClr val="111111"/>
@@ -11205,6 +11676,7 @@
               </a:defRPr>
             </a:lvl7pPr>
             <a:lvl8pPr>
+              <a:buNone/>
               <a:defRPr sz="2850" b="1">
                 <a:solidFill>
                   <a:srgbClr val="111111"/>
@@ -11215,6 +11687,7 @@
               </a:defRPr>
             </a:lvl8pPr>
             <a:lvl9pPr>
+              <a:buNone/>
               <a:defRPr sz="2850" b="1">
                 <a:solidFill>
                   <a:srgbClr val="111111"/>
@@ -11227,6 +11700,7 @@
           </a:lstStyle>
           <a:p xmlns:a="http://schemas.openxmlformats.org/drawingml/2006/main">
             <a:pPr>
+              <a:buNone/>
               <a:defRPr sz="2850" b="1">
                 <a:solidFill>
                   <a:srgbClr val="111111"/>
@@ -11325,6 +11799,7 @@
               </a:defRPr>
             </a:defPPr>
             <a:lvl1pPr>
+              <a:buNone/>
               <a:defRPr sz="1050" b="1">
                 <a:solidFill>
                   <a:srgbClr val="3A3A3A"/>
@@ -11335,6 +11810,7 @@
               </a:defRPr>
             </a:lvl1pPr>
             <a:lvl2pPr>
+              <a:buNone/>
               <a:defRPr sz="1050" b="1">
                 <a:solidFill>
                   <a:srgbClr val="3A3A3A"/>
@@ -11345,6 +11821,7 @@
               </a:defRPr>
             </a:lvl2pPr>
             <a:lvl3pPr>
+              <a:buNone/>
               <a:defRPr sz="1050" b="1">
                 <a:solidFill>
                   <a:srgbClr val="3A3A3A"/>
@@ -11355,6 +11832,7 @@
               </a:defRPr>
             </a:lvl3pPr>
             <a:lvl4pPr>
+              <a:buNone/>
               <a:defRPr sz="1050" b="1">
                 <a:solidFill>
                   <a:srgbClr val="3A3A3A"/>
@@ -11365,6 +11843,7 @@
               </a:defRPr>
             </a:lvl4pPr>
             <a:lvl5pPr>
+              <a:buNone/>
               <a:defRPr sz="1050" b="1">
                 <a:solidFill>
                   <a:srgbClr val="3A3A3A"/>
@@ -11375,6 +11854,7 @@
               </a:defRPr>
             </a:lvl5pPr>
             <a:lvl6pPr>
+              <a:buNone/>
               <a:defRPr sz="1050" b="1">
                 <a:solidFill>
                   <a:srgbClr val="3A3A3A"/>
@@ -11385,6 +11865,7 @@
               </a:defRPr>
             </a:lvl6pPr>
             <a:lvl7pPr>
+              <a:buNone/>
               <a:defRPr sz="1050" b="1">
                 <a:solidFill>
                   <a:srgbClr val="3A3A3A"/>
@@ -11395,6 +11876,7 @@
               </a:defRPr>
             </a:lvl7pPr>
             <a:lvl8pPr>
+              <a:buNone/>
               <a:defRPr sz="1050" b="1">
                 <a:solidFill>
                   <a:srgbClr val="3A3A3A"/>
@@ -11405,6 +11887,7 @@
               </a:defRPr>
             </a:lvl8pPr>
             <a:lvl9pPr>
+              <a:buNone/>
               <a:defRPr sz="1050" b="1">
                 <a:solidFill>
                   <a:srgbClr val="3A3A3A"/>
@@ -11417,6 +11900,7 @@
           </a:lstStyle>
           <a:p xmlns:a="http://schemas.openxmlformats.org/drawingml/2006/main">
             <a:pPr>
+              <a:buNone/>
               <a:defRPr sz="1050" b="1">
                 <a:solidFill>
                   <a:srgbClr val="3A3A3A"/>
@@ -11517,6 +12001,7 @@
               </a:defRPr>
             </a:defPPr>
             <a:lvl1pPr>
+              <a:buNone/>
               <a:defRPr sz="2250" b="1">
                 <a:solidFill>
                   <a:srgbClr val="FFFFFF"/>
@@ -11527,6 +12012,7 @@
               </a:defRPr>
             </a:lvl1pPr>
             <a:lvl2pPr>
+              <a:buNone/>
               <a:defRPr sz="2250" b="1">
                 <a:solidFill>
                   <a:srgbClr val="FFFFFF"/>
@@ -11537,6 +12023,7 @@
               </a:defRPr>
             </a:lvl2pPr>
             <a:lvl3pPr>
+              <a:buNone/>
               <a:defRPr sz="2250" b="1">
                 <a:solidFill>
                   <a:srgbClr val="FFFFFF"/>
@@ -11547,6 +12034,7 @@
               </a:defRPr>
             </a:lvl3pPr>
             <a:lvl4pPr>
+              <a:buNone/>
               <a:defRPr sz="2250" b="1">
                 <a:solidFill>
                   <a:srgbClr val="FFFFFF"/>
@@ -11557,6 +12045,7 @@
               </a:defRPr>
             </a:lvl4pPr>
             <a:lvl5pPr>
+              <a:buNone/>
               <a:defRPr sz="2250" b="1">
                 <a:solidFill>
                   <a:srgbClr val="FFFFFF"/>
@@ -11567,6 +12056,7 @@
               </a:defRPr>
             </a:lvl5pPr>
             <a:lvl6pPr>
+              <a:buNone/>
               <a:defRPr sz="2250" b="1">
                 <a:solidFill>
                   <a:srgbClr val="FFFFFF"/>
@@ -11577,6 +12067,7 @@
               </a:defRPr>
             </a:lvl6pPr>
             <a:lvl7pPr>
+              <a:buNone/>
               <a:defRPr sz="2250" b="1">
                 <a:solidFill>
                   <a:srgbClr val="FFFFFF"/>
@@ -11587,6 +12078,7 @@
               </a:defRPr>
             </a:lvl7pPr>
             <a:lvl8pPr>
+              <a:buNone/>
               <a:defRPr sz="2250" b="1">
                 <a:solidFill>
                   <a:srgbClr val="FFFFFF"/>
@@ -11597,6 +12089,7 @@
               </a:defRPr>
             </a:lvl8pPr>
             <a:lvl9pPr>
+              <a:buNone/>
               <a:defRPr sz="2250" b="1">
                 <a:solidFill>
                   <a:srgbClr val="FFFFFF"/>
@@ -11609,6 +12102,7 @@
           </a:lstStyle>
           <a:p xmlns:a="http://schemas.openxmlformats.org/drawingml/2006/main">
             <a:pPr>
+              <a:buNone/>
               <a:defRPr sz="2250" b="1">
                 <a:solidFill>
                   <a:srgbClr val="FFFFFF"/>
@@ -11676,6 +12170,7 @@
               </a:defRPr>
             </a:defPPr>
             <a:lvl1pPr>
+              <a:buNone/>
               <a:defRPr sz="1800" b="1">
                 <a:solidFill>
                   <a:srgbClr val="111111"/>
@@ -11686,6 +12181,7 @@
               </a:defRPr>
             </a:lvl1pPr>
             <a:lvl2pPr>
+              <a:buNone/>
               <a:defRPr sz="1800" b="1">
                 <a:solidFill>
                   <a:srgbClr val="111111"/>
@@ -11696,6 +12192,7 @@
               </a:defRPr>
             </a:lvl2pPr>
             <a:lvl3pPr>
+              <a:buNone/>
               <a:defRPr sz="1800" b="1">
                 <a:solidFill>
                   <a:srgbClr val="111111"/>
@@ -11706,6 +12203,7 @@
               </a:defRPr>
             </a:lvl3pPr>
             <a:lvl4pPr>
+              <a:buNone/>
               <a:defRPr sz="1800" b="1">
                 <a:solidFill>
                   <a:srgbClr val="111111"/>
@@ -11716,6 +12214,7 @@
               </a:defRPr>
             </a:lvl4pPr>
             <a:lvl5pPr>
+              <a:buNone/>
               <a:defRPr sz="1800" b="1">
                 <a:solidFill>
                   <a:srgbClr val="111111"/>
@@ -11726,6 +12225,7 @@
               </a:defRPr>
             </a:lvl5pPr>
             <a:lvl6pPr>
+              <a:buNone/>
               <a:defRPr sz="1800" b="1">
                 <a:solidFill>
                   <a:srgbClr val="111111"/>
@@ -11736,6 +12236,7 @@
               </a:defRPr>
             </a:lvl6pPr>
             <a:lvl7pPr>
+              <a:buNone/>
               <a:defRPr sz="1800" b="1">
                 <a:solidFill>
                   <a:srgbClr val="111111"/>
@@ -11746,6 +12247,7 @@
               </a:defRPr>
             </a:lvl7pPr>
             <a:lvl8pPr>
+              <a:buNone/>
               <a:defRPr sz="1800" b="1">
                 <a:solidFill>
                   <a:srgbClr val="111111"/>
@@ -11756,6 +12258,7 @@
               </a:defRPr>
             </a:lvl8pPr>
             <a:lvl9pPr>
+              <a:buNone/>
               <a:defRPr sz="1800" b="1">
                 <a:solidFill>
                   <a:srgbClr val="111111"/>
@@ -11768,6 +12271,7 @@
           </a:lstStyle>
           <a:p xmlns:a="http://schemas.openxmlformats.org/drawingml/2006/main">
             <a:pPr>
+              <a:buNone/>
               <a:defRPr sz="1800" b="1">
                 <a:solidFill>
                   <a:srgbClr val="111111"/>
@@ -11835,6 +12339,7 @@
               </a:defRPr>
             </a:defPPr>
             <a:lvl1pPr>
+              <a:buNone/>
               <a:defRPr sz="1500" b="0">
                 <a:solidFill>
                   <a:srgbClr val="3A3A3A"/>
@@ -11845,6 +12350,7 @@
               </a:defRPr>
             </a:lvl1pPr>
             <a:lvl2pPr>
+              <a:buNone/>
               <a:defRPr sz="1500" b="0">
                 <a:solidFill>
                   <a:srgbClr val="3A3A3A"/>
@@ -11855,6 +12361,7 @@
               </a:defRPr>
             </a:lvl2pPr>
             <a:lvl3pPr>
+              <a:buNone/>
               <a:defRPr sz="1500" b="0">
                 <a:solidFill>
                   <a:srgbClr val="3A3A3A"/>
@@ -11865,6 +12372,7 @@
               </a:defRPr>
             </a:lvl3pPr>
             <a:lvl4pPr>
+              <a:buNone/>
               <a:defRPr sz="1500" b="0">
                 <a:solidFill>
                   <a:srgbClr val="3A3A3A"/>
@@ -11875,6 +12383,7 @@
               </a:defRPr>
             </a:lvl4pPr>
             <a:lvl5pPr>
+              <a:buNone/>
               <a:defRPr sz="1500" b="0">
                 <a:solidFill>
                   <a:srgbClr val="3A3A3A"/>
@@ -11885,6 +12394,7 @@
               </a:defRPr>
             </a:lvl5pPr>
             <a:lvl6pPr>
+              <a:buNone/>
               <a:defRPr sz="1500" b="0">
                 <a:solidFill>
                   <a:srgbClr val="3A3A3A"/>
@@ -11895,6 +12405,7 @@
               </a:defRPr>
             </a:lvl6pPr>
             <a:lvl7pPr>
+              <a:buNone/>
               <a:defRPr sz="1500" b="0">
                 <a:solidFill>
                   <a:srgbClr val="3A3A3A"/>
@@ -11905,6 +12416,7 @@
               </a:defRPr>
             </a:lvl7pPr>
             <a:lvl8pPr>
+              <a:buNone/>
               <a:defRPr sz="1500" b="0">
                 <a:solidFill>
                   <a:srgbClr val="3A3A3A"/>
@@ -11915,6 +12427,7 @@
               </a:defRPr>
             </a:lvl8pPr>
             <a:lvl9pPr>
+              <a:buNone/>
               <a:defRPr sz="1500" b="0">
                 <a:solidFill>
                   <a:srgbClr val="3A3A3A"/>
@@ -11927,6 +12440,7 @@
           </a:lstStyle>
           <a:p xmlns:a="http://schemas.openxmlformats.org/drawingml/2006/main">
             <a:pPr>
+              <a:buNone/>
               <a:defRPr sz="1500" b="0">
                 <a:solidFill>
                   <a:srgbClr val="3A3A3A"/>
@@ -12027,6 +12541,7 @@
               </a:defRPr>
             </a:defPPr>
             <a:lvl1pPr>
+              <a:buNone/>
               <a:defRPr sz="2250" b="1">
                 <a:solidFill>
                   <a:srgbClr val="FFFFFF"/>
@@ -12037,6 +12552,7 @@
               </a:defRPr>
             </a:lvl1pPr>
             <a:lvl2pPr>
+              <a:buNone/>
               <a:defRPr sz="2250" b="1">
                 <a:solidFill>
                   <a:srgbClr val="FFFFFF"/>
@@ -12047,6 +12563,7 @@
               </a:defRPr>
             </a:lvl2pPr>
             <a:lvl3pPr>
+              <a:buNone/>
               <a:defRPr sz="2250" b="1">
                 <a:solidFill>
                   <a:srgbClr val="FFFFFF"/>
@@ -12057,6 +12574,7 @@
               </a:defRPr>
             </a:lvl3pPr>
             <a:lvl4pPr>
+              <a:buNone/>
               <a:defRPr sz="2250" b="1">
                 <a:solidFill>
                   <a:srgbClr val="FFFFFF"/>
@@ -12067,6 +12585,7 @@
               </a:defRPr>
             </a:lvl4pPr>
             <a:lvl5pPr>
+              <a:buNone/>
               <a:defRPr sz="2250" b="1">
                 <a:solidFill>
                   <a:srgbClr val="FFFFFF"/>
@@ -12077,6 +12596,7 @@
               </a:defRPr>
             </a:lvl5pPr>
             <a:lvl6pPr>
+              <a:buNone/>
               <a:defRPr sz="2250" b="1">
                 <a:solidFill>
                   <a:srgbClr val="FFFFFF"/>
@@ -12087,6 +12607,7 @@
               </a:defRPr>
             </a:lvl6pPr>
             <a:lvl7pPr>
+              <a:buNone/>
               <a:defRPr sz="2250" b="1">
                 <a:solidFill>
                   <a:srgbClr val="FFFFFF"/>
@@ -12097,6 +12618,7 @@
               </a:defRPr>
             </a:lvl7pPr>
             <a:lvl8pPr>
+              <a:buNone/>
               <a:defRPr sz="2250" b="1">
                 <a:solidFill>
                   <a:srgbClr val="FFFFFF"/>
@@ -12107,6 +12629,7 @@
               </a:defRPr>
             </a:lvl8pPr>
             <a:lvl9pPr>
+              <a:buNone/>
               <a:defRPr sz="2250" b="1">
                 <a:solidFill>
                   <a:srgbClr val="FFFFFF"/>
@@ -12119,6 +12642,7 @@
           </a:lstStyle>
           <a:p xmlns:a="http://schemas.openxmlformats.org/drawingml/2006/main">
             <a:pPr>
+              <a:buNone/>
               <a:defRPr sz="2250" b="1">
                 <a:solidFill>
                   <a:srgbClr val="FFFFFF"/>
@@ -12186,6 +12710,7 @@
               </a:defRPr>
             </a:defPPr>
             <a:lvl1pPr>
+              <a:buNone/>
               <a:defRPr sz="1800" b="1">
                 <a:solidFill>
                   <a:srgbClr val="111111"/>
@@ -12196,6 +12721,7 @@
               </a:defRPr>
             </a:lvl1pPr>
             <a:lvl2pPr>
+              <a:buNone/>
               <a:defRPr sz="1800" b="1">
                 <a:solidFill>
                   <a:srgbClr val="111111"/>
@@ -12206,6 +12732,7 @@
               </a:defRPr>
             </a:lvl2pPr>
             <a:lvl3pPr>
+              <a:buNone/>
               <a:defRPr sz="1800" b="1">
                 <a:solidFill>
                   <a:srgbClr val="111111"/>
@@ -12216,6 +12743,7 @@
               </a:defRPr>
             </a:lvl3pPr>
             <a:lvl4pPr>
+              <a:buNone/>
               <a:defRPr sz="1800" b="1">
                 <a:solidFill>
                   <a:srgbClr val="111111"/>
@@ -12226,6 +12754,7 @@
               </a:defRPr>
             </a:lvl4pPr>
             <a:lvl5pPr>
+              <a:buNone/>
               <a:defRPr sz="1800" b="1">
                 <a:solidFill>
                   <a:srgbClr val="111111"/>
@@ -12236,6 +12765,7 @@
               </a:defRPr>
             </a:lvl5pPr>
             <a:lvl6pPr>
+              <a:buNone/>
               <a:defRPr sz="1800" b="1">
                 <a:solidFill>
                   <a:srgbClr val="111111"/>
@@ -12246,6 +12776,7 @@
               </a:defRPr>
             </a:lvl6pPr>
             <a:lvl7pPr>
+              <a:buNone/>
               <a:defRPr sz="1800" b="1">
                 <a:solidFill>
                   <a:srgbClr val="111111"/>
@@ -12256,6 +12787,7 @@
               </a:defRPr>
             </a:lvl7pPr>
             <a:lvl8pPr>
+              <a:buNone/>
               <a:defRPr sz="1800" b="1">
                 <a:solidFill>
                   <a:srgbClr val="111111"/>
@@ -12266,6 +12798,7 @@
               </a:defRPr>
             </a:lvl8pPr>
             <a:lvl9pPr>
+              <a:buNone/>
               <a:defRPr sz="1800" b="1">
                 <a:solidFill>
                   <a:srgbClr val="111111"/>
@@ -12278,6 +12811,7 @@
           </a:lstStyle>
           <a:p xmlns:a="http://schemas.openxmlformats.org/drawingml/2006/main">
             <a:pPr>
+              <a:buNone/>
               <a:defRPr sz="1800" b="1">
                 <a:solidFill>
                   <a:srgbClr val="111111"/>
@@ -12345,6 +12879,7 @@
               </a:defRPr>
             </a:defPPr>
             <a:lvl1pPr>
+              <a:buNone/>
               <a:defRPr sz="1500" b="0">
                 <a:solidFill>
                   <a:srgbClr val="3A3A3A"/>
@@ -12355,6 +12890,7 @@
               </a:defRPr>
             </a:lvl1pPr>
             <a:lvl2pPr>
+              <a:buNone/>
               <a:defRPr sz="1500" b="0">
                 <a:solidFill>
                   <a:srgbClr val="3A3A3A"/>
@@ -12365,6 +12901,7 @@
               </a:defRPr>
             </a:lvl2pPr>
             <a:lvl3pPr>
+              <a:buNone/>
               <a:defRPr sz="1500" b="0">
                 <a:solidFill>
                   <a:srgbClr val="3A3A3A"/>
@@ -12375,6 +12912,7 @@
               </a:defRPr>
             </a:lvl3pPr>
             <a:lvl4pPr>
+              <a:buNone/>
               <a:defRPr sz="1500" b="0">
                 <a:solidFill>
                   <a:srgbClr val="3A3A3A"/>
@@ -12385,6 +12923,7 @@
               </a:defRPr>
             </a:lvl4pPr>
             <a:lvl5pPr>
+              <a:buNone/>
               <a:defRPr sz="1500" b="0">
                 <a:solidFill>
                   <a:srgbClr val="3A3A3A"/>
@@ -12395,6 +12934,7 @@
               </a:defRPr>
             </a:lvl5pPr>
             <a:lvl6pPr>
+              <a:buNone/>
               <a:defRPr sz="1500" b="0">
                 <a:solidFill>
                   <a:srgbClr val="3A3A3A"/>
@@ -12405,6 +12945,7 @@
               </a:defRPr>
             </a:lvl6pPr>
             <a:lvl7pPr>
+              <a:buNone/>
               <a:defRPr sz="1500" b="0">
                 <a:solidFill>
                   <a:srgbClr val="3A3A3A"/>
@@ -12415,6 +12956,7 @@
               </a:defRPr>
             </a:lvl7pPr>
             <a:lvl8pPr>
+              <a:buNone/>
               <a:defRPr sz="1500" b="0">
                 <a:solidFill>
                   <a:srgbClr val="3A3A3A"/>
@@ -12425,6 +12967,7 @@
               </a:defRPr>
             </a:lvl8pPr>
             <a:lvl9pPr>
+              <a:buNone/>
               <a:defRPr sz="1500" b="0">
                 <a:solidFill>
                   <a:srgbClr val="3A3A3A"/>
@@ -12437,6 +12980,7 @@
           </a:lstStyle>
           <a:p xmlns:a="http://schemas.openxmlformats.org/drawingml/2006/main">
             <a:pPr>
+              <a:buNone/>
               <a:defRPr sz="1500" b="0">
                 <a:solidFill>
                   <a:srgbClr val="3A3A3A"/>
@@ -12537,6 +13081,7 @@
               </a:defRPr>
             </a:defPPr>
             <a:lvl1pPr>
+              <a:buNone/>
               <a:defRPr sz="2250" b="1">
                 <a:solidFill>
                   <a:srgbClr val="FFFFFF"/>
@@ -12547,6 +13092,7 @@
               </a:defRPr>
             </a:lvl1pPr>
             <a:lvl2pPr>
+              <a:buNone/>
               <a:defRPr sz="2250" b="1">
                 <a:solidFill>
                   <a:srgbClr val="FFFFFF"/>
@@ -12557,6 +13103,7 @@
               </a:defRPr>
             </a:lvl2pPr>
             <a:lvl3pPr>
+              <a:buNone/>
               <a:defRPr sz="2250" b="1">
                 <a:solidFill>
                   <a:srgbClr val="FFFFFF"/>
@@ -12567,6 +13114,7 @@
               </a:defRPr>
             </a:lvl3pPr>
             <a:lvl4pPr>
+              <a:buNone/>
               <a:defRPr sz="2250" b="1">
                 <a:solidFill>
                   <a:srgbClr val="FFFFFF"/>
@@ -12577,6 +13125,7 @@
               </a:defRPr>
             </a:lvl4pPr>
             <a:lvl5pPr>
+              <a:buNone/>
               <a:defRPr sz="2250" b="1">
                 <a:solidFill>
                   <a:srgbClr val="FFFFFF"/>
@@ -12587,6 +13136,7 @@
               </a:defRPr>
             </a:lvl5pPr>
             <a:lvl6pPr>
+              <a:buNone/>
               <a:defRPr sz="2250" b="1">
                 <a:solidFill>
                   <a:srgbClr val="FFFFFF"/>
@@ -12597,6 +13147,7 @@
               </a:defRPr>
             </a:lvl6pPr>
             <a:lvl7pPr>
+              <a:buNone/>
               <a:defRPr sz="2250" b="1">
                 <a:solidFill>
                   <a:srgbClr val="FFFFFF"/>
@@ -12607,6 +13158,7 @@
               </a:defRPr>
             </a:lvl7pPr>
             <a:lvl8pPr>
+              <a:buNone/>
               <a:defRPr sz="2250" b="1">
                 <a:solidFill>
                   <a:srgbClr val="FFFFFF"/>
@@ -12617,6 +13169,7 @@
               </a:defRPr>
             </a:lvl8pPr>
             <a:lvl9pPr>
+              <a:buNone/>
               <a:defRPr sz="2250" b="1">
                 <a:solidFill>
                   <a:srgbClr val="FFFFFF"/>
@@ -12629,6 +13182,7 @@
           </a:lstStyle>
           <a:p xmlns:a="http://schemas.openxmlformats.org/drawingml/2006/main">
             <a:pPr>
+              <a:buNone/>
               <a:defRPr sz="2250" b="1">
                 <a:solidFill>
                   <a:srgbClr val="FFFFFF"/>
@@ -12696,6 +13250,7 @@
               </a:defRPr>
             </a:defPPr>
             <a:lvl1pPr>
+              <a:buNone/>
               <a:defRPr sz="1800" b="1">
                 <a:solidFill>
                   <a:srgbClr val="111111"/>
@@ -12706,6 +13261,7 @@
               </a:defRPr>
             </a:lvl1pPr>
             <a:lvl2pPr>
+              <a:buNone/>
               <a:defRPr sz="1800" b="1">
                 <a:solidFill>
                   <a:srgbClr val="111111"/>
@@ -12716,6 +13272,7 @@
               </a:defRPr>
             </a:lvl2pPr>
             <a:lvl3pPr>
+              <a:buNone/>
               <a:defRPr sz="1800" b="1">
                 <a:solidFill>
                   <a:srgbClr val="111111"/>
@@ -12726,6 +13283,7 @@
               </a:defRPr>
             </a:lvl3pPr>
             <a:lvl4pPr>
+              <a:buNone/>
               <a:defRPr sz="1800" b="1">
                 <a:solidFill>
                   <a:srgbClr val="111111"/>
@@ -12736,6 +13294,7 @@
               </a:defRPr>
             </a:lvl4pPr>
             <a:lvl5pPr>
+              <a:buNone/>
               <a:defRPr sz="1800" b="1">
                 <a:solidFill>
                   <a:srgbClr val="111111"/>
@@ -12746,6 +13305,7 @@
               </a:defRPr>
             </a:lvl5pPr>
             <a:lvl6pPr>
+              <a:buNone/>
               <a:defRPr sz="1800" b="1">
                 <a:solidFill>
                   <a:srgbClr val="111111"/>
@@ -12756,6 +13316,7 @@
               </a:defRPr>
             </a:lvl6pPr>
             <a:lvl7pPr>
+              <a:buNone/>
               <a:defRPr sz="1800" b="1">
                 <a:solidFill>
                   <a:srgbClr val="111111"/>
@@ -12766,6 +13327,7 @@
               </a:defRPr>
             </a:lvl7pPr>
             <a:lvl8pPr>
+              <a:buNone/>
               <a:defRPr sz="1800" b="1">
                 <a:solidFill>
                   <a:srgbClr val="111111"/>
@@ -12776,6 +13338,7 @@
               </a:defRPr>
             </a:lvl8pPr>
             <a:lvl9pPr>
+              <a:buNone/>
               <a:defRPr sz="1800" b="1">
                 <a:solidFill>
                   <a:srgbClr val="111111"/>
@@ -12788,6 +13351,7 @@
           </a:lstStyle>
           <a:p xmlns:a="http://schemas.openxmlformats.org/drawingml/2006/main">
             <a:pPr>
+              <a:buNone/>
               <a:defRPr sz="1800" b="1">
                 <a:solidFill>
                   <a:srgbClr val="111111"/>
@@ -12855,6 +13419,7 @@
               </a:defRPr>
             </a:defPPr>
             <a:lvl1pPr>
+              <a:buNone/>
               <a:defRPr sz="1500" b="0">
                 <a:solidFill>
                   <a:srgbClr val="3A3A3A"/>
@@ -12865,6 +13430,7 @@
               </a:defRPr>
             </a:lvl1pPr>
             <a:lvl2pPr>
+              <a:buNone/>
               <a:defRPr sz="1500" b="0">
                 <a:solidFill>
                   <a:srgbClr val="3A3A3A"/>
@@ -12875,6 +13441,7 @@
               </a:defRPr>
             </a:lvl2pPr>
             <a:lvl3pPr>
+              <a:buNone/>
               <a:defRPr sz="1500" b="0">
                 <a:solidFill>
                   <a:srgbClr val="3A3A3A"/>
@@ -12885,6 +13452,7 @@
               </a:defRPr>
             </a:lvl3pPr>
             <a:lvl4pPr>
+              <a:buNone/>
               <a:defRPr sz="1500" b="0">
                 <a:solidFill>
                   <a:srgbClr val="3A3A3A"/>
@@ -12895,6 +13463,7 @@
               </a:defRPr>
             </a:lvl4pPr>
             <a:lvl5pPr>
+              <a:buNone/>
               <a:defRPr sz="1500" b="0">
                 <a:solidFill>
                   <a:srgbClr val="3A3A3A"/>
@@ -12905,6 +13474,7 @@
               </a:defRPr>
             </a:lvl5pPr>
             <a:lvl6pPr>
+              <a:buNone/>
               <a:defRPr sz="1500" b="0">
                 <a:solidFill>
                   <a:srgbClr val="3A3A3A"/>
@@ -12915,6 +13485,7 @@
               </a:defRPr>
             </a:lvl6pPr>
             <a:lvl7pPr>
+              <a:buNone/>
               <a:defRPr sz="1500" b="0">
                 <a:solidFill>
                   <a:srgbClr val="3A3A3A"/>
@@ -12925,6 +13496,7 @@
               </a:defRPr>
             </a:lvl7pPr>
             <a:lvl8pPr>
+              <a:buNone/>
               <a:defRPr sz="1500" b="0">
                 <a:solidFill>
                   <a:srgbClr val="3A3A3A"/>
@@ -12935,6 +13507,7 @@
               </a:defRPr>
             </a:lvl8pPr>
             <a:lvl9pPr>
+              <a:buNone/>
               <a:defRPr sz="1500" b="0">
                 <a:solidFill>
                   <a:srgbClr val="3A3A3A"/>
@@ -12947,6 +13520,7 @@
           </a:lstStyle>
           <a:p xmlns:a="http://schemas.openxmlformats.org/drawingml/2006/main">
             <a:pPr>
+              <a:buNone/>
               <a:defRPr sz="1500" b="0">
                 <a:solidFill>
                   <a:srgbClr val="3A3A3A"/>
@@ -13047,6 +13621,7 @@
               </a:defRPr>
             </a:defPPr>
             <a:lvl1pPr>
+              <a:buNone/>
               <a:defRPr sz="2250" b="1">
                 <a:solidFill>
                   <a:srgbClr val="FFFFFF"/>
@@ -13057,6 +13632,7 @@
               </a:defRPr>
             </a:lvl1pPr>
             <a:lvl2pPr>
+              <a:buNone/>
               <a:defRPr sz="2250" b="1">
                 <a:solidFill>
                   <a:srgbClr val="FFFFFF"/>
@@ -13067,6 +13643,7 @@
               </a:defRPr>
             </a:lvl2pPr>
             <a:lvl3pPr>
+              <a:buNone/>
               <a:defRPr sz="2250" b="1">
                 <a:solidFill>
                   <a:srgbClr val="FFFFFF"/>
@@ -13077,6 +13654,7 @@
               </a:defRPr>
             </a:lvl3pPr>
             <a:lvl4pPr>
+              <a:buNone/>
               <a:defRPr sz="2250" b="1">
                 <a:solidFill>
                   <a:srgbClr val="FFFFFF"/>
@@ -13087,6 +13665,7 @@
               </a:defRPr>
             </a:lvl4pPr>
             <a:lvl5pPr>
+              <a:buNone/>
               <a:defRPr sz="2250" b="1">
                 <a:solidFill>
                   <a:srgbClr val="FFFFFF"/>
@@ -13097,6 +13676,7 @@
               </a:defRPr>
             </a:lvl5pPr>
             <a:lvl6pPr>
+              <a:buNone/>
               <a:defRPr sz="2250" b="1">
                 <a:solidFill>
                   <a:srgbClr val="FFFFFF"/>
@@ -13107,6 +13687,7 @@
               </a:defRPr>
             </a:lvl6pPr>
             <a:lvl7pPr>
+              <a:buNone/>
               <a:defRPr sz="2250" b="1">
                 <a:solidFill>
                   <a:srgbClr val="FFFFFF"/>
@@ -13117,6 +13698,7 @@
               </a:defRPr>
             </a:lvl7pPr>
             <a:lvl8pPr>
+              <a:buNone/>
               <a:defRPr sz="2250" b="1">
                 <a:solidFill>
                   <a:srgbClr val="FFFFFF"/>
@@ -13127,6 +13709,7 @@
               </a:defRPr>
             </a:lvl8pPr>
             <a:lvl9pPr>
+              <a:buNone/>
               <a:defRPr sz="2250" b="1">
                 <a:solidFill>
                   <a:srgbClr val="FFFFFF"/>
@@ -13139,6 +13722,7 @@
           </a:lstStyle>
           <a:p xmlns:a="http://schemas.openxmlformats.org/drawingml/2006/main">
             <a:pPr>
+              <a:buNone/>
               <a:defRPr sz="2250" b="1">
                 <a:solidFill>
                   <a:srgbClr val="FFFFFF"/>
@@ -13206,6 +13790,7 @@
               </a:defRPr>
             </a:defPPr>
             <a:lvl1pPr>
+              <a:buNone/>
               <a:defRPr sz="1800" b="1">
                 <a:solidFill>
                   <a:srgbClr val="111111"/>
@@ -13216,6 +13801,7 @@
               </a:defRPr>
             </a:lvl1pPr>
             <a:lvl2pPr>
+              <a:buNone/>
               <a:defRPr sz="1800" b="1">
                 <a:solidFill>
                   <a:srgbClr val="111111"/>
@@ -13226,6 +13812,7 @@
               </a:defRPr>
             </a:lvl2pPr>
             <a:lvl3pPr>
+              <a:buNone/>
               <a:defRPr sz="1800" b="1">
                 <a:solidFill>
                   <a:srgbClr val="111111"/>
@@ -13236,6 +13823,7 @@
               </a:defRPr>
             </a:lvl3pPr>
             <a:lvl4pPr>
+              <a:buNone/>
               <a:defRPr sz="1800" b="1">
                 <a:solidFill>
                   <a:srgbClr val="111111"/>
@@ -13246,6 +13834,7 @@
               </a:defRPr>
             </a:lvl4pPr>
             <a:lvl5pPr>
+              <a:buNone/>
               <a:defRPr sz="1800" b="1">
                 <a:solidFill>
                   <a:srgbClr val="111111"/>
@@ -13256,6 +13845,7 @@
               </a:defRPr>
             </a:lvl5pPr>
             <a:lvl6pPr>
+              <a:buNone/>
               <a:defRPr sz="1800" b="1">
                 <a:solidFill>
                   <a:srgbClr val="111111"/>
@@ -13266,6 +13856,7 @@
               </a:defRPr>
             </a:lvl6pPr>
             <a:lvl7pPr>
+              <a:buNone/>
               <a:defRPr sz="1800" b="1">
                 <a:solidFill>
                   <a:srgbClr val="111111"/>
@@ -13276,6 +13867,7 @@
               </a:defRPr>
             </a:lvl7pPr>
             <a:lvl8pPr>
+              <a:buNone/>
               <a:defRPr sz="1800" b="1">
                 <a:solidFill>
                   <a:srgbClr val="111111"/>
@@ -13286,6 +13878,7 @@
               </a:defRPr>
             </a:lvl8pPr>
             <a:lvl9pPr>
+              <a:buNone/>
               <a:defRPr sz="1800" b="1">
                 <a:solidFill>
                   <a:srgbClr val="111111"/>
@@ -13298,6 +13891,7 @@
           </a:lstStyle>
           <a:p xmlns:a="http://schemas.openxmlformats.org/drawingml/2006/main">
             <a:pPr>
+              <a:buNone/>
               <a:defRPr sz="1800" b="1">
                 <a:solidFill>
                   <a:srgbClr val="111111"/>
@@ -13365,6 +13959,7 @@
               </a:defRPr>
             </a:defPPr>
             <a:lvl1pPr>
+              <a:buNone/>
               <a:defRPr sz="1500" b="0">
                 <a:solidFill>
                   <a:srgbClr val="3A3A3A"/>
@@ -13375,6 +13970,7 @@
               </a:defRPr>
             </a:lvl1pPr>
             <a:lvl2pPr>
+              <a:buNone/>
               <a:defRPr sz="1500" b="0">
                 <a:solidFill>
                   <a:srgbClr val="3A3A3A"/>
@@ -13385,6 +13981,7 @@
               </a:defRPr>
             </a:lvl2pPr>
             <a:lvl3pPr>
+              <a:buNone/>
               <a:defRPr sz="1500" b="0">
                 <a:solidFill>
                   <a:srgbClr val="3A3A3A"/>
@@ -13395,6 +13992,7 @@
               </a:defRPr>
             </a:lvl3pPr>
             <a:lvl4pPr>
+              <a:buNone/>
               <a:defRPr sz="1500" b="0">
                 <a:solidFill>
                   <a:srgbClr val="3A3A3A"/>
@@ -13405,6 +14003,7 @@
               </a:defRPr>
             </a:lvl4pPr>
             <a:lvl5pPr>
+              <a:buNone/>
               <a:defRPr sz="1500" b="0">
                 <a:solidFill>
                   <a:srgbClr val="3A3A3A"/>
@@ -13415,6 +14014,7 @@
               </a:defRPr>
             </a:lvl5pPr>
             <a:lvl6pPr>
+              <a:buNone/>
               <a:defRPr sz="1500" b="0">
                 <a:solidFill>
                   <a:srgbClr val="3A3A3A"/>
@@ -13425,6 +14025,7 @@
               </a:defRPr>
             </a:lvl6pPr>
             <a:lvl7pPr>
+              <a:buNone/>
               <a:defRPr sz="1500" b="0">
                 <a:solidFill>
                   <a:srgbClr val="3A3A3A"/>
@@ -13435,6 +14036,7 @@
               </a:defRPr>
             </a:lvl7pPr>
             <a:lvl8pPr>
+              <a:buNone/>
               <a:defRPr sz="1500" b="0">
                 <a:solidFill>
                   <a:srgbClr val="3A3A3A"/>
@@ -13445,6 +14047,7 @@
               </a:defRPr>
             </a:lvl8pPr>
             <a:lvl9pPr>
+              <a:buNone/>
               <a:defRPr sz="1500" b="0">
                 <a:solidFill>
                   <a:srgbClr val="3A3A3A"/>
@@ -13457,6 +14060,7 @@
           </a:lstStyle>
           <a:p xmlns:a="http://schemas.openxmlformats.org/drawingml/2006/main">
             <a:pPr>
+              <a:buNone/>
               <a:defRPr sz="1500" b="0">
                 <a:solidFill>
                   <a:srgbClr val="3A3A3A"/>
@@ -13524,6 +14128,7 @@
               </a:defRPr>
             </a:defPPr>
             <a:lvl1pPr>
+              <a:buNone/>
               <a:defRPr sz="1425" b="1">
                 <a:solidFill>
                   <a:srgbClr val="111111"/>
@@ -13534,6 +14139,7 @@
               </a:defRPr>
             </a:lvl1pPr>
             <a:lvl2pPr>
+              <a:buNone/>
               <a:defRPr sz="1425" b="1">
                 <a:solidFill>
                   <a:srgbClr val="111111"/>
@@ -13544,6 +14150,7 @@
               </a:defRPr>
             </a:lvl2pPr>
             <a:lvl3pPr>
+              <a:buNone/>
               <a:defRPr sz="1425" b="1">
                 <a:solidFill>
                   <a:srgbClr val="111111"/>
@@ -13554,6 +14161,7 @@
               </a:defRPr>
             </a:lvl3pPr>
             <a:lvl4pPr>
+              <a:buNone/>
               <a:defRPr sz="1425" b="1">
                 <a:solidFill>
                   <a:srgbClr val="111111"/>
@@ -13564,6 +14172,7 @@
               </a:defRPr>
             </a:lvl4pPr>
             <a:lvl5pPr>
+              <a:buNone/>
               <a:defRPr sz="1425" b="1">
                 <a:solidFill>
                   <a:srgbClr val="111111"/>
@@ -13574,6 +14183,7 @@
               </a:defRPr>
             </a:lvl5pPr>
             <a:lvl6pPr>
+              <a:buNone/>
               <a:defRPr sz="1425" b="1">
                 <a:solidFill>
                   <a:srgbClr val="111111"/>
@@ -13584,6 +14194,7 @@
               </a:defRPr>
             </a:lvl6pPr>
             <a:lvl7pPr>
+              <a:buNone/>
               <a:defRPr sz="1425" b="1">
                 <a:solidFill>
                   <a:srgbClr val="111111"/>
@@ -13594,6 +14205,7 @@
               </a:defRPr>
             </a:lvl7pPr>
             <a:lvl8pPr>
+              <a:buNone/>
               <a:defRPr sz="1425" b="1">
                 <a:solidFill>
                   <a:srgbClr val="111111"/>
@@ -13604,6 +14216,7 @@
               </a:defRPr>
             </a:lvl8pPr>
             <a:lvl9pPr>
+              <a:buNone/>
               <a:defRPr sz="1425" b="1">
                 <a:solidFill>
                   <a:srgbClr val="111111"/>
@@ -13616,6 +14229,7 @@
           </a:lstStyle>
           <a:p xmlns:a="http://schemas.openxmlformats.org/drawingml/2006/main">
             <a:pPr>
+              <a:buNone/>
               <a:defRPr sz="1425" b="1">
                 <a:solidFill>
                   <a:srgbClr val="111111"/>
@@ -13743,6 +14357,7 @@
               </a:defRPr>
             </a:defPPr>
             <a:lvl1pPr>
+              <a:buNone/>
               <a:defRPr sz="2850" b="1">
                 <a:solidFill>
                   <a:srgbClr val="111111"/>
@@ -13753,6 +14368,7 @@
               </a:defRPr>
             </a:lvl1pPr>
             <a:lvl2pPr>
+              <a:buNone/>
               <a:defRPr sz="2850" b="1">
                 <a:solidFill>
                   <a:srgbClr val="111111"/>
@@ -13763,6 +14379,7 @@
               </a:defRPr>
             </a:lvl2pPr>
             <a:lvl3pPr>
+              <a:buNone/>
               <a:defRPr sz="2850" b="1">
                 <a:solidFill>
                   <a:srgbClr val="111111"/>
@@ -13773,6 +14390,7 @@
               </a:defRPr>
             </a:lvl3pPr>
             <a:lvl4pPr>
+              <a:buNone/>
               <a:defRPr sz="2850" b="1">
                 <a:solidFill>
                   <a:srgbClr val="111111"/>
@@ -13783,6 +14401,7 @@
               </a:defRPr>
             </a:lvl4pPr>
             <a:lvl5pPr>
+              <a:buNone/>
               <a:defRPr sz="2850" b="1">
                 <a:solidFill>
                   <a:srgbClr val="111111"/>
@@ -13793,6 +14412,7 @@
               </a:defRPr>
             </a:lvl5pPr>
             <a:lvl6pPr>
+              <a:buNone/>
               <a:defRPr sz="2850" b="1">
                 <a:solidFill>
                   <a:srgbClr val="111111"/>
@@ -13803,6 +14423,7 @@
               </a:defRPr>
             </a:lvl6pPr>
             <a:lvl7pPr>
+              <a:buNone/>
               <a:defRPr sz="2850" b="1">
                 <a:solidFill>
                   <a:srgbClr val="111111"/>
@@ -13813,6 +14434,7 @@
               </a:defRPr>
             </a:lvl7pPr>
             <a:lvl8pPr>
+              <a:buNone/>
               <a:defRPr sz="2850" b="1">
                 <a:solidFill>
                   <a:srgbClr val="111111"/>
@@ -13823,6 +14445,7 @@
               </a:defRPr>
             </a:lvl8pPr>
             <a:lvl9pPr>
+              <a:buNone/>
               <a:defRPr sz="2850" b="1">
                 <a:solidFill>
                   <a:srgbClr val="111111"/>
@@ -13835,6 +14458,7 @@
           </a:lstStyle>
           <a:p xmlns:a="http://schemas.openxmlformats.org/drawingml/2006/main">
             <a:pPr>
+              <a:buNone/>
               <a:defRPr sz="2850" b="1">
                 <a:solidFill>
                   <a:srgbClr val="111111"/>
@@ -13933,6 +14557,7 @@
               </a:defRPr>
             </a:defPPr>
             <a:lvl1pPr>
+              <a:buNone/>
               <a:defRPr sz="1050" b="1">
                 <a:solidFill>
                   <a:srgbClr val="3A3A3A"/>
@@ -13943,6 +14568,7 @@
               </a:defRPr>
             </a:lvl1pPr>
             <a:lvl2pPr>
+              <a:buNone/>
               <a:defRPr sz="1050" b="1">
                 <a:solidFill>
                   <a:srgbClr val="3A3A3A"/>
@@ -13953,6 +14579,7 @@
               </a:defRPr>
             </a:lvl2pPr>
             <a:lvl3pPr>
+              <a:buNone/>
               <a:defRPr sz="1050" b="1">
                 <a:solidFill>
                   <a:srgbClr val="3A3A3A"/>
@@ -13963,6 +14590,7 @@
               </a:defRPr>
             </a:lvl3pPr>
             <a:lvl4pPr>
+              <a:buNone/>
               <a:defRPr sz="1050" b="1">
                 <a:solidFill>
                   <a:srgbClr val="3A3A3A"/>
@@ -13973,6 +14601,7 @@
               </a:defRPr>
             </a:lvl4pPr>
             <a:lvl5pPr>
+              <a:buNone/>
               <a:defRPr sz="1050" b="1">
                 <a:solidFill>
                   <a:srgbClr val="3A3A3A"/>
@@ -13983,6 +14612,7 @@
               </a:defRPr>
             </a:lvl5pPr>
             <a:lvl6pPr>
+              <a:buNone/>
               <a:defRPr sz="1050" b="1">
                 <a:solidFill>
                   <a:srgbClr val="3A3A3A"/>
@@ -13993,6 +14623,7 @@
               </a:defRPr>
             </a:lvl6pPr>
             <a:lvl7pPr>
+              <a:buNone/>
               <a:defRPr sz="1050" b="1">
                 <a:solidFill>
                   <a:srgbClr val="3A3A3A"/>
@@ -14003,6 +14634,7 @@
               </a:defRPr>
             </a:lvl7pPr>
             <a:lvl8pPr>
+              <a:buNone/>
               <a:defRPr sz="1050" b="1">
                 <a:solidFill>
                   <a:srgbClr val="3A3A3A"/>
@@ -14013,6 +14645,7 @@
               </a:defRPr>
             </a:lvl8pPr>
             <a:lvl9pPr>
+              <a:buNone/>
               <a:defRPr sz="1050" b="1">
                 <a:solidFill>
                   <a:srgbClr val="3A3A3A"/>
@@ -14025,6 +14658,7 @@
           </a:lstStyle>
           <a:p xmlns:a="http://schemas.openxmlformats.org/drawingml/2006/main">
             <a:pPr>
+              <a:buNone/>
               <a:defRPr sz="1050" b="1">
                 <a:solidFill>
                   <a:srgbClr val="3A3A3A"/>
@@ -14092,6 +14726,7 @@
               </a:defRPr>
             </a:defPPr>
             <a:lvl1pPr>
+              <a:buNone/>
               <a:defRPr sz="6900" b="1">
                 <a:solidFill>
                   <a:srgbClr val="111111"/>
@@ -14102,6 +14737,7 @@
               </a:defRPr>
             </a:lvl1pPr>
             <a:lvl2pPr>
+              <a:buNone/>
               <a:defRPr sz="6900" b="1">
                 <a:solidFill>
                   <a:srgbClr val="111111"/>
@@ -14112,6 +14748,7 @@
               </a:defRPr>
             </a:lvl2pPr>
             <a:lvl3pPr>
+              <a:buNone/>
               <a:defRPr sz="6900" b="1">
                 <a:solidFill>
                   <a:srgbClr val="111111"/>
@@ -14122,6 +14759,7 @@
               </a:defRPr>
             </a:lvl3pPr>
             <a:lvl4pPr>
+              <a:buNone/>
               <a:defRPr sz="6900" b="1">
                 <a:solidFill>
                   <a:srgbClr val="111111"/>
@@ -14132,6 +14770,7 @@
               </a:defRPr>
             </a:lvl4pPr>
             <a:lvl5pPr>
+              <a:buNone/>
               <a:defRPr sz="6900" b="1">
                 <a:solidFill>
                   <a:srgbClr val="111111"/>
@@ -14142,6 +14781,7 @@
               </a:defRPr>
             </a:lvl5pPr>
             <a:lvl6pPr>
+              <a:buNone/>
               <a:defRPr sz="6900" b="1">
                 <a:solidFill>
                   <a:srgbClr val="111111"/>
@@ -14152,6 +14792,7 @@
               </a:defRPr>
             </a:lvl6pPr>
             <a:lvl7pPr>
+              <a:buNone/>
               <a:defRPr sz="6900" b="1">
                 <a:solidFill>
                   <a:srgbClr val="111111"/>
@@ -14162,6 +14803,7 @@
               </a:defRPr>
             </a:lvl7pPr>
             <a:lvl8pPr>
+              <a:buNone/>
               <a:defRPr sz="6900" b="1">
                 <a:solidFill>
                   <a:srgbClr val="111111"/>
@@ -14172,6 +14814,7 @@
               </a:defRPr>
             </a:lvl8pPr>
             <a:lvl9pPr>
+              <a:buNone/>
               <a:defRPr sz="6900" b="1">
                 <a:solidFill>
                   <a:srgbClr val="111111"/>
@@ -14184,6 +14827,7 @@
           </a:lstStyle>
           <a:p xmlns:a="http://schemas.openxmlformats.org/drawingml/2006/main">
             <a:pPr>
+              <a:buNone/>
               <a:defRPr sz="6900" b="1">
                 <a:solidFill>
                   <a:srgbClr val="111111"/>
@@ -14251,6 +14895,7 @@
               </a:defRPr>
             </a:defPPr>
             <a:lvl1pPr>
+              <a:buNone/>
               <a:defRPr sz="1800" b="1">
                 <a:solidFill>
                   <a:srgbClr val="111111"/>
@@ -14261,6 +14906,7 @@
               </a:defRPr>
             </a:lvl1pPr>
             <a:lvl2pPr>
+              <a:buNone/>
               <a:defRPr sz="1800" b="1">
                 <a:solidFill>
                   <a:srgbClr val="111111"/>
@@ -14271,6 +14917,7 @@
               </a:defRPr>
             </a:lvl2pPr>
             <a:lvl3pPr>
+              <a:buNone/>
               <a:defRPr sz="1800" b="1">
                 <a:solidFill>
                   <a:srgbClr val="111111"/>
@@ -14281,6 +14928,7 @@
               </a:defRPr>
             </a:lvl3pPr>
             <a:lvl4pPr>
+              <a:buNone/>
               <a:defRPr sz="1800" b="1">
                 <a:solidFill>
                   <a:srgbClr val="111111"/>
@@ -14291,6 +14939,7 @@
               </a:defRPr>
             </a:lvl4pPr>
             <a:lvl5pPr>
+              <a:buNone/>
               <a:defRPr sz="1800" b="1">
                 <a:solidFill>
                   <a:srgbClr val="111111"/>
@@ -14301,6 +14950,7 @@
               </a:defRPr>
             </a:lvl5pPr>
             <a:lvl6pPr>
+              <a:buNone/>
               <a:defRPr sz="1800" b="1">
                 <a:solidFill>
                   <a:srgbClr val="111111"/>
@@ -14311,6 +14961,7 @@
               </a:defRPr>
             </a:lvl6pPr>
             <a:lvl7pPr>
+              <a:buNone/>
               <a:defRPr sz="1800" b="1">
                 <a:solidFill>
                   <a:srgbClr val="111111"/>
@@ -14321,6 +14972,7 @@
               </a:defRPr>
             </a:lvl7pPr>
             <a:lvl8pPr>
+              <a:buNone/>
               <a:defRPr sz="1800" b="1">
                 <a:solidFill>
                   <a:srgbClr val="111111"/>
@@ -14331,6 +14983,7 @@
               </a:defRPr>
             </a:lvl8pPr>
             <a:lvl9pPr>
+              <a:buNone/>
               <a:defRPr sz="1800" b="1">
                 <a:solidFill>
                   <a:srgbClr val="111111"/>
@@ -14343,6 +14996,7 @@
           </a:lstStyle>
           <a:p xmlns:a="http://schemas.openxmlformats.org/drawingml/2006/main">
             <a:pPr>
+              <a:buNone/>
               <a:defRPr sz="1800" b="1">
                 <a:solidFill>
                   <a:srgbClr val="111111"/>
@@ -14410,6 +15064,7 @@
               </a:defRPr>
             </a:defPPr>
             <a:lvl1pPr>
+              <a:buNone/>
               <a:defRPr sz="2025" b="1">
                 <a:solidFill>
                   <a:srgbClr val="111111"/>
@@ -14420,6 +15075,7 @@
               </a:defRPr>
             </a:lvl1pPr>
             <a:lvl2pPr>
+              <a:buNone/>
               <a:defRPr sz="2025" b="1">
                 <a:solidFill>
                   <a:srgbClr val="111111"/>
@@ -14430,6 +15086,7 @@
               </a:defRPr>
             </a:lvl2pPr>
             <a:lvl3pPr>
+              <a:buNone/>
               <a:defRPr sz="2025" b="1">
                 <a:solidFill>
                   <a:srgbClr val="111111"/>
@@ -14440,6 +15097,7 @@
               </a:defRPr>
             </a:lvl3pPr>
             <a:lvl4pPr>
+              <a:buNone/>
               <a:defRPr sz="2025" b="1">
                 <a:solidFill>
                   <a:srgbClr val="111111"/>
@@ -14450,6 +15108,7 @@
               </a:defRPr>
             </a:lvl4pPr>
             <a:lvl5pPr>
+              <a:buNone/>
               <a:defRPr sz="2025" b="1">
                 <a:solidFill>
                   <a:srgbClr val="111111"/>
@@ -14460,6 +15119,7 @@
               </a:defRPr>
             </a:lvl5pPr>
             <a:lvl6pPr>
+              <a:buNone/>
               <a:defRPr sz="2025" b="1">
                 <a:solidFill>
                   <a:srgbClr val="111111"/>
@@ -14470,6 +15130,7 @@
               </a:defRPr>
             </a:lvl6pPr>
             <a:lvl7pPr>
+              <a:buNone/>
               <a:defRPr sz="2025" b="1">
                 <a:solidFill>
                   <a:srgbClr val="111111"/>
@@ -14480,6 +15141,7 @@
               </a:defRPr>
             </a:lvl7pPr>
             <a:lvl8pPr>
+              <a:buNone/>
               <a:defRPr sz="2025" b="1">
                 <a:solidFill>
                   <a:srgbClr val="111111"/>
@@ -14490,6 +15152,7 @@
               </a:defRPr>
             </a:lvl8pPr>
             <a:lvl9pPr>
+              <a:buNone/>
               <a:defRPr sz="2025" b="1">
                 <a:solidFill>
                   <a:srgbClr val="111111"/>
@@ -14502,6 +15165,7 @@
           </a:lstStyle>
           <a:p xmlns:a="http://schemas.openxmlformats.org/drawingml/2006/main">
             <a:pPr>
+              <a:buNone/>
               <a:defRPr sz="2025" b="1">
                 <a:solidFill>
                   <a:srgbClr val="111111"/>
@@ -14569,6 +15233,7 @@
               </a:defRPr>
             </a:defPPr>
             <a:lvl1pPr>
+              <a:buNone/>
               <a:defRPr sz="1650" b="0">
                 <a:solidFill>
                   <a:srgbClr val="111111"/>
@@ -14579,6 +15244,7 @@
               </a:defRPr>
             </a:lvl1pPr>
             <a:lvl2pPr>
+              <a:buNone/>
               <a:defRPr sz="1650" b="0">
                 <a:solidFill>
                   <a:srgbClr val="111111"/>
@@ -14589,6 +15255,7 @@
               </a:defRPr>
             </a:lvl2pPr>
             <a:lvl3pPr>
+              <a:buNone/>
               <a:defRPr sz="1650" b="0">
                 <a:solidFill>
                   <a:srgbClr val="111111"/>
@@ -14599,6 +15266,7 @@
               </a:defRPr>
             </a:lvl3pPr>
             <a:lvl4pPr>
+              <a:buNone/>
               <a:defRPr sz="1650" b="0">
                 <a:solidFill>
                   <a:srgbClr val="111111"/>
@@ -14609,6 +15277,7 @@
               </a:defRPr>
             </a:lvl4pPr>
             <a:lvl5pPr>
+              <a:buNone/>
               <a:defRPr sz="1650" b="0">
                 <a:solidFill>
                   <a:srgbClr val="111111"/>
@@ -14619,6 +15288,7 @@
               </a:defRPr>
             </a:lvl5pPr>
             <a:lvl6pPr>
+              <a:buNone/>
               <a:defRPr sz="1650" b="0">
                 <a:solidFill>
                   <a:srgbClr val="111111"/>
@@ -14629,6 +15299,7 @@
               </a:defRPr>
             </a:lvl6pPr>
             <a:lvl7pPr>
+              <a:buNone/>
               <a:defRPr sz="1650" b="0">
                 <a:solidFill>
                   <a:srgbClr val="111111"/>
@@ -14639,6 +15310,7 @@
               </a:defRPr>
             </a:lvl7pPr>
             <a:lvl8pPr>
+              <a:buNone/>
               <a:defRPr sz="1650" b="0">
                 <a:solidFill>
                   <a:srgbClr val="111111"/>
@@ -14649,6 +15321,7 @@
               </a:defRPr>
             </a:lvl8pPr>
             <a:lvl9pPr>
+              <a:buNone/>
               <a:defRPr sz="1650" b="0">
                 <a:solidFill>
                   <a:srgbClr val="111111"/>
@@ -14661,6 +15334,7 @@
           </a:lstStyle>
           <a:p xmlns:a="http://schemas.openxmlformats.org/drawingml/2006/main">
             <a:pPr>
+              <a:buNone/>
               <a:defRPr sz="1650" b="0">
                 <a:solidFill>
                   <a:srgbClr val="111111"/>
@@ -14689,6 +15363,7 @@
           </a:p>
           <a:p xmlns:a="http://schemas.openxmlformats.org/drawingml/2006/main">
             <a:pPr>
+              <a:buNone/>
               <a:defRPr sz="1650" b="0">
                 <a:solidFill>
                   <a:srgbClr val="111111"/>
@@ -14717,6 +15392,7 @@
           </a:p>
           <a:p xmlns:a="http://schemas.openxmlformats.org/drawingml/2006/main">
             <a:pPr>
+              <a:buNone/>
               <a:defRPr sz="1650" b="0">
                 <a:solidFill>
                   <a:srgbClr val="111111"/>
@@ -14815,6 +15491,7 @@
               </a:defRPr>
             </a:defPPr>
             <a:lvl1pPr>
+              <a:buNone/>
               <a:defRPr sz="1575" b="1">
                 <a:solidFill>
                   <a:srgbClr val="111111"/>
@@ -14825,6 +15502,7 @@
               </a:defRPr>
             </a:lvl1pPr>
             <a:lvl2pPr>
+              <a:buNone/>
               <a:defRPr sz="1575" b="1">
                 <a:solidFill>
                   <a:srgbClr val="111111"/>
@@ -14835,6 +15513,7 @@
               </a:defRPr>
             </a:lvl2pPr>
             <a:lvl3pPr>
+              <a:buNone/>
               <a:defRPr sz="1575" b="1">
                 <a:solidFill>
                   <a:srgbClr val="111111"/>
@@ -14845,6 +15524,7 @@
               </a:defRPr>
             </a:lvl3pPr>
             <a:lvl4pPr>
+              <a:buNone/>
               <a:defRPr sz="1575" b="1">
                 <a:solidFill>
                   <a:srgbClr val="111111"/>
@@ -14855,6 +15535,7 @@
               </a:defRPr>
             </a:lvl4pPr>
             <a:lvl5pPr>
+              <a:buNone/>
               <a:defRPr sz="1575" b="1">
                 <a:solidFill>
                   <a:srgbClr val="111111"/>
@@ -14865,6 +15546,7 @@
               </a:defRPr>
             </a:lvl5pPr>
             <a:lvl6pPr>
+              <a:buNone/>
               <a:defRPr sz="1575" b="1">
                 <a:solidFill>
                   <a:srgbClr val="111111"/>
@@ -14875,6 +15557,7 @@
               </a:defRPr>
             </a:lvl6pPr>
             <a:lvl7pPr>
+              <a:buNone/>
               <a:defRPr sz="1575" b="1">
                 <a:solidFill>
                   <a:srgbClr val="111111"/>
@@ -14885,6 +15568,7 @@
               </a:defRPr>
             </a:lvl7pPr>
             <a:lvl8pPr>
+              <a:buNone/>
               <a:defRPr sz="1575" b="1">
                 <a:solidFill>
                   <a:srgbClr val="111111"/>
@@ -14895,6 +15579,7 @@
               </a:defRPr>
             </a:lvl8pPr>
             <a:lvl9pPr>
+              <a:buNone/>
               <a:defRPr sz="1575" b="1">
                 <a:solidFill>
                   <a:srgbClr val="111111"/>
@@ -14907,6 +15592,7 @@
           </a:lstStyle>
           <a:p xmlns:a="http://schemas.openxmlformats.org/drawingml/2006/main">
             <a:pPr>
+              <a:buNone/>
               <a:defRPr sz="1575" b="1">
                 <a:solidFill>
                   <a:srgbClr val="111111"/>
@@ -15034,6 +15720,7 @@
               </a:defRPr>
             </a:defPPr>
             <a:lvl1pPr>
+              <a:buNone/>
               <a:defRPr sz="2850" b="1">
                 <a:solidFill>
                   <a:srgbClr val="111111"/>
@@ -15044,6 +15731,7 @@
               </a:defRPr>
             </a:lvl1pPr>
             <a:lvl2pPr>
+              <a:buNone/>
               <a:defRPr sz="2850" b="1">
                 <a:solidFill>
                   <a:srgbClr val="111111"/>
@@ -15054,6 +15742,7 @@
               </a:defRPr>
             </a:lvl2pPr>
             <a:lvl3pPr>
+              <a:buNone/>
               <a:defRPr sz="2850" b="1">
                 <a:solidFill>
                   <a:srgbClr val="111111"/>
@@ -15064,6 +15753,7 @@
               </a:defRPr>
             </a:lvl3pPr>
             <a:lvl4pPr>
+              <a:buNone/>
               <a:defRPr sz="2850" b="1">
                 <a:solidFill>
                   <a:srgbClr val="111111"/>
@@ -15074,6 +15764,7 @@
               </a:defRPr>
             </a:lvl4pPr>
             <a:lvl5pPr>
+              <a:buNone/>
               <a:defRPr sz="2850" b="1">
                 <a:solidFill>
                   <a:srgbClr val="111111"/>
@@ -15084,6 +15775,7 @@
               </a:defRPr>
             </a:lvl5pPr>
             <a:lvl6pPr>
+              <a:buNone/>
               <a:defRPr sz="2850" b="1">
                 <a:solidFill>
                   <a:srgbClr val="111111"/>
@@ -15094,6 +15786,7 @@
               </a:defRPr>
             </a:lvl6pPr>
             <a:lvl7pPr>
+              <a:buNone/>
               <a:defRPr sz="2850" b="1">
                 <a:solidFill>
                   <a:srgbClr val="111111"/>
@@ -15104,6 +15797,7 @@
               </a:defRPr>
             </a:lvl7pPr>
             <a:lvl8pPr>
+              <a:buNone/>
               <a:defRPr sz="2850" b="1">
                 <a:solidFill>
                   <a:srgbClr val="111111"/>
@@ -15114,6 +15808,7 @@
               </a:defRPr>
             </a:lvl8pPr>
             <a:lvl9pPr>
+              <a:buNone/>
               <a:defRPr sz="2850" b="1">
                 <a:solidFill>
                   <a:srgbClr val="111111"/>
@@ -15126,6 +15821,7 @@
           </a:lstStyle>
           <a:p xmlns:a="http://schemas.openxmlformats.org/drawingml/2006/main">
             <a:pPr>
+              <a:buNone/>
               <a:defRPr sz="2850" b="1">
                 <a:solidFill>
                   <a:srgbClr val="111111"/>
@@ -15224,6 +15920,7 @@
               </a:defRPr>
             </a:defPPr>
             <a:lvl1pPr>
+              <a:buNone/>
               <a:defRPr sz="1050" b="1">
                 <a:solidFill>
                   <a:srgbClr val="3A3A3A"/>
@@ -15234,6 +15931,7 @@
               </a:defRPr>
             </a:lvl1pPr>
             <a:lvl2pPr>
+              <a:buNone/>
               <a:defRPr sz="1050" b="1">
                 <a:solidFill>
                   <a:srgbClr val="3A3A3A"/>
@@ -15244,6 +15942,7 @@
               </a:defRPr>
             </a:lvl2pPr>
             <a:lvl3pPr>
+              <a:buNone/>
               <a:defRPr sz="1050" b="1">
                 <a:solidFill>
                   <a:srgbClr val="3A3A3A"/>
@@ -15254,6 +15953,7 @@
               </a:defRPr>
             </a:lvl3pPr>
             <a:lvl4pPr>
+              <a:buNone/>
               <a:defRPr sz="1050" b="1">
                 <a:solidFill>
                   <a:srgbClr val="3A3A3A"/>
@@ -15264,6 +15964,7 @@
               </a:defRPr>
             </a:lvl4pPr>
             <a:lvl5pPr>
+              <a:buNone/>
               <a:defRPr sz="1050" b="1">
                 <a:solidFill>
                   <a:srgbClr val="3A3A3A"/>
@@ -15274,6 +15975,7 @@
               </a:defRPr>
             </a:lvl5pPr>
             <a:lvl6pPr>
+              <a:buNone/>
               <a:defRPr sz="1050" b="1">
                 <a:solidFill>
                   <a:srgbClr val="3A3A3A"/>
@@ -15284,6 +15986,7 @@
               </a:defRPr>
             </a:lvl6pPr>
             <a:lvl7pPr>
+              <a:buNone/>
               <a:defRPr sz="1050" b="1">
                 <a:solidFill>
                   <a:srgbClr val="3A3A3A"/>
@@ -15294,6 +15997,7 @@
               </a:defRPr>
             </a:lvl7pPr>
             <a:lvl8pPr>
+              <a:buNone/>
               <a:defRPr sz="1050" b="1">
                 <a:solidFill>
                   <a:srgbClr val="3A3A3A"/>
@@ -15304,6 +16008,7 @@
               </a:defRPr>
             </a:lvl8pPr>
             <a:lvl9pPr>
+              <a:buNone/>
               <a:defRPr sz="1050" b="1">
                 <a:solidFill>
                   <a:srgbClr val="3A3A3A"/>
@@ -15316,6 +16021,7 @@
           </a:lstStyle>
           <a:p xmlns:a="http://schemas.openxmlformats.org/drawingml/2006/main">
             <a:pPr>
+              <a:buNone/>
               <a:defRPr sz="1050" b="1">
                 <a:solidFill>
                   <a:srgbClr val="3A3A3A"/>
@@ -15383,6 +16089,7 @@
               </a:defRPr>
             </a:defPPr>
             <a:lvl1pPr>
+              <a:buNone/>
               <a:defRPr sz="1950" b="1">
                 <a:solidFill>
                   <a:srgbClr val="111111"/>
@@ -15393,6 +16100,7 @@
               </a:defRPr>
             </a:lvl1pPr>
             <a:lvl2pPr>
+              <a:buNone/>
               <a:defRPr sz="1950" b="1">
                 <a:solidFill>
                   <a:srgbClr val="111111"/>
@@ -15403,6 +16111,7 @@
               </a:defRPr>
             </a:lvl2pPr>
             <a:lvl3pPr>
+              <a:buNone/>
               <a:defRPr sz="1950" b="1">
                 <a:solidFill>
                   <a:srgbClr val="111111"/>
@@ -15413,6 +16122,7 @@
               </a:defRPr>
             </a:lvl3pPr>
             <a:lvl4pPr>
+              <a:buNone/>
               <a:defRPr sz="1950" b="1">
                 <a:solidFill>
                   <a:srgbClr val="111111"/>
@@ -15423,6 +16133,7 @@
               </a:defRPr>
             </a:lvl4pPr>
             <a:lvl5pPr>
+              <a:buNone/>
               <a:defRPr sz="1950" b="1">
                 <a:solidFill>
                   <a:srgbClr val="111111"/>
@@ -15433,6 +16144,7 @@
               </a:defRPr>
             </a:lvl5pPr>
             <a:lvl6pPr>
+              <a:buNone/>
               <a:defRPr sz="1950" b="1">
                 <a:solidFill>
                   <a:srgbClr val="111111"/>
@@ -15443,6 +16155,7 @@
               </a:defRPr>
             </a:lvl6pPr>
             <a:lvl7pPr>
+              <a:buNone/>
               <a:defRPr sz="1950" b="1">
                 <a:solidFill>
                   <a:srgbClr val="111111"/>
@@ -15453,6 +16166,7 @@
               </a:defRPr>
             </a:lvl7pPr>
             <a:lvl8pPr>
+              <a:buNone/>
               <a:defRPr sz="1950" b="1">
                 <a:solidFill>
                   <a:srgbClr val="111111"/>
@@ -15463,6 +16177,7 @@
               </a:defRPr>
             </a:lvl8pPr>
             <a:lvl9pPr>
+              <a:buNone/>
               <a:defRPr sz="1950" b="1">
                 <a:solidFill>
                   <a:srgbClr val="111111"/>
@@ -15475,6 +16190,7 @@
           </a:lstStyle>
           <a:p xmlns:a="http://schemas.openxmlformats.org/drawingml/2006/main">
             <a:pPr>
+              <a:buNone/>
               <a:defRPr sz="1950" b="1">
                 <a:solidFill>
                   <a:srgbClr val="111111"/>
@@ -15542,6 +16258,7 @@
               </a:defRPr>
             </a:defPPr>
             <a:lvl1pPr>
+              <a:buNone/>
               <a:defRPr sz="1575" b="1">
                 <a:solidFill>
                   <a:srgbClr val="111111"/>
@@ -15552,6 +16269,7 @@
               </a:defRPr>
             </a:lvl1pPr>
             <a:lvl2pPr>
+              <a:buNone/>
               <a:defRPr sz="1575" b="1">
                 <a:solidFill>
                   <a:srgbClr val="111111"/>
@@ -15562,6 +16280,7 @@
               </a:defRPr>
             </a:lvl2pPr>
             <a:lvl3pPr>
+              <a:buNone/>
               <a:defRPr sz="1575" b="1">
                 <a:solidFill>
                   <a:srgbClr val="111111"/>
@@ -15572,6 +16291,7 @@
               </a:defRPr>
             </a:lvl3pPr>
             <a:lvl4pPr>
+              <a:buNone/>
               <a:defRPr sz="1575" b="1">
                 <a:solidFill>
                   <a:srgbClr val="111111"/>
@@ -15582,6 +16302,7 @@
               </a:defRPr>
             </a:lvl4pPr>
             <a:lvl5pPr>
+              <a:buNone/>
               <a:defRPr sz="1575" b="1">
                 <a:solidFill>
                   <a:srgbClr val="111111"/>
@@ -15592,6 +16313,7 @@
               </a:defRPr>
             </a:lvl5pPr>
             <a:lvl6pPr>
+              <a:buNone/>
               <a:defRPr sz="1575" b="1">
                 <a:solidFill>
                   <a:srgbClr val="111111"/>
@@ -15602,6 +16324,7 @@
               </a:defRPr>
             </a:lvl6pPr>
             <a:lvl7pPr>
+              <a:buNone/>
               <a:defRPr sz="1575" b="1">
                 <a:solidFill>
                   <a:srgbClr val="111111"/>
@@ -15612,6 +16335,7 @@
               </a:defRPr>
             </a:lvl7pPr>
             <a:lvl8pPr>
+              <a:buNone/>
               <a:defRPr sz="1575" b="1">
                 <a:solidFill>
                   <a:srgbClr val="111111"/>
@@ -15622,6 +16346,7 @@
               </a:defRPr>
             </a:lvl8pPr>
             <a:lvl9pPr>
+              <a:buNone/>
               <a:defRPr sz="1575" b="1">
                 <a:solidFill>
                   <a:srgbClr val="111111"/>
@@ -15634,6 +16359,7 @@
           </a:lstStyle>
           <a:p xmlns:a="http://schemas.openxmlformats.org/drawingml/2006/main">
             <a:pPr>
+              <a:buNone/>
               <a:defRPr sz="1575" b="1">
                 <a:solidFill>
                   <a:srgbClr val="111111"/>
@@ -15701,6 +16427,7 @@
               </a:defRPr>
             </a:defPPr>
             <a:lvl1pPr>
+              <a:buNone/>
               <a:defRPr sz="1350" b="0">
                 <a:solidFill>
                   <a:srgbClr val="3A3A3A"/>
@@ -15711,6 +16438,7 @@
               </a:defRPr>
             </a:lvl1pPr>
             <a:lvl2pPr>
+              <a:buNone/>
               <a:defRPr sz="1350" b="0">
                 <a:solidFill>
                   <a:srgbClr val="3A3A3A"/>
@@ -15721,6 +16449,7 @@
               </a:defRPr>
             </a:lvl2pPr>
             <a:lvl3pPr>
+              <a:buNone/>
               <a:defRPr sz="1350" b="0">
                 <a:solidFill>
                   <a:srgbClr val="3A3A3A"/>
@@ -15731,6 +16460,7 @@
               </a:defRPr>
             </a:lvl3pPr>
             <a:lvl4pPr>
+              <a:buNone/>
               <a:defRPr sz="1350" b="0">
                 <a:solidFill>
                   <a:srgbClr val="3A3A3A"/>
@@ -15741,6 +16471,7 @@
               </a:defRPr>
             </a:lvl4pPr>
             <a:lvl5pPr>
+              <a:buNone/>
               <a:defRPr sz="1350" b="0">
                 <a:solidFill>
                   <a:srgbClr val="3A3A3A"/>
@@ -15751,6 +16482,7 @@
               </a:defRPr>
             </a:lvl5pPr>
             <a:lvl6pPr>
+              <a:buNone/>
               <a:defRPr sz="1350" b="0">
                 <a:solidFill>
                   <a:srgbClr val="3A3A3A"/>
@@ -15761,6 +16493,7 @@
               </a:defRPr>
             </a:lvl6pPr>
             <a:lvl7pPr>
+              <a:buNone/>
               <a:defRPr sz="1350" b="0">
                 <a:solidFill>
                   <a:srgbClr val="3A3A3A"/>
@@ -15771,6 +16504,7 @@
               </a:defRPr>
             </a:lvl7pPr>
             <a:lvl8pPr>
+              <a:buNone/>
               <a:defRPr sz="1350" b="0">
                 <a:solidFill>
                   <a:srgbClr val="3A3A3A"/>
@@ -15781,6 +16515,7 @@
               </a:defRPr>
             </a:lvl8pPr>
             <a:lvl9pPr>
+              <a:buNone/>
               <a:defRPr sz="1350" b="0">
                 <a:solidFill>
                   <a:srgbClr val="3A3A3A"/>
@@ -15793,6 +16528,7 @@
           </a:lstStyle>
           <a:p xmlns:a="http://schemas.openxmlformats.org/drawingml/2006/main">
             <a:pPr>
+              <a:buNone/>
               <a:defRPr sz="1350" b="0">
                 <a:solidFill>
                   <a:srgbClr val="3A3A3A"/>
@@ -15860,6 +16596,7 @@
               </a:defRPr>
             </a:defPPr>
             <a:lvl1pPr>
+              <a:buNone/>
               <a:defRPr sz="1950" b="1">
                 <a:solidFill>
                   <a:srgbClr val="111111"/>
@@ -15870,6 +16607,7 @@
               </a:defRPr>
             </a:lvl1pPr>
             <a:lvl2pPr>
+              <a:buNone/>
               <a:defRPr sz="1950" b="1">
                 <a:solidFill>
                   <a:srgbClr val="111111"/>
@@ -15880,6 +16618,7 @@
               </a:defRPr>
             </a:lvl2pPr>
             <a:lvl3pPr>
+              <a:buNone/>
               <a:defRPr sz="1950" b="1">
                 <a:solidFill>
                   <a:srgbClr val="111111"/>
@@ -15890,6 +16629,7 @@
               </a:defRPr>
             </a:lvl3pPr>
             <a:lvl4pPr>
+              <a:buNone/>
               <a:defRPr sz="1950" b="1">
                 <a:solidFill>
                   <a:srgbClr val="111111"/>
@@ -15900,6 +16640,7 @@
               </a:defRPr>
             </a:lvl4pPr>
             <a:lvl5pPr>
+              <a:buNone/>
               <a:defRPr sz="1950" b="1">
                 <a:solidFill>
                   <a:srgbClr val="111111"/>
@@ -15910,6 +16651,7 @@
               </a:defRPr>
             </a:lvl5pPr>
             <a:lvl6pPr>
+              <a:buNone/>
               <a:defRPr sz="1950" b="1">
                 <a:solidFill>
                   <a:srgbClr val="111111"/>
@@ -15920,6 +16662,7 @@
               </a:defRPr>
             </a:lvl6pPr>
             <a:lvl7pPr>
+              <a:buNone/>
               <a:defRPr sz="1950" b="1">
                 <a:solidFill>
                   <a:srgbClr val="111111"/>
@@ -15930,6 +16673,7 @@
               </a:defRPr>
             </a:lvl7pPr>
             <a:lvl8pPr>
+              <a:buNone/>
               <a:defRPr sz="1950" b="1">
                 <a:solidFill>
                   <a:srgbClr val="111111"/>
@@ -15940,6 +16684,7 @@
               </a:defRPr>
             </a:lvl8pPr>
             <a:lvl9pPr>
+              <a:buNone/>
               <a:defRPr sz="1950" b="1">
                 <a:solidFill>
                   <a:srgbClr val="111111"/>
@@ -15952,6 +16697,7 @@
           </a:lstStyle>
           <a:p xmlns:a="http://schemas.openxmlformats.org/drawingml/2006/main">
             <a:pPr>
+              <a:buNone/>
               <a:defRPr sz="1950" b="1">
                 <a:solidFill>
                   <a:srgbClr val="111111"/>
@@ -16019,6 +16765,7 @@
               </a:defRPr>
             </a:defPPr>
             <a:lvl1pPr>
+              <a:buNone/>
               <a:defRPr sz="1575" b="1">
                 <a:solidFill>
                   <a:srgbClr val="111111"/>
@@ -16029,6 +16776,7 @@
               </a:defRPr>
             </a:lvl1pPr>
             <a:lvl2pPr>
+              <a:buNone/>
               <a:defRPr sz="1575" b="1">
                 <a:solidFill>
                   <a:srgbClr val="111111"/>
@@ -16039,6 +16787,7 @@
               </a:defRPr>
             </a:lvl2pPr>
             <a:lvl3pPr>
+              <a:buNone/>
               <a:defRPr sz="1575" b="1">
                 <a:solidFill>
                   <a:srgbClr val="111111"/>
@@ -16049,6 +16798,7 @@
               </a:defRPr>
             </a:lvl3pPr>
             <a:lvl4pPr>
+              <a:buNone/>
               <a:defRPr sz="1575" b="1">
                 <a:solidFill>
                   <a:srgbClr val="111111"/>
@@ -16059,6 +16809,7 @@
               </a:defRPr>
             </a:lvl4pPr>
             <a:lvl5pPr>
+              <a:buNone/>
               <a:defRPr sz="1575" b="1">
                 <a:solidFill>
                   <a:srgbClr val="111111"/>
@@ -16069,6 +16820,7 @@
               </a:defRPr>
             </a:lvl5pPr>
             <a:lvl6pPr>
+              <a:buNone/>
               <a:defRPr sz="1575" b="1">
                 <a:solidFill>
                   <a:srgbClr val="111111"/>
@@ -16079,6 +16831,7 @@
               </a:defRPr>
             </a:lvl6pPr>
             <a:lvl7pPr>
+              <a:buNone/>
               <a:defRPr sz="1575" b="1">
                 <a:solidFill>
                   <a:srgbClr val="111111"/>
@@ -16089,6 +16842,7 @@
               </a:defRPr>
             </a:lvl7pPr>
             <a:lvl8pPr>
+              <a:buNone/>
               <a:defRPr sz="1575" b="1">
                 <a:solidFill>
                   <a:srgbClr val="111111"/>
@@ -16099,6 +16853,7 @@
               </a:defRPr>
             </a:lvl8pPr>
             <a:lvl9pPr>
+              <a:buNone/>
               <a:defRPr sz="1575" b="1">
                 <a:solidFill>
                   <a:srgbClr val="111111"/>
@@ -16111,6 +16866,7 @@
           </a:lstStyle>
           <a:p xmlns:a="http://schemas.openxmlformats.org/drawingml/2006/main">
             <a:pPr>
+              <a:buNone/>
               <a:defRPr sz="1575" b="1">
                 <a:solidFill>
                   <a:srgbClr val="111111"/>
@@ -16178,6 +16934,7 @@
               </a:defRPr>
             </a:defPPr>
             <a:lvl1pPr>
+              <a:buNone/>
               <a:defRPr sz="1350" b="0">
                 <a:solidFill>
                   <a:srgbClr val="3A3A3A"/>
@@ -16188,6 +16945,7 @@
               </a:defRPr>
             </a:lvl1pPr>
             <a:lvl2pPr>
+              <a:buNone/>
               <a:defRPr sz="1350" b="0">
                 <a:solidFill>
                   <a:srgbClr val="3A3A3A"/>
@@ -16198,6 +16956,7 @@
               </a:defRPr>
             </a:lvl2pPr>
             <a:lvl3pPr>
+              <a:buNone/>
               <a:defRPr sz="1350" b="0">
                 <a:solidFill>
                   <a:srgbClr val="3A3A3A"/>
@@ -16208,6 +16967,7 @@
               </a:defRPr>
             </a:lvl3pPr>
             <a:lvl4pPr>
+              <a:buNone/>
               <a:defRPr sz="1350" b="0">
                 <a:solidFill>
                   <a:srgbClr val="3A3A3A"/>
@@ -16218,6 +16978,7 @@
               </a:defRPr>
             </a:lvl4pPr>
             <a:lvl5pPr>
+              <a:buNone/>
               <a:defRPr sz="1350" b="0">
                 <a:solidFill>
                   <a:srgbClr val="3A3A3A"/>
@@ -16228,6 +16989,7 @@
               </a:defRPr>
             </a:lvl5pPr>
             <a:lvl6pPr>
+              <a:buNone/>
               <a:defRPr sz="1350" b="0">
                 <a:solidFill>
                   <a:srgbClr val="3A3A3A"/>
@@ -16238,6 +17000,7 @@
               </a:defRPr>
             </a:lvl6pPr>
             <a:lvl7pPr>
+              <a:buNone/>
               <a:defRPr sz="1350" b="0">
                 <a:solidFill>
                   <a:srgbClr val="3A3A3A"/>
@@ -16248,6 +17011,7 @@
               </a:defRPr>
             </a:lvl7pPr>
             <a:lvl8pPr>
+              <a:buNone/>
               <a:defRPr sz="1350" b="0">
                 <a:solidFill>
                   <a:srgbClr val="3A3A3A"/>
@@ -16258,6 +17022,7 @@
               </a:defRPr>
             </a:lvl8pPr>
             <a:lvl9pPr>
+              <a:buNone/>
               <a:defRPr sz="1350" b="0">
                 <a:solidFill>
                   <a:srgbClr val="3A3A3A"/>
@@ -16270,6 +17035,7 @@
           </a:lstStyle>
           <a:p xmlns:a="http://schemas.openxmlformats.org/drawingml/2006/main">
             <a:pPr>
+              <a:buNone/>
               <a:defRPr sz="1350" b="0">
                 <a:solidFill>
                   <a:srgbClr val="3A3A3A"/>
@@ -16337,6 +17103,7 @@
               </a:defRPr>
             </a:defPPr>
             <a:lvl1pPr>
+              <a:buNone/>
               <a:defRPr sz="1950" b="1">
                 <a:solidFill>
                   <a:srgbClr val="111111"/>
@@ -16347,6 +17114,7 @@
               </a:defRPr>
             </a:lvl1pPr>
             <a:lvl2pPr>
+              <a:buNone/>
               <a:defRPr sz="1950" b="1">
                 <a:solidFill>
                   <a:srgbClr val="111111"/>
@@ -16357,6 +17125,7 @@
               </a:defRPr>
             </a:lvl2pPr>
             <a:lvl3pPr>
+              <a:buNone/>
               <a:defRPr sz="1950" b="1">
                 <a:solidFill>
                   <a:srgbClr val="111111"/>
@@ -16367,6 +17136,7 @@
               </a:defRPr>
             </a:lvl3pPr>
             <a:lvl4pPr>
+              <a:buNone/>
               <a:defRPr sz="1950" b="1">
                 <a:solidFill>
                   <a:srgbClr val="111111"/>
@@ -16377,6 +17147,7 @@
               </a:defRPr>
             </a:lvl4pPr>
             <a:lvl5pPr>
+              <a:buNone/>
               <a:defRPr sz="1950" b="1">
                 <a:solidFill>
                   <a:srgbClr val="111111"/>
@@ -16387,6 +17158,7 @@
               </a:defRPr>
             </a:lvl5pPr>
             <a:lvl6pPr>
+              <a:buNone/>
               <a:defRPr sz="1950" b="1">
                 <a:solidFill>
                   <a:srgbClr val="111111"/>
@@ -16397,6 +17169,7 @@
               </a:defRPr>
             </a:lvl6pPr>
             <a:lvl7pPr>
+              <a:buNone/>
               <a:defRPr sz="1950" b="1">
                 <a:solidFill>
                   <a:srgbClr val="111111"/>
@@ -16407,6 +17180,7 @@
               </a:defRPr>
             </a:lvl7pPr>
             <a:lvl8pPr>
+              <a:buNone/>
               <a:defRPr sz="1950" b="1">
                 <a:solidFill>
                   <a:srgbClr val="111111"/>
@@ -16417,6 +17191,7 @@
               </a:defRPr>
             </a:lvl8pPr>
             <a:lvl9pPr>
+              <a:buNone/>
               <a:defRPr sz="1950" b="1">
                 <a:solidFill>
                   <a:srgbClr val="111111"/>
@@ -16429,6 +17204,7 @@
           </a:lstStyle>
           <a:p xmlns:a="http://schemas.openxmlformats.org/drawingml/2006/main">
             <a:pPr>
+              <a:buNone/>
               <a:defRPr sz="1950" b="1">
                 <a:solidFill>
                   <a:srgbClr val="111111"/>
@@ -16496,6 +17272,7 @@
               </a:defRPr>
             </a:defPPr>
             <a:lvl1pPr>
+              <a:buNone/>
               <a:defRPr sz="1575" b="1">
                 <a:solidFill>
                   <a:srgbClr val="111111"/>
@@ -16506,6 +17283,7 @@
               </a:defRPr>
             </a:lvl1pPr>
             <a:lvl2pPr>
+              <a:buNone/>
               <a:defRPr sz="1575" b="1">
                 <a:solidFill>
                   <a:srgbClr val="111111"/>
@@ -16516,6 +17294,7 @@
               </a:defRPr>
             </a:lvl2pPr>
             <a:lvl3pPr>
+              <a:buNone/>
               <a:defRPr sz="1575" b="1">
                 <a:solidFill>
                   <a:srgbClr val="111111"/>
@@ -16526,6 +17305,7 @@
               </a:defRPr>
             </a:lvl3pPr>
             <a:lvl4pPr>
+              <a:buNone/>
               <a:defRPr sz="1575" b="1">
                 <a:solidFill>
                   <a:srgbClr val="111111"/>
@@ -16536,6 +17316,7 @@
               </a:defRPr>
             </a:lvl4pPr>
             <a:lvl5pPr>
+              <a:buNone/>
               <a:defRPr sz="1575" b="1">
                 <a:solidFill>
                   <a:srgbClr val="111111"/>
@@ -16546,6 +17327,7 @@
               </a:defRPr>
             </a:lvl5pPr>
             <a:lvl6pPr>
+              <a:buNone/>
               <a:defRPr sz="1575" b="1">
                 <a:solidFill>
                   <a:srgbClr val="111111"/>
@@ -16556,6 +17338,7 @@
               </a:defRPr>
             </a:lvl6pPr>
             <a:lvl7pPr>
+              <a:buNone/>
               <a:defRPr sz="1575" b="1">
                 <a:solidFill>
                   <a:srgbClr val="111111"/>
@@ -16566,6 +17349,7 @@
               </a:defRPr>
             </a:lvl7pPr>
             <a:lvl8pPr>
+              <a:buNone/>
               <a:defRPr sz="1575" b="1">
                 <a:solidFill>
                   <a:srgbClr val="111111"/>
@@ -16576,6 +17360,7 @@
               </a:defRPr>
             </a:lvl8pPr>
             <a:lvl9pPr>
+              <a:buNone/>
               <a:defRPr sz="1575" b="1">
                 <a:solidFill>
                   <a:srgbClr val="111111"/>
@@ -16588,6 +17373,7 @@
           </a:lstStyle>
           <a:p xmlns:a="http://schemas.openxmlformats.org/drawingml/2006/main">
             <a:pPr>
+              <a:buNone/>
               <a:defRPr sz="1575" b="1">
                 <a:solidFill>
                   <a:srgbClr val="111111"/>
@@ -16655,6 +17441,7 @@
               </a:defRPr>
             </a:defPPr>
             <a:lvl1pPr>
+              <a:buNone/>
               <a:defRPr sz="1350" b="0">
                 <a:solidFill>
                   <a:srgbClr val="3A3A3A"/>
@@ -16665,6 +17452,7 @@
               </a:defRPr>
             </a:lvl1pPr>
             <a:lvl2pPr>
+              <a:buNone/>
               <a:defRPr sz="1350" b="0">
                 <a:solidFill>
                   <a:srgbClr val="3A3A3A"/>
@@ -16675,6 +17463,7 @@
               </a:defRPr>
             </a:lvl2pPr>
             <a:lvl3pPr>
+              <a:buNone/>
               <a:defRPr sz="1350" b="0">
                 <a:solidFill>
                   <a:srgbClr val="3A3A3A"/>
@@ -16685,6 +17474,7 @@
               </a:defRPr>
             </a:lvl3pPr>
             <a:lvl4pPr>
+              <a:buNone/>
               <a:defRPr sz="1350" b="0">
                 <a:solidFill>
                   <a:srgbClr val="3A3A3A"/>
@@ -16695,6 +17485,7 @@
               </a:defRPr>
             </a:lvl4pPr>
             <a:lvl5pPr>
+              <a:buNone/>
               <a:defRPr sz="1350" b="0">
                 <a:solidFill>
                   <a:srgbClr val="3A3A3A"/>
@@ -16705,6 +17496,7 @@
               </a:defRPr>
             </a:lvl5pPr>
             <a:lvl6pPr>
+              <a:buNone/>
               <a:defRPr sz="1350" b="0">
                 <a:solidFill>
                   <a:srgbClr val="3A3A3A"/>
@@ -16715,6 +17507,7 @@
               </a:defRPr>
             </a:lvl6pPr>
             <a:lvl7pPr>
+              <a:buNone/>
               <a:defRPr sz="1350" b="0">
                 <a:solidFill>
                   <a:srgbClr val="3A3A3A"/>
@@ -16725,6 +17518,7 @@
               </a:defRPr>
             </a:lvl7pPr>
             <a:lvl8pPr>
+              <a:buNone/>
               <a:defRPr sz="1350" b="0">
                 <a:solidFill>
                   <a:srgbClr val="3A3A3A"/>
@@ -16735,6 +17529,7 @@
               </a:defRPr>
             </a:lvl8pPr>
             <a:lvl9pPr>
+              <a:buNone/>
               <a:defRPr sz="1350" b="0">
                 <a:solidFill>
                   <a:srgbClr val="3A3A3A"/>
@@ -16747,6 +17542,7 @@
           </a:lstStyle>
           <a:p xmlns:a="http://schemas.openxmlformats.org/drawingml/2006/main">
             <a:pPr>
+              <a:buNone/>
               <a:defRPr sz="1350" b="0">
                 <a:solidFill>
                   <a:srgbClr val="3A3A3A"/>
@@ -16814,6 +17610,7 @@
               </a:defRPr>
             </a:defPPr>
             <a:lvl1pPr>
+              <a:buNone/>
               <a:defRPr sz="1950" b="1">
                 <a:solidFill>
                   <a:srgbClr val="111111"/>
@@ -16824,6 +17621,7 @@
               </a:defRPr>
             </a:lvl1pPr>
             <a:lvl2pPr>
+              <a:buNone/>
               <a:defRPr sz="1950" b="1">
                 <a:solidFill>
                   <a:srgbClr val="111111"/>
@@ -16834,6 +17632,7 @@
               </a:defRPr>
             </a:lvl2pPr>
             <a:lvl3pPr>
+              <a:buNone/>
               <a:defRPr sz="1950" b="1">
                 <a:solidFill>
                   <a:srgbClr val="111111"/>
@@ -16844,6 +17643,7 @@
               </a:defRPr>
             </a:lvl3pPr>
             <a:lvl4pPr>
+              <a:buNone/>
               <a:defRPr sz="1950" b="1">
                 <a:solidFill>
                   <a:srgbClr val="111111"/>
@@ -16854,6 +17654,7 @@
               </a:defRPr>
             </a:lvl4pPr>
             <a:lvl5pPr>
+              <a:buNone/>
               <a:defRPr sz="1950" b="1">
                 <a:solidFill>
                   <a:srgbClr val="111111"/>
@@ -16864,6 +17665,7 @@
               </a:defRPr>
             </a:lvl5pPr>
             <a:lvl6pPr>
+              <a:buNone/>
               <a:defRPr sz="1950" b="1">
                 <a:solidFill>
                   <a:srgbClr val="111111"/>
@@ -16874,6 +17676,7 @@
               </a:defRPr>
             </a:lvl6pPr>
             <a:lvl7pPr>
+              <a:buNone/>
               <a:defRPr sz="1950" b="1">
                 <a:solidFill>
                   <a:srgbClr val="111111"/>
@@ -16884,6 +17687,7 @@
               </a:defRPr>
             </a:lvl7pPr>
             <a:lvl8pPr>
+              <a:buNone/>
               <a:defRPr sz="1950" b="1">
                 <a:solidFill>
                   <a:srgbClr val="111111"/>
@@ -16894,6 +17698,7 @@
               </a:defRPr>
             </a:lvl8pPr>
             <a:lvl9pPr>
+              <a:buNone/>
               <a:defRPr sz="1950" b="1">
                 <a:solidFill>
                   <a:srgbClr val="111111"/>
@@ -16906,6 +17711,7 @@
           </a:lstStyle>
           <a:p xmlns:a="http://schemas.openxmlformats.org/drawingml/2006/main">
             <a:pPr>
+              <a:buNone/>
               <a:defRPr sz="1950" b="1">
                 <a:solidFill>
                   <a:srgbClr val="111111"/>
@@ -16973,6 +17779,7 @@
               </a:defRPr>
             </a:defPPr>
             <a:lvl1pPr>
+              <a:buNone/>
               <a:defRPr sz="1575" b="1">
                 <a:solidFill>
                   <a:srgbClr val="111111"/>
@@ -16983,6 +17790,7 @@
               </a:defRPr>
             </a:lvl1pPr>
             <a:lvl2pPr>
+              <a:buNone/>
               <a:defRPr sz="1575" b="1">
                 <a:solidFill>
                   <a:srgbClr val="111111"/>
@@ -16993,6 +17801,7 @@
               </a:defRPr>
             </a:lvl2pPr>
             <a:lvl3pPr>
+              <a:buNone/>
               <a:defRPr sz="1575" b="1">
                 <a:solidFill>
                   <a:srgbClr val="111111"/>
@@ -17003,6 +17812,7 @@
               </a:defRPr>
             </a:lvl3pPr>
             <a:lvl4pPr>
+              <a:buNone/>
               <a:defRPr sz="1575" b="1">
                 <a:solidFill>
                   <a:srgbClr val="111111"/>
@@ -17013,6 +17823,7 @@
               </a:defRPr>
             </a:lvl4pPr>
             <a:lvl5pPr>
+              <a:buNone/>
               <a:defRPr sz="1575" b="1">
                 <a:solidFill>
                   <a:srgbClr val="111111"/>
@@ -17023,6 +17834,7 @@
               </a:defRPr>
             </a:lvl5pPr>
             <a:lvl6pPr>
+              <a:buNone/>
               <a:defRPr sz="1575" b="1">
                 <a:solidFill>
                   <a:srgbClr val="111111"/>
@@ -17033,6 +17845,7 @@
               </a:defRPr>
             </a:lvl6pPr>
             <a:lvl7pPr>
+              <a:buNone/>
               <a:defRPr sz="1575" b="1">
                 <a:solidFill>
                   <a:srgbClr val="111111"/>
@@ -17043,6 +17856,7 @@
               </a:defRPr>
             </a:lvl7pPr>
             <a:lvl8pPr>
+              <a:buNone/>
               <a:defRPr sz="1575" b="1">
                 <a:solidFill>
                   <a:srgbClr val="111111"/>
@@ -17053,6 +17867,7 @@
               </a:defRPr>
             </a:lvl8pPr>
             <a:lvl9pPr>
+              <a:buNone/>
               <a:defRPr sz="1575" b="1">
                 <a:solidFill>
                   <a:srgbClr val="111111"/>
@@ -17065,6 +17880,7 @@
           </a:lstStyle>
           <a:p xmlns:a="http://schemas.openxmlformats.org/drawingml/2006/main">
             <a:pPr>
+              <a:buNone/>
               <a:defRPr sz="1575" b="1">
                 <a:solidFill>
                   <a:srgbClr val="111111"/>
@@ -17132,6 +17948,7 @@
               </a:defRPr>
             </a:defPPr>
             <a:lvl1pPr>
+              <a:buNone/>
               <a:defRPr sz="1350" b="0">
                 <a:solidFill>
                   <a:srgbClr val="3A3A3A"/>
@@ -17142,6 +17959,7 @@
               </a:defRPr>
             </a:lvl1pPr>
             <a:lvl2pPr>
+              <a:buNone/>
               <a:defRPr sz="1350" b="0">
                 <a:solidFill>
                   <a:srgbClr val="3A3A3A"/>
@@ -17152,6 +17970,7 @@
               </a:defRPr>
             </a:lvl2pPr>
             <a:lvl3pPr>
+              <a:buNone/>
               <a:defRPr sz="1350" b="0">
                 <a:solidFill>
                   <a:srgbClr val="3A3A3A"/>
@@ -17162,6 +17981,7 @@
               </a:defRPr>
             </a:lvl3pPr>
             <a:lvl4pPr>
+              <a:buNone/>
               <a:defRPr sz="1350" b="0">
                 <a:solidFill>
                   <a:srgbClr val="3A3A3A"/>
@@ -17172,6 +17992,7 @@
               </a:defRPr>
             </a:lvl4pPr>
             <a:lvl5pPr>
+              <a:buNone/>
               <a:defRPr sz="1350" b="0">
                 <a:solidFill>
                   <a:srgbClr val="3A3A3A"/>
@@ -17182,6 +18003,7 @@
               </a:defRPr>
             </a:lvl5pPr>
             <a:lvl6pPr>
+              <a:buNone/>
               <a:defRPr sz="1350" b="0">
                 <a:solidFill>
                   <a:srgbClr val="3A3A3A"/>
@@ -17192,6 +18014,7 @@
               </a:defRPr>
             </a:lvl6pPr>
             <a:lvl7pPr>
+              <a:buNone/>
               <a:defRPr sz="1350" b="0">
                 <a:solidFill>
                   <a:srgbClr val="3A3A3A"/>
@@ -17202,6 +18025,7 @@
               </a:defRPr>
             </a:lvl7pPr>
             <a:lvl8pPr>
+              <a:buNone/>
               <a:defRPr sz="1350" b="0">
                 <a:solidFill>
                   <a:srgbClr val="3A3A3A"/>
@@ -17212,6 +18036,7 @@
               </a:defRPr>
             </a:lvl8pPr>
             <a:lvl9pPr>
+              <a:buNone/>
               <a:defRPr sz="1350" b="0">
                 <a:solidFill>
                   <a:srgbClr val="3A3A3A"/>
@@ -17224,6 +18049,7 @@
           </a:lstStyle>
           <a:p xmlns:a="http://schemas.openxmlformats.org/drawingml/2006/main">
             <a:pPr>
+              <a:buNone/>
               <a:defRPr sz="1350" b="0">
                 <a:solidFill>
                   <a:srgbClr val="3A3A3A"/>
@@ -17322,6 +18148,7 @@
               </a:defRPr>
             </a:defPPr>
             <a:lvl1pPr>
+              <a:buNone/>
               <a:defRPr sz="1650" b="0">
                 <a:solidFill>
                   <a:srgbClr val="111111"/>
@@ -17332,6 +18159,7 @@
               </a:defRPr>
             </a:lvl1pPr>
             <a:lvl2pPr>
+              <a:buNone/>
               <a:defRPr sz="1650" b="0">
                 <a:solidFill>
                   <a:srgbClr val="111111"/>
@@ -17342,6 +18170,7 @@
               </a:defRPr>
             </a:lvl2pPr>
             <a:lvl3pPr>
+              <a:buNone/>
               <a:defRPr sz="1650" b="0">
                 <a:solidFill>
                   <a:srgbClr val="111111"/>
@@ -17352,6 +18181,7 @@
               </a:defRPr>
             </a:lvl3pPr>
             <a:lvl4pPr>
+              <a:buNone/>
               <a:defRPr sz="1650" b="0">
                 <a:solidFill>
                   <a:srgbClr val="111111"/>
@@ -17362,6 +18192,7 @@
               </a:defRPr>
             </a:lvl4pPr>
             <a:lvl5pPr>
+              <a:buNone/>
               <a:defRPr sz="1650" b="0">
                 <a:solidFill>
                   <a:srgbClr val="111111"/>
@@ -17372,6 +18203,7 @@
               </a:defRPr>
             </a:lvl5pPr>
             <a:lvl6pPr>
+              <a:buNone/>
               <a:defRPr sz="1650" b="0">
                 <a:solidFill>
                   <a:srgbClr val="111111"/>
@@ -17382,6 +18214,7 @@
               </a:defRPr>
             </a:lvl6pPr>
             <a:lvl7pPr>
+              <a:buNone/>
               <a:defRPr sz="1650" b="0">
                 <a:solidFill>
                   <a:srgbClr val="111111"/>
@@ -17392,6 +18225,7 @@
               </a:defRPr>
             </a:lvl7pPr>
             <a:lvl8pPr>
+              <a:buNone/>
               <a:defRPr sz="1650" b="0">
                 <a:solidFill>
                   <a:srgbClr val="111111"/>
@@ -17402,6 +18236,7 @@
               </a:defRPr>
             </a:lvl8pPr>
             <a:lvl9pPr>
+              <a:buNone/>
               <a:defRPr sz="1650" b="0">
                 <a:solidFill>
                   <a:srgbClr val="111111"/>
@@ -17414,6 +18249,7 @@
           </a:lstStyle>
           <a:p xmlns:a="http://schemas.openxmlformats.org/drawingml/2006/main">
             <a:pPr>
+              <a:buNone/>
               <a:defRPr sz="1650" b="0">
                 <a:solidFill>
                   <a:srgbClr val="111111"/>
@@ -17481,6 +18317,7 @@
               </a:defRPr>
             </a:defPPr>
             <a:lvl1pPr>
+              <a:buNone/>
               <a:defRPr sz="1500" b="1">
                 <a:solidFill>
                   <a:srgbClr val="111111"/>
@@ -17491,6 +18328,7 @@
               </a:defRPr>
             </a:lvl1pPr>
             <a:lvl2pPr>
+              <a:buNone/>
               <a:defRPr sz="1500" b="1">
                 <a:solidFill>
                   <a:srgbClr val="111111"/>
@@ -17501,6 +18339,7 @@
               </a:defRPr>
             </a:lvl2pPr>
             <a:lvl3pPr>
+              <a:buNone/>
               <a:defRPr sz="1500" b="1">
                 <a:solidFill>
                   <a:srgbClr val="111111"/>
@@ -17511,6 +18350,7 @@
               </a:defRPr>
             </a:lvl3pPr>
             <a:lvl4pPr>
+              <a:buNone/>
               <a:defRPr sz="1500" b="1">
                 <a:solidFill>
                   <a:srgbClr val="111111"/>
@@ -17521,6 +18361,7 @@
               </a:defRPr>
             </a:lvl4pPr>
             <a:lvl5pPr>
+              <a:buNone/>
               <a:defRPr sz="1500" b="1">
                 <a:solidFill>
                   <a:srgbClr val="111111"/>
@@ -17531,6 +18372,7 @@
               </a:defRPr>
             </a:lvl5pPr>
             <a:lvl6pPr>
+              <a:buNone/>
               <a:defRPr sz="1500" b="1">
                 <a:solidFill>
                   <a:srgbClr val="111111"/>
@@ -17541,6 +18383,7 @@
               </a:defRPr>
             </a:lvl6pPr>
             <a:lvl7pPr>
+              <a:buNone/>
               <a:defRPr sz="1500" b="1">
                 <a:solidFill>
                   <a:srgbClr val="111111"/>
@@ -17551,6 +18394,7 @@
               </a:defRPr>
             </a:lvl7pPr>
             <a:lvl8pPr>
+              <a:buNone/>
               <a:defRPr sz="1500" b="1">
                 <a:solidFill>
                   <a:srgbClr val="111111"/>
@@ -17561,6 +18405,7 @@
               </a:defRPr>
             </a:lvl8pPr>
             <a:lvl9pPr>
+              <a:buNone/>
               <a:defRPr sz="1500" b="1">
                 <a:solidFill>
                   <a:srgbClr val="111111"/>
@@ -17573,6 +18418,7 @@
           </a:lstStyle>
           <a:p xmlns:a="http://schemas.openxmlformats.org/drawingml/2006/main">
             <a:pPr>
+              <a:buNone/>
               <a:defRPr sz="1500" b="1">
                 <a:solidFill>
                   <a:srgbClr val="111111"/>
@@ -17600,6 +18446,1796 @@
     <p:extLst>
       <p:ext uri="{BB962C8B-B14F-4D97-AF65-F5344CB8AC3E}">
         <p14:creationId xmlns:p14="http://schemas.microsoft.com/office/powerpoint/2010/main" val="1377539463"/>
+      </p:ext>
+    </p:extLst>
+  </p:cSld>
+</p:sld>
+</file>
+
+<file path=ppt/slides/slide8.xml><?xml version="1.0" encoding="utf-8"?>
+<p:sld xmlns:p="http://schemas.openxmlformats.org/presentationml/2006/main">
+  <p:cSld>
+    <p:bg>
+      <p:bgPr>
+        <a:solidFill xmlns:a="http://schemas.openxmlformats.org/drawingml/2006/main">
+          <a:srgbClr val="FFFFFF"/>
+        </a:solidFill>
+      </p:bgPr>
+    </p:bg>
+    <p:spTree>
+      <p:nvGrpSpPr>
+        <p:cNvPr id="1" name=""/>
+        <p:cNvGrpSpPr/>
+        <p:nvPr/>
+      </p:nvGrpSpPr>
+      <p:grpSpPr>
+        <a:xfrm xmlns:a="http://schemas.openxmlformats.org/drawingml/2006/main"/>
+      </p:grpSpPr>
+      <p:sp>
+        <p:nvSpPr>
+          <p:cNvPr id="14" name="left-rail">
+            <a:extLst xmlns:a="http://schemas.openxmlformats.org/drawingml/2006/main">
+              <a:ext uri="{FF2B5EF4-FFF2-40B4-BE49-F238E27FC236}">
+                <a16:creationId xmlns:a16="http://schemas.microsoft.com/office/drawing/2014/main" id="{C4C54ED0-41D6-425D-BFD7-D3454070C355}"/>
+              </a:ext>
+            </a:extLst>
+          </p:cNvPr>
+          <p:cNvSpPr>
+            <a:spLocks xmlns:a="http://schemas.openxmlformats.org/drawingml/2006/main" noGrp="1"/>
+          </p:cNvSpPr>
+          <p:nvPr/>
+        </p:nvSpPr>
+        <p:spPr>
+          <a:xfrm xmlns:a="http://schemas.openxmlformats.org/drawingml/2006/main">
+            <a:off x="0" y="0"/>
+            <a:ext cx="152400" cy="6858000"/>
+          </a:xfrm>
+          <a:prstGeom xmlns:a="http://schemas.openxmlformats.org/drawingml/2006/main" prst="rect">
+            <a:avLst/>
+          </a:prstGeom>
+          <a:solidFill xmlns:a="http://schemas.openxmlformats.org/drawingml/2006/main">
+            <a:srgbClr val="111111"/>
+          </a:solidFill>
+          <a:ln xmlns:a="http://schemas.openxmlformats.org/drawingml/2006/main" w="0">
+            <a:noFill/>
+            <a:prstDash val="solid"/>
+          </a:ln>
+        </p:spPr>
+      </p:sp>
+      <p:sp>
+        <p:nvSpPr>
+          <p:cNvPr id="2" name="slide-title">
+            <a:extLst xmlns:a="http://schemas.openxmlformats.org/drawingml/2006/main">
+              <a:ext uri="{FF2B5EF4-FFF2-40B4-BE49-F238E27FC236}">
+                <a16:creationId xmlns:a16="http://schemas.microsoft.com/office/drawing/2014/main" id="{BBAEB73B-E89D-4A51-B5C7-DC1AC881A0A0}"/>
+              </a:ext>
+            </a:extLst>
+          </p:cNvPr>
+          <p:cNvSpPr>
+            <a:spLocks xmlns:a="http://schemas.openxmlformats.org/drawingml/2006/main" noGrp="1"/>
+          </p:cNvSpPr>
+          <p:nvPr/>
+        </p:nvSpPr>
+        <p:spPr>
+          <a:xfrm xmlns:a="http://schemas.openxmlformats.org/drawingml/2006/main">
+            <a:off x="666750" y="400050"/>
+            <a:ext cx="10668000" cy="571500"/>
+          </a:xfrm>
+          <a:prstGeom xmlns:a="http://schemas.openxmlformats.org/drawingml/2006/main" prst="rect">
+            <a:avLst/>
+          </a:prstGeom>
+          <a:noFill xmlns:a="http://schemas.openxmlformats.org/drawingml/2006/main"/>
+          <a:ln xmlns:a="http://schemas.openxmlformats.org/drawingml/2006/main" w="0">
+            <a:noFill/>
+            <a:prstDash val="solid"/>
+          </a:ln>
+        </p:spPr>
+        <p:txBody>
+          <a:bodyPr xmlns:a="http://schemas.openxmlformats.org/drawingml/2006/main" lIns="0" tIns="0" rIns="0" bIns="0"/>
+          <a:lstStyle xmlns:a="http://schemas.openxmlformats.org/drawingml/2006/main">
+            <a:defPPr algn="l">
+              <a:defRPr sz="2850" b="1">
+                <a:solidFill>
+                  <a:srgbClr val="111111"/>
+                </a:solidFill>
+                <a:latin typeface="Arial"/>
+                <a:ea typeface="Arial"/>
+                <a:cs typeface="Arial"/>
+              </a:defRPr>
+            </a:defPPr>
+            <a:lvl1pPr algn="l">
+              <a:defRPr sz="2850" b="1">
+                <a:solidFill>
+                  <a:srgbClr val="111111"/>
+                </a:solidFill>
+                <a:latin typeface="Arial"/>
+                <a:ea typeface="Arial"/>
+                <a:cs typeface="Arial"/>
+              </a:defRPr>
+            </a:lvl1pPr>
+            <a:lvl2pPr algn="l">
+              <a:defRPr sz="2850" b="1">
+                <a:solidFill>
+                  <a:srgbClr val="111111"/>
+                </a:solidFill>
+                <a:latin typeface="Arial"/>
+                <a:ea typeface="Arial"/>
+                <a:cs typeface="Arial"/>
+              </a:defRPr>
+            </a:lvl2pPr>
+            <a:lvl3pPr algn="l">
+              <a:defRPr sz="2850" b="1">
+                <a:solidFill>
+                  <a:srgbClr val="111111"/>
+                </a:solidFill>
+                <a:latin typeface="Arial"/>
+                <a:ea typeface="Arial"/>
+                <a:cs typeface="Arial"/>
+              </a:defRPr>
+            </a:lvl3pPr>
+            <a:lvl4pPr algn="l">
+              <a:defRPr sz="2850" b="1">
+                <a:solidFill>
+                  <a:srgbClr val="111111"/>
+                </a:solidFill>
+                <a:latin typeface="Arial"/>
+                <a:ea typeface="Arial"/>
+                <a:cs typeface="Arial"/>
+              </a:defRPr>
+            </a:lvl4pPr>
+            <a:lvl5pPr algn="l">
+              <a:defRPr sz="2850" b="1">
+                <a:solidFill>
+                  <a:srgbClr val="111111"/>
+                </a:solidFill>
+                <a:latin typeface="Arial"/>
+                <a:ea typeface="Arial"/>
+                <a:cs typeface="Arial"/>
+              </a:defRPr>
+            </a:lvl5pPr>
+            <a:lvl6pPr algn="l">
+              <a:defRPr sz="2850" b="1">
+                <a:solidFill>
+                  <a:srgbClr val="111111"/>
+                </a:solidFill>
+                <a:latin typeface="Arial"/>
+                <a:ea typeface="Arial"/>
+                <a:cs typeface="Arial"/>
+              </a:defRPr>
+            </a:lvl6pPr>
+            <a:lvl7pPr algn="l">
+              <a:defRPr sz="2850" b="1">
+                <a:solidFill>
+                  <a:srgbClr val="111111"/>
+                </a:solidFill>
+                <a:latin typeface="Arial"/>
+                <a:ea typeface="Arial"/>
+                <a:cs typeface="Arial"/>
+              </a:defRPr>
+            </a:lvl7pPr>
+            <a:lvl8pPr algn="l">
+              <a:defRPr sz="2850" b="1">
+                <a:solidFill>
+                  <a:srgbClr val="111111"/>
+                </a:solidFill>
+                <a:latin typeface="Arial"/>
+                <a:ea typeface="Arial"/>
+                <a:cs typeface="Arial"/>
+              </a:defRPr>
+            </a:lvl8pPr>
+            <a:lvl9pPr algn="l">
+              <a:defRPr sz="2850" b="1">
+                <a:solidFill>
+                  <a:srgbClr val="111111"/>
+                </a:solidFill>
+                <a:latin typeface="Arial"/>
+                <a:ea typeface="Arial"/>
+                <a:cs typeface="Arial"/>
+              </a:defRPr>
+            </a:lvl9pPr>
+          </a:lstStyle>
+          <a:p xmlns:a="http://schemas.openxmlformats.org/drawingml/2006/main">
+            <a:pPr algn="l">
+              <a:defRPr sz="2850" b="1">
+                <a:solidFill>
+                  <a:srgbClr val="111111"/>
+                </a:solidFill>
+                <a:latin typeface="Arial"/>
+                <a:ea typeface="Arial"/>
+                <a:cs typeface="Arial"/>
+              </a:defRPr>
+            </a:pPr>
+            <a:r>
+              <a:rPr sz="2850" b="1">
+                <a:solidFill>
+                  <a:srgbClr val="111111"/>
+                </a:solidFill>
+                <a:latin typeface="Arial"/>
+                <a:ea typeface="Arial"/>
+                <a:cs typeface="Arial"/>
+              </a:rPr>
+              <a:t>Riesgos y seguimiento</a:t>
+            </a:r>
+          </a:p>
+        </p:txBody>
+      </p:sp>
+      <p:sp>
+        <p:nvSpPr>
+          <p:cNvPr id="3" name="title-rule">
+            <a:extLst xmlns:a="http://schemas.openxmlformats.org/drawingml/2006/main">
+              <a:ext uri="{FF2B5EF4-FFF2-40B4-BE49-F238E27FC236}">
+                <a16:creationId xmlns:a16="http://schemas.microsoft.com/office/drawing/2014/main" id="{D966650D-DF02-4CF1-BB83-030F90BF756A}"/>
+              </a:ext>
+            </a:extLst>
+          </p:cNvPr>
+          <p:cNvSpPr>
+            <a:spLocks xmlns:a="http://schemas.openxmlformats.org/drawingml/2006/main" noGrp="1"/>
+          </p:cNvSpPr>
+          <p:nvPr/>
+        </p:nvSpPr>
+        <p:spPr>
+          <a:xfrm xmlns:a="http://schemas.openxmlformats.org/drawingml/2006/main">
+            <a:off x="666750" y="1076325"/>
+            <a:ext cx="10858500" cy="19050"/>
+          </a:xfrm>
+          <a:prstGeom xmlns:a="http://schemas.openxmlformats.org/drawingml/2006/main" prst="rect">
+            <a:avLst/>
+          </a:prstGeom>
+          <a:solidFill xmlns:a="http://schemas.openxmlformats.org/drawingml/2006/main">
+            <a:srgbClr val="111111"/>
+          </a:solidFill>
+          <a:ln xmlns:a="http://schemas.openxmlformats.org/drawingml/2006/main" w="0">
+            <a:noFill/>
+            <a:prstDash val="solid"/>
+          </a:ln>
+        </p:spPr>
+      </p:sp>
+      <p:sp>
+        <p:nvSpPr>
+          <p:cNvPr id="4" name="risk-heading">
+            <a:extLst xmlns:a="http://schemas.openxmlformats.org/drawingml/2006/main">
+              <a:ext uri="{FF2B5EF4-FFF2-40B4-BE49-F238E27FC236}">
+                <a16:creationId xmlns:a16="http://schemas.microsoft.com/office/drawing/2014/main" id="{26A9D80B-53F3-451A-AFC4-0C279078109A}"/>
+              </a:ext>
+            </a:extLst>
+          </p:cNvPr>
+          <p:cNvSpPr>
+            <a:spLocks xmlns:a="http://schemas.openxmlformats.org/drawingml/2006/main" noGrp="1"/>
+          </p:cNvSpPr>
+          <p:nvPr/>
+        </p:nvSpPr>
+        <p:spPr>
+          <a:xfrm xmlns:a="http://schemas.openxmlformats.org/drawingml/2006/main">
+            <a:off x="781050" y="1409700"/>
+            <a:ext cx="4762500" cy="361950"/>
+          </a:xfrm>
+          <a:prstGeom xmlns:a="http://schemas.openxmlformats.org/drawingml/2006/main" prst="rect">
+            <a:avLst/>
+          </a:prstGeom>
+          <a:noFill xmlns:a="http://schemas.openxmlformats.org/drawingml/2006/main"/>
+          <a:ln xmlns:a="http://schemas.openxmlformats.org/drawingml/2006/main" w="0">
+            <a:noFill/>
+            <a:prstDash val="solid"/>
+          </a:ln>
+        </p:spPr>
+        <p:txBody>
+          <a:bodyPr xmlns:a="http://schemas.openxmlformats.org/drawingml/2006/main" lIns="0" tIns="0" rIns="0" bIns="0"/>
+          <a:lstStyle xmlns:a="http://schemas.openxmlformats.org/drawingml/2006/main">
+            <a:defPPr algn="l">
+              <a:defRPr sz="1875" b="1">
+                <a:solidFill>
+                  <a:srgbClr val="111111"/>
+                </a:solidFill>
+                <a:latin typeface="Arial"/>
+                <a:ea typeface="Arial"/>
+                <a:cs typeface="Arial"/>
+              </a:defRPr>
+            </a:defPPr>
+            <a:lvl1pPr algn="l">
+              <a:defRPr sz="1875" b="1">
+                <a:solidFill>
+                  <a:srgbClr val="111111"/>
+                </a:solidFill>
+                <a:latin typeface="Arial"/>
+                <a:ea typeface="Arial"/>
+                <a:cs typeface="Arial"/>
+              </a:defRPr>
+            </a:lvl1pPr>
+            <a:lvl2pPr algn="l">
+              <a:defRPr sz="1875" b="1">
+                <a:solidFill>
+                  <a:srgbClr val="111111"/>
+                </a:solidFill>
+                <a:latin typeface="Arial"/>
+                <a:ea typeface="Arial"/>
+                <a:cs typeface="Arial"/>
+              </a:defRPr>
+            </a:lvl2pPr>
+            <a:lvl3pPr algn="l">
+              <a:defRPr sz="1875" b="1">
+                <a:solidFill>
+                  <a:srgbClr val="111111"/>
+                </a:solidFill>
+                <a:latin typeface="Arial"/>
+                <a:ea typeface="Arial"/>
+                <a:cs typeface="Arial"/>
+              </a:defRPr>
+            </a:lvl3pPr>
+            <a:lvl4pPr algn="l">
+              <a:defRPr sz="1875" b="1">
+                <a:solidFill>
+                  <a:srgbClr val="111111"/>
+                </a:solidFill>
+                <a:latin typeface="Arial"/>
+                <a:ea typeface="Arial"/>
+                <a:cs typeface="Arial"/>
+              </a:defRPr>
+            </a:lvl4pPr>
+            <a:lvl5pPr algn="l">
+              <a:defRPr sz="1875" b="1">
+                <a:solidFill>
+                  <a:srgbClr val="111111"/>
+                </a:solidFill>
+                <a:latin typeface="Arial"/>
+                <a:ea typeface="Arial"/>
+                <a:cs typeface="Arial"/>
+              </a:defRPr>
+            </a:lvl5pPr>
+            <a:lvl6pPr algn="l">
+              <a:defRPr sz="1875" b="1">
+                <a:solidFill>
+                  <a:srgbClr val="111111"/>
+                </a:solidFill>
+                <a:latin typeface="Arial"/>
+                <a:ea typeface="Arial"/>
+                <a:cs typeface="Arial"/>
+              </a:defRPr>
+            </a:lvl6pPr>
+            <a:lvl7pPr algn="l">
+              <a:defRPr sz="1875" b="1">
+                <a:solidFill>
+                  <a:srgbClr val="111111"/>
+                </a:solidFill>
+                <a:latin typeface="Arial"/>
+                <a:ea typeface="Arial"/>
+                <a:cs typeface="Arial"/>
+              </a:defRPr>
+            </a:lvl7pPr>
+            <a:lvl8pPr algn="l">
+              <a:defRPr sz="1875" b="1">
+                <a:solidFill>
+                  <a:srgbClr val="111111"/>
+                </a:solidFill>
+                <a:latin typeface="Arial"/>
+                <a:ea typeface="Arial"/>
+                <a:cs typeface="Arial"/>
+              </a:defRPr>
+            </a:lvl8pPr>
+            <a:lvl9pPr algn="l">
+              <a:defRPr sz="1875" b="1">
+                <a:solidFill>
+                  <a:srgbClr val="111111"/>
+                </a:solidFill>
+                <a:latin typeface="Arial"/>
+                <a:ea typeface="Arial"/>
+                <a:cs typeface="Arial"/>
+              </a:defRPr>
+            </a:lvl9pPr>
+          </a:lstStyle>
+          <a:p xmlns:a="http://schemas.openxmlformats.org/drawingml/2006/main">
+            <a:pPr algn="l">
+              <a:defRPr sz="1875" b="1">
+                <a:solidFill>
+                  <a:srgbClr val="111111"/>
+                </a:solidFill>
+                <a:latin typeface="Arial"/>
+                <a:ea typeface="Arial"/>
+                <a:cs typeface="Arial"/>
+              </a:defRPr>
+            </a:pPr>
+            <a:r>
+              <a:rPr sz="1875" b="1">
+                <a:solidFill>
+                  <a:srgbClr val="111111"/>
+                </a:solidFill>
+                <a:latin typeface="Arial"/>
+                <a:ea typeface="Arial"/>
+                <a:cs typeface="Arial"/>
+              </a:rPr>
+              <a:t>Riesgos principales</a:t>
+            </a:r>
+          </a:p>
+        </p:txBody>
+      </p:sp>
+      <p:sp>
+        <p:nvSpPr>
+          <p:cNvPr id="5" name="risk-key">
+            <a:extLst xmlns:a="http://schemas.openxmlformats.org/drawingml/2006/main">
+              <a:ext uri="{FF2B5EF4-FFF2-40B4-BE49-F238E27FC236}">
+                <a16:creationId xmlns:a16="http://schemas.microsoft.com/office/drawing/2014/main" id="{5C48C859-0A85-47CC-A748-C5E9FAECE918}"/>
+              </a:ext>
+            </a:extLst>
+          </p:cNvPr>
+          <p:cNvSpPr>
+            <a:spLocks xmlns:a="http://schemas.openxmlformats.org/drawingml/2006/main" noGrp="1"/>
+          </p:cNvSpPr>
+          <p:nvPr/>
+        </p:nvSpPr>
+        <p:spPr>
+          <a:xfrm xmlns:a="http://schemas.openxmlformats.org/drawingml/2006/main">
+            <a:off x="781050" y="1752600"/>
+            <a:ext cx="4762500" cy="228600"/>
+          </a:xfrm>
+          <a:prstGeom xmlns:a="http://schemas.openxmlformats.org/drawingml/2006/main" prst="rect">
+            <a:avLst/>
+          </a:prstGeom>
+          <a:noFill xmlns:a="http://schemas.openxmlformats.org/drawingml/2006/main"/>
+          <a:ln xmlns:a="http://schemas.openxmlformats.org/drawingml/2006/main" w="0">
+            <a:noFill/>
+            <a:prstDash val="solid"/>
+          </a:ln>
+        </p:spPr>
+        <p:txBody>
+          <a:bodyPr xmlns:a="http://schemas.openxmlformats.org/drawingml/2006/main" lIns="0" tIns="0" rIns="0" bIns="0"/>
+          <a:lstStyle xmlns:a="http://schemas.openxmlformats.org/drawingml/2006/main">
+            <a:defPPr algn="l">
+              <a:defRPr sz="1200" b="0">
+                <a:solidFill>
+                  <a:srgbClr val="555555"/>
+                </a:solidFill>
+                <a:latin typeface="Arial"/>
+                <a:ea typeface="Arial"/>
+                <a:cs typeface="Arial"/>
+              </a:defRPr>
+            </a:defPPr>
+            <a:lvl1pPr algn="l">
+              <a:defRPr sz="1200" b="0">
+                <a:solidFill>
+                  <a:srgbClr val="555555"/>
+                </a:solidFill>
+                <a:latin typeface="Arial"/>
+                <a:ea typeface="Arial"/>
+                <a:cs typeface="Arial"/>
+              </a:defRPr>
+            </a:lvl1pPr>
+            <a:lvl2pPr algn="l">
+              <a:defRPr sz="1200" b="0">
+                <a:solidFill>
+                  <a:srgbClr val="555555"/>
+                </a:solidFill>
+                <a:latin typeface="Arial"/>
+                <a:ea typeface="Arial"/>
+                <a:cs typeface="Arial"/>
+              </a:defRPr>
+            </a:lvl2pPr>
+            <a:lvl3pPr algn="l">
+              <a:defRPr sz="1200" b="0">
+                <a:solidFill>
+                  <a:srgbClr val="555555"/>
+                </a:solidFill>
+                <a:latin typeface="Arial"/>
+                <a:ea typeface="Arial"/>
+                <a:cs typeface="Arial"/>
+              </a:defRPr>
+            </a:lvl3pPr>
+            <a:lvl4pPr algn="l">
+              <a:defRPr sz="1200" b="0">
+                <a:solidFill>
+                  <a:srgbClr val="555555"/>
+                </a:solidFill>
+                <a:latin typeface="Arial"/>
+                <a:ea typeface="Arial"/>
+                <a:cs typeface="Arial"/>
+              </a:defRPr>
+            </a:lvl4pPr>
+            <a:lvl5pPr algn="l">
+              <a:defRPr sz="1200" b="0">
+                <a:solidFill>
+                  <a:srgbClr val="555555"/>
+                </a:solidFill>
+                <a:latin typeface="Arial"/>
+                <a:ea typeface="Arial"/>
+                <a:cs typeface="Arial"/>
+              </a:defRPr>
+            </a:lvl5pPr>
+            <a:lvl6pPr algn="l">
+              <a:defRPr sz="1200" b="0">
+                <a:solidFill>
+                  <a:srgbClr val="555555"/>
+                </a:solidFill>
+                <a:latin typeface="Arial"/>
+                <a:ea typeface="Arial"/>
+                <a:cs typeface="Arial"/>
+              </a:defRPr>
+            </a:lvl6pPr>
+            <a:lvl7pPr algn="l">
+              <a:defRPr sz="1200" b="0">
+                <a:solidFill>
+                  <a:srgbClr val="555555"/>
+                </a:solidFill>
+                <a:latin typeface="Arial"/>
+                <a:ea typeface="Arial"/>
+                <a:cs typeface="Arial"/>
+              </a:defRPr>
+            </a:lvl7pPr>
+            <a:lvl8pPr algn="l">
+              <a:defRPr sz="1200" b="0">
+                <a:solidFill>
+                  <a:srgbClr val="555555"/>
+                </a:solidFill>
+                <a:latin typeface="Arial"/>
+                <a:ea typeface="Arial"/>
+                <a:cs typeface="Arial"/>
+              </a:defRPr>
+            </a:lvl8pPr>
+            <a:lvl9pPr algn="l">
+              <a:defRPr sz="1200" b="0">
+                <a:solidFill>
+                  <a:srgbClr val="555555"/>
+                </a:solidFill>
+                <a:latin typeface="Arial"/>
+                <a:ea typeface="Arial"/>
+                <a:cs typeface="Arial"/>
+              </a:defRPr>
+            </a:lvl9pPr>
+          </a:lstStyle>
+          <a:p xmlns:a="http://schemas.openxmlformats.org/drawingml/2006/main">
+            <a:pPr algn="l">
+              <a:defRPr sz="1200" b="0">
+                <a:solidFill>
+                  <a:srgbClr val="555555"/>
+                </a:solidFill>
+                <a:latin typeface="Arial"/>
+                <a:ea typeface="Arial"/>
+                <a:cs typeface="Arial"/>
+              </a:defRPr>
+            </a:pPr>
+            <a:r>
+              <a:rPr sz="1200" b="0">
+                <a:solidFill>
+                  <a:srgbClr val="555555"/>
+                </a:solidFill>
+                <a:latin typeface="Arial"/>
+                <a:ea typeface="Arial"/>
+                <a:cs typeface="Arial"/>
+              </a:rPr>
+              <a:t>P = probabilidad · I = impacto</a:t>
+            </a:r>
+          </a:p>
+        </p:txBody>
+      </p:sp>
+      <p:sp>
+        <p:nvSpPr>
+          <p:cNvPr id="6" name="risk-list">
+            <a:extLst xmlns:a="http://schemas.openxmlformats.org/drawingml/2006/main">
+              <a:ext uri="{FF2B5EF4-FFF2-40B4-BE49-F238E27FC236}">
+                <a16:creationId xmlns:a16="http://schemas.microsoft.com/office/drawing/2014/main" id="{7D08D77A-EFB8-42F1-A6E5-2CDAE532FBB6}"/>
+              </a:ext>
+            </a:extLst>
+          </p:cNvPr>
+          <p:cNvSpPr>
+            <a:spLocks xmlns:a="http://schemas.openxmlformats.org/drawingml/2006/main" noGrp="1"/>
+          </p:cNvSpPr>
+          <p:nvPr/>
+        </p:nvSpPr>
+        <p:spPr>
+          <a:xfrm xmlns:a="http://schemas.openxmlformats.org/drawingml/2006/main">
+            <a:off x="781050" y="2057400"/>
+            <a:ext cx="4810125" cy="3333750"/>
+          </a:xfrm>
+          <a:prstGeom xmlns:a="http://schemas.openxmlformats.org/drawingml/2006/main" prst="rect">
+            <a:avLst/>
+          </a:prstGeom>
+          <a:noFill xmlns:a="http://schemas.openxmlformats.org/drawingml/2006/main"/>
+          <a:ln xmlns:a="http://schemas.openxmlformats.org/drawingml/2006/main" w="0">
+            <a:noFill/>
+            <a:prstDash val="solid"/>
+          </a:ln>
+        </p:spPr>
+        <p:txBody>
+          <a:bodyPr xmlns:a="http://schemas.openxmlformats.org/drawingml/2006/main" lIns="0" tIns="0" rIns="0" bIns="0"/>
+          <a:lstStyle xmlns:a="http://schemas.openxmlformats.org/drawingml/2006/main">
+            <a:defPPr algn="l">
+              <a:defRPr sz="1350" b="0">
+                <a:solidFill>
+                  <a:srgbClr val="222222"/>
+                </a:solidFill>
+                <a:latin typeface="Arial"/>
+                <a:ea typeface="Arial"/>
+                <a:cs typeface="Arial"/>
+              </a:defRPr>
+            </a:defPPr>
+            <a:lvl1pPr algn="l">
+              <a:defRPr sz="1350" b="0">
+                <a:solidFill>
+                  <a:srgbClr val="222222"/>
+                </a:solidFill>
+                <a:latin typeface="Arial"/>
+                <a:ea typeface="Arial"/>
+                <a:cs typeface="Arial"/>
+              </a:defRPr>
+            </a:lvl1pPr>
+            <a:lvl2pPr algn="l">
+              <a:defRPr sz="1350" b="0">
+                <a:solidFill>
+                  <a:srgbClr val="222222"/>
+                </a:solidFill>
+                <a:latin typeface="Arial"/>
+                <a:ea typeface="Arial"/>
+                <a:cs typeface="Arial"/>
+              </a:defRPr>
+            </a:lvl2pPr>
+            <a:lvl3pPr algn="l">
+              <a:defRPr sz="1350" b="0">
+                <a:solidFill>
+                  <a:srgbClr val="222222"/>
+                </a:solidFill>
+                <a:latin typeface="Arial"/>
+                <a:ea typeface="Arial"/>
+                <a:cs typeface="Arial"/>
+              </a:defRPr>
+            </a:lvl3pPr>
+            <a:lvl4pPr algn="l">
+              <a:defRPr sz="1350" b="0">
+                <a:solidFill>
+                  <a:srgbClr val="222222"/>
+                </a:solidFill>
+                <a:latin typeface="Arial"/>
+                <a:ea typeface="Arial"/>
+                <a:cs typeface="Arial"/>
+              </a:defRPr>
+            </a:lvl4pPr>
+            <a:lvl5pPr algn="l">
+              <a:defRPr sz="1350" b="0">
+                <a:solidFill>
+                  <a:srgbClr val="222222"/>
+                </a:solidFill>
+                <a:latin typeface="Arial"/>
+                <a:ea typeface="Arial"/>
+                <a:cs typeface="Arial"/>
+              </a:defRPr>
+            </a:lvl5pPr>
+            <a:lvl6pPr algn="l">
+              <a:defRPr sz="1350" b="0">
+                <a:solidFill>
+                  <a:srgbClr val="222222"/>
+                </a:solidFill>
+                <a:latin typeface="Arial"/>
+                <a:ea typeface="Arial"/>
+                <a:cs typeface="Arial"/>
+              </a:defRPr>
+            </a:lvl6pPr>
+            <a:lvl7pPr algn="l">
+              <a:defRPr sz="1350" b="0">
+                <a:solidFill>
+                  <a:srgbClr val="222222"/>
+                </a:solidFill>
+                <a:latin typeface="Arial"/>
+                <a:ea typeface="Arial"/>
+                <a:cs typeface="Arial"/>
+              </a:defRPr>
+            </a:lvl7pPr>
+            <a:lvl8pPr algn="l">
+              <a:defRPr sz="1350" b="0">
+                <a:solidFill>
+                  <a:srgbClr val="222222"/>
+                </a:solidFill>
+                <a:latin typeface="Arial"/>
+                <a:ea typeface="Arial"/>
+                <a:cs typeface="Arial"/>
+              </a:defRPr>
+            </a:lvl8pPr>
+            <a:lvl9pPr algn="l">
+              <a:defRPr sz="1350" b="0">
+                <a:solidFill>
+                  <a:srgbClr val="222222"/>
+                </a:solidFill>
+                <a:latin typeface="Arial"/>
+                <a:ea typeface="Arial"/>
+                <a:cs typeface="Arial"/>
+              </a:defRPr>
+            </a:lvl9pPr>
+          </a:lstStyle>
+          <a:p xmlns:a="http://schemas.openxmlformats.org/drawingml/2006/main">
+            <a:pPr algn="l">
+              <a:defRPr sz="1350" b="0">
+                <a:solidFill>
+                  <a:srgbClr val="222222"/>
+                </a:solidFill>
+                <a:latin typeface="Arial"/>
+                <a:ea typeface="Arial"/>
+                <a:cs typeface="Arial"/>
+              </a:defRPr>
+            </a:pPr>
+            <a:r>
+              <a:rPr sz="1350" b="0">
+                <a:solidFill>
+                  <a:srgbClr val="222222"/>
+                </a:solidFill>
+                <a:latin typeface="Arial"/>
+                <a:ea typeface="Arial"/>
+                <a:cs typeface="Arial"/>
+              </a:rPr>
+              <a:t>Reglas incorrectas — P media / I alta: pruebas por requisito.</a:t>
+            </a:r>
+          </a:p>
+          <a:p xmlns:a="http://schemas.openxmlformats.org/drawingml/2006/main">
+            <a:r>
+              <a:t/>
+            </a:r>
+          </a:p>
+          <a:p xmlns:a="http://schemas.openxmlformats.org/drawingml/2006/main">
+            <a:pPr algn="l">
+              <a:defRPr sz="1350" b="0">
+                <a:solidFill>
+                  <a:srgbClr val="222222"/>
+                </a:solidFill>
+                <a:latin typeface="Arial"/>
+                <a:ea typeface="Arial"/>
+                <a:cs typeface="Arial"/>
+              </a:defRPr>
+            </a:pPr>
+            <a:r>
+              <a:rPr sz="1350" b="0">
+                <a:solidFill>
+                  <a:srgbClr val="222222"/>
+                </a:solidFill>
+                <a:latin typeface="Arial"/>
+                <a:ea typeface="Arial"/>
+                <a:cs typeface="Arial"/>
+              </a:rPr>
+              <a:t>Tests débiles — P media / I alta: revisar las aserciones.</a:t>
+            </a:r>
+          </a:p>
+          <a:p xmlns:a="http://schemas.openxmlformats.org/drawingml/2006/main">
+            <a:r>
+              <a:t/>
+            </a:r>
+          </a:p>
+          <a:p xmlns:a="http://schemas.openxmlformats.org/drawingml/2006/main">
+            <a:pPr algn="l">
+              <a:defRPr sz="1350" b="0">
+                <a:solidFill>
+                  <a:srgbClr val="222222"/>
+                </a:solidFill>
+                <a:latin typeface="Arial"/>
+                <a:ea typeface="Arial"/>
+                <a:cs typeface="Arial"/>
+              </a:defRPr>
+            </a:pPr>
+            <a:r>
+              <a:rPr sz="1350" b="0">
+                <a:solidFill>
+                  <a:srgbClr val="222222"/>
+                </a:solidFill>
+                <a:latin typeface="Arial"/>
+                <a:ea typeface="Arial"/>
+                <a:cs typeface="Arial"/>
+              </a:rPr>
+              <a:t>Pérdida de código — P baja / I alta: repositorio remoto y suite final.</a:t>
+            </a:r>
+          </a:p>
+          <a:p xmlns:a="http://schemas.openxmlformats.org/drawingml/2006/main">
+            <a:r>
+              <a:t/>
+            </a:r>
+          </a:p>
+          <a:p xmlns:a="http://schemas.openxmlformats.org/drawingml/2006/main">
+            <a:pPr algn="l">
+              <a:defRPr sz="1350" b="0">
+                <a:solidFill>
+                  <a:srgbClr val="222222"/>
+                </a:solidFill>
+                <a:latin typeface="Arial"/>
+                <a:ea typeface="Arial"/>
+                <a:cs typeface="Arial"/>
+              </a:defRPr>
+            </a:pPr>
+            <a:r>
+              <a:rPr sz="1350" b="0">
+                <a:solidFill>
+                  <a:srgbClr val="222222"/>
+                </a:solidFill>
+                <a:latin typeface="Arial"/>
+                <a:ea typeface="Arial"/>
+                <a:cs typeface="Arial"/>
+              </a:rPr>
+              <a:t>Conocimiento concentrado — P media / I media: revisión compartida.</a:t>
+            </a:r>
+          </a:p>
+          <a:p xmlns:a="http://schemas.openxmlformats.org/drawingml/2006/main">
+            <a:r>
+              <a:t/>
+            </a:r>
+          </a:p>
+          <a:p xmlns:a="http://schemas.openxmlformats.org/drawingml/2006/main">
+            <a:pPr algn="l">
+              <a:defRPr sz="1350" b="0">
+                <a:solidFill>
+                  <a:srgbClr val="222222"/>
+                </a:solidFill>
+                <a:latin typeface="Arial"/>
+                <a:ea typeface="Arial"/>
+                <a:cs typeface="Arial"/>
+              </a:defRPr>
+            </a:pPr>
+            <a:r>
+              <a:rPr sz="1350" b="0">
+                <a:solidFill>
+                  <a:srgbClr val="222222"/>
+                </a:solidFill>
+                <a:latin typeface="Arial"/>
+                <a:ea typeface="Arial"/>
+                <a:cs typeface="Arial"/>
+              </a:rPr>
+              <a:t>Clave expuesta — P baja hoy / I alta: no integrar IA.</a:t>
+            </a:r>
+          </a:p>
+        </p:txBody>
+      </p:sp>
+      <p:sp>
+        <p:nvSpPr>
+          <p:cNvPr id="7" name="column-divider">
+            <a:extLst xmlns:a="http://schemas.openxmlformats.org/drawingml/2006/main">
+              <a:ext uri="{FF2B5EF4-FFF2-40B4-BE49-F238E27FC236}">
+                <a16:creationId xmlns:a16="http://schemas.microsoft.com/office/drawing/2014/main" id="{283EDB14-B899-4058-8233-3E75DE3B2BF9}"/>
+              </a:ext>
+            </a:extLst>
+          </p:cNvPr>
+          <p:cNvSpPr>
+            <a:spLocks xmlns:a="http://schemas.openxmlformats.org/drawingml/2006/main" noGrp="1"/>
+          </p:cNvSpPr>
+          <p:nvPr/>
+        </p:nvSpPr>
+        <p:spPr>
+          <a:xfrm xmlns:a="http://schemas.openxmlformats.org/drawingml/2006/main">
+            <a:off x="5953125" y="1409700"/>
+            <a:ext cx="14288" cy="4000500"/>
+          </a:xfrm>
+          <a:prstGeom xmlns:a="http://schemas.openxmlformats.org/drawingml/2006/main" prst="rect">
+            <a:avLst/>
+          </a:prstGeom>
+          <a:solidFill xmlns:a="http://schemas.openxmlformats.org/drawingml/2006/main">
+            <a:srgbClr val="B8C2C6"/>
+          </a:solidFill>
+          <a:ln xmlns:a="http://schemas.openxmlformats.org/drawingml/2006/main" w="0">
+            <a:noFill/>
+            <a:prstDash val="solid"/>
+          </a:ln>
+        </p:spPr>
+      </p:sp>
+      <p:sp>
+        <p:nvSpPr>
+          <p:cNvPr id="8" name="metrics-heading">
+            <a:extLst xmlns:a="http://schemas.openxmlformats.org/drawingml/2006/main">
+              <a:ext uri="{FF2B5EF4-FFF2-40B4-BE49-F238E27FC236}">
+                <a16:creationId xmlns:a16="http://schemas.microsoft.com/office/drawing/2014/main" id="{19626D26-2A00-46D4-B355-C9ED56911C19}"/>
+              </a:ext>
+            </a:extLst>
+          </p:cNvPr>
+          <p:cNvSpPr>
+            <a:spLocks xmlns:a="http://schemas.openxmlformats.org/drawingml/2006/main" noGrp="1"/>
+          </p:cNvSpPr>
+          <p:nvPr/>
+        </p:nvSpPr>
+        <p:spPr>
+          <a:xfrm xmlns:a="http://schemas.openxmlformats.org/drawingml/2006/main">
+            <a:off x="6334125" y="1409700"/>
+            <a:ext cx="5000625" cy="361950"/>
+          </a:xfrm>
+          <a:prstGeom xmlns:a="http://schemas.openxmlformats.org/drawingml/2006/main" prst="rect">
+            <a:avLst/>
+          </a:prstGeom>
+          <a:noFill xmlns:a="http://schemas.openxmlformats.org/drawingml/2006/main"/>
+          <a:ln xmlns:a="http://schemas.openxmlformats.org/drawingml/2006/main" w="0">
+            <a:noFill/>
+            <a:prstDash val="solid"/>
+          </a:ln>
+        </p:spPr>
+        <p:txBody>
+          <a:bodyPr xmlns:a="http://schemas.openxmlformats.org/drawingml/2006/main" lIns="0" tIns="0" rIns="0" bIns="0"/>
+          <a:lstStyle xmlns:a="http://schemas.openxmlformats.org/drawingml/2006/main">
+            <a:defPPr algn="l">
+              <a:defRPr sz="1875" b="1">
+                <a:solidFill>
+                  <a:srgbClr val="111111"/>
+                </a:solidFill>
+                <a:latin typeface="Arial"/>
+                <a:ea typeface="Arial"/>
+                <a:cs typeface="Arial"/>
+              </a:defRPr>
+            </a:defPPr>
+            <a:lvl1pPr algn="l">
+              <a:defRPr sz="1875" b="1">
+                <a:solidFill>
+                  <a:srgbClr val="111111"/>
+                </a:solidFill>
+                <a:latin typeface="Arial"/>
+                <a:ea typeface="Arial"/>
+                <a:cs typeface="Arial"/>
+              </a:defRPr>
+            </a:lvl1pPr>
+            <a:lvl2pPr algn="l">
+              <a:defRPr sz="1875" b="1">
+                <a:solidFill>
+                  <a:srgbClr val="111111"/>
+                </a:solidFill>
+                <a:latin typeface="Arial"/>
+                <a:ea typeface="Arial"/>
+                <a:cs typeface="Arial"/>
+              </a:defRPr>
+            </a:lvl2pPr>
+            <a:lvl3pPr algn="l">
+              <a:defRPr sz="1875" b="1">
+                <a:solidFill>
+                  <a:srgbClr val="111111"/>
+                </a:solidFill>
+                <a:latin typeface="Arial"/>
+                <a:ea typeface="Arial"/>
+                <a:cs typeface="Arial"/>
+              </a:defRPr>
+            </a:lvl3pPr>
+            <a:lvl4pPr algn="l">
+              <a:defRPr sz="1875" b="1">
+                <a:solidFill>
+                  <a:srgbClr val="111111"/>
+                </a:solidFill>
+                <a:latin typeface="Arial"/>
+                <a:ea typeface="Arial"/>
+                <a:cs typeface="Arial"/>
+              </a:defRPr>
+            </a:lvl4pPr>
+            <a:lvl5pPr algn="l">
+              <a:defRPr sz="1875" b="1">
+                <a:solidFill>
+                  <a:srgbClr val="111111"/>
+                </a:solidFill>
+                <a:latin typeface="Arial"/>
+                <a:ea typeface="Arial"/>
+                <a:cs typeface="Arial"/>
+              </a:defRPr>
+            </a:lvl5pPr>
+            <a:lvl6pPr algn="l">
+              <a:defRPr sz="1875" b="1">
+                <a:solidFill>
+                  <a:srgbClr val="111111"/>
+                </a:solidFill>
+                <a:latin typeface="Arial"/>
+                <a:ea typeface="Arial"/>
+                <a:cs typeface="Arial"/>
+              </a:defRPr>
+            </a:lvl6pPr>
+            <a:lvl7pPr algn="l">
+              <a:defRPr sz="1875" b="1">
+                <a:solidFill>
+                  <a:srgbClr val="111111"/>
+                </a:solidFill>
+                <a:latin typeface="Arial"/>
+                <a:ea typeface="Arial"/>
+                <a:cs typeface="Arial"/>
+              </a:defRPr>
+            </a:lvl7pPr>
+            <a:lvl8pPr algn="l">
+              <a:defRPr sz="1875" b="1">
+                <a:solidFill>
+                  <a:srgbClr val="111111"/>
+                </a:solidFill>
+                <a:latin typeface="Arial"/>
+                <a:ea typeface="Arial"/>
+                <a:cs typeface="Arial"/>
+              </a:defRPr>
+            </a:lvl8pPr>
+            <a:lvl9pPr algn="l">
+              <a:defRPr sz="1875" b="1">
+                <a:solidFill>
+                  <a:srgbClr val="111111"/>
+                </a:solidFill>
+                <a:latin typeface="Arial"/>
+                <a:ea typeface="Arial"/>
+                <a:cs typeface="Arial"/>
+              </a:defRPr>
+            </a:lvl9pPr>
+          </a:lstStyle>
+          <a:p xmlns:a="http://schemas.openxmlformats.org/drawingml/2006/main">
+            <a:pPr algn="l">
+              <a:defRPr sz="1875" b="1">
+                <a:solidFill>
+                  <a:srgbClr val="111111"/>
+                </a:solidFill>
+                <a:latin typeface="Arial"/>
+                <a:ea typeface="Arial"/>
+                <a:cs typeface="Arial"/>
+              </a:defRPr>
+            </a:pPr>
+            <a:r>
+              <a:rPr sz="1875" b="1">
+                <a:solidFill>
+                  <a:srgbClr val="111111"/>
+                </a:solidFill>
+                <a:latin typeface="Arial"/>
+                <a:ea typeface="Arial"/>
+                <a:cs typeface="Arial"/>
+              </a:rPr>
+              <a:t>Meta e indicadores</a:t>
+            </a:r>
+          </a:p>
+        </p:txBody>
+      </p:sp>
+      <p:sp>
+        <p:nvSpPr>
+          <p:cNvPr id="9" name="goal">
+            <a:extLst xmlns:a="http://schemas.openxmlformats.org/drawingml/2006/main">
+              <a:ext uri="{FF2B5EF4-FFF2-40B4-BE49-F238E27FC236}">
+                <a16:creationId xmlns:a16="http://schemas.microsoft.com/office/drawing/2014/main" id="{28615166-F47A-4FDE-8CFA-2D3CDBF02714}"/>
+              </a:ext>
+            </a:extLst>
+          </p:cNvPr>
+          <p:cNvSpPr>
+            <a:spLocks xmlns:a="http://schemas.openxmlformats.org/drawingml/2006/main" noGrp="1"/>
+          </p:cNvSpPr>
+          <p:nvPr/>
+        </p:nvSpPr>
+        <p:spPr>
+          <a:xfrm xmlns:a="http://schemas.openxmlformats.org/drawingml/2006/main">
+            <a:off x="6334125" y="1885950"/>
+            <a:ext cx="5000625" cy="495300"/>
+          </a:xfrm>
+          <a:prstGeom xmlns:a="http://schemas.openxmlformats.org/drawingml/2006/main" prst="rect">
+            <a:avLst/>
+          </a:prstGeom>
+          <a:noFill xmlns:a="http://schemas.openxmlformats.org/drawingml/2006/main"/>
+          <a:ln xmlns:a="http://schemas.openxmlformats.org/drawingml/2006/main" w="0">
+            <a:noFill/>
+            <a:prstDash val="solid"/>
+          </a:ln>
+        </p:spPr>
+        <p:txBody>
+          <a:bodyPr xmlns:a="http://schemas.openxmlformats.org/drawingml/2006/main" lIns="0" tIns="0" rIns="0" bIns="0"/>
+          <a:lstStyle xmlns:a="http://schemas.openxmlformats.org/drawingml/2006/main">
+            <a:defPPr algn="l">
+              <a:defRPr sz="1425" b="1">
+                <a:solidFill>
+                  <a:srgbClr val="222222"/>
+                </a:solidFill>
+                <a:latin typeface="Arial"/>
+                <a:ea typeface="Arial"/>
+                <a:cs typeface="Arial"/>
+              </a:defRPr>
+            </a:defPPr>
+            <a:lvl1pPr algn="l">
+              <a:defRPr sz="1425" b="1">
+                <a:solidFill>
+                  <a:srgbClr val="222222"/>
+                </a:solidFill>
+                <a:latin typeface="Arial"/>
+                <a:ea typeface="Arial"/>
+                <a:cs typeface="Arial"/>
+              </a:defRPr>
+            </a:lvl1pPr>
+            <a:lvl2pPr algn="l">
+              <a:defRPr sz="1425" b="1">
+                <a:solidFill>
+                  <a:srgbClr val="222222"/>
+                </a:solidFill>
+                <a:latin typeface="Arial"/>
+                <a:ea typeface="Arial"/>
+                <a:cs typeface="Arial"/>
+              </a:defRPr>
+            </a:lvl2pPr>
+            <a:lvl3pPr algn="l">
+              <a:defRPr sz="1425" b="1">
+                <a:solidFill>
+                  <a:srgbClr val="222222"/>
+                </a:solidFill>
+                <a:latin typeface="Arial"/>
+                <a:ea typeface="Arial"/>
+                <a:cs typeface="Arial"/>
+              </a:defRPr>
+            </a:lvl3pPr>
+            <a:lvl4pPr algn="l">
+              <a:defRPr sz="1425" b="1">
+                <a:solidFill>
+                  <a:srgbClr val="222222"/>
+                </a:solidFill>
+                <a:latin typeface="Arial"/>
+                <a:ea typeface="Arial"/>
+                <a:cs typeface="Arial"/>
+              </a:defRPr>
+            </a:lvl4pPr>
+            <a:lvl5pPr algn="l">
+              <a:defRPr sz="1425" b="1">
+                <a:solidFill>
+                  <a:srgbClr val="222222"/>
+                </a:solidFill>
+                <a:latin typeface="Arial"/>
+                <a:ea typeface="Arial"/>
+                <a:cs typeface="Arial"/>
+              </a:defRPr>
+            </a:lvl5pPr>
+            <a:lvl6pPr algn="l">
+              <a:defRPr sz="1425" b="1">
+                <a:solidFill>
+                  <a:srgbClr val="222222"/>
+                </a:solidFill>
+                <a:latin typeface="Arial"/>
+                <a:ea typeface="Arial"/>
+                <a:cs typeface="Arial"/>
+              </a:defRPr>
+            </a:lvl6pPr>
+            <a:lvl7pPr algn="l">
+              <a:defRPr sz="1425" b="1">
+                <a:solidFill>
+                  <a:srgbClr val="222222"/>
+                </a:solidFill>
+                <a:latin typeface="Arial"/>
+                <a:ea typeface="Arial"/>
+                <a:cs typeface="Arial"/>
+              </a:defRPr>
+            </a:lvl7pPr>
+            <a:lvl8pPr algn="l">
+              <a:defRPr sz="1425" b="1">
+                <a:solidFill>
+                  <a:srgbClr val="222222"/>
+                </a:solidFill>
+                <a:latin typeface="Arial"/>
+                <a:ea typeface="Arial"/>
+                <a:cs typeface="Arial"/>
+              </a:defRPr>
+            </a:lvl8pPr>
+            <a:lvl9pPr algn="l">
+              <a:defRPr sz="1425" b="1">
+                <a:solidFill>
+                  <a:srgbClr val="222222"/>
+                </a:solidFill>
+                <a:latin typeface="Arial"/>
+                <a:ea typeface="Arial"/>
+                <a:cs typeface="Arial"/>
+              </a:defRPr>
+            </a:lvl9pPr>
+          </a:lstStyle>
+          <a:p xmlns:a="http://schemas.openxmlformats.org/drawingml/2006/main">
+            <a:pPr algn="l">
+              <a:defRPr sz="1425" b="1">
+                <a:solidFill>
+                  <a:srgbClr val="222222"/>
+                </a:solidFill>
+                <a:latin typeface="Arial"/>
+                <a:ea typeface="Arial"/>
+                <a:cs typeface="Arial"/>
+              </a:defRPr>
+            </a:pPr>
+            <a:r>
+              <a:rPr sz="1425" b="1">
+                <a:solidFill>
+                  <a:srgbClr val="222222"/>
+                </a:solidFill>
+                <a:latin typeface="Arial"/>
+                <a:ea typeface="Arial"/>
+                <a:cs typeface="Arial"/>
+              </a:rPr>
+              <a:t>Meta: cumplir los requisitos obligatorios y poder verificarlo.</a:t>
+            </a:r>
+          </a:p>
+        </p:txBody>
+      </p:sp>
+      <p:sp>
+        <p:nvSpPr>
+          <p:cNvPr id="10" name="metrics-list">
+            <a:extLst xmlns:a="http://schemas.openxmlformats.org/drawingml/2006/main">
+              <a:ext uri="{FF2B5EF4-FFF2-40B4-BE49-F238E27FC236}">
+                <a16:creationId xmlns:a16="http://schemas.microsoft.com/office/drawing/2014/main" id="{528CCCC9-86E5-4FC6-890C-163E84AA0E91}"/>
+              </a:ext>
+            </a:extLst>
+          </p:cNvPr>
+          <p:cNvSpPr>
+            <a:spLocks xmlns:a="http://schemas.openxmlformats.org/drawingml/2006/main" noGrp="1"/>
+          </p:cNvSpPr>
+          <p:nvPr/>
+        </p:nvSpPr>
+        <p:spPr>
+          <a:xfrm xmlns:a="http://schemas.openxmlformats.org/drawingml/2006/main">
+            <a:off x="6334125" y="2428875"/>
+            <a:ext cx="5000625" cy="3095625"/>
+          </a:xfrm>
+          <a:prstGeom xmlns:a="http://schemas.openxmlformats.org/drawingml/2006/main" prst="rect">
+            <a:avLst/>
+          </a:prstGeom>
+          <a:noFill xmlns:a="http://schemas.openxmlformats.org/drawingml/2006/main"/>
+          <a:ln xmlns:a="http://schemas.openxmlformats.org/drawingml/2006/main" w="0">
+            <a:noFill/>
+            <a:prstDash val="solid"/>
+          </a:ln>
+        </p:spPr>
+        <p:txBody>
+          <a:bodyPr xmlns:a="http://schemas.openxmlformats.org/drawingml/2006/main" lIns="0" tIns="0" rIns="0" bIns="0"/>
+          <a:lstStyle xmlns:a="http://schemas.openxmlformats.org/drawingml/2006/main">
+            <a:defPPr algn="l">
+              <a:defRPr sz="1275" b="0">
+                <a:solidFill>
+                  <a:srgbClr val="222222"/>
+                </a:solidFill>
+                <a:latin typeface="Arial"/>
+                <a:ea typeface="Arial"/>
+                <a:cs typeface="Arial"/>
+              </a:defRPr>
+            </a:defPPr>
+            <a:lvl1pPr algn="l">
+              <a:defRPr sz="1275" b="0">
+                <a:solidFill>
+                  <a:srgbClr val="222222"/>
+                </a:solidFill>
+                <a:latin typeface="Arial"/>
+                <a:ea typeface="Arial"/>
+                <a:cs typeface="Arial"/>
+              </a:defRPr>
+            </a:lvl1pPr>
+            <a:lvl2pPr algn="l">
+              <a:defRPr sz="1275" b="0">
+                <a:solidFill>
+                  <a:srgbClr val="222222"/>
+                </a:solidFill>
+                <a:latin typeface="Arial"/>
+                <a:ea typeface="Arial"/>
+                <a:cs typeface="Arial"/>
+              </a:defRPr>
+            </a:lvl2pPr>
+            <a:lvl3pPr algn="l">
+              <a:defRPr sz="1275" b="0">
+                <a:solidFill>
+                  <a:srgbClr val="222222"/>
+                </a:solidFill>
+                <a:latin typeface="Arial"/>
+                <a:ea typeface="Arial"/>
+                <a:cs typeface="Arial"/>
+              </a:defRPr>
+            </a:lvl3pPr>
+            <a:lvl4pPr algn="l">
+              <a:defRPr sz="1275" b="0">
+                <a:solidFill>
+                  <a:srgbClr val="222222"/>
+                </a:solidFill>
+                <a:latin typeface="Arial"/>
+                <a:ea typeface="Arial"/>
+                <a:cs typeface="Arial"/>
+              </a:defRPr>
+            </a:lvl4pPr>
+            <a:lvl5pPr algn="l">
+              <a:defRPr sz="1275" b="0">
+                <a:solidFill>
+                  <a:srgbClr val="222222"/>
+                </a:solidFill>
+                <a:latin typeface="Arial"/>
+                <a:ea typeface="Arial"/>
+                <a:cs typeface="Arial"/>
+              </a:defRPr>
+            </a:lvl5pPr>
+            <a:lvl6pPr algn="l">
+              <a:defRPr sz="1275" b="0">
+                <a:solidFill>
+                  <a:srgbClr val="222222"/>
+                </a:solidFill>
+                <a:latin typeface="Arial"/>
+                <a:ea typeface="Arial"/>
+                <a:cs typeface="Arial"/>
+              </a:defRPr>
+            </a:lvl6pPr>
+            <a:lvl7pPr algn="l">
+              <a:defRPr sz="1275" b="0">
+                <a:solidFill>
+                  <a:srgbClr val="222222"/>
+                </a:solidFill>
+                <a:latin typeface="Arial"/>
+                <a:ea typeface="Arial"/>
+                <a:cs typeface="Arial"/>
+              </a:defRPr>
+            </a:lvl7pPr>
+            <a:lvl8pPr algn="l">
+              <a:defRPr sz="1275" b="0">
+                <a:solidFill>
+                  <a:srgbClr val="222222"/>
+                </a:solidFill>
+                <a:latin typeface="Arial"/>
+                <a:ea typeface="Arial"/>
+                <a:cs typeface="Arial"/>
+              </a:defRPr>
+            </a:lvl8pPr>
+            <a:lvl9pPr algn="l">
+              <a:defRPr sz="1275" b="0">
+                <a:solidFill>
+                  <a:srgbClr val="222222"/>
+                </a:solidFill>
+                <a:latin typeface="Arial"/>
+                <a:ea typeface="Arial"/>
+                <a:cs typeface="Arial"/>
+              </a:defRPr>
+            </a:lvl9pPr>
+          </a:lstStyle>
+          <a:p xmlns:a="http://schemas.openxmlformats.org/drawingml/2006/main">
+            <a:pPr algn="l">
+              <a:defRPr sz="1275" b="0">
+                <a:solidFill>
+                  <a:srgbClr val="222222"/>
+                </a:solidFill>
+                <a:latin typeface="Arial"/>
+                <a:ea typeface="Arial"/>
+                <a:cs typeface="Arial"/>
+              </a:defRPr>
+            </a:pPr>
+            <a:r>
+              <a:rPr sz="1275" b="0">
+                <a:solidFill>
+                  <a:srgbClr val="222222"/>
+                </a:solidFill>
+                <a:latin typeface="Arial"/>
+                <a:ea typeface="Arial"/>
+                <a:cs typeface="Arial"/>
+              </a:rPr>
+              <a:t>1. Cobertura: requisitos con test significativo / requisitos obligatorios × 100.</a:t>
+            </a:r>
+          </a:p>
+          <a:p xmlns:a="http://schemas.openxmlformats.org/drawingml/2006/main">
+            <a:r>
+              <a:t/>
+            </a:r>
+          </a:p>
+          <a:p xmlns:a="http://schemas.openxmlformats.org/drawingml/2006/main">
+            <a:pPr algn="l">
+              <a:defRPr sz="1275" b="0">
+                <a:solidFill>
+                  <a:srgbClr val="222222"/>
+                </a:solidFill>
+                <a:latin typeface="Arial"/>
+                <a:ea typeface="Arial"/>
+                <a:cs typeface="Arial"/>
+              </a:defRPr>
+            </a:pPr>
+            <a:r>
+              <a:rPr sz="1275" b="0">
+                <a:solidFill>
+                  <a:srgbClr val="222222"/>
+                </a:solidFill>
+                <a:latin typeface="Arial"/>
+                <a:ea typeface="Arial"/>
+                <a:cs typeface="Arial"/>
+              </a:rPr>
+              <a:t>2. Suite: pruebas aprobadas / pruebas ejecutadas × 100. Última verificación: 37/37.</a:t>
+            </a:r>
+          </a:p>
+          <a:p xmlns:a="http://schemas.openxmlformats.org/drawingml/2006/main">
+            <a:r>
+              <a:t/>
+            </a:r>
+          </a:p>
+          <a:p xmlns:a="http://schemas.openxmlformats.org/drawingml/2006/main">
+            <a:pPr algn="l">
+              <a:defRPr sz="1275" b="0">
+                <a:solidFill>
+                  <a:srgbClr val="222222"/>
+                </a:solidFill>
+                <a:latin typeface="Arial"/>
+                <a:ea typeface="Arial"/>
+                <a:cs typeface="Arial"/>
+              </a:defRPr>
+            </a:pPr>
+            <a:r>
+              <a:rPr sz="1275" b="0">
+                <a:solidFill>
+                  <a:srgbClr val="222222"/>
+                </a:solidFill>
+                <a:latin typeface="Arial"/>
+                <a:ea typeface="Arial"/>
+                <a:cs typeface="Arial"/>
+              </a:rPr>
+              <a:t>3. Revisión: cambios del núcleo revisados y probados / cambios del núcleo × 100.</a:t>
+            </a:r>
+          </a:p>
+          <a:p xmlns:a="http://schemas.openxmlformats.org/drawingml/2006/main">
+            <a:r>
+              <a:t/>
+            </a:r>
+          </a:p>
+          <a:p xmlns:a="http://schemas.openxmlformats.org/drawingml/2006/main">
+            <a:pPr algn="l">
+              <a:defRPr sz="1275" b="0">
+                <a:solidFill>
+                  <a:srgbClr val="222222"/>
+                </a:solidFill>
+                <a:latin typeface="Arial"/>
+                <a:ea typeface="Arial"/>
+                <a:cs typeface="Arial"/>
+              </a:defRPr>
+            </a:pPr>
+            <a:r>
+              <a:rPr sz="1275" b="0">
+                <a:solidFill>
+                  <a:srgbClr val="222222"/>
+                </a:solidFill>
+                <a:latin typeface="Arial"/>
+                <a:ea typeface="Arial"/>
+                <a:cs typeface="Arial"/>
+              </a:rPr>
+              <a:t>KRI: requisitos fallidos o sin prueba significativa. Alerta si el valor supera cero.</a:t>
+            </a:r>
+          </a:p>
+          <a:p xmlns:a="http://schemas.openxmlformats.org/drawingml/2006/main">
+            <a:r>
+              <a:t/>
+            </a:r>
+          </a:p>
+          <a:p xmlns:a="http://schemas.openxmlformats.org/drawingml/2006/main">
+            <a:pPr algn="l">
+              <a:defRPr sz="1275" b="0">
+                <a:solidFill>
+                  <a:srgbClr val="222222"/>
+                </a:solidFill>
+                <a:latin typeface="Arial"/>
+                <a:ea typeface="Arial"/>
+                <a:cs typeface="Arial"/>
+              </a:defRPr>
+            </a:pPr>
+            <a:r>
+              <a:rPr sz="1275" b="0">
+                <a:solidFill>
+                  <a:srgbClr val="222222"/>
+                </a:solidFill>
+                <a:latin typeface="Arial"/>
+                <a:ea typeface="Arial"/>
+                <a:cs typeface="Arial"/>
+              </a:rPr>
+              <a:t>Goodhart: no premiar la cantidad de tests; revisar qué comportamiento comprueba cada uno.</a:t>
+            </a:r>
+          </a:p>
+        </p:txBody>
+      </p:sp>
+      <p:sp>
+        <p:nvSpPr>
+          <p:cNvPr id="11" name="policy-rule">
+            <a:extLst xmlns:a="http://schemas.openxmlformats.org/drawingml/2006/main">
+              <a:ext uri="{FF2B5EF4-FFF2-40B4-BE49-F238E27FC236}">
+                <a16:creationId xmlns:a16="http://schemas.microsoft.com/office/drawing/2014/main" id="{6A3B6D69-FA58-4CDF-BE1C-47AC17F104D2}"/>
+              </a:ext>
+            </a:extLst>
+          </p:cNvPr>
+          <p:cNvSpPr>
+            <a:spLocks xmlns:a="http://schemas.openxmlformats.org/drawingml/2006/main" noGrp="1"/>
+          </p:cNvSpPr>
+          <p:nvPr/>
+        </p:nvSpPr>
+        <p:spPr>
+          <a:xfrm xmlns:a="http://schemas.openxmlformats.org/drawingml/2006/main">
+            <a:off x="781050" y="5715000"/>
+            <a:ext cx="10477500" cy="14288"/>
+          </a:xfrm>
+          <a:prstGeom xmlns:a="http://schemas.openxmlformats.org/drawingml/2006/main" prst="rect">
+            <a:avLst/>
+          </a:prstGeom>
+          <a:solidFill xmlns:a="http://schemas.openxmlformats.org/drawingml/2006/main">
+            <a:srgbClr val="B8C2C6"/>
+          </a:solidFill>
+          <a:ln xmlns:a="http://schemas.openxmlformats.org/drawingml/2006/main" w="0">
+            <a:noFill/>
+            <a:prstDash val="solid"/>
+          </a:ln>
+        </p:spPr>
+      </p:sp>
+      <p:sp>
+        <p:nvSpPr>
+          <p:cNvPr id="12" name="ai-policy">
+            <a:extLst xmlns:a="http://schemas.openxmlformats.org/drawingml/2006/main">
+              <a:ext uri="{FF2B5EF4-FFF2-40B4-BE49-F238E27FC236}">
+                <a16:creationId xmlns:a16="http://schemas.microsoft.com/office/drawing/2014/main" id="{35D81E00-D2D1-44BC-87AA-42E62C0A5767}"/>
+              </a:ext>
+            </a:extLst>
+          </p:cNvPr>
+          <p:cNvSpPr>
+            <a:spLocks xmlns:a="http://schemas.openxmlformats.org/drawingml/2006/main" noGrp="1"/>
+          </p:cNvSpPr>
+          <p:nvPr/>
+        </p:nvSpPr>
+        <p:spPr>
+          <a:xfrm xmlns:a="http://schemas.openxmlformats.org/drawingml/2006/main">
+            <a:off x="781050" y="5867400"/>
+            <a:ext cx="10382250" cy="381000"/>
+          </a:xfrm>
+          <a:prstGeom xmlns:a="http://schemas.openxmlformats.org/drawingml/2006/main" prst="rect">
+            <a:avLst/>
+          </a:prstGeom>
+          <a:noFill xmlns:a="http://schemas.openxmlformats.org/drawingml/2006/main"/>
+          <a:ln xmlns:a="http://schemas.openxmlformats.org/drawingml/2006/main" w="0">
+            <a:noFill/>
+            <a:prstDash val="solid"/>
+          </a:ln>
+        </p:spPr>
+        <p:txBody>
+          <a:bodyPr xmlns:a="http://schemas.openxmlformats.org/drawingml/2006/main" lIns="0" tIns="0" rIns="0" bIns="0"/>
+          <a:lstStyle xmlns:a="http://schemas.openxmlformats.org/drawingml/2006/main">
+            <a:defPPr algn="l">
+              <a:defRPr sz="1275" b="0">
+                <a:solidFill>
+                  <a:srgbClr val="333333"/>
+                </a:solidFill>
+                <a:latin typeface="Arial"/>
+                <a:ea typeface="Arial"/>
+                <a:cs typeface="Arial"/>
+              </a:defRPr>
+            </a:defPPr>
+            <a:lvl1pPr algn="l">
+              <a:defRPr sz="1275" b="0">
+                <a:solidFill>
+                  <a:srgbClr val="333333"/>
+                </a:solidFill>
+                <a:latin typeface="Arial"/>
+                <a:ea typeface="Arial"/>
+                <a:cs typeface="Arial"/>
+              </a:defRPr>
+            </a:lvl1pPr>
+            <a:lvl2pPr algn="l">
+              <a:defRPr sz="1275" b="0">
+                <a:solidFill>
+                  <a:srgbClr val="333333"/>
+                </a:solidFill>
+                <a:latin typeface="Arial"/>
+                <a:ea typeface="Arial"/>
+                <a:cs typeface="Arial"/>
+              </a:defRPr>
+            </a:lvl2pPr>
+            <a:lvl3pPr algn="l">
+              <a:defRPr sz="1275" b="0">
+                <a:solidFill>
+                  <a:srgbClr val="333333"/>
+                </a:solidFill>
+                <a:latin typeface="Arial"/>
+                <a:ea typeface="Arial"/>
+                <a:cs typeface="Arial"/>
+              </a:defRPr>
+            </a:lvl3pPr>
+            <a:lvl4pPr algn="l">
+              <a:defRPr sz="1275" b="0">
+                <a:solidFill>
+                  <a:srgbClr val="333333"/>
+                </a:solidFill>
+                <a:latin typeface="Arial"/>
+                <a:ea typeface="Arial"/>
+                <a:cs typeface="Arial"/>
+              </a:defRPr>
+            </a:lvl4pPr>
+            <a:lvl5pPr algn="l">
+              <a:defRPr sz="1275" b="0">
+                <a:solidFill>
+                  <a:srgbClr val="333333"/>
+                </a:solidFill>
+                <a:latin typeface="Arial"/>
+                <a:ea typeface="Arial"/>
+                <a:cs typeface="Arial"/>
+              </a:defRPr>
+            </a:lvl5pPr>
+            <a:lvl6pPr algn="l">
+              <a:defRPr sz="1275" b="0">
+                <a:solidFill>
+                  <a:srgbClr val="333333"/>
+                </a:solidFill>
+                <a:latin typeface="Arial"/>
+                <a:ea typeface="Arial"/>
+                <a:cs typeface="Arial"/>
+              </a:defRPr>
+            </a:lvl6pPr>
+            <a:lvl7pPr algn="l">
+              <a:defRPr sz="1275" b="0">
+                <a:solidFill>
+                  <a:srgbClr val="333333"/>
+                </a:solidFill>
+                <a:latin typeface="Arial"/>
+                <a:ea typeface="Arial"/>
+                <a:cs typeface="Arial"/>
+              </a:defRPr>
+            </a:lvl7pPr>
+            <a:lvl8pPr algn="l">
+              <a:defRPr sz="1275" b="0">
+                <a:solidFill>
+                  <a:srgbClr val="333333"/>
+                </a:solidFill>
+                <a:latin typeface="Arial"/>
+                <a:ea typeface="Arial"/>
+                <a:cs typeface="Arial"/>
+              </a:defRPr>
+            </a:lvl8pPr>
+            <a:lvl9pPr algn="l">
+              <a:defRPr sz="1275" b="0">
+                <a:solidFill>
+                  <a:srgbClr val="333333"/>
+                </a:solidFill>
+                <a:latin typeface="Arial"/>
+                <a:ea typeface="Arial"/>
+                <a:cs typeface="Arial"/>
+              </a:defRPr>
+            </a:lvl9pPr>
+          </a:lstStyle>
+          <a:p xmlns:a="http://schemas.openxmlformats.org/drawingml/2006/main">
+            <a:pPr algn="l">
+              <a:defRPr sz="1275" b="0">
+                <a:solidFill>
+                  <a:srgbClr val="333333"/>
+                </a:solidFill>
+                <a:latin typeface="Arial"/>
+                <a:ea typeface="Arial"/>
+                <a:cs typeface="Arial"/>
+              </a:defRPr>
+            </a:pPr>
+            <a:r>
+              <a:rPr sz="1275" b="0">
+                <a:solidFill>
+                  <a:srgbClr val="333333"/>
+                </a:solidFill>
+                <a:latin typeface="Arial"/>
+                <a:ea typeface="Arial"/>
+                <a:cs typeface="Arial"/>
+              </a:rPr>
+              <a:t>IA: no se integra en esta versión. El código asistido se entiende, revisa y prueba; no se comparten secretos ni datos personales.</a:t>
+            </a:r>
+          </a:p>
+        </p:txBody>
+      </p:sp>
+      <p:sp>
+        <p:nvSpPr>
+          <p:cNvPr id="13" name="footer">
+            <a:extLst xmlns:a="http://schemas.openxmlformats.org/drawingml/2006/main">
+              <a:ext uri="{FF2B5EF4-FFF2-40B4-BE49-F238E27FC236}">
+                <a16:creationId xmlns:a16="http://schemas.microsoft.com/office/drawing/2014/main" id="{49554790-A20B-4965-AC07-D44C9B93DB70}"/>
+              </a:ext>
+            </a:extLst>
+          </p:cNvPr>
+          <p:cNvSpPr>
+            <a:spLocks xmlns:a="http://schemas.openxmlformats.org/drawingml/2006/main" noGrp="1"/>
+          </p:cNvSpPr>
+          <p:nvPr/>
+        </p:nvSpPr>
+        <p:spPr>
+          <a:xfrm xmlns:a="http://schemas.openxmlformats.org/drawingml/2006/main">
+            <a:off x="666750" y="6429375"/>
+            <a:ext cx="6667500" cy="209550"/>
+          </a:xfrm>
+          <a:prstGeom xmlns:a="http://schemas.openxmlformats.org/drawingml/2006/main" prst="rect">
+            <a:avLst/>
+          </a:prstGeom>
+          <a:noFill xmlns:a="http://schemas.openxmlformats.org/drawingml/2006/main"/>
+          <a:ln xmlns:a="http://schemas.openxmlformats.org/drawingml/2006/main" w="0">
+            <a:noFill/>
+            <a:prstDash val="solid"/>
+          </a:ln>
+        </p:spPr>
+        <p:txBody>
+          <a:bodyPr xmlns:a="http://schemas.openxmlformats.org/drawingml/2006/main" lIns="0" tIns="0" rIns="0" bIns="0"/>
+          <a:lstStyle xmlns:a="http://schemas.openxmlformats.org/drawingml/2006/main">
+            <a:defPPr algn="l">
+              <a:defRPr sz="1050" b="1">
+                <a:solidFill>
+                  <a:srgbClr val="3A3A3A"/>
+                </a:solidFill>
+                <a:latin typeface="Arial"/>
+                <a:ea typeface="Arial"/>
+                <a:cs typeface="Arial"/>
+              </a:defRPr>
+            </a:defPPr>
+            <a:lvl1pPr algn="l">
+              <a:defRPr sz="1050" b="1">
+                <a:solidFill>
+                  <a:srgbClr val="3A3A3A"/>
+                </a:solidFill>
+                <a:latin typeface="Arial"/>
+                <a:ea typeface="Arial"/>
+                <a:cs typeface="Arial"/>
+              </a:defRPr>
+            </a:lvl1pPr>
+            <a:lvl2pPr algn="l">
+              <a:defRPr sz="1050" b="1">
+                <a:solidFill>
+                  <a:srgbClr val="3A3A3A"/>
+                </a:solidFill>
+                <a:latin typeface="Arial"/>
+                <a:ea typeface="Arial"/>
+                <a:cs typeface="Arial"/>
+              </a:defRPr>
+            </a:lvl2pPr>
+            <a:lvl3pPr algn="l">
+              <a:defRPr sz="1050" b="1">
+                <a:solidFill>
+                  <a:srgbClr val="3A3A3A"/>
+                </a:solidFill>
+                <a:latin typeface="Arial"/>
+                <a:ea typeface="Arial"/>
+                <a:cs typeface="Arial"/>
+              </a:defRPr>
+            </a:lvl3pPr>
+            <a:lvl4pPr algn="l">
+              <a:defRPr sz="1050" b="1">
+                <a:solidFill>
+                  <a:srgbClr val="3A3A3A"/>
+                </a:solidFill>
+                <a:latin typeface="Arial"/>
+                <a:ea typeface="Arial"/>
+                <a:cs typeface="Arial"/>
+              </a:defRPr>
+            </a:lvl4pPr>
+            <a:lvl5pPr algn="l">
+              <a:defRPr sz="1050" b="1">
+                <a:solidFill>
+                  <a:srgbClr val="3A3A3A"/>
+                </a:solidFill>
+                <a:latin typeface="Arial"/>
+                <a:ea typeface="Arial"/>
+                <a:cs typeface="Arial"/>
+              </a:defRPr>
+            </a:lvl5pPr>
+            <a:lvl6pPr algn="l">
+              <a:defRPr sz="1050" b="1">
+                <a:solidFill>
+                  <a:srgbClr val="3A3A3A"/>
+                </a:solidFill>
+                <a:latin typeface="Arial"/>
+                <a:ea typeface="Arial"/>
+                <a:cs typeface="Arial"/>
+              </a:defRPr>
+            </a:lvl6pPr>
+            <a:lvl7pPr algn="l">
+              <a:defRPr sz="1050" b="1">
+                <a:solidFill>
+                  <a:srgbClr val="3A3A3A"/>
+                </a:solidFill>
+                <a:latin typeface="Arial"/>
+                <a:ea typeface="Arial"/>
+                <a:cs typeface="Arial"/>
+              </a:defRPr>
+            </a:lvl7pPr>
+            <a:lvl8pPr algn="l">
+              <a:defRPr sz="1050" b="1">
+                <a:solidFill>
+                  <a:srgbClr val="3A3A3A"/>
+                </a:solidFill>
+                <a:latin typeface="Arial"/>
+                <a:ea typeface="Arial"/>
+                <a:cs typeface="Arial"/>
+              </a:defRPr>
+            </a:lvl8pPr>
+            <a:lvl9pPr algn="l">
+              <a:defRPr sz="1050" b="1">
+                <a:solidFill>
+                  <a:srgbClr val="3A3A3A"/>
+                </a:solidFill>
+                <a:latin typeface="Arial"/>
+                <a:ea typeface="Arial"/>
+                <a:cs typeface="Arial"/>
+              </a:defRPr>
+            </a:lvl9pPr>
+          </a:lstStyle>
+          <a:p xmlns:a="http://schemas.openxmlformats.org/drawingml/2006/main">
+            <a:pPr algn="l">
+              <a:defRPr sz="1050" b="1">
+                <a:solidFill>
+                  <a:srgbClr val="3A3A3A"/>
+                </a:solidFill>
+                <a:latin typeface="Arial"/>
+                <a:ea typeface="Arial"/>
+                <a:cs typeface="Arial"/>
+              </a:defRPr>
+            </a:pPr>
+            <a:r>
+              <a:rPr sz="1050" b="1">
+                <a:solidFill>
+                  <a:srgbClr val="3A3A3A"/>
+                </a:solidFill>
+                <a:latin typeface="Arial"/>
+                <a:ea typeface="Arial"/>
+                <a:cs typeface="Arial"/>
+              </a:rPr>
+              <a:t>08  ·  TPO AJEDREZ</a:t>
+            </a:r>
+          </a:p>
+        </p:txBody>
+      </p:sp>
+    </p:spTree>
+    <p:extLst>
+      <p:ext uri="{BB962C8B-B14F-4D97-AF65-F5344CB8AC3E}">
+        <p14:creationId xmlns:p14="http://schemas.microsoft.com/office/powerpoint/2010/main" val="1989017984"/>
       </p:ext>
     </p:extLst>
   </p:cSld>

--- a/TPO-Ajedrez-2026/docs/presentacion-tpo.pptx
+++ b/TPO-Ajedrez-2026/docs/presentacion-tpo.pptx
@@ -11490,7 +11490,7 @@
                 <a:ea typeface="Arial"/>
                 <a:cs typeface="Arial"/>
               </a:rPr>
-              <a:t>El diagrama completo se regenera desde el código con docs/generar_uml.py.</a:t>
+              <a:t>El generador usa una definición manual que debe mantenerse sincronizada con el código.</a:t>
             </a:r>
           </a:p>
         </p:txBody>
@@ -15184,7 +15184,7 @@
                 <a:ea typeface="Arial"/>
                 <a:cs typeface="Arial"/>
               </a:rPr>
-              <a:t>La prueba nueva encontró el defecto antes de corregirlo.</a:t>
+              <a:t>La prueba de regresión cubre esta regla.</a:t>
             </a:r>
           </a:p>
         </p:txBody>

--- a/TPO-Ajedrez-2026/docs/presentacion-tpo.pptx
+++ b/TPO-Ajedrez-2026/docs/presentacion-tpo.pptx
@@ -16,6 +16,7 @@
     <p:sldId xmlns:r="http://schemas.openxmlformats.org/officeDocument/2006/relationships" id="261" r:id="R3f731650e9fa4512"/>
     <p:sldId xmlns:r="http://schemas.openxmlformats.org/officeDocument/2006/relationships" id="262" r:id="R3c18b12e5e054791"/>
     <p:sldId xmlns:r="http://schemas.openxmlformats.org/officeDocument/2006/relationships" id="263" r:id="R691f392216224be6"/>
+    <p:sldId xmlns:ns0="http://schemas.openxmlformats.org/officeDocument/2006/relationships" id="264" ns0:id="rId14"/>
   </p:sldIdLst>
   <p:sldSz cx="12192000" cy="6858000"/>
   <p:notesSz cx="6858000" cy="9144000"/>
@@ -3963,6 +3964,10 @@
             <a:prstDash val="solid"/>
           </a:ln>
         </p:spPr>
+        <p:txBody xmlns:a="http://schemas.openxmlformats.org/drawingml/2006/main">
+          <a:bodyPr/>
+          <a:p/>
+        </p:txBody>
       </p:sp>
       <p:sp>
         <p:nvSpPr>
@@ -4332,6 +4337,10 @@
             <a:prstDash val="solid"/>
           </a:ln>
         </p:spPr>
+        <p:txBody xmlns:a="http://schemas.openxmlformats.org/drawingml/2006/main">
+          <a:bodyPr/>
+          <a:p/>
+        </p:txBody>
       </p:sp>
       <p:sp>
         <p:nvSpPr>
@@ -4646,27 +4655,14 @@
             </a:lvl9pPr>
           </a:lstStyle>
           <a:p xmlns:a="http://schemas.openxmlformats.org/drawingml/2006/main">
-            <a:pPr>
-              <a:buNone/>
-              <a:defRPr sz="1275" b="0">
-                <a:solidFill>
-                  <a:srgbClr val="C5D0D5"/>
-                </a:solidFill>
-                <a:latin typeface="Arial"/>
-                <a:ea typeface="Arial"/>
-                <a:cs typeface="Arial"/>
-              </a:defRPr>
-            </a:pPr>
             <a:r>
-              <a:rPr sz="1275" b="0">
-                <a:solidFill>
-                  <a:srgbClr val="C5D0D5"/>
-                </a:solidFill>
-                <a:latin typeface="Arial"/>
-                <a:ea typeface="Arial"/>
-                <a:cs typeface="Arial"/>
+              <a:rPr sz="1000">
+                <a:solidFill>
+                  <a:srgbClr val="AAAAAA"/>
+                </a:solidFill>
+                <a:latin typeface="Arial"/>
               </a:rPr>
-              <a:t>Proyecto académico · 2026</a:t>
+              <a:t>Proyecto académico · 2026 · Grupo de seis con autorización informada por el grupo</a:t>
             </a:r>
           </a:p>
         </p:txBody>
@@ -7950,6 +7946,10 @@
             <a:prstDash val="solid"/>
           </a:ln>
         </p:spPr>
+        <p:txBody xmlns:a="http://schemas.openxmlformats.org/drawingml/2006/main">
+          <a:bodyPr/>
+          <a:p/>
+        </p:txBody>
       </p:sp>
       <p:sp>
         <p:nvSpPr>
@@ -8150,6 +8150,10 @@
             <a:prstDash val="solid"/>
           </a:ln>
         </p:spPr>
+        <p:txBody xmlns:a="http://schemas.openxmlformats.org/drawingml/2006/main">
+          <a:bodyPr/>
+          <a:p/>
+        </p:txBody>
       </p:sp>
       <p:sp>
         <p:nvSpPr>
@@ -8521,6 +8525,10 @@
             <a:prstDash val="solid"/>
           </a:ln>
         </p:spPr>
+        <p:txBody xmlns:a="http://schemas.openxmlformats.org/drawingml/2006/main">
+          <a:bodyPr/>
+          <a:p/>
+        </p:txBody>
       </p:sp>
       <p:sp>
         <p:nvSpPr>
@@ -8916,6 +8924,10 @@
             <a:prstDash val="solid"/>
           </a:ln>
         </p:spPr>
+        <p:txBody xmlns:a="http://schemas.openxmlformats.org/drawingml/2006/main">
+          <a:bodyPr/>
+          <a:p/>
+        </p:txBody>
       </p:sp>
       <p:sp>
         <p:nvSpPr>
@@ -9311,6 +9323,10 @@
             <a:prstDash val="solid"/>
           </a:ln>
         </p:spPr>
+        <p:txBody xmlns:a="http://schemas.openxmlformats.org/drawingml/2006/main">
+          <a:bodyPr/>
+          <a:p/>
+        </p:txBody>
       </p:sp>
       <p:sp>
         <p:nvSpPr>
@@ -9706,6 +9722,10 @@
             <a:prstDash val="solid"/>
           </a:ln>
         </p:spPr>
+        <p:txBody xmlns:a="http://schemas.openxmlformats.org/drawingml/2006/main">
+          <a:bodyPr/>
+          <a:p/>
+        </p:txBody>
       </p:sp>
       <p:sp>
         <p:nvSpPr>
@@ -10101,6 +10121,10 @@
             <a:prstDash val="solid"/>
           </a:ln>
         </p:spPr>
+        <p:txBody xmlns:a="http://schemas.openxmlformats.org/drawingml/2006/main">
+          <a:bodyPr/>
+          <a:p/>
+        </p:txBody>
       </p:sp>
       <p:sp>
         <p:nvSpPr>
@@ -10494,37 +10518,10 @@
             <a:prstDash val="solid"/>
           </a:ln>
         </p:spPr>
-      </p:sp>
-      <p:sp>
-        <p:nvSpPr>
-          <p:cNvPr id="22" name="">
-            <a:extLst xmlns:a="http://schemas.openxmlformats.org/drawingml/2006/main">
-              <a:ext uri="{FF2B5EF4-FFF2-40B4-BE49-F238E27FC236}">
-                <a16:creationId xmlns:a16="http://schemas.microsoft.com/office/drawing/2014/main" id="{652AFDF7-F660-4CBA-A4EB-12F3EEED1266}"/>
-              </a:ext>
-            </a:extLst>
-          </p:cNvPr>
-          <p:cNvSpPr>
-            <a:spLocks xmlns:a="http://schemas.openxmlformats.org/drawingml/2006/main" noGrp="1"/>
-          </p:cNvSpPr>
-          <p:nvPr/>
-        </p:nvSpPr>
-        <p:spPr>
-          <a:xfrm xmlns:a="http://schemas.openxmlformats.org/drawingml/2006/main">
-            <a:off x="7524750" y="2686050"/>
-            <a:ext cx="933450" cy="28575"/>
-          </a:xfrm>
-          <a:prstGeom xmlns:a="http://schemas.openxmlformats.org/drawingml/2006/main" prst="rect">
-            <a:avLst/>
-          </a:prstGeom>
-          <a:solidFill xmlns:a="http://schemas.openxmlformats.org/drawingml/2006/main">
-            <a:srgbClr val="555555"/>
-          </a:solidFill>
-          <a:ln xmlns:a="http://schemas.openxmlformats.org/drawingml/2006/main" w="0">
-            <a:noFill/>
-            <a:prstDash val="solid"/>
-          </a:ln>
-        </p:spPr>
+        <p:txBody xmlns:a="http://schemas.openxmlformats.org/drawingml/2006/main">
+          <a:bodyPr/>
+          <a:p/>
+        </p:txBody>
       </p:sp>
       <p:sp>
         <p:nvSpPr>
@@ -10556,6 +10553,10 @@
             <a:prstDash val="solid"/>
           </a:ln>
         </p:spPr>
+        <p:txBody xmlns:a="http://schemas.openxmlformats.org/drawingml/2006/main">
+          <a:bodyPr/>
+          <a:p/>
+        </p:txBody>
       </p:sp>
       <p:sp>
         <p:nvSpPr>
@@ -10587,6 +10588,10 @@
             <a:prstDash val="solid"/>
           </a:ln>
         </p:spPr>
+        <p:txBody xmlns:a="http://schemas.openxmlformats.org/drawingml/2006/main">
+          <a:bodyPr/>
+          <a:p/>
+        </p:txBody>
       </p:sp>
       <p:sp>
         <p:nvSpPr>
@@ -10618,6 +10623,10 @@
             <a:prstDash val="solid"/>
           </a:ln>
         </p:spPr>
+        <p:txBody xmlns:a="http://schemas.openxmlformats.org/drawingml/2006/main">
+          <a:bodyPr/>
+          <a:p/>
+        </p:txBody>
       </p:sp>
       <p:sp>
         <p:nvSpPr>
@@ -10649,6 +10658,10 @@
             <a:prstDash val="solid"/>
           </a:ln>
         </p:spPr>
+        <p:txBody xmlns:a="http://schemas.openxmlformats.org/drawingml/2006/main">
+          <a:bodyPr/>
+          <a:p/>
+        </p:txBody>
       </p:sp>
       <p:sp>
         <p:nvSpPr>
@@ -10667,175 +10680,6 @@
         <p:spPr>
           <a:xfrm xmlns:a="http://schemas.openxmlformats.org/drawingml/2006/main">
             <a:off x="3981450" y="2447925"/>
-            <a:ext cx="457200" cy="209550"/>
-          </a:xfrm>
-          <a:prstGeom xmlns:a="http://schemas.openxmlformats.org/drawingml/2006/main" prst="rect">
-            <a:avLst/>
-          </a:prstGeom>
-          <a:noFill xmlns:a="http://schemas.openxmlformats.org/drawingml/2006/main"/>
-          <a:ln xmlns:a="http://schemas.openxmlformats.org/drawingml/2006/main" w="0">
-            <a:noFill/>
-            <a:prstDash val="solid"/>
-          </a:ln>
-        </p:spPr>
-        <p:txBody>
-          <a:bodyPr xmlns:a="http://schemas.openxmlformats.org/drawingml/2006/main" wrap="square" lIns="0" tIns="0" rIns="0" bIns="0" anchor="ctr">
-            <a:normAutofit fontScale="100000"/>
-          </a:bodyPr>
-          <a:lstStyle xmlns:a="http://schemas.openxmlformats.org/drawingml/2006/main">
-            <a:defPPr>
-              <a:defRPr sz="1125" b="1">
-                <a:solidFill>
-                  <a:srgbClr val="3A3A3A"/>
-                </a:solidFill>
-                <a:latin typeface="Arial"/>
-                <a:ea typeface="Arial"/>
-                <a:cs typeface="Arial"/>
-              </a:defRPr>
-            </a:defPPr>
-            <a:lvl1pPr>
-              <a:buNone/>
-              <a:defRPr sz="1125" b="1">
-                <a:solidFill>
-                  <a:srgbClr val="3A3A3A"/>
-                </a:solidFill>
-                <a:latin typeface="Arial"/>
-                <a:ea typeface="Arial"/>
-                <a:cs typeface="Arial"/>
-              </a:defRPr>
-            </a:lvl1pPr>
-            <a:lvl2pPr>
-              <a:buNone/>
-              <a:defRPr sz="1125" b="1">
-                <a:solidFill>
-                  <a:srgbClr val="3A3A3A"/>
-                </a:solidFill>
-                <a:latin typeface="Arial"/>
-                <a:ea typeface="Arial"/>
-                <a:cs typeface="Arial"/>
-              </a:defRPr>
-            </a:lvl2pPr>
-            <a:lvl3pPr>
-              <a:buNone/>
-              <a:defRPr sz="1125" b="1">
-                <a:solidFill>
-                  <a:srgbClr val="3A3A3A"/>
-                </a:solidFill>
-                <a:latin typeface="Arial"/>
-                <a:ea typeface="Arial"/>
-                <a:cs typeface="Arial"/>
-              </a:defRPr>
-            </a:lvl3pPr>
-            <a:lvl4pPr>
-              <a:buNone/>
-              <a:defRPr sz="1125" b="1">
-                <a:solidFill>
-                  <a:srgbClr val="3A3A3A"/>
-                </a:solidFill>
-                <a:latin typeface="Arial"/>
-                <a:ea typeface="Arial"/>
-                <a:cs typeface="Arial"/>
-              </a:defRPr>
-            </a:lvl4pPr>
-            <a:lvl5pPr>
-              <a:buNone/>
-              <a:defRPr sz="1125" b="1">
-                <a:solidFill>
-                  <a:srgbClr val="3A3A3A"/>
-                </a:solidFill>
-                <a:latin typeface="Arial"/>
-                <a:ea typeface="Arial"/>
-                <a:cs typeface="Arial"/>
-              </a:defRPr>
-            </a:lvl5pPr>
-            <a:lvl6pPr>
-              <a:buNone/>
-              <a:defRPr sz="1125" b="1">
-                <a:solidFill>
-                  <a:srgbClr val="3A3A3A"/>
-                </a:solidFill>
-                <a:latin typeface="Arial"/>
-                <a:ea typeface="Arial"/>
-                <a:cs typeface="Arial"/>
-              </a:defRPr>
-            </a:lvl6pPr>
-            <a:lvl7pPr>
-              <a:buNone/>
-              <a:defRPr sz="1125" b="1">
-                <a:solidFill>
-                  <a:srgbClr val="3A3A3A"/>
-                </a:solidFill>
-                <a:latin typeface="Arial"/>
-                <a:ea typeface="Arial"/>
-                <a:cs typeface="Arial"/>
-              </a:defRPr>
-            </a:lvl7pPr>
-            <a:lvl8pPr>
-              <a:buNone/>
-              <a:defRPr sz="1125" b="1">
-                <a:solidFill>
-                  <a:srgbClr val="3A3A3A"/>
-                </a:solidFill>
-                <a:latin typeface="Arial"/>
-                <a:ea typeface="Arial"/>
-                <a:cs typeface="Arial"/>
-              </a:defRPr>
-            </a:lvl8pPr>
-            <a:lvl9pPr>
-              <a:buNone/>
-              <a:defRPr sz="1125" b="1">
-                <a:solidFill>
-                  <a:srgbClr val="3A3A3A"/>
-                </a:solidFill>
-                <a:latin typeface="Arial"/>
-                <a:ea typeface="Arial"/>
-                <a:cs typeface="Arial"/>
-              </a:defRPr>
-            </a:lvl9pPr>
-          </a:lstStyle>
-          <a:p xmlns:a="http://schemas.openxmlformats.org/drawingml/2006/main">
-            <a:pPr>
-              <a:buNone/>
-              <a:defRPr sz="1125" b="1">
-                <a:solidFill>
-                  <a:srgbClr val="3A3A3A"/>
-                </a:solidFill>
-                <a:latin typeface="Arial"/>
-                <a:ea typeface="Arial"/>
-                <a:cs typeface="Arial"/>
-              </a:defRPr>
-            </a:pPr>
-            <a:r>
-              <a:rPr sz="1125" b="1">
-                <a:solidFill>
-                  <a:srgbClr val="3A3A3A"/>
-                </a:solidFill>
-                <a:latin typeface="Arial"/>
-                <a:ea typeface="Arial"/>
-                <a:cs typeface="Arial"/>
-              </a:rPr>
-              <a:t>usa</a:t>
-            </a:r>
-          </a:p>
-        </p:txBody>
-      </p:sp>
-      <p:sp>
-        <p:nvSpPr>
-          <p:cNvPr id="28" name="">
-            <a:extLst xmlns:a="http://schemas.openxmlformats.org/drawingml/2006/main">
-              <a:ext uri="{FF2B5EF4-FFF2-40B4-BE49-F238E27FC236}">
-                <a16:creationId xmlns:a16="http://schemas.microsoft.com/office/drawing/2014/main" id="{249B90B9-0730-426C-BC69-3DBD1291F1A5}"/>
-              </a:ext>
-            </a:extLst>
-          </p:cNvPr>
-          <p:cNvSpPr>
-            <a:spLocks xmlns:a="http://schemas.openxmlformats.org/drawingml/2006/main" noGrp="1"/>
-          </p:cNvSpPr>
-          <p:nvPr/>
-        </p:nvSpPr>
-        <p:spPr>
-          <a:xfrm xmlns:a="http://schemas.openxmlformats.org/drawingml/2006/main">
-            <a:off x="7762875" y="2447925"/>
             <a:ext cx="457200" cy="209550"/>
           </a:xfrm>
           <a:prstGeom xmlns:a="http://schemas.openxmlformats.org/drawingml/2006/main" prst="rect">
@@ -11491,6 +11335,219 @@
                 <a:cs typeface="Arial"/>
               </a:rPr>
               <a:t>El generador usa una definición manual que debe mantenerse sincronizada con el código.</a:t>
+            </a:r>
+          </a:p>
+        </p:txBody>
+      </p:sp>
+      <p:sp xmlns:a="http://schemas.openxmlformats.org/drawingml/2006/main">
+        <p:nvSpPr>
+          <p:cNvPr id="33" name="Rectangle 32"/>
+          <p:cNvSpPr/>
+          <p:nvPr/>
+        </p:nvSpPr>
+        <p:spPr>
+          <a:xfrm>
+            <a:off x="2295144" y="1920240"/>
+            <a:ext cx="18288" cy="155448"/>
+          </a:xfrm>
+          <a:prstGeom prst="rect">
+            <a:avLst/>
+          </a:prstGeom>
+          <a:solidFill>
+            <a:srgbClr val="555555"/>
+          </a:solidFill>
+          <a:ln>
+            <a:noFill/>
+          </a:ln>
+        </p:spPr>
+        <p:style>
+          <a:lnRef idx="1">
+            <a:schemeClr val="accent1"/>
+          </a:lnRef>
+          <a:fillRef idx="3">
+            <a:schemeClr val="accent1"/>
+          </a:fillRef>
+          <a:effectRef idx="2">
+            <a:schemeClr val="accent1"/>
+          </a:effectRef>
+          <a:fontRef idx="minor">
+            <a:schemeClr val="lt1"/>
+          </a:fontRef>
+        </p:style>
+        <p:txBody>
+          <a:bodyPr rtlCol="0" anchor="ctr"/>
+          <a:lstStyle/>
+          <a:p>
+            <a:pPr algn="ctr"/>
+          </a:p>
+        </p:txBody>
+      </p:sp>
+      <p:sp xmlns:a="http://schemas.openxmlformats.org/drawingml/2006/main">
+        <p:nvSpPr>
+          <p:cNvPr id="34" name="Rectangle 33"/>
+          <p:cNvSpPr/>
+          <p:nvPr/>
+        </p:nvSpPr>
+        <p:spPr>
+          <a:xfrm>
+            <a:off x="2295144" y="1920240"/>
+            <a:ext cx="5376672" cy="18288"/>
+          </a:xfrm>
+          <a:prstGeom prst="rect">
+            <a:avLst/>
+          </a:prstGeom>
+          <a:solidFill>
+            <a:srgbClr val="555555"/>
+          </a:solidFill>
+          <a:ln>
+            <a:noFill/>
+          </a:ln>
+        </p:spPr>
+        <p:style>
+          <a:lnRef idx="1">
+            <a:schemeClr val="accent1"/>
+          </a:lnRef>
+          <a:fillRef idx="3">
+            <a:schemeClr val="accent1"/>
+          </a:fillRef>
+          <a:effectRef idx="2">
+            <a:schemeClr val="accent1"/>
+          </a:effectRef>
+          <a:fontRef idx="minor">
+            <a:schemeClr val="lt1"/>
+          </a:fontRef>
+        </p:style>
+        <p:txBody>
+          <a:bodyPr rtlCol="0" anchor="ctr"/>
+          <a:lstStyle/>
+          <a:p>
+            <a:pPr algn="ctr"/>
+          </a:p>
+        </p:txBody>
+      </p:sp>
+      <p:sp xmlns:a="http://schemas.openxmlformats.org/drawingml/2006/main">
+        <p:nvSpPr>
+          <p:cNvPr id="35" name="Rectangle 34"/>
+          <p:cNvSpPr/>
+          <p:nvPr/>
+        </p:nvSpPr>
+        <p:spPr>
+          <a:xfrm>
+            <a:off x="8165592" y="1920240"/>
+            <a:ext cx="1719072" cy="18288"/>
+          </a:xfrm>
+          <a:prstGeom prst="rect">
+            <a:avLst/>
+          </a:prstGeom>
+          <a:solidFill>
+            <a:srgbClr val="555555"/>
+          </a:solidFill>
+          <a:ln>
+            <a:noFill/>
+          </a:ln>
+        </p:spPr>
+        <p:style>
+          <a:lnRef idx="1">
+            <a:schemeClr val="accent1"/>
+          </a:lnRef>
+          <a:fillRef idx="3">
+            <a:schemeClr val="accent1"/>
+          </a:fillRef>
+          <a:effectRef idx="2">
+            <a:schemeClr val="accent1"/>
+          </a:effectRef>
+          <a:fontRef idx="minor">
+            <a:schemeClr val="lt1"/>
+          </a:fontRef>
+        </p:style>
+        <p:txBody>
+          <a:bodyPr rtlCol="0" anchor="ctr"/>
+          <a:lstStyle/>
+          <a:p>
+            <a:pPr algn="ctr"/>
+          </a:p>
+        </p:txBody>
+      </p:sp>
+      <p:sp xmlns:a="http://schemas.openxmlformats.org/drawingml/2006/main">
+        <p:nvSpPr>
+          <p:cNvPr id="36" name="Rectangle 35"/>
+          <p:cNvSpPr/>
+          <p:nvPr/>
+        </p:nvSpPr>
+        <p:spPr>
+          <a:xfrm>
+            <a:off x="9866376" y="1920240"/>
+            <a:ext cx="18288" cy="155448"/>
+          </a:xfrm>
+          <a:prstGeom prst="rect">
+            <a:avLst/>
+          </a:prstGeom>
+          <a:solidFill>
+            <a:srgbClr val="555555"/>
+          </a:solidFill>
+          <a:ln>
+            <a:noFill/>
+          </a:ln>
+        </p:spPr>
+        <p:style>
+          <a:lnRef idx="1">
+            <a:schemeClr val="accent1"/>
+          </a:lnRef>
+          <a:fillRef idx="3">
+            <a:schemeClr val="accent1"/>
+          </a:fillRef>
+          <a:effectRef idx="2">
+            <a:schemeClr val="accent1"/>
+          </a:effectRef>
+          <a:fontRef idx="minor">
+            <a:schemeClr val="lt1"/>
+          </a:fontRef>
+        </p:style>
+        <p:txBody>
+          <a:bodyPr rtlCol="0" anchor="ctr"/>
+          <a:lstStyle/>
+          <a:p>
+            <a:pPr algn="ctr"/>
+          </a:p>
+        </p:txBody>
+      </p:sp>
+      <p:sp xmlns:a="http://schemas.openxmlformats.org/drawingml/2006/main">
+        <p:nvSpPr>
+          <p:cNvPr id="37" name="TextBox 36"/>
+          <p:cNvSpPr txBox="1"/>
+          <p:nvPr/>
+        </p:nvSpPr>
+        <p:spPr>
+          <a:xfrm>
+            <a:off x="7662672" y="1901952"/>
+            <a:ext cx="502920" cy="201168"/>
+          </a:xfrm>
+          <a:prstGeom prst="rect">
+            <a:avLst/>
+          </a:prstGeom>
+          <a:solidFill>
+            <a:srgbClr val="FFFFFF"/>
+          </a:solidFill>
+          <a:ln>
+            <a:noFill/>
+          </a:ln>
+        </p:spPr>
+        <p:txBody>
+          <a:bodyPr wrap="square" lIns="0" rIns="0" tIns="0" bIns="0">
+            <a:spAutoFit/>
+          </a:bodyPr>
+          <a:lstStyle/>
+          <a:p>
+            <a:pPr>
+              <a:defRPr sz="1000" b="0">
+                <a:solidFill>
+                  <a:srgbClr val="555555"/>
+                </a:solidFill>
+                <a:latin typeface="Arial"/>
+              </a:defRPr>
+            </a:pPr>
+            <a:r>
+              <a:t>usa</a:t>
             </a:r>
           </a:p>
         </p:txBody>
@@ -18692,1391 +18749,6 @@
       </p:sp>
       <p:sp>
         <p:nvSpPr>
-          <p:cNvPr id="4" name="risk-heading">
-            <a:extLst xmlns:a="http://schemas.openxmlformats.org/drawingml/2006/main">
-              <a:ext uri="{FF2B5EF4-FFF2-40B4-BE49-F238E27FC236}">
-                <a16:creationId xmlns:a16="http://schemas.microsoft.com/office/drawing/2014/main" id="{26A9D80B-53F3-451A-AFC4-0C279078109A}"/>
-              </a:ext>
-            </a:extLst>
-          </p:cNvPr>
-          <p:cNvSpPr>
-            <a:spLocks xmlns:a="http://schemas.openxmlformats.org/drawingml/2006/main" noGrp="1"/>
-          </p:cNvSpPr>
-          <p:nvPr/>
-        </p:nvSpPr>
-        <p:spPr>
-          <a:xfrm xmlns:a="http://schemas.openxmlformats.org/drawingml/2006/main">
-            <a:off x="781050" y="1409700"/>
-            <a:ext cx="4762500" cy="361950"/>
-          </a:xfrm>
-          <a:prstGeom xmlns:a="http://schemas.openxmlformats.org/drawingml/2006/main" prst="rect">
-            <a:avLst/>
-          </a:prstGeom>
-          <a:noFill xmlns:a="http://schemas.openxmlformats.org/drawingml/2006/main"/>
-          <a:ln xmlns:a="http://schemas.openxmlformats.org/drawingml/2006/main" w="0">
-            <a:noFill/>
-            <a:prstDash val="solid"/>
-          </a:ln>
-        </p:spPr>
-        <p:txBody>
-          <a:bodyPr xmlns:a="http://schemas.openxmlformats.org/drawingml/2006/main" lIns="0" tIns="0" rIns="0" bIns="0"/>
-          <a:lstStyle xmlns:a="http://schemas.openxmlformats.org/drawingml/2006/main">
-            <a:defPPr algn="l">
-              <a:defRPr sz="1875" b="1">
-                <a:solidFill>
-                  <a:srgbClr val="111111"/>
-                </a:solidFill>
-                <a:latin typeface="Arial"/>
-                <a:ea typeface="Arial"/>
-                <a:cs typeface="Arial"/>
-              </a:defRPr>
-            </a:defPPr>
-            <a:lvl1pPr algn="l">
-              <a:defRPr sz="1875" b="1">
-                <a:solidFill>
-                  <a:srgbClr val="111111"/>
-                </a:solidFill>
-                <a:latin typeface="Arial"/>
-                <a:ea typeface="Arial"/>
-                <a:cs typeface="Arial"/>
-              </a:defRPr>
-            </a:lvl1pPr>
-            <a:lvl2pPr algn="l">
-              <a:defRPr sz="1875" b="1">
-                <a:solidFill>
-                  <a:srgbClr val="111111"/>
-                </a:solidFill>
-                <a:latin typeface="Arial"/>
-                <a:ea typeface="Arial"/>
-                <a:cs typeface="Arial"/>
-              </a:defRPr>
-            </a:lvl2pPr>
-            <a:lvl3pPr algn="l">
-              <a:defRPr sz="1875" b="1">
-                <a:solidFill>
-                  <a:srgbClr val="111111"/>
-                </a:solidFill>
-                <a:latin typeface="Arial"/>
-                <a:ea typeface="Arial"/>
-                <a:cs typeface="Arial"/>
-              </a:defRPr>
-            </a:lvl3pPr>
-            <a:lvl4pPr algn="l">
-              <a:defRPr sz="1875" b="1">
-                <a:solidFill>
-                  <a:srgbClr val="111111"/>
-                </a:solidFill>
-                <a:latin typeface="Arial"/>
-                <a:ea typeface="Arial"/>
-                <a:cs typeface="Arial"/>
-              </a:defRPr>
-            </a:lvl4pPr>
-            <a:lvl5pPr algn="l">
-              <a:defRPr sz="1875" b="1">
-                <a:solidFill>
-                  <a:srgbClr val="111111"/>
-                </a:solidFill>
-                <a:latin typeface="Arial"/>
-                <a:ea typeface="Arial"/>
-                <a:cs typeface="Arial"/>
-              </a:defRPr>
-            </a:lvl5pPr>
-            <a:lvl6pPr algn="l">
-              <a:defRPr sz="1875" b="1">
-                <a:solidFill>
-                  <a:srgbClr val="111111"/>
-                </a:solidFill>
-                <a:latin typeface="Arial"/>
-                <a:ea typeface="Arial"/>
-                <a:cs typeface="Arial"/>
-              </a:defRPr>
-            </a:lvl6pPr>
-            <a:lvl7pPr algn="l">
-              <a:defRPr sz="1875" b="1">
-                <a:solidFill>
-                  <a:srgbClr val="111111"/>
-                </a:solidFill>
-                <a:latin typeface="Arial"/>
-                <a:ea typeface="Arial"/>
-                <a:cs typeface="Arial"/>
-              </a:defRPr>
-            </a:lvl7pPr>
-            <a:lvl8pPr algn="l">
-              <a:defRPr sz="1875" b="1">
-                <a:solidFill>
-                  <a:srgbClr val="111111"/>
-                </a:solidFill>
-                <a:latin typeface="Arial"/>
-                <a:ea typeface="Arial"/>
-                <a:cs typeface="Arial"/>
-              </a:defRPr>
-            </a:lvl8pPr>
-            <a:lvl9pPr algn="l">
-              <a:defRPr sz="1875" b="1">
-                <a:solidFill>
-                  <a:srgbClr val="111111"/>
-                </a:solidFill>
-                <a:latin typeface="Arial"/>
-                <a:ea typeface="Arial"/>
-                <a:cs typeface="Arial"/>
-              </a:defRPr>
-            </a:lvl9pPr>
-          </a:lstStyle>
-          <a:p xmlns:a="http://schemas.openxmlformats.org/drawingml/2006/main">
-            <a:pPr algn="l">
-              <a:defRPr sz="1875" b="1">
-                <a:solidFill>
-                  <a:srgbClr val="111111"/>
-                </a:solidFill>
-                <a:latin typeface="Arial"/>
-                <a:ea typeface="Arial"/>
-                <a:cs typeface="Arial"/>
-              </a:defRPr>
-            </a:pPr>
-            <a:r>
-              <a:rPr sz="1875" b="1">
-                <a:solidFill>
-                  <a:srgbClr val="111111"/>
-                </a:solidFill>
-                <a:latin typeface="Arial"/>
-                <a:ea typeface="Arial"/>
-                <a:cs typeface="Arial"/>
-              </a:rPr>
-              <a:t>Riesgos principales</a:t>
-            </a:r>
-          </a:p>
-        </p:txBody>
-      </p:sp>
-      <p:sp>
-        <p:nvSpPr>
-          <p:cNvPr id="5" name="risk-key">
-            <a:extLst xmlns:a="http://schemas.openxmlformats.org/drawingml/2006/main">
-              <a:ext uri="{FF2B5EF4-FFF2-40B4-BE49-F238E27FC236}">
-                <a16:creationId xmlns:a16="http://schemas.microsoft.com/office/drawing/2014/main" id="{5C48C859-0A85-47CC-A748-C5E9FAECE918}"/>
-              </a:ext>
-            </a:extLst>
-          </p:cNvPr>
-          <p:cNvSpPr>
-            <a:spLocks xmlns:a="http://schemas.openxmlformats.org/drawingml/2006/main" noGrp="1"/>
-          </p:cNvSpPr>
-          <p:nvPr/>
-        </p:nvSpPr>
-        <p:spPr>
-          <a:xfrm xmlns:a="http://schemas.openxmlformats.org/drawingml/2006/main">
-            <a:off x="781050" y="1752600"/>
-            <a:ext cx="4762500" cy="228600"/>
-          </a:xfrm>
-          <a:prstGeom xmlns:a="http://schemas.openxmlformats.org/drawingml/2006/main" prst="rect">
-            <a:avLst/>
-          </a:prstGeom>
-          <a:noFill xmlns:a="http://schemas.openxmlformats.org/drawingml/2006/main"/>
-          <a:ln xmlns:a="http://schemas.openxmlformats.org/drawingml/2006/main" w="0">
-            <a:noFill/>
-            <a:prstDash val="solid"/>
-          </a:ln>
-        </p:spPr>
-        <p:txBody>
-          <a:bodyPr xmlns:a="http://schemas.openxmlformats.org/drawingml/2006/main" lIns="0" tIns="0" rIns="0" bIns="0"/>
-          <a:lstStyle xmlns:a="http://schemas.openxmlformats.org/drawingml/2006/main">
-            <a:defPPr algn="l">
-              <a:defRPr sz="1200" b="0">
-                <a:solidFill>
-                  <a:srgbClr val="555555"/>
-                </a:solidFill>
-                <a:latin typeface="Arial"/>
-                <a:ea typeface="Arial"/>
-                <a:cs typeface="Arial"/>
-              </a:defRPr>
-            </a:defPPr>
-            <a:lvl1pPr algn="l">
-              <a:defRPr sz="1200" b="0">
-                <a:solidFill>
-                  <a:srgbClr val="555555"/>
-                </a:solidFill>
-                <a:latin typeface="Arial"/>
-                <a:ea typeface="Arial"/>
-                <a:cs typeface="Arial"/>
-              </a:defRPr>
-            </a:lvl1pPr>
-            <a:lvl2pPr algn="l">
-              <a:defRPr sz="1200" b="0">
-                <a:solidFill>
-                  <a:srgbClr val="555555"/>
-                </a:solidFill>
-                <a:latin typeface="Arial"/>
-                <a:ea typeface="Arial"/>
-                <a:cs typeface="Arial"/>
-              </a:defRPr>
-            </a:lvl2pPr>
-            <a:lvl3pPr algn="l">
-              <a:defRPr sz="1200" b="0">
-                <a:solidFill>
-                  <a:srgbClr val="555555"/>
-                </a:solidFill>
-                <a:latin typeface="Arial"/>
-                <a:ea typeface="Arial"/>
-                <a:cs typeface="Arial"/>
-              </a:defRPr>
-            </a:lvl3pPr>
-            <a:lvl4pPr algn="l">
-              <a:defRPr sz="1200" b="0">
-                <a:solidFill>
-                  <a:srgbClr val="555555"/>
-                </a:solidFill>
-                <a:latin typeface="Arial"/>
-                <a:ea typeface="Arial"/>
-                <a:cs typeface="Arial"/>
-              </a:defRPr>
-            </a:lvl4pPr>
-            <a:lvl5pPr algn="l">
-              <a:defRPr sz="1200" b="0">
-                <a:solidFill>
-                  <a:srgbClr val="555555"/>
-                </a:solidFill>
-                <a:latin typeface="Arial"/>
-                <a:ea typeface="Arial"/>
-                <a:cs typeface="Arial"/>
-              </a:defRPr>
-            </a:lvl5pPr>
-            <a:lvl6pPr algn="l">
-              <a:defRPr sz="1200" b="0">
-                <a:solidFill>
-                  <a:srgbClr val="555555"/>
-                </a:solidFill>
-                <a:latin typeface="Arial"/>
-                <a:ea typeface="Arial"/>
-                <a:cs typeface="Arial"/>
-              </a:defRPr>
-            </a:lvl6pPr>
-            <a:lvl7pPr algn="l">
-              <a:defRPr sz="1200" b="0">
-                <a:solidFill>
-                  <a:srgbClr val="555555"/>
-                </a:solidFill>
-                <a:latin typeface="Arial"/>
-                <a:ea typeface="Arial"/>
-                <a:cs typeface="Arial"/>
-              </a:defRPr>
-            </a:lvl7pPr>
-            <a:lvl8pPr algn="l">
-              <a:defRPr sz="1200" b="0">
-                <a:solidFill>
-                  <a:srgbClr val="555555"/>
-                </a:solidFill>
-                <a:latin typeface="Arial"/>
-                <a:ea typeface="Arial"/>
-                <a:cs typeface="Arial"/>
-              </a:defRPr>
-            </a:lvl8pPr>
-            <a:lvl9pPr algn="l">
-              <a:defRPr sz="1200" b="0">
-                <a:solidFill>
-                  <a:srgbClr val="555555"/>
-                </a:solidFill>
-                <a:latin typeface="Arial"/>
-                <a:ea typeface="Arial"/>
-                <a:cs typeface="Arial"/>
-              </a:defRPr>
-            </a:lvl9pPr>
-          </a:lstStyle>
-          <a:p xmlns:a="http://schemas.openxmlformats.org/drawingml/2006/main">
-            <a:pPr algn="l">
-              <a:defRPr sz="1200" b="0">
-                <a:solidFill>
-                  <a:srgbClr val="555555"/>
-                </a:solidFill>
-                <a:latin typeface="Arial"/>
-                <a:ea typeface="Arial"/>
-                <a:cs typeface="Arial"/>
-              </a:defRPr>
-            </a:pPr>
-            <a:r>
-              <a:rPr sz="1200" b="0">
-                <a:solidFill>
-                  <a:srgbClr val="555555"/>
-                </a:solidFill>
-                <a:latin typeface="Arial"/>
-                <a:ea typeface="Arial"/>
-                <a:cs typeface="Arial"/>
-              </a:rPr>
-              <a:t>P = probabilidad · I = impacto</a:t>
-            </a:r>
-          </a:p>
-        </p:txBody>
-      </p:sp>
-      <p:sp>
-        <p:nvSpPr>
-          <p:cNvPr id="6" name="risk-list">
-            <a:extLst xmlns:a="http://schemas.openxmlformats.org/drawingml/2006/main">
-              <a:ext uri="{FF2B5EF4-FFF2-40B4-BE49-F238E27FC236}">
-                <a16:creationId xmlns:a16="http://schemas.microsoft.com/office/drawing/2014/main" id="{7D08D77A-EFB8-42F1-A6E5-2CDAE532FBB6}"/>
-              </a:ext>
-            </a:extLst>
-          </p:cNvPr>
-          <p:cNvSpPr>
-            <a:spLocks xmlns:a="http://schemas.openxmlformats.org/drawingml/2006/main" noGrp="1"/>
-          </p:cNvSpPr>
-          <p:nvPr/>
-        </p:nvSpPr>
-        <p:spPr>
-          <a:xfrm xmlns:a="http://schemas.openxmlformats.org/drawingml/2006/main">
-            <a:off x="781050" y="2057400"/>
-            <a:ext cx="4810125" cy="3333750"/>
-          </a:xfrm>
-          <a:prstGeom xmlns:a="http://schemas.openxmlformats.org/drawingml/2006/main" prst="rect">
-            <a:avLst/>
-          </a:prstGeom>
-          <a:noFill xmlns:a="http://schemas.openxmlformats.org/drawingml/2006/main"/>
-          <a:ln xmlns:a="http://schemas.openxmlformats.org/drawingml/2006/main" w="0">
-            <a:noFill/>
-            <a:prstDash val="solid"/>
-          </a:ln>
-        </p:spPr>
-        <p:txBody>
-          <a:bodyPr xmlns:a="http://schemas.openxmlformats.org/drawingml/2006/main" lIns="0" tIns="0" rIns="0" bIns="0"/>
-          <a:lstStyle xmlns:a="http://schemas.openxmlformats.org/drawingml/2006/main">
-            <a:defPPr algn="l">
-              <a:defRPr sz="1350" b="0">
-                <a:solidFill>
-                  <a:srgbClr val="222222"/>
-                </a:solidFill>
-                <a:latin typeface="Arial"/>
-                <a:ea typeface="Arial"/>
-                <a:cs typeface="Arial"/>
-              </a:defRPr>
-            </a:defPPr>
-            <a:lvl1pPr algn="l">
-              <a:defRPr sz="1350" b="0">
-                <a:solidFill>
-                  <a:srgbClr val="222222"/>
-                </a:solidFill>
-                <a:latin typeface="Arial"/>
-                <a:ea typeface="Arial"/>
-                <a:cs typeface="Arial"/>
-              </a:defRPr>
-            </a:lvl1pPr>
-            <a:lvl2pPr algn="l">
-              <a:defRPr sz="1350" b="0">
-                <a:solidFill>
-                  <a:srgbClr val="222222"/>
-                </a:solidFill>
-                <a:latin typeface="Arial"/>
-                <a:ea typeface="Arial"/>
-                <a:cs typeface="Arial"/>
-              </a:defRPr>
-            </a:lvl2pPr>
-            <a:lvl3pPr algn="l">
-              <a:defRPr sz="1350" b="0">
-                <a:solidFill>
-                  <a:srgbClr val="222222"/>
-                </a:solidFill>
-                <a:latin typeface="Arial"/>
-                <a:ea typeface="Arial"/>
-                <a:cs typeface="Arial"/>
-              </a:defRPr>
-            </a:lvl3pPr>
-            <a:lvl4pPr algn="l">
-              <a:defRPr sz="1350" b="0">
-                <a:solidFill>
-                  <a:srgbClr val="222222"/>
-                </a:solidFill>
-                <a:latin typeface="Arial"/>
-                <a:ea typeface="Arial"/>
-                <a:cs typeface="Arial"/>
-              </a:defRPr>
-            </a:lvl4pPr>
-            <a:lvl5pPr algn="l">
-              <a:defRPr sz="1350" b="0">
-                <a:solidFill>
-                  <a:srgbClr val="222222"/>
-                </a:solidFill>
-                <a:latin typeface="Arial"/>
-                <a:ea typeface="Arial"/>
-                <a:cs typeface="Arial"/>
-              </a:defRPr>
-            </a:lvl5pPr>
-            <a:lvl6pPr algn="l">
-              <a:defRPr sz="1350" b="0">
-                <a:solidFill>
-                  <a:srgbClr val="222222"/>
-                </a:solidFill>
-                <a:latin typeface="Arial"/>
-                <a:ea typeface="Arial"/>
-                <a:cs typeface="Arial"/>
-              </a:defRPr>
-            </a:lvl6pPr>
-            <a:lvl7pPr algn="l">
-              <a:defRPr sz="1350" b="0">
-                <a:solidFill>
-                  <a:srgbClr val="222222"/>
-                </a:solidFill>
-                <a:latin typeface="Arial"/>
-                <a:ea typeface="Arial"/>
-                <a:cs typeface="Arial"/>
-              </a:defRPr>
-            </a:lvl7pPr>
-            <a:lvl8pPr algn="l">
-              <a:defRPr sz="1350" b="0">
-                <a:solidFill>
-                  <a:srgbClr val="222222"/>
-                </a:solidFill>
-                <a:latin typeface="Arial"/>
-                <a:ea typeface="Arial"/>
-                <a:cs typeface="Arial"/>
-              </a:defRPr>
-            </a:lvl8pPr>
-            <a:lvl9pPr algn="l">
-              <a:defRPr sz="1350" b="0">
-                <a:solidFill>
-                  <a:srgbClr val="222222"/>
-                </a:solidFill>
-                <a:latin typeface="Arial"/>
-                <a:ea typeface="Arial"/>
-                <a:cs typeface="Arial"/>
-              </a:defRPr>
-            </a:lvl9pPr>
-          </a:lstStyle>
-          <a:p xmlns:a="http://schemas.openxmlformats.org/drawingml/2006/main">
-            <a:pPr algn="l">
-              <a:defRPr sz="1350" b="0">
-                <a:solidFill>
-                  <a:srgbClr val="222222"/>
-                </a:solidFill>
-                <a:latin typeface="Arial"/>
-                <a:ea typeface="Arial"/>
-                <a:cs typeface="Arial"/>
-              </a:defRPr>
-            </a:pPr>
-            <a:r>
-              <a:rPr sz="1350" b="0">
-                <a:solidFill>
-                  <a:srgbClr val="222222"/>
-                </a:solidFill>
-                <a:latin typeface="Arial"/>
-                <a:ea typeface="Arial"/>
-                <a:cs typeface="Arial"/>
-              </a:rPr>
-              <a:t>Reglas incorrectas — P media / I alta: pruebas por requisito.</a:t>
-            </a:r>
-          </a:p>
-          <a:p xmlns:a="http://schemas.openxmlformats.org/drawingml/2006/main">
-            <a:r>
-              <a:t/>
-            </a:r>
-          </a:p>
-          <a:p xmlns:a="http://schemas.openxmlformats.org/drawingml/2006/main">
-            <a:pPr algn="l">
-              <a:defRPr sz="1350" b="0">
-                <a:solidFill>
-                  <a:srgbClr val="222222"/>
-                </a:solidFill>
-                <a:latin typeface="Arial"/>
-                <a:ea typeface="Arial"/>
-                <a:cs typeface="Arial"/>
-              </a:defRPr>
-            </a:pPr>
-            <a:r>
-              <a:rPr sz="1350" b="0">
-                <a:solidFill>
-                  <a:srgbClr val="222222"/>
-                </a:solidFill>
-                <a:latin typeface="Arial"/>
-                <a:ea typeface="Arial"/>
-                <a:cs typeface="Arial"/>
-              </a:rPr>
-              <a:t>Tests débiles — P media / I alta: revisar las aserciones.</a:t>
-            </a:r>
-          </a:p>
-          <a:p xmlns:a="http://schemas.openxmlformats.org/drawingml/2006/main">
-            <a:r>
-              <a:t/>
-            </a:r>
-          </a:p>
-          <a:p xmlns:a="http://schemas.openxmlformats.org/drawingml/2006/main">
-            <a:pPr algn="l">
-              <a:defRPr sz="1350" b="0">
-                <a:solidFill>
-                  <a:srgbClr val="222222"/>
-                </a:solidFill>
-                <a:latin typeface="Arial"/>
-                <a:ea typeface="Arial"/>
-                <a:cs typeface="Arial"/>
-              </a:defRPr>
-            </a:pPr>
-            <a:r>
-              <a:rPr sz="1350" b="0">
-                <a:solidFill>
-                  <a:srgbClr val="222222"/>
-                </a:solidFill>
-                <a:latin typeface="Arial"/>
-                <a:ea typeface="Arial"/>
-                <a:cs typeface="Arial"/>
-              </a:rPr>
-              <a:t>Pérdida de código — P baja / I alta: repositorio remoto y suite final.</a:t>
-            </a:r>
-          </a:p>
-          <a:p xmlns:a="http://schemas.openxmlformats.org/drawingml/2006/main">
-            <a:r>
-              <a:t/>
-            </a:r>
-          </a:p>
-          <a:p xmlns:a="http://schemas.openxmlformats.org/drawingml/2006/main">
-            <a:pPr algn="l">
-              <a:defRPr sz="1350" b="0">
-                <a:solidFill>
-                  <a:srgbClr val="222222"/>
-                </a:solidFill>
-                <a:latin typeface="Arial"/>
-                <a:ea typeface="Arial"/>
-                <a:cs typeface="Arial"/>
-              </a:defRPr>
-            </a:pPr>
-            <a:r>
-              <a:rPr sz="1350" b="0">
-                <a:solidFill>
-                  <a:srgbClr val="222222"/>
-                </a:solidFill>
-                <a:latin typeface="Arial"/>
-                <a:ea typeface="Arial"/>
-                <a:cs typeface="Arial"/>
-              </a:rPr>
-              <a:t>Conocimiento concentrado — P media / I media: revisión compartida.</a:t>
-            </a:r>
-          </a:p>
-          <a:p xmlns:a="http://schemas.openxmlformats.org/drawingml/2006/main">
-            <a:r>
-              <a:t/>
-            </a:r>
-          </a:p>
-          <a:p xmlns:a="http://schemas.openxmlformats.org/drawingml/2006/main">
-            <a:pPr algn="l">
-              <a:defRPr sz="1350" b="0">
-                <a:solidFill>
-                  <a:srgbClr val="222222"/>
-                </a:solidFill>
-                <a:latin typeface="Arial"/>
-                <a:ea typeface="Arial"/>
-                <a:cs typeface="Arial"/>
-              </a:defRPr>
-            </a:pPr>
-            <a:r>
-              <a:rPr sz="1350" b="0">
-                <a:solidFill>
-                  <a:srgbClr val="222222"/>
-                </a:solidFill>
-                <a:latin typeface="Arial"/>
-                <a:ea typeface="Arial"/>
-                <a:cs typeface="Arial"/>
-              </a:rPr>
-              <a:t>Clave expuesta — P baja hoy / I alta: no integrar IA.</a:t>
-            </a:r>
-          </a:p>
-        </p:txBody>
-      </p:sp>
-      <p:sp>
-        <p:nvSpPr>
-          <p:cNvPr id="7" name="column-divider">
-            <a:extLst xmlns:a="http://schemas.openxmlformats.org/drawingml/2006/main">
-              <a:ext uri="{FF2B5EF4-FFF2-40B4-BE49-F238E27FC236}">
-                <a16:creationId xmlns:a16="http://schemas.microsoft.com/office/drawing/2014/main" id="{283EDB14-B899-4058-8233-3E75DE3B2BF9}"/>
-              </a:ext>
-            </a:extLst>
-          </p:cNvPr>
-          <p:cNvSpPr>
-            <a:spLocks xmlns:a="http://schemas.openxmlformats.org/drawingml/2006/main" noGrp="1"/>
-          </p:cNvSpPr>
-          <p:nvPr/>
-        </p:nvSpPr>
-        <p:spPr>
-          <a:xfrm xmlns:a="http://schemas.openxmlformats.org/drawingml/2006/main">
-            <a:off x="5953125" y="1409700"/>
-            <a:ext cx="14288" cy="4000500"/>
-          </a:xfrm>
-          <a:prstGeom xmlns:a="http://schemas.openxmlformats.org/drawingml/2006/main" prst="rect">
-            <a:avLst/>
-          </a:prstGeom>
-          <a:solidFill xmlns:a="http://schemas.openxmlformats.org/drawingml/2006/main">
-            <a:srgbClr val="B8C2C6"/>
-          </a:solidFill>
-          <a:ln xmlns:a="http://schemas.openxmlformats.org/drawingml/2006/main" w="0">
-            <a:noFill/>
-            <a:prstDash val="solid"/>
-          </a:ln>
-        </p:spPr>
-      </p:sp>
-      <p:sp>
-        <p:nvSpPr>
-          <p:cNvPr id="8" name="metrics-heading">
-            <a:extLst xmlns:a="http://schemas.openxmlformats.org/drawingml/2006/main">
-              <a:ext uri="{FF2B5EF4-FFF2-40B4-BE49-F238E27FC236}">
-                <a16:creationId xmlns:a16="http://schemas.microsoft.com/office/drawing/2014/main" id="{19626D26-2A00-46D4-B355-C9ED56911C19}"/>
-              </a:ext>
-            </a:extLst>
-          </p:cNvPr>
-          <p:cNvSpPr>
-            <a:spLocks xmlns:a="http://schemas.openxmlformats.org/drawingml/2006/main" noGrp="1"/>
-          </p:cNvSpPr>
-          <p:nvPr/>
-        </p:nvSpPr>
-        <p:spPr>
-          <a:xfrm xmlns:a="http://schemas.openxmlformats.org/drawingml/2006/main">
-            <a:off x="6334125" y="1409700"/>
-            <a:ext cx="5000625" cy="361950"/>
-          </a:xfrm>
-          <a:prstGeom xmlns:a="http://schemas.openxmlformats.org/drawingml/2006/main" prst="rect">
-            <a:avLst/>
-          </a:prstGeom>
-          <a:noFill xmlns:a="http://schemas.openxmlformats.org/drawingml/2006/main"/>
-          <a:ln xmlns:a="http://schemas.openxmlformats.org/drawingml/2006/main" w="0">
-            <a:noFill/>
-            <a:prstDash val="solid"/>
-          </a:ln>
-        </p:spPr>
-        <p:txBody>
-          <a:bodyPr xmlns:a="http://schemas.openxmlformats.org/drawingml/2006/main" lIns="0" tIns="0" rIns="0" bIns="0"/>
-          <a:lstStyle xmlns:a="http://schemas.openxmlformats.org/drawingml/2006/main">
-            <a:defPPr algn="l">
-              <a:defRPr sz="1875" b="1">
-                <a:solidFill>
-                  <a:srgbClr val="111111"/>
-                </a:solidFill>
-                <a:latin typeface="Arial"/>
-                <a:ea typeface="Arial"/>
-                <a:cs typeface="Arial"/>
-              </a:defRPr>
-            </a:defPPr>
-            <a:lvl1pPr algn="l">
-              <a:defRPr sz="1875" b="1">
-                <a:solidFill>
-                  <a:srgbClr val="111111"/>
-                </a:solidFill>
-                <a:latin typeface="Arial"/>
-                <a:ea typeface="Arial"/>
-                <a:cs typeface="Arial"/>
-              </a:defRPr>
-            </a:lvl1pPr>
-            <a:lvl2pPr algn="l">
-              <a:defRPr sz="1875" b="1">
-                <a:solidFill>
-                  <a:srgbClr val="111111"/>
-                </a:solidFill>
-                <a:latin typeface="Arial"/>
-                <a:ea typeface="Arial"/>
-                <a:cs typeface="Arial"/>
-              </a:defRPr>
-            </a:lvl2pPr>
-            <a:lvl3pPr algn="l">
-              <a:defRPr sz="1875" b="1">
-                <a:solidFill>
-                  <a:srgbClr val="111111"/>
-                </a:solidFill>
-                <a:latin typeface="Arial"/>
-                <a:ea typeface="Arial"/>
-                <a:cs typeface="Arial"/>
-              </a:defRPr>
-            </a:lvl3pPr>
-            <a:lvl4pPr algn="l">
-              <a:defRPr sz="1875" b="1">
-                <a:solidFill>
-                  <a:srgbClr val="111111"/>
-                </a:solidFill>
-                <a:latin typeface="Arial"/>
-                <a:ea typeface="Arial"/>
-                <a:cs typeface="Arial"/>
-              </a:defRPr>
-            </a:lvl4pPr>
-            <a:lvl5pPr algn="l">
-              <a:defRPr sz="1875" b="1">
-                <a:solidFill>
-                  <a:srgbClr val="111111"/>
-                </a:solidFill>
-                <a:latin typeface="Arial"/>
-                <a:ea typeface="Arial"/>
-                <a:cs typeface="Arial"/>
-              </a:defRPr>
-            </a:lvl5pPr>
-            <a:lvl6pPr algn="l">
-              <a:defRPr sz="1875" b="1">
-                <a:solidFill>
-                  <a:srgbClr val="111111"/>
-                </a:solidFill>
-                <a:latin typeface="Arial"/>
-                <a:ea typeface="Arial"/>
-                <a:cs typeface="Arial"/>
-              </a:defRPr>
-            </a:lvl6pPr>
-            <a:lvl7pPr algn="l">
-              <a:defRPr sz="1875" b="1">
-                <a:solidFill>
-                  <a:srgbClr val="111111"/>
-                </a:solidFill>
-                <a:latin typeface="Arial"/>
-                <a:ea typeface="Arial"/>
-                <a:cs typeface="Arial"/>
-              </a:defRPr>
-            </a:lvl7pPr>
-            <a:lvl8pPr algn="l">
-              <a:defRPr sz="1875" b="1">
-                <a:solidFill>
-                  <a:srgbClr val="111111"/>
-                </a:solidFill>
-                <a:latin typeface="Arial"/>
-                <a:ea typeface="Arial"/>
-                <a:cs typeface="Arial"/>
-              </a:defRPr>
-            </a:lvl8pPr>
-            <a:lvl9pPr algn="l">
-              <a:defRPr sz="1875" b="1">
-                <a:solidFill>
-                  <a:srgbClr val="111111"/>
-                </a:solidFill>
-                <a:latin typeface="Arial"/>
-                <a:ea typeface="Arial"/>
-                <a:cs typeface="Arial"/>
-              </a:defRPr>
-            </a:lvl9pPr>
-          </a:lstStyle>
-          <a:p xmlns:a="http://schemas.openxmlformats.org/drawingml/2006/main">
-            <a:pPr algn="l">
-              <a:defRPr sz="1875" b="1">
-                <a:solidFill>
-                  <a:srgbClr val="111111"/>
-                </a:solidFill>
-                <a:latin typeface="Arial"/>
-                <a:ea typeface="Arial"/>
-                <a:cs typeface="Arial"/>
-              </a:defRPr>
-            </a:pPr>
-            <a:r>
-              <a:rPr sz="1875" b="1">
-                <a:solidFill>
-                  <a:srgbClr val="111111"/>
-                </a:solidFill>
-                <a:latin typeface="Arial"/>
-                <a:ea typeface="Arial"/>
-                <a:cs typeface="Arial"/>
-              </a:rPr>
-              <a:t>Meta e indicadores</a:t>
-            </a:r>
-          </a:p>
-        </p:txBody>
-      </p:sp>
-      <p:sp>
-        <p:nvSpPr>
-          <p:cNvPr id="9" name="goal">
-            <a:extLst xmlns:a="http://schemas.openxmlformats.org/drawingml/2006/main">
-              <a:ext uri="{FF2B5EF4-FFF2-40B4-BE49-F238E27FC236}">
-                <a16:creationId xmlns:a16="http://schemas.microsoft.com/office/drawing/2014/main" id="{28615166-F47A-4FDE-8CFA-2D3CDBF02714}"/>
-              </a:ext>
-            </a:extLst>
-          </p:cNvPr>
-          <p:cNvSpPr>
-            <a:spLocks xmlns:a="http://schemas.openxmlformats.org/drawingml/2006/main" noGrp="1"/>
-          </p:cNvSpPr>
-          <p:nvPr/>
-        </p:nvSpPr>
-        <p:spPr>
-          <a:xfrm xmlns:a="http://schemas.openxmlformats.org/drawingml/2006/main">
-            <a:off x="6334125" y="1885950"/>
-            <a:ext cx="5000625" cy="495300"/>
-          </a:xfrm>
-          <a:prstGeom xmlns:a="http://schemas.openxmlformats.org/drawingml/2006/main" prst="rect">
-            <a:avLst/>
-          </a:prstGeom>
-          <a:noFill xmlns:a="http://schemas.openxmlformats.org/drawingml/2006/main"/>
-          <a:ln xmlns:a="http://schemas.openxmlformats.org/drawingml/2006/main" w="0">
-            <a:noFill/>
-            <a:prstDash val="solid"/>
-          </a:ln>
-        </p:spPr>
-        <p:txBody>
-          <a:bodyPr xmlns:a="http://schemas.openxmlformats.org/drawingml/2006/main" lIns="0" tIns="0" rIns="0" bIns="0"/>
-          <a:lstStyle xmlns:a="http://schemas.openxmlformats.org/drawingml/2006/main">
-            <a:defPPr algn="l">
-              <a:defRPr sz="1425" b="1">
-                <a:solidFill>
-                  <a:srgbClr val="222222"/>
-                </a:solidFill>
-                <a:latin typeface="Arial"/>
-                <a:ea typeface="Arial"/>
-                <a:cs typeface="Arial"/>
-              </a:defRPr>
-            </a:defPPr>
-            <a:lvl1pPr algn="l">
-              <a:defRPr sz="1425" b="1">
-                <a:solidFill>
-                  <a:srgbClr val="222222"/>
-                </a:solidFill>
-                <a:latin typeface="Arial"/>
-                <a:ea typeface="Arial"/>
-                <a:cs typeface="Arial"/>
-              </a:defRPr>
-            </a:lvl1pPr>
-            <a:lvl2pPr algn="l">
-              <a:defRPr sz="1425" b="1">
-                <a:solidFill>
-                  <a:srgbClr val="222222"/>
-                </a:solidFill>
-                <a:latin typeface="Arial"/>
-                <a:ea typeface="Arial"/>
-                <a:cs typeface="Arial"/>
-              </a:defRPr>
-            </a:lvl2pPr>
-            <a:lvl3pPr algn="l">
-              <a:defRPr sz="1425" b="1">
-                <a:solidFill>
-                  <a:srgbClr val="222222"/>
-                </a:solidFill>
-                <a:latin typeface="Arial"/>
-                <a:ea typeface="Arial"/>
-                <a:cs typeface="Arial"/>
-              </a:defRPr>
-            </a:lvl3pPr>
-            <a:lvl4pPr algn="l">
-              <a:defRPr sz="1425" b="1">
-                <a:solidFill>
-                  <a:srgbClr val="222222"/>
-                </a:solidFill>
-                <a:latin typeface="Arial"/>
-                <a:ea typeface="Arial"/>
-                <a:cs typeface="Arial"/>
-              </a:defRPr>
-            </a:lvl4pPr>
-            <a:lvl5pPr algn="l">
-              <a:defRPr sz="1425" b="1">
-                <a:solidFill>
-                  <a:srgbClr val="222222"/>
-                </a:solidFill>
-                <a:latin typeface="Arial"/>
-                <a:ea typeface="Arial"/>
-                <a:cs typeface="Arial"/>
-              </a:defRPr>
-            </a:lvl5pPr>
-            <a:lvl6pPr algn="l">
-              <a:defRPr sz="1425" b="1">
-                <a:solidFill>
-                  <a:srgbClr val="222222"/>
-                </a:solidFill>
-                <a:latin typeface="Arial"/>
-                <a:ea typeface="Arial"/>
-                <a:cs typeface="Arial"/>
-              </a:defRPr>
-            </a:lvl6pPr>
-            <a:lvl7pPr algn="l">
-              <a:defRPr sz="1425" b="1">
-                <a:solidFill>
-                  <a:srgbClr val="222222"/>
-                </a:solidFill>
-                <a:latin typeface="Arial"/>
-                <a:ea typeface="Arial"/>
-                <a:cs typeface="Arial"/>
-              </a:defRPr>
-            </a:lvl7pPr>
-            <a:lvl8pPr algn="l">
-              <a:defRPr sz="1425" b="1">
-                <a:solidFill>
-                  <a:srgbClr val="222222"/>
-                </a:solidFill>
-                <a:latin typeface="Arial"/>
-                <a:ea typeface="Arial"/>
-                <a:cs typeface="Arial"/>
-              </a:defRPr>
-            </a:lvl8pPr>
-            <a:lvl9pPr algn="l">
-              <a:defRPr sz="1425" b="1">
-                <a:solidFill>
-                  <a:srgbClr val="222222"/>
-                </a:solidFill>
-                <a:latin typeface="Arial"/>
-                <a:ea typeface="Arial"/>
-                <a:cs typeface="Arial"/>
-              </a:defRPr>
-            </a:lvl9pPr>
-          </a:lstStyle>
-          <a:p xmlns:a="http://schemas.openxmlformats.org/drawingml/2006/main">
-            <a:pPr algn="l">
-              <a:defRPr sz="1425" b="1">
-                <a:solidFill>
-                  <a:srgbClr val="222222"/>
-                </a:solidFill>
-                <a:latin typeface="Arial"/>
-                <a:ea typeface="Arial"/>
-                <a:cs typeface="Arial"/>
-              </a:defRPr>
-            </a:pPr>
-            <a:r>
-              <a:rPr sz="1425" b="1">
-                <a:solidFill>
-                  <a:srgbClr val="222222"/>
-                </a:solidFill>
-                <a:latin typeface="Arial"/>
-                <a:ea typeface="Arial"/>
-                <a:cs typeface="Arial"/>
-              </a:rPr>
-              <a:t>Meta: cumplir los requisitos obligatorios y poder verificarlo.</a:t>
-            </a:r>
-          </a:p>
-        </p:txBody>
-      </p:sp>
-      <p:sp>
-        <p:nvSpPr>
-          <p:cNvPr id="10" name="metrics-list">
-            <a:extLst xmlns:a="http://schemas.openxmlformats.org/drawingml/2006/main">
-              <a:ext uri="{FF2B5EF4-FFF2-40B4-BE49-F238E27FC236}">
-                <a16:creationId xmlns:a16="http://schemas.microsoft.com/office/drawing/2014/main" id="{528CCCC9-86E5-4FC6-890C-163E84AA0E91}"/>
-              </a:ext>
-            </a:extLst>
-          </p:cNvPr>
-          <p:cNvSpPr>
-            <a:spLocks xmlns:a="http://schemas.openxmlformats.org/drawingml/2006/main" noGrp="1"/>
-          </p:cNvSpPr>
-          <p:nvPr/>
-        </p:nvSpPr>
-        <p:spPr>
-          <a:xfrm xmlns:a="http://schemas.openxmlformats.org/drawingml/2006/main">
-            <a:off x="6334125" y="2428875"/>
-            <a:ext cx="5000625" cy="3095625"/>
-          </a:xfrm>
-          <a:prstGeom xmlns:a="http://schemas.openxmlformats.org/drawingml/2006/main" prst="rect">
-            <a:avLst/>
-          </a:prstGeom>
-          <a:noFill xmlns:a="http://schemas.openxmlformats.org/drawingml/2006/main"/>
-          <a:ln xmlns:a="http://schemas.openxmlformats.org/drawingml/2006/main" w="0">
-            <a:noFill/>
-            <a:prstDash val="solid"/>
-          </a:ln>
-        </p:spPr>
-        <p:txBody>
-          <a:bodyPr xmlns:a="http://schemas.openxmlformats.org/drawingml/2006/main" lIns="0" tIns="0" rIns="0" bIns="0"/>
-          <a:lstStyle xmlns:a="http://schemas.openxmlformats.org/drawingml/2006/main">
-            <a:defPPr algn="l">
-              <a:defRPr sz="1275" b="0">
-                <a:solidFill>
-                  <a:srgbClr val="222222"/>
-                </a:solidFill>
-                <a:latin typeface="Arial"/>
-                <a:ea typeface="Arial"/>
-                <a:cs typeface="Arial"/>
-              </a:defRPr>
-            </a:defPPr>
-            <a:lvl1pPr algn="l">
-              <a:defRPr sz="1275" b="0">
-                <a:solidFill>
-                  <a:srgbClr val="222222"/>
-                </a:solidFill>
-                <a:latin typeface="Arial"/>
-                <a:ea typeface="Arial"/>
-                <a:cs typeface="Arial"/>
-              </a:defRPr>
-            </a:lvl1pPr>
-            <a:lvl2pPr algn="l">
-              <a:defRPr sz="1275" b="0">
-                <a:solidFill>
-                  <a:srgbClr val="222222"/>
-                </a:solidFill>
-                <a:latin typeface="Arial"/>
-                <a:ea typeface="Arial"/>
-                <a:cs typeface="Arial"/>
-              </a:defRPr>
-            </a:lvl2pPr>
-            <a:lvl3pPr algn="l">
-              <a:defRPr sz="1275" b="0">
-                <a:solidFill>
-                  <a:srgbClr val="222222"/>
-                </a:solidFill>
-                <a:latin typeface="Arial"/>
-                <a:ea typeface="Arial"/>
-                <a:cs typeface="Arial"/>
-              </a:defRPr>
-            </a:lvl3pPr>
-            <a:lvl4pPr algn="l">
-              <a:defRPr sz="1275" b="0">
-                <a:solidFill>
-                  <a:srgbClr val="222222"/>
-                </a:solidFill>
-                <a:latin typeface="Arial"/>
-                <a:ea typeface="Arial"/>
-                <a:cs typeface="Arial"/>
-              </a:defRPr>
-            </a:lvl4pPr>
-            <a:lvl5pPr algn="l">
-              <a:defRPr sz="1275" b="0">
-                <a:solidFill>
-                  <a:srgbClr val="222222"/>
-                </a:solidFill>
-                <a:latin typeface="Arial"/>
-                <a:ea typeface="Arial"/>
-                <a:cs typeface="Arial"/>
-              </a:defRPr>
-            </a:lvl5pPr>
-            <a:lvl6pPr algn="l">
-              <a:defRPr sz="1275" b="0">
-                <a:solidFill>
-                  <a:srgbClr val="222222"/>
-                </a:solidFill>
-                <a:latin typeface="Arial"/>
-                <a:ea typeface="Arial"/>
-                <a:cs typeface="Arial"/>
-              </a:defRPr>
-            </a:lvl6pPr>
-            <a:lvl7pPr algn="l">
-              <a:defRPr sz="1275" b="0">
-                <a:solidFill>
-                  <a:srgbClr val="222222"/>
-                </a:solidFill>
-                <a:latin typeface="Arial"/>
-                <a:ea typeface="Arial"/>
-                <a:cs typeface="Arial"/>
-              </a:defRPr>
-            </a:lvl7pPr>
-            <a:lvl8pPr algn="l">
-              <a:defRPr sz="1275" b="0">
-                <a:solidFill>
-                  <a:srgbClr val="222222"/>
-                </a:solidFill>
-                <a:latin typeface="Arial"/>
-                <a:ea typeface="Arial"/>
-                <a:cs typeface="Arial"/>
-              </a:defRPr>
-            </a:lvl8pPr>
-            <a:lvl9pPr algn="l">
-              <a:defRPr sz="1275" b="0">
-                <a:solidFill>
-                  <a:srgbClr val="222222"/>
-                </a:solidFill>
-                <a:latin typeface="Arial"/>
-                <a:ea typeface="Arial"/>
-                <a:cs typeface="Arial"/>
-              </a:defRPr>
-            </a:lvl9pPr>
-          </a:lstStyle>
-          <a:p xmlns:a="http://schemas.openxmlformats.org/drawingml/2006/main">
-            <a:pPr algn="l">
-              <a:defRPr sz="1275" b="0">
-                <a:solidFill>
-                  <a:srgbClr val="222222"/>
-                </a:solidFill>
-                <a:latin typeface="Arial"/>
-                <a:ea typeface="Arial"/>
-                <a:cs typeface="Arial"/>
-              </a:defRPr>
-            </a:pPr>
-            <a:r>
-              <a:rPr sz="1275" b="0">
-                <a:solidFill>
-                  <a:srgbClr val="222222"/>
-                </a:solidFill>
-                <a:latin typeface="Arial"/>
-                <a:ea typeface="Arial"/>
-                <a:cs typeface="Arial"/>
-              </a:rPr>
-              <a:t>1. Cobertura: requisitos con test significativo / requisitos obligatorios × 100.</a:t>
-            </a:r>
-          </a:p>
-          <a:p xmlns:a="http://schemas.openxmlformats.org/drawingml/2006/main">
-            <a:r>
-              <a:t/>
-            </a:r>
-          </a:p>
-          <a:p xmlns:a="http://schemas.openxmlformats.org/drawingml/2006/main">
-            <a:pPr algn="l">
-              <a:defRPr sz="1275" b="0">
-                <a:solidFill>
-                  <a:srgbClr val="222222"/>
-                </a:solidFill>
-                <a:latin typeface="Arial"/>
-                <a:ea typeface="Arial"/>
-                <a:cs typeface="Arial"/>
-              </a:defRPr>
-            </a:pPr>
-            <a:r>
-              <a:rPr sz="1275" b="0">
-                <a:solidFill>
-                  <a:srgbClr val="222222"/>
-                </a:solidFill>
-                <a:latin typeface="Arial"/>
-                <a:ea typeface="Arial"/>
-                <a:cs typeface="Arial"/>
-              </a:rPr>
-              <a:t>2. Suite: pruebas aprobadas / pruebas ejecutadas × 100. Última verificación: 37/37.</a:t>
-            </a:r>
-          </a:p>
-          <a:p xmlns:a="http://schemas.openxmlformats.org/drawingml/2006/main">
-            <a:r>
-              <a:t/>
-            </a:r>
-          </a:p>
-          <a:p xmlns:a="http://schemas.openxmlformats.org/drawingml/2006/main">
-            <a:pPr algn="l">
-              <a:defRPr sz="1275" b="0">
-                <a:solidFill>
-                  <a:srgbClr val="222222"/>
-                </a:solidFill>
-                <a:latin typeface="Arial"/>
-                <a:ea typeface="Arial"/>
-                <a:cs typeface="Arial"/>
-              </a:defRPr>
-            </a:pPr>
-            <a:r>
-              <a:rPr sz="1275" b="0">
-                <a:solidFill>
-                  <a:srgbClr val="222222"/>
-                </a:solidFill>
-                <a:latin typeface="Arial"/>
-                <a:ea typeface="Arial"/>
-                <a:cs typeface="Arial"/>
-              </a:rPr>
-              <a:t>3. Revisión: cambios del núcleo revisados y probados / cambios del núcleo × 100.</a:t>
-            </a:r>
-          </a:p>
-          <a:p xmlns:a="http://schemas.openxmlformats.org/drawingml/2006/main">
-            <a:r>
-              <a:t/>
-            </a:r>
-          </a:p>
-          <a:p xmlns:a="http://schemas.openxmlformats.org/drawingml/2006/main">
-            <a:pPr algn="l">
-              <a:defRPr sz="1275" b="0">
-                <a:solidFill>
-                  <a:srgbClr val="222222"/>
-                </a:solidFill>
-                <a:latin typeface="Arial"/>
-                <a:ea typeface="Arial"/>
-                <a:cs typeface="Arial"/>
-              </a:defRPr>
-            </a:pPr>
-            <a:r>
-              <a:rPr sz="1275" b="0">
-                <a:solidFill>
-                  <a:srgbClr val="222222"/>
-                </a:solidFill>
-                <a:latin typeface="Arial"/>
-                <a:ea typeface="Arial"/>
-                <a:cs typeface="Arial"/>
-              </a:rPr>
-              <a:t>KRI: requisitos fallidos o sin prueba significativa. Alerta si el valor supera cero.</a:t>
-            </a:r>
-          </a:p>
-          <a:p xmlns:a="http://schemas.openxmlformats.org/drawingml/2006/main">
-            <a:r>
-              <a:t/>
-            </a:r>
-          </a:p>
-          <a:p xmlns:a="http://schemas.openxmlformats.org/drawingml/2006/main">
-            <a:pPr algn="l">
-              <a:defRPr sz="1275" b="0">
-                <a:solidFill>
-                  <a:srgbClr val="222222"/>
-                </a:solidFill>
-                <a:latin typeface="Arial"/>
-                <a:ea typeface="Arial"/>
-                <a:cs typeface="Arial"/>
-              </a:defRPr>
-            </a:pPr>
-            <a:r>
-              <a:rPr sz="1275" b="0">
-                <a:solidFill>
-                  <a:srgbClr val="222222"/>
-                </a:solidFill>
-                <a:latin typeface="Arial"/>
-                <a:ea typeface="Arial"/>
-                <a:cs typeface="Arial"/>
-              </a:rPr>
-              <a:t>Goodhart: no premiar la cantidad de tests; revisar qué comportamiento comprueba cada uno.</a:t>
-            </a:r>
-          </a:p>
-        </p:txBody>
-      </p:sp>
-      <p:sp>
-        <p:nvSpPr>
-          <p:cNvPr id="11" name="policy-rule">
-            <a:extLst xmlns:a="http://schemas.openxmlformats.org/drawingml/2006/main">
-              <a:ext uri="{FF2B5EF4-FFF2-40B4-BE49-F238E27FC236}">
-                <a16:creationId xmlns:a16="http://schemas.microsoft.com/office/drawing/2014/main" id="{6A3B6D69-FA58-4CDF-BE1C-47AC17F104D2}"/>
-              </a:ext>
-            </a:extLst>
-          </p:cNvPr>
-          <p:cNvSpPr>
-            <a:spLocks xmlns:a="http://schemas.openxmlformats.org/drawingml/2006/main" noGrp="1"/>
-          </p:cNvSpPr>
-          <p:nvPr/>
-        </p:nvSpPr>
-        <p:spPr>
-          <a:xfrm xmlns:a="http://schemas.openxmlformats.org/drawingml/2006/main">
-            <a:off x="781050" y="5715000"/>
-            <a:ext cx="10477500" cy="14288"/>
-          </a:xfrm>
-          <a:prstGeom xmlns:a="http://schemas.openxmlformats.org/drawingml/2006/main" prst="rect">
-            <a:avLst/>
-          </a:prstGeom>
-          <a:solidFill xmlns:a="http://schemas.openxmlformats.org/drawingml/2006/main">
-            <a:srgbClr val="B8C2C6"/>
-          </a:solidFill>
-          <a:ln xmlns:a="http://schemas.openxmlformats.org/drawingml/2006/main" w="0">
-            <a:noFill/>
-            <a:prstDash val="solid"/>
-          </a:ln>
-        </p:spPr>
-      </p:sp>
-      <p:sp>
-        <p:nvSpPr>
-          <p:cNvPr id="12" name="ai-policy">
-            <a:extLst xmlns:a="http://schemas.openxmlformats.org/drawingml/2006/main">
-              <a:ext uri="{FF2B5EF4-FFF2-40B4-BE49-F238E27FC236}">
-                <a16:creationId xmlns:a16="http://schemas.microsoft.com/office/drawing/2014/main" id="{35D81E00-D2D1-44BC-87AA-42E62C0A5767}"/>
-              </a:ext>
-            </a:extLst>
-          </p:cNvPr>
-          <p:cNvSpPr>
-            <a:spLocks xmlns:a="http://schemas.openxmlformats.org/drawingml/2006/main" noGrp="1"/>
-          </p:cNvSpPr>
-          <p:nvPr/>
-        </p:nvSpPr>
-        <p:spPr>
-          <a:xfrm xmlns:a="http://schemas.openxmlformats.org/drawingml/2006/main">
-            <a:off x="781050" y="5867400"/>
-            <a:ext cx="10382250" cy="381000"/>
-          </a:xfrm>
-          <a:prstGeom xmlns:a="http://schemas.openxmlformats.org/drawingml/2006/main" prst="rect">
-            <a:avLst/>
-          </a:prstGeom>
-          <a:noFill xmlns:a="http://schemas.openxmlformats.org/drawingml/2006/main"/>
-          <a:ln xmlns:a="http://schemas.openxmlformats.org/drawingml/2006/main" w="0">
-            <a:noFill/>
-            <a:prstDash val="solid"/>
-          </a:ln>
-        </p:spPr>
-        <p:txBody>
-          <a:bodyPr xmlns:a="http://schemas.openxmlformats.org/drawingml/2006/main" lIns="0" tIns="0" rIns="0" bIns="0"/>
-          <a:lstStyle xmlns:a="http://schemas.openxmlformats.org/drawingml/2006/main">
-            <a:defPPr algn="l">
-              <a:defRPr sz="1275" b="0">
-                <a:solidFill>
-                  <a:srgbClr val="333333"/>
-                </a:solidFill>
-                <a:latin typeface="Arial"/>
-                <a:ea typeface="Arial"/>
-                <a:cs typeface="Arial"/>
-              </a:defRPr>
-            </a:defPPr>
-            <a:lvl1pPr algn="l">
-              <a:defRPr sz="1275" b="0">
-                <a:solidFill>
-                  <a:srgbClr val="333333"/>
-                </a:solidFill>
-                <a:latin typeface="Arial"/>
-                <a:ea typeface="Arial"/>
-                <a:cs typeface="Arial"/>
-              </a:defRPr>
-            </a:lvl1pPr>
-            <a:lvl2pPr algn="l">
-              <a:defRPr sz="1275" b="0">
-                <a:solidFill>
-                  <a:srgbClr val="333333"/>
-                </a:solidFill>
-                <a:latin typeface="Arial"/>
-                <a:ea typeface="Arial"/>
-                <a:cs typeface="Arial"/>
-              </a:defRPr>
-            </a:lvl2pPr>
-            <a:lvl3pPr algn="l">
-              <a:defRPr sz="1275" b="0">
-                <a:solidFill>
-                  <a:srgbClr val="333333"/>
-                </a:solidFill>
-                <a:latin typeface="Arial"/>
-                <a:ea typeface="Arial"/>
-                <a:cs typeface="Arial"/>
-              </a:defRPr>
-            </a:lvl3pPr>
-            <a:lvl4pPr algn="l">
-              <a:defRPr sz="1275" b="0">
-                <a:solidFill>
-                  <a:srgbClr val="333333"/>
-                </a:solidFill>
-                <a:latin typeface="Arial"/>
-                <a:ea typeface="Arial"/>
-                <a:cs typeface="Arial"/>
-              </a:defRPr>
-            </a:lvl4pPr>
-            <a:lvl5pPr algn="l">
-              <a:defRPr sz="1275" b="0">
-                <a:solidFill>
-                  <a:srgbClr val="333333"/>
-                </a:solidFill>
-                <a:latin typeface="Arial"/>
-                <a:ea typeface="Arial"/>
-                <a:cs typeface="Arial"/>
-              </a:defRPr>
-            </a:lvl5pPr>
-            <a:lvl6pPr algn="l">
-              <a:defRPr sz="1275" b="0">
-                <a:solidFill>
-                  <a:srgbClr val="333333"/>
-                </a:solidFill>
-                <a:latin typeface="Arial"/>
-                <a:ea typeface="Arial"/>
-                <a:cs typeface="Arial"/>
-              </a:defRPr>
-            </a:lvl6pPr>
-            <a:lvl7pPr algn="l">
-              <a:defRPr sz="1275" b="0">
-                <a:solidFill>
-                  <a:srgbClr val="333333"/>
-                </a:solidFill>
-                <a:latin typeface="Arial"/>
-                <a:ea typeface="Arial"/>
-                <a:cs typeface="Arial"/>
-              </a:defRPr>
-            </a:lvl7pPr>
-            <a:lvl8pPr algn="l">
-              <a:defRPr sz="1275" b="0">
-                <a:solidFill>
-                  <a:srgbClr val="333333"/>
-                </a:solidFill>
-                <a:latin typeface="Arial"/>
-                <a:ea typeface="Arial"/>
-                <a:cs typeface="Arial"/>
-              </a:defRPr>
-            </a:lvl8pPr>
-            <a:lvl9pPr algn="l">
-              <a:defRPr sz="1275" b="0">
-                <a:solidFill>
-                  <a:srgbClr val="333333"/>
-                </a:solidFill>
-                <a:latin typeface="Arial"/>
-                <a:ea typeface="Arial"/>
-                <a:cs typeface="Arial"/>
-              </a:defRPr>
-            </a:lvl9pPr>
-          </a:lstStyle>
-          <a:p xmlns:a="http://schemas.openxmlformats.org/drawingml/2006/main">
-            <a:pPr algn="l">
-              <a:defRPr sz="1275" b="0">
-                <a:solidFill>
-                  <a:srgbClr val="333333"/>
-                </a:solidFill>
-                <a:latin typeface="Arial"/>
-                <a:ea typeface="Arial"/>
-                <a:cs typeface="Arial"/>
-              </a:defRPr>
-            </a:pPr>
-            <a:r>
-              <a:rPr sz="1275" b="0">
-                <a:solidFill>
-                  <a:srgbClr val="333333"/>
-                </a:solidFill>
-                <a:latin typeface="Arial"/>
-                <a:ea typeface="Arial"/>
-                <a:cs typeface="Arial"/>
-              </a:rPr>
-              <a:t>IA: no se integra en esta versión. El código asistido se entiende, revisa y prueba; no se comparten secretos ni datos personales.</a:t>
-            </a:r>
-          </a:p>
-        </p:txBody>
-      </p:sp>
-      <p:sp>
-        <p:nvSpPr>
           <p:cNvPr id="13" name="footer">
             <a:extLst xmlns:a="http://schemas.openxmlformats.org/drawingml/2006/main">
               <a:ext uri="{FF2B5EF4-FFF2-40B4-BE49-F238E27FC236}">
@@ -20232,6 +18904,826 @@
           </a:p>
         </p:txBody>
       </p:sp>
+      <p:sp xmlns:a="http://schemas.openxmlformats.org/drawingml/2006/main">
+        <p:nvSpPr>
+          <p:cNvPr id="15" name="TextBox 14"/>
+          <p:cNvSpPr txBox="1"/>
+          <p:nvPr/>
+        </p:nvSpPr>
+        <p:spPr>
+          <a:xfrm>
+            <a:off x="777240" y="1417320"/>
+            <a:ext cx="10424160" cy="320040"/>
+          </a:xfrm>
+          <a:prstGeom prst="rect">
+            <a:avLst/>
+          </a:prstGeom>
+          <a:noFill/>
+        </p:spPr>
+        <p:txBody>
+          <a:bodyPr wrap="square" lIns="0" rIns="0" tIns="0" bIns="0">
+            <a:spAutoFit/>
+          </a:bodyPr>
+          <a:lstStyle/>
+          <a:p>
+            <a:pPr>
+              <a:defRPr sz="1800" b="1">
+                <a:solidFill>
+                  <a:srgbClr val="202020"/>
+                </a:solidFill>
+                <a:latin typeface="Arial"/>
+              </a:defRPr>
+            </a:pPr>
+            <a:r>
+              <a:t>Riesgos principales</a:t>
+            </a:r>
+          </a:p>
+        </p:txBody>
+      </p:sp>
+      <p:sp xmlns:a="http://schemas.openxmlformats.org/drawingml/2006/main">
+        <p:nvSpPr>
+          <p:cNvPr id="16" name="TextBox 15"/>
+          <p:cNvSpPr txBox="1"/>
+          <p:nvPr/>
+        </p:nvSpPr>
+        <p:spPr>
+          <a:xfrm>
+            <a:off x="777240" y="1773936"/>
+            <a:ext cx="10424160" cy="274320"/>
+          </a:xfrm>
+          <a:prstGeom prst="rect">
+            <a:avLst/>
+          </a:prstGeom>
+          <a:noFill/>
+        </p:spPr>
+        <p:txBody>
+          <a:bodyPr wrap="square" lIns="0" rIns="0" tIns="0" bIns="0">
+            <a:spAutoFit/>
+          </a:bodyPr>
+          <a:lstStyle/>
+          <a:p>
+            <a:pPr>
+              <a:defRPr sz="1100" b="0">
+                <a:solidFill>
+                  <a:srgbClr val="666666"/>
+                </a:solidFill>
+                <a:latin typeface="Arial"/>
+              </a:defRPr>
+            </a:pPr>
+            <a:r>
+              <a:t>P = probabilidad · I = impacto · Respuestas propuestas para el proyecto</a:t>
+            </a:r>
+          </a:p>
+        </p:txBody>
+      </p:sp>
+      <p:sp xmlns:a="http://schemas.openxmlformats.org/drawingml/2006/main">
+        <p:nvSpPr>
+          <p:cNvPr id="17" name="TextBox 16"/>
+          <p:cNvSpPr txBox="1"/>
+          <p:nvPr/>
+        </p:nvSpPr>
+        <p:spPr>
+          <a:xfrm>
+            <a:off x="822960" y="2185416"/>
+            <a:ext cx="2971800" cy="228600"/>
+          </a:xfrm>
+          <a:prstGeom prst="rect">
+            <a:avLst/>
+          </a:prstGeom>
+          <a:noFill/>
+        </p:spPr>
+        <p:txBody>
+          <a:bodyPr wrap="square" lIns="0" rIns="0" tIns="0" bIns="0">
+            <a:spAutoFit/>
+          </a:bodyPr>
+          <a:lstStyle/>
+          <a:p>
+            <a:pPr>
+              <a:defRPr sz="1200" b="1">
+                <a:solidFill>
+                  <a:srgbClr val="202020"/>
+                </a:solidFill>
+                <a:latin typeface="Arial"/>
+              </a:defRPr>
+            </a:pPr>
+            <a:r>
+              <a:t>Reglas de ajedrez incorrectas</a:t>
+            </a:r>
+          </a:p>
+        </p:txBody>
+      </p:sp>
+      <p:sp xmlns:a="http://schemas.openxmlformats.org/drawingml/2006/main">
+        <p:nvSpPr>
+          <p:cNvPr id="18" name="TextBox 17"/>
+          <p:cNvSpPr txBox="1"/>
+          <p:nvPr/>
+        </p:nvSpPr>
+        <p:spPr>
+          <a:xfrm>
+            <a:off x="3840480" y="2185416"/>
+            <a:ext cx="1828800" cy="228600"/>
+          </a:xfrm>
+          <a:prstGeom prst="rect">
+            <a:avLst/>
+          </a:prstGeom>
+          <a:noFill/>
+        </p:spPr>
+        <p:txBody>
+          <a:bodyPr wrap="square" lIns="0" rIns="0" tIns="0" bIns="0">
+            <a:spAutoFit/>
+          </a:bodyPr>
+          <a:lstStyle/>
+          <a:p>
+            <a:pPr>
+              <a:defRPr sz="1100" b="0">
+                <a:solidFill>
+                  <a:srgbClr val="555555"/>
+                </a:solidFill>
+                <a:latin typeface="Arial"/>
+              </a:defRPr>
+            </a:pPr>
+            <a:r>
+              <a:t>P media · I alto</a:t>
+            </a:r>
+          </a:p>
+        </p:txBody>
+      </p:sp>
+      <p:sp xmlns:a="http://schemas.openxmlformats.org/drawingml/2006/main">
+        <p:nvSpPr>
+          <p:cNvPr id="19" name="TextBox 18"/>
+          <p:cNvSpPr txBox="1"/>
+          <p:nvPr/>
+        </p:nvSpPr>
+        <p:spPr>
+          <a:xfrm>
+            <a:off x="5669280" y="2185416"/>
+            <a:ext cx="5394960" cy="320040"/>
+          </a:xfrm>
+          <a:prstGeom prst="rect">
+            <a:avLst/>
+          </a:prstGeom>
+          <a:noFill/>
+        </p:spPr>
+        <p:txBody>
+          <a:bodyPr wrap="square" lIns="0" rIns="0" tIns="0" bIns="0">
+            <a:spAutoFit/>
+          </a:bodyPr>
+          <a:lstStyle/>
+          <a:p>
+            <a:pPr>
+              <a:defRPr sz="1100" b="0">
+                <a:solidFill>
+                  <a:srgbClr val="202020"/>
+                </a:solidFill>
+                <a:latin typeface="Arial"/>
+              </a:defRPr>
+            </a:pPr>
+            <a:r>
+              <a:t>Mitigar: prueba por requisito y revisión de casos límite.</a:t>
+            </a:r>
+          </a:p>
+        </p:txBody>
+      </p:sp>
+      <p:sp xmlns:a="http://schemas.openxmlformats.org/drawingml/2006/main">
+        <p:nvSpPr>
+          <p:cNvPr id="20" name="Rectangle 19"/>
+          <p:cNvSpPr/>
+          <p:nvPr/>
+        </p:nvSpPr>
+        <p:spPr>
+          <a:xfrm>
+            <a:off x="822960" y="2615184"/>
+            <a:ext cx="10469880" cy="9144"/>
+          </a:xfrm>
+          <a:prstGeom prst="rect">
+            <a:avLst/>
+          </a:prstGeom>
+          <a:solidFill>
+            <a:srgbClr val="DDDDDD"/>
+          </a:solidFill>
+          <a:ln>
+            <a:noFill/>
+          </a:ln>
+        </p:spPr>
+        <p:style>
+          <a:lnRef idx="1">
+            <a:schemeClr val="accent1"/>
+          </a:lnRef>
+          <a:fillRef idx="3">
+            <a:schemeClr val="accent1"/>
+          </a:fillRef>
+          <a:effectRef idx="2">
+            <a:schemeClr val="accent1"/>
+          </a:effectRef>
+          <a:fontRef idx="minor">
+            <a:schemeClr val="lt1"/>
+          </a:fontRef>
+        </p:style>
+        <p:txBody>
+          <a:bodyPr rtlCol="0" anchor="ctr"/>
+          <a:lstStyle/>
+          <a:p>
+            <a:pPr algn="ctr"/>
+          </a:p>
+        </p:txBody>
+      </p:sp>
+      <p:sp xmlns:a="http://schemas.openxmlformats.org/drawingml/2006/main">
+        <p:nvSpPr>
+          <p:cNvPr id="21" name="TextBox 20"/>
+          <p:cNvSpPr txBox="1"/>
+          <p:nvPr/>
+        </p:nvSpPr>
+        <p:spPr>
+          <a:xfrm>
+            <a:off x="822960" y="2834640"/>
+            <a:ext cx="2971800" cy="228600"/>
+          </a:xfrm>
+          <a:prstGeom prst="rect">
+            <a:avLst/>
+          </a:prstGeom>
+          <a:noFill/>
+        </p:spPr>
+        <p:txBody>
+          <a:bodyPr wrap="square" lIns="0" rIns="0" tIns="0" bIns="0">
+            <a:spAutoFit/>
+          </a:bodyPr>
+          <a:lstStyle/>
+          <a:p>
+            <a:pPr>
+              <a:defRPr sz="1200" b="1">
+                <a:solidFill>
+                  <a:srgbClr val="202020"/>
+                </a:solidFill>
+                <a:latin typeface="Arial"/>
+              </a:defRPr>
+            </a:pPr>
+            <a:r>
+              <a:t>Pruebas débiles o alteradas</a:t>
+            </a:r>
+          </a:p>
+        </p:txBody>
+      </p:sp>
+      <p:sp xmlns:a="http://schemas.openxmlformats.org/drawingml/2006/main">
+        <p:nvSpPr>
+          <p:cNvPr id="22" name="TextBox 21"/>
+          <p:cNvSpPr txBox="1"/>
+          <p:nvPr/>
+        </p:nvSpPr>
+        <p:spPr>
+          <a:xfrm>
+            <a:off x="3840480" y="2834640"/>
+            <a:ext cx="1828800" cy="228600"/>
+          </a:xfrm>
+          <a:prstGeom prst="rect">
+            <a:avLst/>
+          </a:prstGeom>
+          <a:noFill/>
+        </p:spPr>
+        <p:txBody>
+          <a:bodyPr wrap="square" lIns="0" rIns="0" tIns="0" bIns="0">
+            <a:spAutoFit/>
+          </a:bodyPr>
+          <a:lstStyle/>
+          <a:p>
+            <a:pPr>
+              <a:defRPr sz="1100" b="0">
+                <a:solidFill>
+                  <a:srgbClr val="555555"/>
+                </a:solidFill>
+                <a:latin typeface="Arial"/>
+              </a:defRPr>
+            </a:pPr>
+            <a:r>
+              <a:t>P media · I alto</a:t>
+            </a:r>
+          </a:p>
+        </p:txBody>
+      </p:sp>
+      <p:sp xmlns:a="http://schemas.openxmlformats.org/drawingml/2006/main">
+        <p:nvSpPr>
+          <p:cNvPr id="23" name="TextBox 22"/>
+          <p:cNvSpPr txBox="1"/>
+          <p:nvPr/>
+        </p:nvSpPr>
+        <p:spPr>
+          <a:xfrm>
+            <a:off x="5669280" y="2834640"/>
+            <a:ext cx="5394960" cy="320040"/>
+          </a:xfrm>
+          <a:prstGeom prst="rect">
+            <a:avLst/>
+          </a:prstGeom>
+          <a:noFill/>
+        </p:spPr>
+        <p:txBody>
+          <a:bodyPr wrap="square" lIns="0" rIns="0" tIns="0" bIns="0">
+            <a:spAutoFit/>
+          </a:bodyPr>
+          <a:lstStyle/>
+          <a:p>
+            <a:pPr>
+              <a:defRPr sz="1100" b="0">
+                <a:solidFill>
+                  <a:srgbClr val="202020"/>
+                </a:solidFill>
+                <a:latin typeface="Arial"/>
+              </a:defRPr>
+            </a:pPr>
+            <a:r>
+              <a:t>Mitigar: revisar aserciones y conservar regresiones.</a:t>
+            </a:r>
+          </a:p>
+        </p:txBody>
+      </p:sp>
+      <p:sp xmlns:a="http://schemas.openxmlformats.org/drawingml/2006/main">
+        <p:nvSpPr>
+          <p:cNvPr id="24" name="Rectangle 23"/>
+          <p:cNvSpPr/>
+          <p:nvPr/>
+        </p:nvSpPr>
+        <p:spPr>
+          <a:xfrm>
+            <a:off x="822960" y="3264408"/>
+            <a:ext cx="10469880" cy="9144"/>
+          </a:xfrm>
+          <a:prstGeom prst="rect">
+            <a:avLst/>
+          </a:prstGeom>
+          <a:solidFill>
+            <a:srgbClr val="DDDDDD"/>
+          </a:solidFill>
+          <a:ln>
+            <a:noFill/>
+          </a:ln>
+        </p:spPr>
+        <p:style>
+          <a:lnRef idx="1">
+            <a:schemeClr val="accent1"/>
+          </a:lnRef>
+          <a:fillRef idx="3">
+            <a:schemeClr val="accent1"/>
+          </a:fillRef>
+          <a:effectRef idx="2">
+            <a:schemeClr val="accent1"/>
+          </a:effectRef>
+          <a:fontRef idx="minor">
+            <a:schemeClr val="lt1"/>
+          </a:fontRef>
+        </p:style>
+        <p:txBody>
+          <a:bodyPr rtlCol="0" anchor="ctr"/>
+          <a:lstStyle/>
+          <a:p>
+            <a:pPr algn="ctr"/>
+          </a:p>
+        </p:txBody>
+      </p:sp>
+      <p:sp xmlns:a="http://schemas.openxmlformats.org/drawingml/2006/main">
+        <p:nvSpPr>
+          <p:cNvPr id="25" name="TextBox 24"/>
+          <p:cNvSpPr txBox="1"/>
+          <p:nvPr/>
+        </p:nvSpPr>
+        <p:spPr>
+          <a:xfrm>
+            <a:off x="822960" y="3483864"/>
+            <a:ext cx="2971800" cy="228600"/>
+          </a:xfrm>
+          <a:prstGeom prst="rect">
+            <a:avLst/>
+          </a:prstGeom>
+          <a:noFill/>
+        </p:spPr>
+        <p:txBody>
+          <a:bodyPr wrap="square" lIns="0" rIns="0" tIns="0" bIns="0">
+            <a:spAutoFit/>
+          </a:bodyPr>
+          <a:lstStyle/>
+          <a:p>
+            <a:pPr>
+              <a:defRPr sz="1200" b="1">
+                <a:solidFill>
+                  <a:srgbClr val="202020"/>
+                </a:solidFill>
+                <a:latin typeface="Arial"/>
+              </a:defRPr>
+            </a:pPr>
+            <a:r>
+              <a:t>Pérdida de código o integración tardía</a:t>
+            </a:r>
+          </a:p>
+        </p:txBody>
+      </p:sp>
+      <p:sp xmlns:a="http://schemas.openxmlformats.org/drawingml/2006/main">
+        <p:nvSpPr>
+          <p:cNvPr id="26" name="TextBox 25"/>
+          <p:cNvSpPr txBox="1"/>
+          <p:nvPr/>
+        </p:nvSpPr>
+        <p:spPr>
+          <a:xfrm>
+            <a:off x="3840480" y="3483864"/>
+            <a:ext cx="1828800" cy="228600"/>
+          </a:xfrm>
+          <a:prstGeom prst="rect">
+            <a:avLst/>
+          </a:prstGeom>
+          <a:noFill/>
+        </p:spPr>
+        <p:txBody>
+          <a:bodyPr wrap="square" lIns="0" rIns="0" tIns="0" bIns="0">
+            <a:spAutoFit/>
+          </a:bodyPr>
+          <a:lstStyle/>
+          <a:p>
+            <a:pPr>
+              <a:defRPr sz="1100" b="0">
+                <a:solidFill>
+                  <a:srgbClr val="555555"/>
+                </a:solidFill>
+                <a:latin typeface="Arial"/>
+              </a:defRPr>
+            </a:pPr>
+            <a:r>
+              <a:t>P baja · I alto</a:t>
+            </a:r>
+          </a:p>
+        </p:txBody>
+      </p:sp>
+      <p:sp xmlns:a="http://schemas.openxmlformats.org/drawingml/2006/main">
+        <p:nvSpPr>
+          <p:cNvPr id="27" name="TextBox 26"/>
+          <p:cNvSpPr txBox="1"/>
+          <p:nvPr/>
+        </p:nvSpPr>
+        <p:spPr>
+          <a:xfrm>
+            <a:off x="5669280" y="3483864"/>
+            <a:ext cx="5394960" cy="320040"/>
+          </a:xfrm>
+          <a:prstGeom prst="rect">
+            <a:avLst/>
+          </a:prstGeom>
+          <a:noFill/>
+        </p:spPr>
+        <p:txBody>
+          <a:bodyPr wrap="square" lIns="0" rIns="0" tIns="0" bIns="0">
+            <a:spAutoFit/>
+          </a:bodyPr>
+          <a:lstStyle/>
+          <a:p>
+            <a:pPr>
+              <a:defRPr sz="1100" b="0">
+                <a:solidFill>
+                  <a:srgbClr val="202020"/>
+                </a:solidFill>
+                <a:latin typeface="Arial"/>
+              </a:defRPr>
+            </a:pPr>
+            <a:r>
+              <a:t>Mitigar: repositorio remoto y suite antes de entregar.</a:t>
+            </a:r>
+          </a:p>
+        </p:txBody>
+      </p:sp>
+      <p:sp xmlns:a="http://schemas.openxmlformats.org/drawingml/2006/main">
+        <p:nvSpPr>
+          <p:cNvPr id="28" name="Rectangle 27"/>
+          <p:cNvSpPr/>
+          <p:nvPr/>
+        </p:nvSpPr>
+        <p:spPr>
+          <a:xfrm>
+            <a:off x="822960" y="3913632"/>
+            <a:ext cx="10469880" cy="9144"/>
+          </a:xfrm>
+          <a:prstGeom prst="rect">
+            <a:avLst/>
+          </a:prstGeom>
+          <a:solidFill>
+            <a:srgbClr val="DDDDDD"/>
+          </a:solidFill>
+          <a:ln>
+            <a:noFill/>
+          </a:ln>
+        </p:spPr>
+        <p:style>
+          <a:lnRef idx="1">
+            <a:schemeClr val="accent1"/>
+          </a:lnRef>
+          <a:fillRef idx="3">
+            <a:schemeClr val="accent1"/>
+          </a:fillRef>
+          <a:effectRef idx="2">
+            <a:schemeClr val="accent1"/>
+          </a:effectRef>
+          <a:fontRef idx="minor">
+            <a:schemeClr val="lt1"/>
+          </a:fontRef>
+        </p:style>
+        <p:txBody>
+          <a:bodyPr rtlCol="0" anchor="ctr"/>
+          <a:lstStyle/>
+          <a:p>
+            <a:pPr algn="ctr"/>
+          </a:p>
+        </p:txBody>
+      </p:sp>
+      <p:sp xmlns:a="http://schemas.openxmlformats.org/drawingml/2006/main">
+        <p:nvSpPr>
+          <p:cNvPr id="29" name="TextBox 28"/>
+          <p:cNvSpPr txBox="1"/>
+          <p:nvPr/>
+        </p:nvSpPr>
+        <p:spPr>
+          <a:xfrm>
+            <a:off x="822960" y="4133087"/>
+            <a:ext cx="2971800" cy="228600"/>
+          </a:xfrm>
+          <a:prstGeom prst="rect">
+            <a:avLst/>
+          </a:prstGeom>
+          <a:noFill/>
+        </p:spPr>
+        <p:txBody>
+          <a:bodyPr wrap="square" lIns="0" rIns="0" tIns="0" bIns="0">
+            <a:spAutoFit/>
+          </a:bodyPr>
+          <a:lstStyle/>
+          <a:p>
+            <a:pPr>
+              <a:defRPr sz="1200" b="1">
+                <a:solidFill>
+                  <a:srgbClr val="202020"/>
+                </a:solidFill>
+                <a:latin typeface="Arial"/>
+              </a:defRPr>
+            </a:pPr>
+            <a:r>
+              <a:t>Conocimiento concentrado</a:t>
+            </a:r>
+          </a:p>
+        </p:txBody>
+      </p:sp>
+      <p:sp xmlns:a="http://schemas.openxmlformats.org/drawingml/2006/main">
+        <p:nvSpPr>
+          <p:cNvPr id="30" name="TextBox 29"/>
+          <p:cNvSpPr txBox="1"/>
+          <p:nvPr/>
+        </p:nvSpPr>
+        <p:spPr>
+          <a:xfrm>
+            <a:off x="3840480" y="4133087"/>
+            <a:ext cx="1828800" cy="228600"/>
+          </a:xfrm>
+          <a:prstGeom prst="rect">
+            <a:avLst/>
+          </a:prstGeom>
+          <a:noFill/>
+        </p:spPr>
+        <p:txBody>
+          <a:bodyPr wrap="square" lIns="0" rIns="0" tIns="0" bIns="0">
+            <a:spAutoFit/>
+          </a:bodyPr>
+          <a:lstStyle/>
+          <a:p>
+            <a:pPr>
+              <a:defRPr sz="1100" b="0">
+                <a:solidFill>
+                  <a:srgbClr val="555555"/>
+                </a:solidFill>
+                <a:latin typeface="Arial"/>
+              </a:defRPr>
+            </a:pPr>
+            <a:r>
+              <a:t>P media · I medio</a:t>
+            </a:r>
+          </a:p>
+        </p:txBody>
+      </p:sp>
+      <p:sp xmlns:a="http://schemas.openxmlformats.org/drawingml/2006/main">
+        <p:nvSpPr>
+          <p:cNvPr id="31" name="TextBox 30"/>
+          <p:cNvSpPr txBox="1"/>
+          <p:nvPr/>
+        </p:nvSpPr>
+        <p:spPr>
+          <a:xfrm>
+            <a:off x="5669280" y="4133087"/>
+            <a:ext cx="5394960" cy="320040"/>
+          </a:xfrm>
+          <a:prstGeom prst="rect">
+            <a:avLst/>
+          </a:prstGeom>
+          <a:noFill/>
+        </p:spPr>
+        <p:txBody>
+          <a:bodyPr wrap="square" lIns="0" rIns="0" tIns="0" bIns="0">
+            <a:spAutoFit/>
+          </a:bodyPr>
+          <a:lstStyle/>
+          <a:p>
+            <a:pPr>
+              <a:defRPr sz="1100" b="0">
+                <a:solidFill>
+                  <a:srgbClr val="202020"/>
+                </a:solidFill>
+                <a:latin typeface="Arial"/>
+              </a:defRPr>
+            </a:pPr>
+            <a:r>
+              <a:t>Mitigar: revisión compartida y explicación del núcleo.</a:t>
+            </a:r>
+          </a:p>
+        </p:txBody>
+      </p:sp>
+      <p:sp xmlns:a="http://schemas.openxmlformats.org/drawingml/2006/main">
+        <p:nvSpPr>
+          <p:cNvPr id="32" name="Rectangle 31"/>
+          <p:cNvSpPr/>
+          <p:nvPr/>
+        </p:nvSpPr>
+        <p:spPr>
+          <a:xfrm>
+            <a:off x="822960" y="4562855"/>
+            <a:ext cx="10469880" cy="9144"/>
+          </a:xfrm>
+          <a:prstGeom prst="rect">
+            <a:avLst/>
+          </a:prstGeom>
+          <a:solidFill>
+            <a:srgbClr val="DDDDDD"/>
+          </a:solidFill>
+          <a:ln>
+            <a:noFill/>
+          </a:ln>
+        </p:spPr>
+        <p:style>
+          <a:lnRef idx="1">
+            <a:schemeClr val="accent1"/>
+          </a:lnRef>
+          <a:fillRef idx="3">
+            <a:schemeClr val="accent1"/>
+          </a:fillRef>
+          <a:effectRef idx="2">
+            <a:schemeClr val="accent1"/>
+          </a:effectRef>
+          <a:fontRef idx="minor">
+            <a:schemeClr val="lt1"/>
+          </a:fontRef>
+        </p:style>
+        <p:txBody>
+          <a:bodyPr rtlCol="0" anchor="ctr"/>
+          <a:lstStyle/>
+          <a:p>
+            <a:pPr algn="ctr"/>
+          </a:p>
+        </p:txBody>
+      </p:sp>
+      <p:sp xmlns:a="http://schemas.openxmlformats.org/drawingml/2006/main">
+        <p:nvSpPr>
+          <p:cNvPr id="33" name="TextBox 32"/>
+          <p:cNvSpPr txBox="1"/>
+          <p:nvPr/>
+        </p:nvSpPr>
+        <p:spPr>
+          <a:xfrm>
+            <a:off x="822960" y="4782312"/>
+            <a:ext cx="2971800" cy="228600"/>
+          </a:xfrm>
+          <a:prstGeom prst="rect">
+            <a:avLst/>
+          </a:prstGeom>
+          <a:noFill/>
+        </p:spPr>
+        <p:txBody>
+          <a:bodyPr wrap="square" lIns="0" rIns="0" tIns="0" bIns="0">
+            <a:spAutoFit/>
+          </a:bodyPr>
+          <a:lstStyle/>
+          <a:p>
+            <a:pPr>
+              <a:defRPr sz="1200" b="1">
+                <a:solidFill>
+                  <a:srgbClr val="202020"/>
+                </a:solidFill>
+                <a:latin typeface="Arial"/>
+              </a:defRPr>
+            </a:pPr>
+            <a:r>
+              <a:t>Exposición de una clave si se integra IA</a:t>
+            </a:r>
+          </a:p>
+        </p:txBody>
+      </p:sp>
+      <p:sp xmlns:a="http://schemas.openxmlformats.org/drawingml/2006/main">
+        <p:nvSpPr>
+          <p:cNvPr id="34" name="TextBox 33"/>
+          <p:cNvSpPr txBox="1"/>
+          <p:nvPr/>
+        </p:nvSpPr>
+        <p:spPr>
+          <a:xfrm>
+            <a:off x="3840480" y="4782312"/>
+            <a:ext cx="1828800" cy="228600"/>
+          </a:xfrm>
+          <a:prstGeom prst="rect">
+            <a:avLst/>
+          </a:prstGeom>
+          <a:noFill/>
+        </p:spPr>
+        <p:txBody>
+          <a:bodyPr wrap="square" lIns="0" rIns="0" tIns="0" bIns="0">
+            <a:spAutoFit/>
+          </a:bodyPr>
+          <a:lstStyle/>
+          <a:p>
+            <a:pPr>
+              <a:defRPr sz="1100" b="0">
+                <a:solidFill>
+                  <a:srgbClr val="555555"/>
+                </a:solidFill>
+                <a:latin typeface="Arial"/>
+              </a:defRPr>
+            </a:pPr>
+            <a:r>
+              <a:t>P baja hoy · I alto</a:t>
+            </a:r>
+          </a:p>
+        </p:txBody>
+      </p:sp>
+      <p:sp xmlns:a="http://schemas.openxmlformats.org/drawingml/2006/main">
+        <p:nvSpPr>
+          <p:cNvPr id="35" name="TextBox 34"/>
+          <p:cNvSpPr txBox="1"/>
+          <p:nvPr/>
+        </p:nvSpPr>
+        <p:spPr>
+          <a:xfrm>
+            <a:off x="5669280" y="4782312"/>
+            <a:ext cx="5394960" cy="320040"/>
+          </a:xfrm>
+          <a:prstGeom prst="rect">
+            <a:avLst/>
+          </a:prstGeom>
+          <a:noFill/>
+        </p:spPr>
+        <p:txBody>
+          <a:bodyPr wrap="square" lIns="0" rIns="0" tIns="0" bIns="0">
+            <a:spAutoFit/>
+          </a:bodyPr>
+          <a:lstStyle/>
+          <a:p>
+            <a:pPr>
+              <a:defRPr sz="1100" b="0">
+                <a:solidFill>
+                  <a:srgbClr val="202020"/>
+                </a:solidFill>
+                <a:latin typeface="Arial"/>
+              </a:defRPr>
+            </a:pPr>
+            <a:r>
+              <a:t>Evitar: IA fuera del alcance; si cambia, clave fuera del repo.</a:t>
+            </a:r>
+          </a:p>
+        </p:txBody>
+      </p:sp>
+      <p:sp xmlns:a="http://schemas.openxmlformats.org/drawingml/2006/main">
+        <p:nvSpPr>
+          <p:cNvPr id="36" name="TextBox 35"/>
+          <p:cNvSpPr txBox="1"/>
+          <p:nvPr/>
+        </p:nvSpPr>
+        <p:spPr>
+          <a:xfrm>
+            <a:off x="777240" y="5742432"/>
+            <a:ext cx="10469880" cy="365760"/>
+          </a:xfrm>
+          <a:prstGeom prst="rect">
+            <a:avLst/>
+          </a:prstGeom>
+          <a:noFill/>
+        </p:spPr>
+        <p:txBody>
+          <a:bodyPr wrap="square" lIns="0" rIns="0" tIns="0" bIns="0">
+            <a:spAutoFit/>
+          </a:bodyPr>
+          <a:lstStyle/>
+          <a:p>
+            <a:pPr>
+              <a:defRPr sz="1000" b="0">
+                <a:solidFill>
+                  <a:srgbClr val="555555"/>
+                </a:solidFill>
+                <a:latin typeface="Arial"/>
+              </a:defRPr>
+            </a:pPr>
+            <a:r>
+              <a:t>Estimación inicial del grupo; revisar probabilidad e impacto si cambia el alcance.</a:t>
+            </a:r>
+          </a:p>
+        </p:txBody>
+      </p:sp>
     </p:spTree>
     <p:extLst>
       <p:ext uri="{BB962C8B-B14F-4D97-AF65-F5344CB8AC3E}">
@@ -20239,6 +19731,706 @@
       </p:ext>
     </p:extLst>
   </p:cSld>
+</p:sld>
+</file>
+
+<file path=ppt/slides/slide9.xml><?xml version="1.0" encoding="utf-8"?>
+<p:sld xmlns:a="http://schemas.openxmlformats.org/drawingml/2006/main" xmlns:p="http://schemas.openxmlformats.org/presentationml/2006/main" xmlns:r="http://schemas.openxmlformats.org/officeDocument/2006/relationships">
+  <p:cSld>
+    <p:spTree>
+      <p:nvGrpSpPr>
+        <p:cNvPr id="1" name=""/>
+        <p:cNvGrpSpPr/>
+        <p:nvPr/>
+      </p:nvGrpSpPr>
+      <p:grpSpPr/>
+      <p:sp>
+        <p:nvSpPr>
+          <p:cNvPr id="2" name="Rectangle 1"/>
+          <p:cNvSpPr/>
+          <p:nvPr/>
+        </p:nvSpPr>
+        <p:spPr>
+          <a:xfrm>
+            <a:off x="0" y="0"/>
+            <a:ext cx="155448" cy="6858000"/>
+          </a:xfrm>
+          <a:prstGeom prst="rect">
+            <a:avLst/>
+          </a:prstGeom>
+          <a:solidFill>
+            <a:srgbClr val="111111"/>
+          </a:solidFill>
+          <a:ln>
+            <a:noFill/>
+          </a:ln>
+        </p:spPr>
+        <p:style>
+          <a:lnRef idx="1">
+            <a:schemeClr val="accent1"/>
+          </a:lnRef>
+          <a:fillRef idx="3">
+            <a:schemeClr val="accent1"/>
+          </a:fillRef>
+          <a:effectRef idx="2">
+            <a:schemeClr val="accent1"/>
+          </a:effectRef>
+          <a:fontRef idx="minor">
+            <a:schemeClr val="lt1"/>
+          </a:fontRef>
+        </p:style>
+        <p:txBody>
+          <a:bodyPr rtlCol="0" anchor="ctr"/>
+          <a:lstStyle/>
+          <a:p>
+            <a:pPr algn="ctr"/>
+          </a:p>
+        </p:txBody>
+      </p:sp>
+      <p:sp>
+        <p:nvSpPr>
+          <p:cNvPr id="3" name="TextBox 2"/>
+          <p:cNvSpPr txBox="1"/>
+          <p:nvPr/>
+        </p:nvSpPr>
+        <p:spPr>
+          <a:xfrm>
+            <a:off x="667512" y="402336"/>
+            <a:ext cx="10671048" cy="566928"/>
+          </a:xfrm>
+          <a:prstGeom prst="rect">
+            <a:avLst/>
+          </a:prstGeom>
+          <a:noFill/>
+        </p:spPr>
+        <p:txBody>
+          <a:bodyPr wrap="square" lIns="0" rIns="0" tIns="0" bIns="0">
+            <a:spAutoFit/>
+          </a:bodyPr>
+          <a:lstStyle/>
+          <a:p>
+            <a:pPr>
+              <a:defRPr sz="2600" b="1">
+                <a:solidFill>
+                  <a:srgbClr val="111111"/>
+                </a:solidFill>
+                <a:latin typeface="Arial"/>
+              </a:defRPr>
+            </a:pPr>
+            <a:r>
+              <a:t>Meta, preguntas e indicadores</a:t>
+            </a:r>
+          </a:p>
+        </p:txBody>
+      </p:sp>
+      <p:sp>
+        <p:nvSpPr>
+          <p:cNvPr id="4" name="Rectangle 3"/>
+          <p:cNvSpPr/>
+          <p:nvPr/>
+        </p:nvSpPr>
+        <p:spPr>
+          <a:xfrm>
+            <a:off x="667512" y="1078992"/>
+            <a:ext cx="10863072" cy="18288"/>
+          </a:xfrm>
+          <a:prstGeom prst="rect">
+            <a:avLst/>
+          </a:prstGeom>
+          <a:solidFill>
+            <a:srgbClr val="222222"/>
+          </a:solidFill>
+          <a:ln>
+            <a:noFill/>
+          </a:ln>
+        </p:spPr>
+        <p:style>
+          <a:lnRef idx="1">
+            <a:schemeClr val="accent1"/>
+          </a:lnRef>
+          <a:fillRef idx="3">
+            <a:schemeClr val="accent1"/>
+          </a:fillRef>
+          <a:effectRef idx="2">
+            <a:schemeClr val="accent1"/>
+          </a:effectRef>
+          <a:fontRef idx="minor">
+            <a:schemeClr val="lt1"/>
+          </a:fontRef>
+        </p:style>
+        <p:txBody>
+          <a:bodyPr rtlCol="0" anchor="ctr"/>
+          <a:lstStyle/>
+          <a:p>
+            <a:pPr algn="ctr"/>
+          </a:p>
+        </p:txBody>
+      </p:sp>
+      <p:sp>
+        <p:nvSpPr>
+          <p:cNvPr id="5" name="TextBox 4"/>
+          <p:cNvSpPr txBox="1"/>
+          <p:nvPr/>
+        </p:nvSpPr>
+        <p:spPr>
+          <a:xfrm>
+            <a:off x="667512" y="6428232"/>
+            <a:ext cx="6665976" cy="210312"/>
+          </a:xfrm>
+          <a:prstGeom prst="rect">
+            <a:avLst/>
+          </a:prstGeom>
+          <a:noFill/>
+        </p:spPr>
+        <p:txBody>
+          <a:bodyPr wrap="square" lIns="0" rIns="0" tIns="0" bIns="0">
+            <a:spAutoFit/>
+          </a:bodyPr>
+          <a:lstStyle/>
+          <a:p>
+            <a:pPr>
+              <a:defRPr sz="900" b="0">
+                <a:solidFill>
+                  <a:srgbClr val="666666"/>
+                </a:solidFill>
+                <a:latin typeface="Arial"/>
+              </a:defRPr>
+            </a:pPr>
+            <a:r>
+              <a:t>09  ·  TPO AJEDREZ</a:t>
+            </a:r>
+          </a:p>
+        </p:txBody>
+      </p:sp>
+      <p:sp>
+        <p:nvSpPr>
+          <p:cNvPr id="6" name="TextBox 5"/>
+          <p:cNvSpPr txBox="1"/>
+          <p:nvPr/>
+        </p:nvSpPr>
+        <p:spPr>
+          <a:xfrm>
+            <a:off x="777240" y="1353312"/>
+            <a:ext cx="10515600" cy="274320"/>
+          </a:xfrm>
+          <a:prstGeom prst="rect">
+            <a:avLst/>
+          </a:prstGeom>
+          <a:noFill/>
+        </p:spPr>
+        <p:txBody>
+          <a:bodyPr wrap="square" lIns="0" rIns="0" tIns="0" bIns="0">
+            <a:spAutoFit/>
+          </a:bodyPr>
+          <a:lstStyle/>
+          <a:p>
+            <a:pPr>
+              <a:defRPr sz="1600" b="1">
+                <a:solidFill>
+                  <a:srgbClr val="202020"/>
+                </a:solidFill>
+                <a:latin typeface="Arial"/>
+              </a:defRPr>
+            </a:pPr>
+            <a:r>
+              <a:t>Meta: entregar un ajedrez correcto y verificable.</a:t>
+            </a:r>
+          </a:p>
+        </p:txBody>
+      </p:sp>
+      <p:sp>
+        <p:nvSpPr>
+          <p:cNvPr id="7" name="TextBox 6"/>
+          <p:cNvSpPr txBox="1"/>
+          <p:nvPr/>
+        </p:nvSpPr>
+        <p:spPr>
+          <a:xfrm>
+            <a:off x="777240" y="1700784"/>
+            <a:ext cx="10515600" cy="365760"/>
+          </a:xfrm>
+          <a:prstGeom prst="rect">
+            <a:avLst/>
+          </a:prstGeom>
+          <a:noFill/>
+        </p:spPr>
+        <p:txBody>
+          <a:bodyPr wrap="square" lIns="0" rIns="0" tIns="0" bIns="0">
+            <a:spAutoFit/>
+          </a:bodyPr>
+          <a:lstStyle/>
+          <a:p>
+            <a:pPr>
+              <a:defRPr sz="1100" b="0">
+                <a:solidFill>
+                  <a:srgbClr val="444444"/>
+                </a:solidFill>
+                <a:latin typeface="Arial"/>
+              </a:defRPr>
+            </a:pPr>
+            <a:r>
+              <a:t>Preguntas: ¿cada requisito obligatorio tiene una prueba significativa? ¿La suite detecta regresiones? ¿Los cambios del núcleo se revisan?</a:t>
+            </a:r>
+          </a:p>
+        </p:txBody>
+      </p:sp>
+      <p:sp>
+        <p:nvSpPr>
+          <p:cNvPr id="8" name="TextBox 7"/>
+          <p:cNvSpPr txBox="1"/>
+          <p:nvPr/>
+        </p:nvSpPr>
+        <p:spPr>
+          <a:xfrm>
+            <a:off x="822960" y="2221992"/>
+            <a:ext cx="1874519" cy="347472"/>
+          </a:xfrm>
+          <a:prstGeom prst="rect">
+            <a:avLst/>
+          </a:prstGeom>
+          <a:noFill/>
+        </p:spPr>
+        <p:txBody>
+          <a:bodyPr wrap="square" lIns="0" rIns="0" tIns="0" bIns="0">
+            <a:spAutoFit/>
+          </a:bodyPr>
+          <a:lstStyle/>
+          <a:p>
+            <a:pPr>
+              <a:defRPr sz="1300" b="1">
+                <a:solidFill>
+                  <a:srgbClr val="202020"/>
+                </a:solidFill>
+                <a:latin typeface="Arial"/>
+              </a:defRPr>
+            </a:pPr>
+            <a:r>
+              <a:t>1  Cobertura de requisitos</a:t>
+            </a:r>
+          </a:p>
+        </p:txBody>
+      </p:sp>
+      <p:sp>
+        <p:nvSpPr>
+          <p:cNvPr id="9" name="TextBox 8"/>
+          <p:cNvSpPr txBox="1"/>
+          <p:nvPr/>
+        </p:nvSpPr>
+        <p:spPr>
+          <a:xfrm>
+            <a:off x="2743200" y="2221992"/>
+            <a:ext cx="8503920" cy="713232"/>
+          </a:xfrm>
+          <a:prstGeom prst="rect">
+            <a:avLst/>
+          </a:prstGeom>
+          <a:noFill/>
+        </p:spPr>
+        <p:txBody>
+          <a:bodyPr wrap="square" lIns="0" rIns="0" tIns="0" bIns="0">
+            <a:spAutoFit/>
+          </a:bodyPr>
+          <a:lstStyle/>
+          <a:p>
+            <a:pPr>
+              <a:defRPr sz="1019" b="0">
+                <a:solidFill>
+                  <a:srgbClr val="333333"/>
+                </a:solidFill>
+                <a:latin typeface="Arial"/>
+              </a:defRPr>
+            </a:pPr>
+            <a:r>
+              <a:t>Requisitos obligatorios con prueba significativa aprobada / requisitos obligatorios × 100.</a:t>
+            </a:r>
+          </a:p>
+          <a:p>
+            <a:pPr>
+              <a:defRPr sz="1019" b="0">
+                <a:solidFill>
+                  <a:srgbClr val="333333"/>
+                </a:solidFill>
+                <a:latin typeface="Arial"/>
+              </a:defRPr>
+            </a:pPr>
+            <a:r>
+              <a:t>Responsable propuesto: quien mantiene las pruebas. Datos: consigna y relación requisito–test. Meta: 100% antes de entregar.</a:t>
+            </a:r>
+          </a:p>
+          <a:p>
+            <a:pPr>
+              <a:defRPr sz="1019" b="0">
+                <a:solidFill>
+                  <a:srgbClr val="333333"/>
+                </a:solidFill>
+                <a:latin typeface="Arial"/>
+              </a:defRPr>
+            </a:pPr>
+            <a:r>
+              <a:t>Riesgo Goodhart: tests sin aserciones útiles. Control: revisar qué comportamiento falla si se rompe.</a:t>
+            </a:r>
+          </a:p>
+        </p:txBody>
+      </p:sp>
+      <p:sp>
+        <p:nvSpPr>
+          <p:cNvPr id="10" name="Rectangle 9"/>
+          <p:cNvSpPr/>
+          <p:nvPr/>
+        </p:nvSpPr>
+        <p:spPr>
+          <a:xfrm>
+            <a:off x="822960" y="3017520"/>
+            <a:ext cx="10424160" cy="9144"/>
+          </a:xfrm>
+          <a:prstGeom prst="rect">
+            <a:avLst/>
+          </a:prstGeom>
+          <a:solidFill>
+            <a:srgbClr val="DDDDDD"/>
+          </a:solidFill>
+          <a:ln>
+            <a:noFill/>
+          </a:ln>
+        </p:spPr>
+        <p:style>
+          <a:lnRef idx="1">
+            <a:schemeClr val="accent1"/>
+          </a:lnRef>
+          <a:fillRef idx="3">
+            <a:schemeClr val="accent1"/>
+          </a:fillRef>
+          <a:effectRef idx="2">
+            <a:schemeClr val="accent1"/>
+          </a:effectRef>
+          <a:fontRef idx="minor">
+            <a:schemeClr val="lt1"/>
+          </a:fontRef>
+        </p:style>
+        <p:txBody>
+          <a:bodyPr rtlCol="0" anchor="ctr"/>
+          <a:lstStyle/>
+          <a:p>
+            <a:pPr algn="ctr"/>
+          </a:p>
+        </p:txBody>
+      </p:sp>
+      <p:sp>
+        <p:nvSpPr>
+          <p:cNvPr id="11" name="TextBox 10"/>
+          <p:cNvSpPr txBox="1"/>
+          <p:nvPr/>
+        </p:nvSpPr>
+        <p:spPr>
+          <a:xfrm>
+            <a:off x="822960" y="3127248"/>
+            <a:ext cx="1874519" cy="347472"/>
+          </a:xfrm>
+          <a:prstGeom prst="rect">
+            <a:avLst/>
+          </a:prstGeom>
+          <a:noFill/>
+        </p:spPr>
+        <p:txBody>
+          <a:bodyPr wrap="square" lIns="0" rIns="0" tIns="0" bIns="0">
+            <a:spAutoFit/>
+          </a:bodyPr>
+          <a:lstStyle/>
+          <a:p>
+            <a:pPr>
+              <a:defRPr sz="1300" b="1">
+                <a:solidFill>
+                  <a:srgbClr val="202020"/>
+                </a:solidFill>
+                <a:latin typeface="Arial"/>
+              </a:defRPr>
+            </a:pPr>
+            <a:r>
+              <a:t>2  Éxito de la suite</a:t>
+            </a:r>
+          </a:p>
+        </p:txBody>
+      </p:sp>
+      <p:sp>
+        <p:nvSpPr>
+          <p:cNvPr id="12" name="TextBox 11"/>
+          <p:cNvSpPr txBox="1"/>
+          <p:nvPr/>
+        </p:nvSpPr>
+        <p:spPr>
+          <a:xfrm>
+            <a:off x="2743200" y="3127248"/>
+            <a:ext cx="8503920" cy="713232"/>
+          </a:xfrm>
+          <a:prstGeom prst="rect">
+            <a:avLst/>
+          </a:prstGeom>
+          <a:noFill/>
+        </p:spPr>
+        <p:txBody>
+          <a:bodyPr wrap="square" lIns="0" rIns="0" tIns="0" bIns="0">
+            <a:spAutoFit/>
+          </a:bodyPr>
+          <a:lstStyle/>
+          <a:p>
+            <a:pPr>
+              <a:defRPr sz="1019" b="0">
+                <a:solidFill>
+                  <a:srgbClr val="333333"/>
+                </a:solidFill>
+                <a:latin typeface="Arial"/>
+              </a:defRPr>
+            </a:pPr>
+            <a:r>
+              <a:t>Pruebas aprobadas / pruebas ejecutadas × 100.</a:t>
+            </a:r>
+          </a:p>
+          <a:p>
+            <a:pPr>
+              <a:defRPr sz="1019" b="0">
+                <a:solidFill>
+                  <a:srgbClr val="333333"/>
+                </a:solidFill>
+                <a:latin typeface="Arial"/>
+              </a:defRPr>
+            </a:pPr>
+            <a:r>
+              <a:t>Responsable propuesto: quien integra. Datos: salida de unittest. Meta: 100% en cada integración y entrega.</a:t>
+            </a:r>
+          </a:p>
+          <a:p>
+            <a:pPr>
+              <a:defRPr sz="1019" b="0">
+                <a:solidFill>
+                  <a:srgbClr val="333333"/>
+                </a:solidFill>
+                <a:latin typeface="Arial"/>
+              </a:defRPr>
+            </a:pPr>
+            <a:r>
+              <a:t>Riesgo Goodhart: borrar o debilitar el test que falla. Control: conservar regresiones y revisar cambios de tests.</a:t>
+            </a:r>
+          </a:p>
+        </p:txBody>
+      </p:sp>
+      <p:sp>
+        <p:nvSpPr>
+          <p:cNvPr id="13" name="Rectangle 12"/>
+          <p:cNvSpPr/>
+          <p:nvPr/>
+        </p:nvSpPr>
+        <p:spPr>
+          <a:xfrm>
+            <a:off x="822960" y="3922776"/>
+            <a:ext cx="10424160" cy="9144"/>
+          </a:xfrm>
+          <a:prstGeom prst="rect">
+            <a:avLst/>
+          </a:prstGeom>
+          <a:solidFill>
+            <a:srgbClr val="DDDDDD"/>
+          </a:solidFill>
+          <a:ln>
+            <a:noFill/>
+          </a:ln>
+        </p:spPr>
+        <p:style>
+          <a:lnRef idx="1">
+            <a:schemeClr val="accent1"/>
+          </a:lnRef>
+          <a:fillRef idx="3">
+            <a:schemeClr val="accent1"/>
+          </a:fillRef>
+          <a:effectRef idx="2">
+            <a:schemeClr val="accent1"/>
+          </a:effectRef>
+          <a:fontRef idx="minor">
+            <a:schemeClr val="lt1"/>
+          </a:fontRef>
+        </p:style>
+        <p:txBody>
+          <a:bodyPr rtlCol="0" anchor="ctr"/>
+          <a:lstStyle/>
+          <a:p>
+            <a:pPr algn="ctr"/>
+          </a:p>
+        </p:txBody>
+      </p:sp>
+      <p:sp>
+        <p:nvSpPr>
+          <p:cNvPr id="14" name="TextBox 13"/>
+          <p:cNvSpPr txBox="1"/>
+          <p:nvPr/>
+        </p:nvSpPr>
+        <p:spPr>
+          <a:xfrm>
+            <a:off x="822960" y="4032504"/>
+            <a:ext cx="1874519" cy="347472"/>
+          </a:xfrm>
+          <a:prstGeom prst="rect">
+            <a:avLst/>
+          </a:prstGeom>
+          <a:noFill/>
+        </p:spPr>
+        <p:txBody>
+          <a:bodyPr wrap="square" lIns="0" rIns="0" tIns="0" bIns="0">
+            <a:spAutoFit/>
+          </a:bodyPr>
+          <a:lstStyle/>
+          <a:p>
+            <a:pPr>
+              <a:defRPr sz="1300" b="1">
+                <a:solidFill>
+                  <a:srgbClr val="202020"/>
+                </a:solidFill>
+                <a:latin typeface="Arial"/>
+              </a:defRPr>
+            </a:pPr>
+            <a:r>
+              <a:t>3  Revisión de cambios</a:t>
+            </a:r>
+          </a:p>
+        </p:txBody>
+      </p:sp>
+      <p:sp>
+        <p:nvSpPr>
+          <p:cNvPr id="15" name="TextBox 14"/>
+          <p:cNvSpPr txBox="1"/>
+          <p:nvPr/>
+        </p:nvSpPr>
+        <p:spPr>
+          <a:xfrm>
+            <a:off x="2743200" y="4032504"/>
+            <a:ext cx="8503920" cy="713232"/>
+          </a:xfrm>
+          <a:prstGeom prst="rect">
+            <a:avLst/>
+          </a:prstGeom>
+          <a:noFill/>
+        </p:spPr>
+        <p:txBody>
+          <a:bodyPr wrap="square" lIns="0" rIns="0" tIns="0" bIns="0">
+            <a:spAutoFit/>
+          </a:bodyPr>
+          <a:lstStyle/>
+          <a:p>
+            <a:pPr>
+              <a:defRPr sz="1019" b="0">
+                <a:solidFill>
+                  <a:srgbClr val="333333"/>
+                </a:solidFill>
+                <a:latin typeface="Arial"/>
+              </a:defRPr>
+            </a:pPr>
+            <a:r>
+              <a:t>Cambios de reglas revisados y probados / total de cambios de reglas × 100.</a:t>
+            </a:r>
+          </a:p>
+          <a:p>
+            <a:pPr>
+              <a:defRPr sz="1019" b="0">
+                <a:solidFill>
+                  <a:srgbClr val="333333"/>
+                </a:solidFill>
+                <a:latin typeface="Arial"/>
+              </a:defRPr>
+            </a:pPr>
+            <a:r>
+              <a:t>Responsable propuesto: integrador y par revisor. Datos: cambios del repositorio y salida de tests. Meta: 100% en cada integración.</a:t>
+            </a:r>
+          </a:p>
+          <a:p>
+            <a:pPr>
+              <a:defRPr sz="1019" b="0">
+                <a:solidFill>
+                  <a:srgbClr val="333333"/>
+                </a:solidFill>
+                <a:latin typeface="Arial"/>
+              </a:defRPr>
+            </a:pPr>
+            <a:r>
+              <a:t>Riesgo Goodhart: aprobar sin leer. Control: explicar la regla revisada y comprobar la prueba.</a:t>
+            </a:r>
+          </a:p>
+        </p:txBody>
+      </p:sp>
+      <p:sp>
+        <p:nvSpPr>
+          <p:cNvPr id="16" name="TextBox 15"/>
+          <p:cNvSpPr txBox="1"/>
+          <p:nvPr/>
+        </p:nvSpPr>
+        <p:spPr>
+          <a:xfrm>
+            <a:off x="822960" y="5010912"/>
+            <a:ext cx="10469880" cy="493776"/>
+          </a:xfrm>
+          <a:prstGeom prst="rect">
+            <a:avLst/>
+          </a:prstGeom>
+          <a:noFill/>
+        </p:spPr>
+        <p:txBody>
+          <a:bodyPr wrap="square" lIns="0" rIns="0" tIns="0" bIns="0">
+            <a:spAutoFit/>
+          </a:bodyPr>
+          <a:lstStyle/>
+          <a:p>
+            <a:pPr>
+              <a:defRPr sz="1100" b="1">
+                <a:solidFill>
+                  <a:srgbClr val="202020"/>
+                </a:solidFill>
+                <a:latin typeface="Arial"/>
+              </a:defRPr>
+            </a:pPr>
+            <a:r>
+              <a:t>KRI: requisitos obligatorios fallidos o sin prueba significativa. Alerta &gt; 0: pausar ampliaciones y corregir el núcleo.</a:t>
+            </a:r>
+          </a:p>
+        </p:txBody>
+      </p:sp>
+      <p:sp>
+        <p:nvSpPr>
+          <p:cNvPr id="17" name="TextBox 16"/>
+          <p:cNvSpPr txBox="1"/>
+          <p:nvPr/>
+        </p:nvSpPr>
+        <p:spPr>
+          <a:xfrm>
+            <a:off x="822960" y="5559552"/>
+            <a:ext cx="10469880" cy="475488"/>
+          </a:xfrm>
+          <a:prstGeom prst="rect">
+            <a:avLst/>
+          </a:prstGeom>
+          <a:noFill/>
+        </p:spPr>
+        <p:txBody>
+          <a:bodyPr wrap="square" lIns="0" rIns="0" tIns="0" bIns="0">
+            <a:spAutoFit/>
+          </a:bodyPr>
+          <a:lstStyle/>
+          <a:p>
+            <a:pPr>
+              <a:defRPr sz="1000" b="0">
+                <a:solidFill>
+                  <a:srgbClr val="555555"/>
+                </a:solidFill>
+                <a:latin typeface="Arial"/>
+              </a:defRPr>
+            </a:pPr>
+            <a:r>
+              <a:t>No se fija una cantidad objetivo de tests: se revisa su vínculo con requisitos y resultados observables. Propuesta basada en Unidad 6, diap. 12–13.</a:t>
+            </a:r>
+          </a:p>
+        </p:txBody>
+      </p:sp>
+    </p:spTree>
+  </p:cSld>
+  <p:clrMapOvr>
+    <a:masterClrMapping/>
+  </p:clrMapOvr>
 </p:sld>
 </file>
 
